--- a/reports/TSGEX_Five_Instrument_Yield_Optimization_Report.pptx
+++ b/reports/TSGEX_Five_Instrument_Yield_Optimization_Report.pptx
@@ -2920,7 +2920,7 @@
     <p:bg>
       <p:bgPr>
         <a:solidFill>
-          <a:srgbClr val="0F172A"/>
+          <a:srgbClr val="FFFFFF"/>
         </a:solidFill>
       </p:bgPr>
     </p:bg>
@@ -2946,14 +2946,14 @@
         </p:nvSpPr>
         <p:spPr>
           <a:xfrm>
-            <a:off x="9326880" y="-1645920"/>
+            <a:off x="9509760" y="-1828800"/>
             <a:ext cx="4572000" cy="4572000"/>
           </a:xfrm>
           <a:prstGeom prst="ellipse">
             <a:avLst/>
           </a:prstGeom>
           <a:solidFill>
-            <a:srgbClr val="1E293B"/>
+            <a:srgbClr val="EFF6FF"/>
           </a:solidFill>
           <a:ln/>
         </p:spPr>
@@ -2966,16 +2966,21 @@
         </p:nvSpPr>
         <p:spPr>
           <a:xfrm>
-            <a:off x="-1463040" y="4754880"/>
+            <a:off x="-1645920" y="4937760"/>
             <a:ext cx="3657600" cy="3657600"/>
           </a:xfrm>
           <a:prstGeom prst="ellipse">
             <a:avLst/>
           </a:prstGeom>
           <a:solidFill>
-            <a:srgbClr val="1E293B"/>
+            <a:srgbClr val="F8FAFC"/>
           </a:solidFill>
-          <a:ln/>
+          <a:ln w="9525">
+            <a:solidFill>
+              <a:srgbClr val="E2E8F0"/>
+            </a:solidFill>
+            <a:prstDash val="solid"/>
+          </a:ln>
         </p:spPr>
       </p:sp>
       <p:sp>
@@ -3005,7 +3010,7 @@
             <a:r>
               <a:rPr lang="en-US" sz="1600" b="1" spc="200" kern="0" dirty="0">
                 <a:solidFill>
-                  <a:srgbClr val="93C5FD"/>
+                  <a:srgbClr val="2563EB"/>
                 </a:solidFill>
                 <a:latin typeface="Microsoft JhengHei" pitchFamily="34" charset="0"/>
                 <a:ea typeface="Microsoft JhengHei" pitchFamily="34" charset="-122"/>
@@ -3044,7 +3049,7 @@
             <a:r>
               <a:rPr lang="en-US" sz="4000" b="1" dirty="0">
                 <a:solidFill>
-                  <a:srgbClr val="FFFFFF"/>
+                  <a:srgbClr val="0F172A"/>
                 </a:solidFill>
                 <a:latin typeface="Microsoft JhengHei" pitchFamily="34" charset="0"/>
                 <a:ea typeface="Microsoft JhengHei" pitchFamily="34" charset="-122"/>
@@ -3083,7 +3088,7 @@
             <a:r>
               <a:rPr lang="en-US" sz="1800" dirty="0">
                 <a:solidFill>
-                  <a:srgbClr val="CBD5E1"/>
+                  <a:srgbClr val="334155"/>
                 </a:solidFill>
                 <a:latin typeface="Microsoft JhengHei" pitchFamily="34" charset="0"/>
                 <a:ea typeface="Microsoft JhengHei" pitchFamily="34" charset="-122"/>
@@ -3135,11 +3140,11 @@
             </a:avLst>
           </a:prstGeom>
           <a:solidFill>
-            <a:srgbClr val="1E293B"/>
+            <a:srgbClr val="EFF6FF"/>
           </a:solidFill>
           <a:ln w="9525">
             <a:solidFill>
-              <a:srgbClr val="334155"/>
+              <a:srgbClr val="E2E8F0"/>
             </a:solidFill>
             <a:prstDash val="solid"/>
           </a:ln>
@@ -3172,7 +3177,7 @@
             <a:r>
               <a:rPr lang="en-US" sz="1050" dirty="0">
                 <a:solidFill>
-                  <a:srgbClr val="93C5FD"/>
+                  <a:srgbClr val="2563EB"/>
                 </a:solidFill>
                 <a:latin typeface="Microsoft JhengHei" pitchFamily="34" charset="0"/>
                 <a:ea typeface="Microsoft JhengHei" pitchFamily="34" charset="-122"/>
@@ -3201,11 +3206,11 @@
             </a:avLst>
           </a:prstGeom>
           <a:solidFill>
-            <a:srgbClr val="1E293B"/>
+            <a:srgbClr val="EFF6FF"/>
           </a:solidFill>
           <a:ln w="9525">
             <a:solidFill>
-              <a:srgbClr val="334155"/>
+              <a:srgbClr val="E2E8F0"/>
             </a:solidFill>
             <a:prstDash val="solid"/>
           </a:ln>
@@ -3238,7 +3243,7 @@
             <a:r>
               <a:rPr lang="en-US" sz="1050" dirty="0">
                 <a:solidFill>
-                  <a:srgbClr val="93C5FD"/>
+                  <a:srgbClr val="2563EB"/>
                 </a:solidFill>
                 <a:latin typeface="Microsoft JhengHei" pitchFamily="34" charset="0"/>
                 <a:ea typeface="Microsoft JhengHei" pitchFamily="34" charset="-122"/>
@@ -3267,11 +3272,11 @@
             </a:avLst>
           </a:prstGeom>
           <a:solidFill>
-            <a:srgbClr val="1E293B"/>
+            <a:srgbClr val="EFF6FF"/>
           </a:solidFill>
           <a:ln w="9525">
             <a:solidFill>
-              <a:srgbClr val="334155"/>
+              <a:srgbClr val="E2E8F0"/>
             </a:solidFill>
             <a:prstDash val="solid"/>
           </a:ln>
@@ -3304,7 +3309,7 @@
             <a:r>
               <a:rPr lang="en-US" sz="1050" dirty="0">
                 <a:solidFill>
-                  <a:srgbClr val="93C5FD"/>
+                  <a:srgbClr val="2563EB"/>
                 </a:solidFill>
                 <a:latin typeface="Microsoft JhengHei" pitchFamily="34" charset="0"/>
                 <a:ea typeface="Microsoft JhengHei" pitchFamily="34" charset="-122"/>
@@ -3333,11 +3338,11 @@
             </a:avLst>
           </a:prstGeom>
           <a:solidFill>
-            <a:srgbClr val="1E293B"/>
+            <a:srgbClr val="EFF6FF"/>
           </a:solidFill>
           <a:ln w="9525">
             <a:solidFill>
-              <a:srgbClr val="334155"/>
+              <a:srgbClr val="E2E8F0"/>
             </a:solidFill>
             <a:prstDash val="solid"/>
           </a:ln>
@@ -3370,7 +3375,7 @@
             <a:r>
               <a:rPr lang="en-US" sz="1050" dirty="0">
                 <a:solidFill>
-                  <a:srgbClr val="93C5FD"/>
+                  <a:srgbClr val="2563EB"/>
                 </a:solidFill>
                 <a:latin typeface="Microsoft JhengHei" pitchFamily="34" charset="0"/>
                 <a:ea typeface="Microsoft JhengHei" pitchFamily="34" charset="-122"/>
@@ -3399,11 +3404,11 @@
             </a:avLst>
           </a:prstGeom>
           <a:solidFill>
-            <a:srgbClr val="1E293B"/>
+            <a:srgbClr val="EFF6FF"/>
           </a:solidFill>
           <a:ln w="9525">
             <a:solidFill>
-              <a:srgbClr val="334155"/>
+              <a:srgbClr val="E2E8F0"/>
             </a:solidFill>
             <a:prstDash val="solid"/>
           </a:ln>
@@ -3436,7 +3441,7 @@
             <a:r>
               <a:rPr lang="en-US" sz="1050" dirty="0">
                 <a:solidFill>
-                  <a:srgbClr val="93C5FD"/>
+                  <a:srgbClr val="2563EB"/>
                 </a:solidFill>
                 <a:latin typeface="Microsoft JhengHei" pitchFamily="34" charset="0"/>
                 <a:ea typeface="Microsoft JhengHei" pitchFamily="34" charset="-122"/>
@@ -3475,7 +3480,7 @@
             <a:r>
               <a:rPr lang="en-US" sz="1200" dirty="0">
                 <a:solidFill>
-                  <a:srgbClr val="94A3B8"/>
+                  <a:srgbClr val="334155"/>
                 </a:solidFill>
                 <a:latin typeface="Microsoft JhengHei" pitchFamily="34" charset="0"/>
                 <a:ea typeface="Microsoft JhengHei" pitchFamily="34" charset="-122"/>
@@ -11900,7 +11905,7 @@
     <p:bg>
       <p:bgPr>
         <a:solidFill>
-          <a:srgbClr val="0F172A"/>
+          <a:srgbClr val="FFFFFF"/>
         </a:solidFill>
       </p:bgPr>
     </p:bg>
@@ -11945,7 +11950,7 @@
             <a:r>
               <a:rPr lang="en-US" sz="2800" b="1" dirty="0">
                 <a:solidFill>
-                  <a:srgbClr val="FFFFFF"/>
+                  <a:srgbClr val="0F172A"/>
                 </a:solidFill>
                 <a:latin typeface="Microsoft JhengHei" pitchFamily="34" charset="0"/>
                 <a:ea typeface="Microsoft JhengHei" pitchFamily="34" charset="-122"/>
@@ -11966,15 +11971,13 @@
         <p:spPr>
           <a:xfrm>
             <a:off x="548640" y="1371600"/>
-            <a:ext cx="128016" cy="548640"/>
-          </a:xfrm>
-          <a:prstGeom prst="roundRect">
-            <a:avLst>
-              <a:gd name="adj" fmla="val 28571"/>
-            </a:avLst>
+            <a:ext cx="411480" cy="411480"/>
+          </a:xfrm>
+          <a:prstGeom prst="ellipse">
+            <a:avLst/>
           </a:prstGeom>
           <a:solidFill>
-            <a:srgbClr val="2563EB"/>
+            <a:srgbClr val="EFF6FF"/>
           </a:solidFill>
           <a:ln/>
         </p:spPr>
@@ -11987,8 +11990,47 @@
         </p:nvSpPr>
         <p:spPr>
           <a:xfrm>
-            <a:off x="868680" y="1353312"/>
-            <a:ext cx="2103120" cy="566928"/>
+            <a:off x="548640" y="1371600"/>
+            <a:ext cx="411480" cy="411480"/>
+          </a:xfrm>
+          <a:prstGeom prst="rect">
+            <a:avLst/>
+          </a:prstGeom>
+          <a:noFill/>
+          <a:ln/>
+        </p:spPr>
+        <p:txBody>
+          <a:bodyPr wrap="square" lIns="0" tIns="0" rIns="0" bIns="0" rtlCol="0" anchor="ctr"/>
+          <a:lstStyle/>
+          <a:p>
+            <a:pPr algn="ctr" indent="0" marL="0">
+              <a:buNone/>
+            </a:pPr>
+            <a:r>
+              <a:rPr lang="en-US" sz="1800" b="1" dirty="0">
+                <a:solidFill>
+                  <a:srgbClr val="2563EB"/>
+                </a:solidFill>
+                <a:latin typeface="Microsoft JhengHei" pitchFamily="34" charset="0"/>
+                <a:ea typeface="Microsoft JhengHei" pitchFamily="34" charset="-122"/>
+                <a:cs typeface="Microsoft JhengHei" pitchFamily="34" charset="-120"/>
+              </a:rPr>
+              <a:t>•</a:t>
+            </a:r>
+            <a:endParaRPr lang="en-US" sz="1800" dirty="0"/>
+          </a:p>
+        </p:txBody>
+      </p:sp>
+      <p:sp>
+        <p:nvSpPr>
+          <p:cNvPr id="5" name="Text 3"/>
+          <p:cNvSpPr txBox="1"/>
+          <p:nvPr/>
+        </p:nvSpPr>
+        <p:spPr>
+          <a:xfrm>
+            <a:off x="1097280" y="1353312"/>
+            <a:ext cx="1874520" cy="457200"/>
           </a:xfrm>
           <a:prstGeom prst="rect">
             <a:avLst/>
@@ -12006,7 +12048,7 @@
             <a:r>
               <a:rPr lang="en-US" sz="1250" b="1" dirty="0">
                 <a:solidFill>
-                  <a:srgbClr val="93C5FD"/>
+                  <a:srgbClr val="0F172A"/>
                 </a:solidFill>
                 <a:latin typeface="Microsoft JhengHei" pitchFamily="34" charset="0"/>
                 <a:ea typeface="Microsoft JhengHei" pitchFamily="34" charset="-122"/>
@@ -12020,14 +12062,14 @@
       </p:sp>
       <p:sp>
         <p:nvSpPr>
-          <p:cNvPr id="5" name="Text 3"/>
+          <p:cNvPr id="6" name="Text 4"/>
           <p:cNvSpPr txBox="1"/>
           <p:nvPr/>
         </p:nvSpPr>
         <p:spPr>
           <a:xfrm>
             <a:off x="3017520" y="1353312"/>
-            <a:ext cx="3108960" cy="566928"/>
+            <a:ext cx="3108960" cy="457200"/>
           </a:xfrm>
           <a:prstGeom prst="rect">
             <a:avLst/>
@@ -12048,7 +12090,7 @@
             <a:r>
               <a:rPr lang="en-US" sz="1000" dirty="0">
                 <a:solidFill>
-                  <a:srgbClr val="CBD5E1"/>
+                  <a:srgbClr val="334155"/>
                 </a:solidFill>
                 <a:latin typeface="Microsoft JhengHei" pitchFamily="34" charset="0"/>
                 <a:ea typeface="Microsoft JhengHei" pitchFamily="34" charset="-122"/>
@@ -12062,36 +12104,73 @@
       </p:sp>
       <p:sp>
         <p:nvSpPr>
-          <p:cNvPr id="6" name="Shape 4"/>
+          <p:cNvPr id="7" name="Shape 5"/>
           <p:cNvSpPr/>
           <p:nvPr/>
         </p:nvSpPr>
         <p:spPr>
           <a:xfrm>
             <a:off x="548640" y="2057400"/>
-            <a:ext cx="128016" cy="548640"/>
-          </a:xfrm>
-          <a:prstGeom prst="roundRect">
-            <a:avLst>
-              <a:gd name="adj" fmla="val 28571"/>
-            </a:avLst>
+            <a:ext cx="411480" cy="411480"/>
+          </a:xfrm>
+          <a:prstGeom prst="ellipse">
+            <a:avLst/>
           </a:prstGeom>
           <a:solidFill>
-            <a:srgbClr val="2563EB"/>
+            <a:srgbClr val="EFF6FF"/>
           </a:solidFill>
           <a:ln/>
         </p:spPr>
       </p:sp>
       <p:sp>
         <p:nvSpPr>
-          <p:cNvPr id="7" name="Text 5"/>
+          <p:cNvPr id="8" name="Text 6"/>
           <p:cNvSpPr txBox="1"/>
           <p:nvPr/>
         </p:nvSpPr>
         <p:spPr>
           <a:xfrm>
-            <a:off x="868680" y="2039112"/>
-            <a:ext cx="2103120" cy="566928"/>
+            <a:off x="548640" y="2057400"/>
+            <a:ext cx="411480" cy="411480"/>
+          </a:xfrm>
+          <a:prstGeom prst="rect">
+            <a:avLst/>
+          </a:prstGeom>
+          <a:noFill/>
+          <a:ln/>
+        </p:spPr>
+        <p:txBody>
+          <a:bodyPr wrap="square" lIns="0" tIns="0" rIns="0" bIns="0" rtlCol="0" anchor="ctr"/>
+          <a:lstStyle/>
+          <a:p>
+            <a:pPr algn="ctr" indent="0" marL="0">
+              <a:buNone/>
+            </a:pPr>
+            <a:r>
+              <a:rPr lang="en-US" sz="1800" b="1" dirty="0">
+                <a:solidFill>
+                  <a:srgbClr val="2563EB"/>
+                </a:solidFill>
+                <a:latin typeface="Microsoft JhengHei" pitchFamily="34" charset="0"/>
+                <a:ea typeface="Microsoft JhengHei" pitchFamily="34" charset="-122"/>
+                <a:cs typeface="Microsoft JhengHei" pitchFamily="34" charset="-120"/>
+              </a:rPr>
+              <a:t>•</a:t>
+            </a:r>
+            <a:endParaRPr lang="en-US" sz="1800" dirty="0"/>
+          </a:p>
+        </p:txBody>
+      </p:sp>
+      <p:sp>
+        <p:nvSpPr>
+          <p:cNvPr id="9" name="Text 7"/>
+          <p:cNvSpPr txBox="1"/>
+          <p:nvPr/>
+        </p:nvSpPr>
+        <p:spPr>
+          <a:xfrm>
+            <a:off x="1097280" y="2039112"/>
+            <a:ext cx="1874520" cy="457200"/>
           </a:xfrm>
           <a:prstGeom prst="rect">
             <a:avLst/>
@@ -12109,7 +12188,7 @@
             <a:r>
               <a:rPr lang="en-US" sz="1250" b="1" dirty="0">
                 <a:solidFill>
-                  <a:srgbClr val="93C5FD"/>
+                  <a:srgbClr val="0F172A"/>
                 </a:solidFill>
                 <a:latin typeface="Microsoft JhengHei" pitchFamily="34" charset="0"/>
                 <a:ea typeface="Microsoft JhengHei" pitchFamily="34" charset="-122"/>
@@ -12123,14 +12202,14 @@
       </p:sp>
       <p:sp>
         <p:nvSpPr>
-          <p:cNvPr id="8" name="Text 6"/>
+          <p:cNvPr id="10" name="Text 8"/>
           <p:cNvSpPr txBox="1"/>
           <p:nvPr/>
         </p:nvSpPr>
         <p:spPr>
           <a:xfrm>
             <a:off x="3017520" y="2039112"/>
-            <a:ext cx="3108960" cy="566928"/>
+            <a:ext cx="3108960" cy="457200"/>
           </a:xfrm>
           <a:prstGeom prst="rect">
             <a:avLst/>
@@ -12151,7 +12230,7 @@
             <a:r>
               <a:rPr lang="en-US" sz="1000" dirty="0">
                 <a:solidFill>
-                  <a:srgbClr val="CBD5E1"/>
+                  <a:srgbClr val="334155"/>
                 </a:solidFill>
                 <a:latin typeface="Microsoft JhengHei" pitchFamily="34" charset="0"/>
                 <a:ea typeface="Microsoft JhengHei" pitchFamily="34" charset="-122"/>
@@ -12165,36 +12244,73 @@
       </p:sp>
       <p:sp>
         <p:nvSpPr>
-          <p:cNvPr id="9" name="Shape 7"/>
+          <p:cNvPr id="11" name="Shape 9"/>
           <p:cNvSpPr/>
           <p:nvPr/>
         </p:nvSpPr>
         <p:spPr>
           <a:xfrm>
             <a:off x="548640" y="2743200"/>
-            <a:ext cx="128016" cy="548640"/>
-          </a:xfrm>
-          <a:prstGeom prst="roundRect">
-            <a:avLst>
-              <a:gd name="adj" fmla="val 28571"/>
-            </a:avLst>
+            <a:ext cx="411480" cy="411480"/>
+          </a:xfrm>
+          <a:prstGeom prst="ellipse">
+            <a:avLst/>
           </a:prstGeom>
           <a:solidFill>
-            <a:srgbClr val="2563EB"/>
+            <a:srgbClr val="EFF6FF"/>
           </a:solidFill>
           <a:ln/>
         </p:spPr>
       </p:sp>
       <p:sp>
         <p:nvSpPr>
-          <p:cNvPr id="10" name="Text 8"/>
+          <p:cNvPr id="12" name="Text 10"/>
           <p:cNvSpPr txBox="1"/>
           <p:nvPr/>
         </p:nvSpPr>
         <p:spPr>
           <a:xfrm>
-            <a:off x="868680" y="2724912"/>
-            <a:ext cx="2103120" cy="566928"/>
+            <a:off x="548640" y="2743200"/>
+            <a:ext cx="411480" cy="411480"/>
+          </a:xfrm>
+          <a:prstGeom prst="rect">
+            <a:avLst/>
+          </a:prstGeom>
+          <a:noFill/>
+          <a:ln/>
+        </p:spPr>
+        <p:txBody>
+          <a:bodyPr wrap="square" lIns="0" tIns="0" rIns="0" bIns="0" rtlCol="0" anchor="ctr"/>
+          <a:lstStyle/>
+          <a:p>
+            <a:pPr algn="ctr" indent="0" marL="0">
+              <a:buNone/>
+            </a:pPr>
+            <a:r>
+              <a:rPr lang="en-US" sz="1800" b="1" dirty="0">
+                <a:solidFill>
+                  <a:srgbClr val="2563EB"/>
+                </a:solidFill>
+                <a:latin typeface="Microsoft JhengHei" pitchFamily="34" charset="0"/>
+                <a:ea typeface="Microsoft JhengHei" pitchFamily="34" charset="-122"/>
+                <a:cs typeface="Microsoft JhengHei" pitchFamily="34" charset="-120"/>
+              </a:rPr>
+              <a:t>•</a:t>
+            </a:r>
+            <a:endParaRPr lang="en-US" sz="1800" dirty="0"/>
+          </a:p>
+        </p:txBody>
+      </p:sp>
+      <p:sp>
+        <p:nvSpPr>
+          <p:cNvPr id="13" name="Text 11"/>
+          <p:cNvSpPr txBox="1"/>
+          <p:nvPr/>
+        </p:nvSpPr>
+        <p:spPr>
+          <a:xfrm>
+            <a:off x="1097280" y="2724912"/>
+            <a:ext cx="1874520" cy="457200"/>
           </a:xfrm>
           <a:prstGeom prst="rect">
             <a:avLst/>
@@ -12212,7 +12328,7 @@
             <a:r>
               <a:rPr lang="en-US" sz="1250" b="1" dirty="0">
                 <a:solidFill>
-                  <a:srgbClr val="93C5FD"/>
+                  <a:srgbClr val="0F172A"/>
                 </a:solidFill>
                 <a:latin typeface="Microsoft JhengHei" pitchFamily="34" charset="0"/>
                 <a:ea typeface="Microsoft JhengHei" pitchFamily="34" charset="-122"/>
@@ -12226,14 +12342,14 @@
       </p:sp>
       <p:sp>
         <p:nvSpPr>
-          <p:cNvPr id="11" name="Text 9"/>
+          <p:cNvPr id="14" name="Text 12"/>
           <p:cNvSpPr txBox="1"/>
           <p:nvPr/>
         </p:nvSpPr>
         <p:spPr>
           <a:xfrm>
             <a:off x="3017520" y="2724912"/>
-            <a:ext cx="3108960" cy="566928"/>
+            <a:ext cx="3108960" cy="457200"/>
           </a:xfrm>
           <a:prstGeom prst="rect">
             <a:avLst/>
@@ -12254,7 +12370,7 @@
             <a:r>
               <a:rPr lang="en-US" sz="1000" dirty="0">
                 <a:solidFill>
-                  <a:srgbClr val="CBD5E1"/>
+                  <a:srgbClr val="334155"/>
                 </a:solidFill>
                 <a:latin typeface="Microsoft JhengHei" pitchFamily="34" charset="0"/>
                 <a:ea typeface="Microsoft JhengHei" pitchFamily="34" charset="-122"/>
@@ -12268,36 +12384,73 @@
       </p:sp>
       <p:sp>
         <p:nvSpPr>
-          <p:cNvPr id="12" name="Shape 10"/>
+          <p:cNvPr id="15" name="Shape 13"/>
           <p:cNvSpPr/>
           <p:nvPr/>
         </p:nvSpPr>
         <p:spPr>
           <a:xfrm>
             <a:off x="548640" y="3429000"/>
-            <a:ext cx="128016" cy="548640"/>
-          </a:xfrm>
-          <a:prstGeom prst="roundRect">
-            <a:avLst>
-              <a:gd name="adj" fmla="val 28571"/>
-            </a:avLst>
+            <a:ext cx="411480" cy="411480"/>
+          </a:xfrm>
+          <a:prstGeom prst="ellipse">
+            <a:avLst/>
           </a:prstGeom>
           <a:solidFill>
-            <a:srgbClr val="2563EB"/>
+            <a:srgbClr val="EFF6FF"/>
           </a:solidFill>
           <a:ln/>
         </p:spPr>
       </p:sp>
       <p:sp>
         <p:nvSpPr>
-          <p:cNvPr id="13" name="Text 11"/>
+          <p:cNvPr id="16" name="Text 14"/>
           <p:cNvSpPr txBox="1"/>
           <p:nvPr/>
         </p:nvSpPr>
         <p:spPr>
           <a:xfrm>
-            <a:off x="868680" y="3410712"/>
-            <a:ext cx="2103120" cy="566928"/>
+            <a:off x="548640" y="3429000"/>
+            <a:ext cx="411480" cy="411480"/>
+          </a:xfrm>
+          <a:prstGeom prst="rect">
+            <a:avLst/>
+          </a:prstGeom>
+          <a:noFill/>
+          <a:ln/>
+        </p:spPr>
+        <p:txBody>
+          <a:bodyPr wrap="square" lIns="0" tIns="0" rIns="0" bIns="0" rtlCol="0" anchor="ctr"/>
+          <a:lstStyle/>
+          <a:p>
+            <a:pPr algn="ctr" indent="0" marL="0">
+              <a:buNone/>
+            </a:pPr>
+            <a:r>
+              <a:rPr lang="en-US" sz="1800" b="1" dirty="0">
+                <a:solidFill>
+                  <a:srgbClr val="2563EB"/>
+                </a:solidFill>
+                <a:latin typeface="Microsoft JhengHei" pitchFamily="34" charset="0"/>
+                <a:ea typeface="Microsoft JhengHei" pitchFamily="34" charset="-122"/>
+                <a:cs typeface="Microsoft JhengHei" pitchFamily="34" charset="-120"/>
+              </a:rPr>
+              <a:t>•</a:t>
+            </a:r>
+            <a:endParaRPr lang="en-US" sz="1800" dirty="0"/>
+          </a:p>
+        </p:txBody>
+      </p:sp>
+      <p:sp>
+        <p:nvSpPr>
+          <p:cNvPr id="17" name="Text 15"/>
+          <p:cNvSpPr txBox="1"/>
+          <p:nvPr/>
+        </p:nvSpPr>
+        <p:spPr>
+          <a:xfrm>
+            <a:off x="1097280" y="3410712"/>
+            <a:ext cx="1874520" cy="457200"/>
           </a:xfrm>
           <a:prstGeom prst="rect">
             <a:avLst/>
@@ -12315,7 +12468,7 @@
             <a:r>
               <a:rPr lang="en-US" sz="1250" b="1" dirty="0">
                 <a:solidFill>
-                  <a:srgbClr val="93C5FD"/>
+                  <a:srgbClr val="0F172A"/>
                 </a:solidFill>
                 <a:latin typeface="Microsoft JhengHei" pitchFamily="34" charset="0"/>
                 <a:ea typeface="Microsoft JhengHei" pitchFamily="34" charset="-122"/>
@@ -12329,14 +12482,14 @@
       </p:sp>
       <p:sp>
         <p:nvSpPr>
-          <p:cNvPr id="14" name="Text 12"/>
+          <p:cNvPr id="18" name="Text 16"/>
           <p:cNvSpPr txBox="1"/>
           <p:nvPr/>
         </p:nvSpPr>
         <p:spPr>
           <a:xfrm>
             <a:off x="3017520" y="3410712"/>
-            <a:ext cx="3108960" cy="566928"/>
+            <a:ext cx="3108960" cy="457200"/>
           </a:xfrm>
           <a:prstGeom prst="rect">
             <a:avLst/>
@@ -12357,7 +12510,7 @@
             <a:r>
               <a:rPr lang="en-US" sz="1000" dirty="0">
                 <a:solidFill>
-                  <a:srgbClr val="CBD5E1"/>
+                  <a:srgbClr val="334155"/>
                 </a:solidFill>
                 <a:latin typeface="Microsoft JhengHei" pitchFamily="34" charset="0"/>
                 <a:ea typeface="Microsoft JhengHei" pitchFamily="34" charset="-122"/>
@@ -12371,7 +12524,7 @@
       </p:sp>
       <p:sp>
         <p:nvSpPr>
-          <p:cNvPr id="15" name="Shape 13"/>
+          <p:cNvPr id="19" name="Shape 17"/>
           <p:cNvSpPr/>
           <p:nvPr/>
         </p:nvSpPr>
@@ -12386,11 +12539,11 @@
             </a:avLst>
           </a:prstGeom>
           <a:solidFill>
-            <a:srgbClr val="1E293B"/>
+            <a:srgbClr val="F8FAFC"/>
           </a:solidFill>
           <a:ln w="9525">
             <a:solidFill>
-              <a:srgbClr val="334155"/>
+              <a:srgbClr val="E2E8F0"/>
             </a:solidFill>
             <a:prstDash val="solid"/>
           </a:ln>
@@ -12398,7 +12551,7 @@
       </p:sp>
       <p:sp>
         <p:nvSpPr>
-          <p:cNvPr id="16" name="Text 14"/>
+          <p:cNvPr id="20" name="Text 18"/>
           <p:cNvSpPr txBox="1"/>
           <p:nvPr/>
         </p:nvSpPr>
@@ -12437,7 +12590,7 @@
       </p:sp>
       <p:sp>
         <p:nvSpPr>
-          <p:cNvPr id="17" name="Text 15"/>
+          <p:cNvPr id="21" name="Text 19"/>
           <p:cNvSpPr txBox="1"/>
           <p:nvPr/>
         </p:nvSpPr>
@@ -12465,7 +12618,7 @@
             <a:r>
               <a:rPr lang="en-US" sz="950" dirty="0">
                 <a:solidFill>
-                  <a:srgbClr val="FFFFFF"/>
+                  <a:srgbClr val="0F172A"/>
                 </a:solidFill>
                 <a:latin typeface="Microsoft JhengHei" pitchFamily="34" charset="0"/>
                 <a:ea typeface="Microsoft JhengHei" pitchFamily="34" charset="-122"/>
@@ -12479,7 +12632,7 @@
       </p:sp>
       <p:sp>
         <p:nvSpPr>
-          <p:cNvPr id="18" name="Text 16"/>
+          <p:cNvPr id="22" name="Text 20"/>
           <p:cNvSpPr txBox="1"/>
           <p:nvPr/>
         </p:nvSpPr>
@@ -12504,7 +12657,7 @@
             <a:r>
               <a:rPr lang="en-US" sz="850" dirty="0">
                 <a:solidFill>
-                  <a:srgbClr val="94A3B8"/>
+                  <a:srgbClr val="64748B"/>
                 </a:solidFill>
                 <a:latin typeface="Microsoft JhengHei" pitchFamily="34" charset="0"/>
                 <a:ea typeface="Microsoft JhengHei" pitchFamily="34" charset="-122"/>
@@ -12518,7 +12671,7 @@
       </p:sp>
       <p:sp>
         <p:nvSpPr>
-          <p:cNvPr id="19" name="Text 17"/>
+          <p:cNvPr id="23" name="Text 21"/>
           <p:cNvSpPr txBox="1"/>
           <p:nvPr/>
         </p:nvSpPr>
@@ -12557,7 +12710,7 @@
       </p:sp>
       <p:sp>
         <p:nvSpPr>
-          <p:cNvPr id="20" name="Shape 18"/>
+          <p:cNvPr id="24" name="Shape 22"/>
           <p:cNvSpPr/>
           <p:nvPr/>
         </p:nvSpPr>
@@ -12572,11 +12725,11 @@
             </a:avLst>
           </a:prstGeom>
           <a:solidFill>
-            <a:srgbClr val="1E293B"/>
+            <a:srgbClr val="F8FAFC"/>
           </a:solidFill>
           <a:ln w="9525">
             <a:solidFill>
-              <a:srgbClr val="334155"/>
+              <a:srgbClr val="E2E8F0"/>
             </a:solidFill>
             <a:prstDash val="solid"/>
           </a:ln>
@@ -12584,7 +12737,7 @@
       </p:sp>
       <p:sp>
         <p:nvSpPr>
-          <p:cNvPr id="21" name="Text 19"/>
+          <p:cNvPr id="25" name="Text 23"/>
           <p:cNvSpPr txBox="1"/>
           <p:nvPr/>
         </p:nvSpPr>
@@ -12623,7 +12776,7 @@
       </p:sp>
       <p:sp>
         <p:nvSpPr>
-          <p:cNvPr id="22" name="Text 20"/>
+          <p:cNvPr id="26" name="Text 24"/>
           <p:cNvSpPr txBox="1"/>
           <p:nvPr/>
         </p:nvSpPr>
@@ -12651,7 +12804,7 @@
             <a:r>
               <a:rPr lang="en-US" sz="950" dirty="0">
                 <a:solidFill>
-                  <a:srgbClr val="FFFFFF"/>
+                  <a:srgbClr val="0F172A"/>
                 </a:solidFill>
                 <a:latin typeface="Microsoft JhengHei" pitchFamily="34" charset="0"/>
                 <a:ea typeface="Microsoft JhengHei" pitchFamily="34" charset="-122"/>
@@ -12665,7 +12818,7 @@
       </p:sp>
       <p:sp>
         <p:nvSpPr>
-          <p:cNvPr id="23" name="Text 21"/>
+          <p:cNvPr id="27" name="Text 25"/>
           <p:cNvSpPr txBox="1"/>
           <p:nvPr/>
         </p:nvSpPr>
@@ -12690,7 +12843,7 @@
             <a:r>
               <a:rPr lang="en-US" sz="850" dirty="0">
                 <a:solidFill>
-                  <a:srgbClr val="94A3B8"/>
+                  <a:srgbClr val="64748B"/>
                 </a:solidFill>
                 <a:latin typeface="Microsoft JhengHei" pitchFamily="34" charset="0"/>
                 <a:ea typeface="Microsoft JhengHei" pitchFamily="34" charset="-122"/>
@@ -12704,7 +12857,7 @@
       </p:sp>
       <p:sp>
         <p:nvSpPr>
-          <p:cNvPr id="24" name="Text 22"/>
+          <p:cNvPr id="28" name="Text 26"/>
           <p:cNvSpPr txBox="1"/>
           <p:nvPr/>
         </p:nvSpPr>
@@ -12743,7 +12896,7 @@
       </p:sp>
       <p:sp>
         <p:nvSpPr>
-          <p:cNvPr id="25" name="Shape 23"/>
+          <p:cNvPr id="29" name="Shape 27"/>
           <p:cNvSpPr/>
           <p:nvPr/>
         </p:nvSpPr>
@@ -12758,11 +12911,11 @@
             </a:avLst>
           </a:prstGeom>
           <a:solidFill>
-            <a:srgbClr val="1E293B"/>
+            <a:srgbClr val="F8FAFC"/>
           </a:solidFill>
           <a:ln w="9525">
             <a:solidFill>
-              <a:srgbClr val="334155"/>
+              <a:srgbClr val="E2E8F0"/>
             </a:solidFill>
             <a:prstDash val="solid"/>
           </a:ln>
@@ -12770,7 +12923,7 @@
       </p:sp>
       <p:sp>
         <p:nvSpPr>
-          <p:cNvPr id="26" name="Text 24"/>
+          <p:cNvPr id="30" name="Text 28"/>
           <p:cNvSpPr txBox="1"/>
           <p:nvPr/>
         </p:nvSpPr>
@@ -12809,7 +12962,7 @@
       </p:sp>
       <p:sp>
         <p:nvSpPr>
-          <p:cNvPr id="27" name="Text 25"/>
+          <p:cNvPr id="31" name="Text 29"/>
           <p:cNvSpPr txBox="1"/>
           <p:nvPr/>
         </p:nvSpPr>
@@ -12837,7 +12990,7 @@
             <a:r>
               <a:rPr lang="en-US" sz="950" dirty="0">
                 <a:solidFill>
-                  <a:srgbClr val="FFFFFF"/>
+                  <a:srgbClr val="0F172A"/>
                 </a:solidFill>
                 <a:latin typeface="Microsoft JhengHei" pitchFamily="34" charset="0"/>
                 <a:ea typeface="Microsoft JhengHei" pitchFamily="34" charset="-122"/>
@@ -12851,7 +13004,7 @@
       </p:sp>
       <p:sp>
         <p:nvSpPr>
-          <p:cNvPr id="28" name="Text 26"/>
+          <p:cNvPr id="32" name="Text 30"/>
           <p:cNvSpPr txBox="1"/>
           <p:nvPr/>
         </p:nvSpPr>
@@ -12876,7 +13029,7 @@
             <a:r>
               <a:rPr lang="en-US" sz="850" dirty="0">
                 <a:solidFill>
-                  <a:srgbClr val="94A3B8"/>
+                  <a:srgbClr val="64748B"/>
                 </a:solidFill>
                 <a:latin typeface="Microsoft JhengHei" pitchFamily="34" charset="0"/>
                 <a:ea typeface="Microsoft JhengHei" pitchFamily="34" charset="-122"/>
@@ -12890,7 +13043,7 @@
       </p:sp>
       <p:sp>
         <p:nvSpPr>
-          <p:cNvPr id="29" name="Shape 27"/>
+          <p:cNvPr id="33" name="Shape 31"/>
           <p:cNvSpPr/>
           <p:nvPr/>
         </p:nvSpPr>
@@ -12905,7 +13058,7 @@
           <a:noFill/>
           <a:ln w="9525">
             <a:solidFill>
-              <a:srgbClr val="334155"/>
+              <a:srgbClr val="E2E8F0"/>
             </a:solidFill>
             <a:prstDash val="solid"/>
           </a:ln>
@@ -12913,7 +13066,7 @@
       </p:sp>
       <p:sp>
         <p:nvSpPr>
-          <p:cNvPr id="30" name="Text 28"/>
+          <p:cNvPr id="34" name="Text 32"/>
           <p:cNvSpPr txBox="1"/>
           <p:nvPr/>
         </p:nvSpPr>
@@ -12938,7 +13091,7 @@
             <a:r>
               <a:rPr lang="en-US" sz="1600" b="1" dirty="0">
                 <a:solidFill>
-                  <a:srgbClr val="FFFFFF"/>
+                  <a:srgbClr val="0F172A"/>
                 </a:solidFill>
                 <a:latin typeface="Microsoft JhengHei" pitchFamily="34" charset="0"/>
                 <a:ea typeface="Microsoft JhengHei" pitchFamily="34" charset="-122"/>
@@ -12952,7 +13105,7 @@
       </p:sp>
       <p:sp>
         <p:nvSpPr>
-          <p:cNvPr id="31" name="Text 29"/>
+          <p:cNvPr id="35" name="Text 33"/>
           <p:cNvSpPr txBox="1"/>
           <p:nvPr/>
         </p:nvSpPr>
@@ -12980,7 +13133,7 @@
             <a:r>
               <a:rPr lang="en-US" sz="1300" dirty="0">
                 <a:solidFill>
-                  <a:srgbClr val="CBD5E1"/>
+                  <a:srgbClr val="334155"/>
                 </a:solidFill>
                 <a:latin typeface="Microsoft JhengHei" pitchFamily="34" charset="0"/>
                 <a:ea typeface="Microsoft JhengHei" pitchFamily="34" charset="-122"/>
@@ -12994,7 +13147,7 @@
       </p:sp>
       <p:sp>
         <p:nvSpPr>
-          <p:cNvPr id="32" name="Text 30"/>
+          <p:cNvPr id="36" name="Text 34"/>
           <p:cNvSpPr txBox="1"/>
           <p:nvPr/>
         </p:nvSpPr>
@@ -13019,7 +13172,7 @@
             <a:r>
               <a:rPr lang="en-US" sz="900" dirty="0">
                 <a:solidFill>
-                  <a:srgbClr val="94A3B8"/>
+                  <a:srgbClr val="64748B"/>
                 </a:solidFill>
                 <a:latin typeface="Microsoft JhengHei" pitchFamily="34" charset="0"/>
                 <a:ea typeface="Microsoft JhengHei" pitchFamily="34" charset="-122"/>
@@ -13033,7 +13186,7 @@
       </p:sp>
       <p:sp>
         <p:nvSpPr>
-          <p:cNvPr id="33" name="Text 31"/>
+          <p:cNvPr id="37" name="Text 35"/>
           <p:cNvSpPr txBox="1"/>
           <p:nvPr/>
         </p:nvSpPr>
@@ -13058,7 +13211,7 @@
             <a:r>
               <a:rPr lang="en-US" sz="900" dirty="0">
                 <a:solidFill>
-                  <a:srgbClr val="94A3B8"/>
+                  <a:srgbClr val="64748B"/>
                 </a:solidFill>
                 <a:latin typeface="Microsoft JhengHei" pitchFamily="34" charset="0"/>
                 <a:ea typeface="Microsoft JhengHei" pitchFamily="34" charset="-122"/>

--- a/reports/TSGEX_Five_Instrument_Yield_Optimization_Report.pptx
+++ b/reports/TSGEX_Five_Instrument_Yield_Optimization_Report.pptx
@@ -19,9 +19,10 @@
     <p:sldId id="267" r:id="rId13"/>
     <p:sldId id="268" r:id="rId14"/>
     <p:sldId id="269" r:id="rId15"/>
+    <p:sldId id="270" r:id="rId16"/>
   </p:sldIdLst>
   <p:notesMasterIdLst>
-    <p:notesMasterId r:id="rId16"/>
+    <p:notesMasterId r:id="rId17"/>
   </p:notesMasterIdLst>
   <p:sldSz cx="12192000" cy="6858000"/>
   <p:notesSz cx="6858000" cy="12192000"/>
@@ -1903,6 +1904,94 @@
 </p:notes>
 </file>
 
+<file path=ppt/notesSlides/notesSlide15.xml><?xml version="1.0" encoding="utf-8"?>
+<p:notes xmlns:a="http://schemas.openxmlformats.org/drawingml/2006/main" xmlns:r="http://schemas.openxmlformats.org/officeDocument/2006/relationships" xmlns:p="http://schemas.openxmlformats.org/presentationml/2006/main">
+  <p:cSld>
+    <p:spTree>
+      <p:nvGrpSpPr>
+        <p:cNvPr id="1" name=""/>
+        <p:cNvGrpSpPr/>
+        <p:nvPr/>
+      </p:nvGrpSpPr>
+      <p:grpSpPr>
+        <a:xfrm>
+          <a:off x="0" y="0"/>
+          <a:ext cx="0" cy="0"/>
+          <a:chOff x="0" y="0"/>
+          <a:chExt cx="0" cy="0"/>
+        </a:xfrm>
+      </p:grpSpPr>
+      <p:sp>
+        <p:nvSpPr>
+          <p:cNvPr id="2" name="Slide Image Placeholder 1"/>
+          <p:cNvSpPr>
+            <a:spLocks noGrp="1" noRot="1" noChangeAspect="1"/>
+          </p:cNvSpPr>
+          <p:nvPr>
+            <p:ph type="sldImg"/>
+          </p:nvPr>
+        </p:nvSpPr>
+        <p:spPr/>
+      </p:sp>
+      <p:sp>
+        <p:nvSpPr>
+          <p:cNvPr id="3" name="Notes Placeholder 2"/>
+          <p:cNvSpPr>
+            <a:spLocks noGrp="1"/>
+          </p:cNvSpPr>
+          <p:nvPr>
+            <p:ph type="body" idx="1"/>
+          </p:nvPr>
+        </p:nvSpPr>
+        <p:spPr/>
+        <p:txBody>
+          <a:bodyPr/>
+          <a:lstStyle/>
+          <a:p>
+            <a:r>
+              <a:rPr lang="en-US" dirty="0"/>
+              <a:t/>
+            </a:r>
+            <a:endParaRPr lang="en-US" dirty="0"/>
+          </a:p>
+        </p:txBody>
+      </p:sp>
+      <p:sp>
+        <p:nvSpPr>
+          <p:cNvPr id="4" name="Slide Number Placeholder 3"/>
+          <p:cNvSpPr>
+            <a:spLocks noGrp="1"/>
+          </p:cNvSpPr>
+          <p:nvPr>
+            <p:ph type="sldNum" sz="quarter" idx="10"/>
+          </p:nvPr>
+        </p:nvSpPr>
+        <p:spPr/>
+        <p:txBody>
+          <a:bodyPr/>
+          <a:lstStyle/>
+          <a:p>
+            <a:fld id="{F7021451-1387-4CA6-816F-3879F97B5CBC}" type="slidenum">
+              <a:rPr lang="en-US"/>
+              <a:t>15</a:t>
+            </a:fld>
+            <a:endParaRPr lang="en-US"/>
+          </a:p>
+        </p:txBody>
+      </p:sp>
+    </p:spTree>
+    <p:extLst>
+      <p:ext uri="{BB962C8B-B14F-4D97-AF65-F5344CB8AC3E}">
+        <p14:creationId xmlns:p14="http://schemas.microsoft.com/office/powerpoint/2010/main" val="1024086991"/>
+      </p:ext>
+    </p:extLst>
+  </p:cSld>
+  <p:clrMapOvr>
+    <a:masterClrMapping/>
+  </p:clrMapOvr>
+</p:notes>
+</file>
+
 <file path=ppt/notesSlides/notesSlide2.xml><?xml version="1.0" encoding="utf-8"?>
 <p:notes xmlns:a="http://schemas.openxmlformats.org/drawingml/2006/main" xmlns:r="http://schemas.openxmlformats.org/officeDocument/2006/relationships" xmlns:p="http://schemas.openxmlformats.org/presentationml/2006/main">
   <p:cSld>
@@ -3596,6 +3685,2000 @@
                 <a:ea typeface="Microsoft JhengHei" pitchFamily="34" charset="-122"/>
                 <a:cs typeface="Microsoft JhengHei" pitchFamily="34" charset="-120"/>
               </a:rPr>
+              <a:t>④ 進階策略：轉換後之滾動掛單（"Wheel" 策略）</a:t>
+            </a:r>
+            <a:endParaRPr lang="en-US" sz="2800" dirty="0"/>
+          </a:p>
+        </p:txBody>
+      </p:sp>
+      <p:sp>
+        <p:nvSpPr>
+          <p:cNvPr id="3" name="Text 1"/>
+          <p:cNvSpPr txBox="1"/>
+          <p:nvPr/>
+        </p:nvSpPr>
+        <p:spPr>
+          <a:xfrm>
+            <a:off x="548640" y="960120"/>
+            <a:ext cx="11094415" cy="365760"/>
+          </a:xfrm>
+          <a:prstGeom prst="rect">
+            <a:avLst/>
+          </a:prstGeom>
+          <a:noFill/>
+          <a:ln/>
+        </p:spPr>
+        <p:txBody>
+          <a:bodyPr wrap="square" lIns="0" tIns="0" rIns="0" bIns="0" rtlCol="0" anchor="ctr"/>
+          <a:lstStyle/>
+          <a:p>
+            <a:pPr algn="l" indent="0" marL="0">
+              <a:buNone/>
+            </a:pPr>
+            <a:r>
+              <a:rPr lang="en-US" sz="1300" dirty="0">
+                <a:solidFill>
+                  <a:srgbClr val="64748B"/>
+                </a:solidFill>
+                <a:latin typeface="Microsoft JhengHei" pitchFamily="34" charset="0"/>
+                <a:ea typeface="Microsoft JhengHei" pitchFamily="34" charset="-122"/>
+                <a:cs typeface="Microsoft JhengHei" pitchFamily="34" charset="-120"/>
+              </a:rPr>
+              <a:t>本金轉為 BTC 後不認賠平倉，改以同一行使價反向掛「高賣」等待價格回升</a:t>
+            </a:r>
+            <a:endParaRPr lang="en-US" sz="1300" dirty="0"/>
+          </a:p>
+        </p:txBody>
+      </p:sp>
+      <p:sp>
+        <p:nvSpPr>
+          <p:cNvPr id="4" name="Shape 2"/>
+          <p:cNvSpPr/>
+          <p:nvPr/>
+        </p:nvSpPr>
+        <p:spPr>
+          <a:xfrm>
+            <a:off x="548640" y="1463040"/>
+            <a:ext cx="5440680" cy="1920240"/>
+          </a:xfrm>
+          <a:prstGeom prst="roundRect">
+            <a:avLst>
+              <a:gd name="adj" fmla="val 3810"/>
+            </a:avLst>
+          </a:prstGeom>
+          <a:solidFill>
+            <a:srgbClr val="EFF6FF"/>
+          </a:solidFill>
+          <a:ln w="9525">
+            <a:solidFill>
+              <a:srgbClr val="E2E8F0"/>
+            </a:solidFill>
+            <a:prstDash val="solid"/>
+          </a:ln>
+          <a:effectLst>
+            <a:outerShdw sx="100000" sy="100000" kx="0" ky="0" algn="bl" rotWithShape="0" blurRad="76200" dist="25400" dir="5400000">
+              <a:srgbClr val="1E293B">
+                <a:alpha val="8000"/>
+              </a:srgbClr>
+            </a:outerShdw>
+          </a:effectLst>
+        </p:spPr>
+      </p:sp>
+      <p:sp>
+        <p:nvSpPr>
+          <p:cNvPr id="5" name="Text 3"/>
+          <p:cNvSpPr txBox="1"/>
+          <p:nvPr/>
+        </p:nvSpPr>
+        <p:spPr>
+          <a:xfrm>
+            <a:off x="749808" y="1609344"/>
+            <a:ext cx="5038344" cy="320040"/>
+          </a:xfrm>
+          <a:prstGeom prst="rect">
+            <a:avLst/>
+          </a:prstGeom>
+          <a:noFill/>
+          <a:ln/>
+        </p:spPr>
+        <p:txBody>
+          <a:bodyPr wrap="square" lIns="0" tIns="0" rIns="0" bIns="0" rtlCol="0" anchor="ctr"/>
+          <a:lstStyle/>
+          <a:p>
+            <a:pPr algn="l" indent="0" marL="0">
+              <a:buNone/>
+            </a:pPr>
+            <a:r>
+              <a:rPr lang="en-US" sz="1300" b="1" dirty="0">
+                <a:solidFill>
+                  <a:srgbClr val="0F172A"/>
+                </a:solidFill>
+                <a:latin typeface="Microsoft JhengHei" pitchFamily="34" charset="0"/>
+                <a:ea typeface="Microsoft JhengHei" pitchFamily="34" charset="-122"/>
+                <a:cs typeface="Microsoft JhengHei" pitchFamily="34" charset="-120"/>
+              </a:rPr>
+              <a:t>怎麼做？（Covered-Call Wheel 概念）</a:t>
+            </a:r>
+            <a:endParaRPr lang="en-US" sz="1300" dirty="0"/>
+          </a:p>
+        </p:txBody>
+      </p:sp>
+      <p:sp>
+        <p:nvSpPr>
+          <p:cNvPr id="6" name="Text 4"/>
+          <p:cNvSpPr txBox="1"/>
+          <p:nvPr/>
+        </p:nvSpPr>
+        <p:spPr>
+          <a:xfrm>
+            <a:off x="749808" y="1965960"/>
+            <a:ext cx="5038344" cy="1261872"/>
+          </a:xfrm>
+          <a:prstGeom prst="rect">
+            <a:avLst/>
+          </a:prstGeom>
+          <a:noFill/>
+          <a:ln/>
+        </p:spPr>
+        <p:txBody>
+          <a:bodyPr wrap="square" lIns="0" tIns="0" rIns="0" bIns="0" rtlCol="0" anchor="t"/>
+          <a:lstStyle/>
+          <a:p>
+            <a:pPr algn="l" indent="0" marL="0">
+              <a:lnSpc>
+                <a:spcPct val="115000"/>
+              </a:lnSpc>
+              <a:buNone/>
+            </a:pPr>
+            <a:r>
+              <a:rPr lang="en-US" sz="1100" dirty="0">
+                <a:solidFill>
+                  <a:srgbClr val="334155"/>
+                </a:solidFill>
+                <a:latin typeface="Microsoft JhengHei" pitchFamily="34" charset="0"/>
+                <a:ea typeface="Microsoft JhengHei" pitchFamily="34" charset="-122"/>
+                <a:cs typeface="Microsoft JhengHei" pitchFamily="34" charset="-120"/>
+              </a:rPr>
+              <a:t>① 低買轉換為 BTC 後，② 立即以持有之 BTC、相同行使價（$55,900）掛出「高賣」收取權利金；③ 若到期未漲破，繼續持有 BTC 並重複掛單；④ 一旦漲破，BTC 依原行使價換回 USDT，本金名目值完整取回，且期間累積之權利金全數保留。</a:t>
+            </a:r>
+            <a:endParaRPr lang="en-US" sz="1100" dirty="0"/>
+          </a:p>
+        </p:txBody>
+      </p:sp>
+      <p:graphicFrame>
+        <p:nvGraphicFramePr>
+          <p:cNvPr id="11" name="Table 0"/>
+          <p:cNvGraphicFramePr>
+            <a:graphicFrameLocks noGrp="1"/>
+          </p:cNvGraphicFramePr>
+          <p:nvPr>
+            <p:extLst>
+              <p:ext uri="{D42A27DB-BD31-4B8C-83A1-F6EECF244321}">
+                <p14:modId xmlns:p14="http://schemas.microsoft.com/office/powerpoint/2010/main" val="1579011935"/>
+              </p:ext>
+            </p:extLst>
+          </p:nvPr>
+        </p:nvGraphicFramePr>
+        <p:xfrm>
+          <a:off x="6172200" y="1463040"/>
+          <a:ext cx="5468112" cy="914400"/>
+        </p:xfrm>
+        <a:graphic>
+          <a:graphicData uri="http://schemas.openxmlformats.org/drawingml/2006/table">
+            <a:tbl>
+              <a:tblPr/>
+              <a:tblGrid>
+                <a:gridCol w="1051560"/>
+                <a:gridCol w="1947672"/>
+                <a:gridCol w="914400"/>
+                <a:gridCol w="1005840"/>
+                <a:gridCol w="1463040"/>
+              </a:tblGrid>
+              <a:tr h="457200">
+                <a:tc>
+                  <a:txBody>
+                    <a:bodyPr/>
+                    <a:lstStyle/>
+                    <a:p>
+                      <a:pPr algn="ctr" indent="0" marL="0">
+                        <a:buNone/>
+                      </a:pPr>
+                      <a:r>
+                        <a:rPr lang="en-US" sz="900" b="1" dirty="0">
+                          <a:solidFill>
+                            <a:srgbClr val="FFFFFF"/>
+                          </a:solidFill>
+                        </a:rPr>
+                        <a:t>週期</a:t>
+                      </a:r>
+                      <a:endParaRPr lang="en-US" sz="900" dirty="0"/>
+                    </a:p>
+                  </a:txBody>
+                  <a:tcPr marL="73152" marR="73152" marT="45720" marB="45720" anchor="ctr">
+                    <a:lnL w="9525" cap="flat" cmpd="sng" algn="ctr">
+                      <a:solidFill>
+                        <a:srgbClr val="E2E8F0"/>
+                      </a:solidFill>
+                      <a:prstDash val="solid"/>
+                      <a:round/>
+                      <a:headEnd type="none" w="med" len="med"/>
+                      <a:tailEnd type="none" w="med" len="med"/>
+                    </a:lnL>
+                    <a:lnR w="9525" cap="flat" cmpd="sng" algn="ctr">
+                      <a:solidFill>
+                        <a:srgbClr val="E2E8F0"/>
+                      </a:solidFill>
+                      <a:prstDash val="solid"/>
+                      <a:round/>
+                      <a:headEnd type="none" w="med" len="med"/>
+                      <a:tailEnd type="none" w="med" len="med"/>
+                    </a:lnR>
+                    <a:lnT w="9525" cap="flat" cmpd="sng" algn="ctr">
+                      <a:solidFill>
+                        <a:srgbClr val="E2E8F0"/>
+                      </a:solidFill>
+                      <a:prstDash val="solid"/>
+                      <a:round/>
+                      <a:headEnd type="none" w="med" len="med"/>
+                      <a:tailEnd type="none" w="med" len="med"/>
+                    </a:lnT>
+                    <a:lnB w="9525" cap="flat" cmpd="sng" algn="ctr">
+                      <a:solidFill>
+                        <a:srgbClr val="E2E8F0"/>
+                      </a:solidFill>
+                      <a:prstDash val="solid"/>
+                      <a:round/>
+                      <a:headEnd type="none" w="med" len="med"/>
+                      <a:tailEnd type="none" w="med" len="med"/>
+                    </a:lnB>
+                    <a:solidFill>
+                      <a:srgbClr val="0F172A"/>
+                    </a:solidFill>
+                  </a:tcPr>
+                </a:tc>
+                <a:tc>
+                  <a:txBody>
+                    <a:bodyPr/>
+                    <a:lstStyle/>
+                    <a:p>
+                      <a:pPr algn="ctr" indent="0" marL="0">
+                        <a:buNone/>
+                      </a:pPr>
+                      <a:r>
+                        <a:rPr lang="en-US" sz="900" b="1" dirty="0">
+                          <a:solidFill>
+                            <a:srgbClr val="FFFFFF"/>
+                          </a:solidFill>
+                        </a:rPr>
+                        <a:t>操作</a:t>
+                      </a:r>
+                      <a:endParaRPr lang="en-US" sz="900" dirty="0"/>
+                    </a:p>
+                  </a:txBody>
+                  <a:tcPr marL="73152" marR="73152" marT="45720" marB="45720" anchor="ctr">
+                    <a:lnL w="9525" cap="flat" cmpd="sng" algn="ctr">
+                      <a:solidFill>
+                        <a:srgbClr val="E2E8F0"/>
+                      </a:solidFill>
+                      <a:prstDash val="solid"/>
+                      <a:round/>
+                      <a:headEnd type="none" w="med" len="med"/>
+                      <a:tailEnd type="none" w="med" len="med"/>
+                    </a:lnL>
+                    <a:lnR w="9525" cap="flat" cmpd="sng" algn="ctr">
+                      <a:solidFill>
+                        <a:srgbClr val="E2E8F0"/>
+                      </a:solidFill>
+                      <a:prstDash val="solid"/>
+                      <a:round/>
+                      <a:headEnd type="none" w="med" len="med"/>
+                      <a:tailEnd type="none" w="med" len="med"/>
+                    </a:lnR>
+                    <a:lnT w="9525" cap="flat" cmpd="sng" algn="ctr">
+                      <a:solidFill>
+                        <a:srgbClr val="E2E8F0"/>
+                      </a:solidFill>
+                      <a:prstDash val="solid"/>
+                      <a:round/>
+                      <a:headEnd type="none" w="med" len="med"/>
+                      <a:tailEnd type="none" w="med" len="med"/>
+                    </a:lnT>
+                    <a:lnB w="9525" cap="flat" cmpd="sng" algn="ctr">
+                      <a:solidFill>
+                        <a:srgbClr val="E2E8F0"/>
+                      </a:solidFill>
+                      <a:prstDash val="solid"/>
+                      <a:round/>
+                      <a:headEnd type="none" w="med" len="med"/>
+                      <a:tailEnd type="none" w="med" len="med"/>
+                    </a:lnB>
+                    <a:solidFill>
+                      <a:srgbClr val="0F172A"/>
+                    </a:solidFill>
+                  </a:tcPr>
+                </a:tc>
+                <a:tc>
+                  <a:txBody>
+                    <a:bodyPr/>
+                    <a:lstStyle/>
+                    <a:p>
+                      <a:pPr algn="ctr" indent="0" marL="0">
+                        <a:buNone/>
+                      </a:pPr>
+                      <a:r>
+                        <a:rPr lang="en-US" sz="900" b="1" dirty="0">
+                          <a:solidFill>
+                            <a:srgbClr val="FFFFFF"/>
+                          </a:solidFill>
+                        </a:rPr>
+                        <a:t>示意年化</a:t>
+                      </a:r>
+                      <a:endParaRPr lang="en-US" sz="900" dirty="0"/>
+                    </a:p>
+                  </a:txBody>
+                  <a:tcPr marL="73152" marR="73152" marT="45720" marB="45720" anchor="ctr">
+                    <a:lnL w="9525" cap="flat" cmpd="sng" algn="ctr">
+                      <a:solidFill>
+                        <a:srgbClr val="E2E8F0"/>
+                      </a:solidFill>
+                      <a:prstDash val="solid"/>
+                      <a:round/>
+                      <a:headEnd type="none" w="med" len="med"/>
+                      <a:tailEnd type="none" w="med" len="med"/>
+                    </a:lnL>
+                    <a:lnR w="9525" cap="flat" cmpd="sng" algn="ctr">
+                      <a:solidFill>
+                        <a:srgbClr val="E2E8F0"/>
+                      </a:solidFill>
+                      <a:prstDash val="solid"/>
+                      <a:round/>
+                      <a:headEnd type="none" w="med" len="med"/>
+                      <a:tailEnd type="none" w="med" len="med"/>
+                    </a:lnR>
+                    <a:lnT w="9525" cap="flat" cmpd="sng" algn="ctr">
+                      <a:solidFill>
+                        <a:srgbClr val="E2E8F0"/>
+                      </a:solidFill>
+                      <a:prstDash val="solid"/>
+                      <a:round/>
+                      <a:headEnd type="none" w="med" len="med"/>
+                      <a:tailEnd type="none" w="med" len="med"/>
+                    </a:lnT>
+                    <a:lnB w="9525" cap="flat" cmpd="sng" algn="ctr">
+                      <a:solidFill>
+                        <a:srgbClr val="E2E8F0"/>
+                      </a:solidFill>
+                      <a:prstDash val="solid"/>
+                      <a:round/>
+                      <a:headEnd type="none" w="med" len="med"/>
+                      <a:tailEnd type="none" w="med" len="med"/>
+                    </a:lnB>
+                    <a:solidFill>
+                      <a:srgbClr val="0F172A"/>
+                    </a:solidFill>
+                  </a:tcPr>
+                </a:tc>
+                <a:tc>
+                  <a:txBody>
+                    <a:bodyPr/>
+                    <a:lstStyle/>
+                    <a:p>
+                      <a:pPr algn="ctr" indent="0" marL="0">
+                        <a:buNone/>
+                      </a:pPr>
+                      <a:r>
+                        <a:rPr lang="en-US" sz="900" b="1" dirty="0">
+                          <a:solidFill>
+                            <a:srgbClr val="FFFFFF"/>
+                          </a:solidFill>
+                        </a:rPr>
+                        <a:t>本期權利金</a:t>
+                      </a:r>
+                      <a:endParaRPr lang="en-US" sz="900" dirty="0"/>
+                    </a:p>
+                  </a:txBody>
+                  <a:tcPr marL="73152" marR="73152" marT="45720" marB="45720" anchor="ctr">
+                    <a:lnL w="9525" cap="flat" cmpd="sng" algn="ctr">
+                      <a:solidFill>
+                        <a:srgbClr val="E2E8F0"/>
+                      </a:solidFill>
+                      <a:prstDash val="solid"/>
+                      <a:round/>
+                      <a:headEnd type="none" w="med" len="med"/>
+                      <a:tailEnd type="none" w="med" len="med"/>
+                    </a:lnL>
+                    <a:lnR w="9525" cap="flat" cmpd="sng" algn="ctr">
+                      <a:solidFill>
+                        <a:srgbClr val="E2E8F0"/>
+                      </a:solidFill>
+                      <a:prstDash val="solid"/>
+                      <a:round/>
+                      <a:headEnd type="none" w="med" len="med"/>
+                      <a:tailEnd type="none" w="med" len="med"/>
+                    </a:lnR>
+                    <a:lnT w="9525" cap="flat" cmpd="sng" algn="ctr">
+                      <a:solidFill>
+                        <a:srgbClr val="E2E8F0"/>
+                      </a:solidFill>
+                      <a:prstDash val="solid"/>
+                      <a:round/>
+                      <a:headEnd type="none" w="med" len="med"/>
+                      <a:tailEnd type="none" w="med" len="med"/>
+                    </a:lnT>
+                    <a:lnB w="9525" cap="flat" cmpd="sng" algn="ctr">
+                      <a:solidFill>
+                        <a:srgbClr val="E2E8F0"/>
+                      </a:solidFill>
+                      <a:prstDash val="solid"/>
+                      <a:round/>
+                      <a:headEnd type="none" w="med" len="med"/>
+                      <a:tailEnd type="none" w="med" len="med"/>
+                    </a:lnB>
+                    <a:solidFill>
+                      <a:srgbClr val="0F172A"/>
+                    </a:solidFill>
+                  </a:tcPr>
+                </a:tc>
+                <a:tc>
+                  <a:txBody>
+                    <a:bodyPr/>
+                    <a:lstStyle/>
+                    <a:p>
+                      <a:pPr algn="ctr" indent="0" marL="0">
+                        <a:buNone/>
+                      </a:pPr>
+                      <a:r>
+                        <a:rPr lang="en-US" sz="900" b="1" dirty="0">
+                          <a:solidFill>
+                            <a:srgbClr val="FFFFFF"/>
+                          </a:solidFill>
+                        </a:rPr>
+                        <a:t>結算結果</a:t>
+                      </a:r>
+                      <a:endParaRPr lang="en-US" sz="900" dirty="0"/>
+                    </a:p>
+                  </a:txBody>
+                  <a:tcPr marL="73152" marR="73152" marT="45720" marB="45720" anchor="ctr">
+                    <a:lnL w="9525" cap="flat" cmpd="sng" algn="ctr">
+                      <a:solidFill>
+                        <a:srgbClr val="E2E8F0"/>
+                      </a:solidFill>
+                      <a:prstDash val="solid"/>
+                      <a:round/>
+                      <a:headEnd type="none" w="med" len="med"/>
+                      <a:tailEnd type="none" w="med" len="med"/>
+                    </a:lnL>
+                    <a:lnR w="9525" cap="flat" cmpd="sng" algn="ctr">
+                      <a:solidFill>
+                        <a:srgbClr val="E2E8F0"/>
+                      </a:solidFill>
+                      <a:prstDash val="solid"/>
+                      <a:round/>
+                      <a:headEnd type="none" w="med" len="med"/>
+                      <a:tailEnd type="none" w="med" len="med"/>
+                    </a:lnR>
+                    <a:lnT w="9525" cap="flat" cmpd="sng" algn="ctr">
+                      <a:solidFill>
+                        <a:srgbClr val="E2E8F0"/>
+                      </a:solidFill>
+                      <a:prstDash val="solid"/>
+                      <a:round/>
+                      <a:headEnd type="none" w="med" len="med"/>
+                      <a:tailEnd type="none" w="med" len="med"/>
+                    </a:lnT>
+                    <a:lnB w="9525" cap="flat" cmpd="sng" algn="ctr">
+                      <a:solidFill>
+                        <a:srgbClr val="E2E8F0"/>
+                      </a:solidFill>
+                      <a:prstDash val="solid"/>
+                      <a:round/>
+                      <a:headEnd type="none" w="med" len="med"/>
+                      <a:tailEnd type="none" w="med" len="med"/>
+                    </a:lnB>
+                    <a:solidFill>
+                      <a:srgbClr val="0F172A"/>
+                    </a:solidFill>
+                  </a:tcPr>
+                </a:tc>
+              </a:tr>
+              <a:tr h="457200">
+                <a:tc>
+                  <a:txBody>
+                    <a:bodyPr/>
+                    <a:lstStyle/>
+                    <a:p>
+                      <a:pPr algn="l" indent="0" marL="0">
+                        <a:buNone/>
+                      </a:pPr>
+                      <a:r>
+                        <a:rPr lang="en-US" sz="900" dirty="0">
+                          <a:solidFill>
+                            <a:srgbClr val="334155"/>
+                          </a:solidFill>
+                        </a:rPr>
+                        <a:t>第1週 低買</a:t>
+                      </a:r>
+                      <a:endParaRPr lang="en-US" sz="900" dirty="0"/>
+                    </a:p>
+                  </a:txBody>
+                  <a:tcPr marL="73152" marR="73152" marT="45720" marB="45720" anchor="ctr">
+                    <a:lnL w="9525" cap="flat" cmpd="sng" algn="ctr">
+                      <a:solidFill>
+                        <a:srgbClr val="E2E8F0"/>
+                      </a:solidFill>
+                      <a:prstDash val="solid"/>
+                      <a:round/>
+                      <a:headEnd type="none" w="med" len="med"/>
+                      <a:tailEnd type="none" w="med" len="med"/>
+                    </a:lnL>
+                    <a:lnR w="9525" cap="flat" cmpd="sng" algn="ctr">
+                      <a:solidFill>
+                        <a:srgbClr val="E2E8F0"/>
+                      </a:solidFill>
+                      <a:prstDash val="solid"/>
+                      <a:round/>
+                      <a:headEnd type="none" w="med" len="med"/>
+                      <a:tailEnd type="none" w="med" len="med"/>
+                    </a:lnR>
+                    <a:lnT w="9525" cap="flat" cmpd="sng" algn="ctr">
+                      <a:solidFill>
+                        <a:srgbClr val="E2E8F0"/>
+                      </a:solidFill>
+                      <a:prstDash val="solid"/>
+                      <a:round/>
+                      <a:headEnd type="none" w="med" len="med"/>
+                      <a:tailEnd type="none" w="med" len="med"/>
+                    </a:lnT>
+                    <a:lnB w="9525" cap="flat" cmpd="sng" algn="ctr">
+                      <a:solidFill>
+                        <a:srgbClr val="E2E8F0"/>
+                      </a:solidFill>
+                      <a:prstDash val="solid"/>
+                      <a:round/>
+                      <a:headEnd type="none" w="med" len="med"/>
+                      <a:tailEnd type="none" w="med" len="med"/>
+                    </a:lnB>
+                    <a:solidFill>
+                      <a:srgbClr val="FFFFFF"/>
+                    </a:solidFill>
+                  </a:tcPr>
+                </a:tc>
+                <a:tc>
+                  <a:txBody>
+                    <a:bodyPr/>
+                    <a:lstStyle/>
+                    <a:p>
+                      <a:pPr algn="l" indent="0" marL="0">
+                        <a:buNone/>
+                      </a:pPr>
+                      <a:r>
+                        <a:rPr lang="en-US" sz="900" dirty="0">
+                          <a:solidFill>
+                            <a:srgbClr val="334155"/>
+                          </a:solidFill>
+                        </a:rPr>
+                        <a:t>$1,000,000→轉換為17.8891 BTC</a:t>
+                      </a:r>
+                      <a:endParaRPr lang="en-US" sz="900" dirty="0"/>
+                    </a:p>
+                  </a:txBody>
+                  <a:tcPr marL="73152" marR="73152" marT="45720" marB="45720" anchor="ctr">
+                    <a:lnL w="9525" cap="flat" cmpd="sng" algn="ctr">
+                      <a:solidFill>
+                        <a:srgbClr val="E2E8F0"/>
+                      </a:solidFill>
+                      <a:prstDash val="solid"/>
+                      <a:round/>
+                      <a:headEnd type="none" w="med" len="med"/>
+                      <a:tailEnd type="none" w="med" len="med"/>
+                    </a:lnL>
+                    <a:lnR w="9525" cap="flat" cmpd="sng" algn="ctr">
+                      <a:solidFill>
+                        <a:srgbClr val="E2E8F0"/>
+                      </a:solidFill>
+                      <a:prstDash val="solid"/>
+                      <a:round/>
+                      <a:headEnd type="none" w="med" len="med"/>
+                      <a:tailEnd type="none" w="med" len="med"/>
+                    </a:lnR>
+                    <a:lnT w="9525" cap="flat" cmpd="sng" algn="ctr">
+                      <a:solidFill>
+                        <a:srgbClr val="E2E8F0"/>
+                      </a:solidFill>
+                      <a:prstDash val="solid"/>
+                      <a:round/>
+                      <a:headEnd type="none" w="med" len="med"/>
+                      <a:tailEnd type="none" w="med" len="med"/>
+                    </a:lnT>
+                    <a:lnB w="9525" cap="flat" cmpd="sng" algn="ctr">
+                      <a:solidFill>
+                        <a:srgbClr val="E2E8F0"/>
+                      </a:solidFill>
+                      <a:prstDash val="solid"/>
+                      <a:round/>
+                      <a:headEnd type="none" w="med" len="med"/>
+                      <a:tailEnd type="none" w="med" len="med"/>
+                    </a:lnB>
+                    <a:solidFill>
+                      <a:srgbClr val="FFFFFF"/>
+                    </a:solidFill>
+                  </a:tcPr>
+                </a:tc>
+                <a:tc>
+                  <a:txBody>
+                    <a:bodyPr/>
+                    <a:lstStyle/>
+                    <a:p>
+                      <a:pPr algn="l" indent="0" marL="0">
+                        <a:buNone/>
+                      </a:pPr>
+                      <a:r>
+                        <a:rPr lang="en-US" sz="900" dirty="0">
+                          <a:solidFill>
+                            <a:srgbClr val="334155"/>
+                          </a:solidFill>
+                        </a:rPr>
+                        <a:t>40%</a:t>
+                      </a:r>
+                      <a:endParaRPr lang="en-US" sz="900" dirty="0"/>
+                    </a:p>
+                  </a:txBody>
+                  <a:tcPr marL="73152" marR="73152" marT="45720" marB="45720" anchor="ctr">
+                    <a:lnL w="9525" cap="flat" cmpd="sng" algn="ctr">
+                      <a:solidFill>
+                        <a:srgbClr val="E2E8F0"/>
+                      </a:solidFill>
+                      <a:prstDash val="solid"/>
+                      <a:round/>
+                      <a:headEnd type="none" w="med" len="med"/>
+                      <a:tailEnd type="none" w="med" len="med"/>
+                    </a:lnL>
+                    <a:lnR w="9525" cap="flat" cmpd="sng" algn="ctr">
+                      <a:solidFill>
+                        <a:srgbClr val="E2E8F0"/>
+                      </a:solidFill>
+                      <a:prstDash val="solid"/>
+                      <a:round/>
+                      <a:headEnd type="none" w="med" len="med"/>
+                      <a:tailEnd type="none" w="med" len="med"/>
+                    </a:lnR>
+                    <a:lnT w="9525" cap="flat" cmpd="sng" algn="ctr">
+                      <a:solidFill>
+                        <a:srgbClr val="E2E8F0"/>
+                      </a:solidFill>
+                      <a:prstDash val="solid"/>
+                      <a:round/>
+                      <a:headEnd type="none" w="med" len="med"/>
+                      <a:tailEnd type="none" w="med" len="med"/>
+                    </a:lnT>
+                    <a:lnB w="9525" cap="flat" cmpd="sng" algn="ctr">
+                      <a:solidFill>
+                        <a:srgbClr val="E2E8F0"/>
+                      </a:solidFill>
+                      <a:prstDash val="solid"/>
+                      <a:round/>
+                      <a:headEnd type="none" w="med" len="med"/>
+                      <a:tailEnd type="none" w="med" len="med"/>
+                    </a:lnB>
+                    <a:solidFill>
+                      <a:srgbClr val="FFFFFF"/>
+                    </a:solidFill>
+                  </a:tcPr>
+                </a:tc>
+                <a:tc>
+                  <a:txBody>
+                    <a:bodyPr/>
+                    <a:lstStyle/>
+                    <a:p>
+                      <a:pPr algn="l" indent="0" marL="0">
+                        <a:buNone/>
+                      </a:pPr>
+                      <a:r>
+                        <a:rPr lang="en-US" sz="900" dirty="0">
+                          <a:solidFill>
+                            <a:srgbClr val="334155"/>
+                          </a:solidFill>
+                        </a:rPr>
+                        <a:t>$7,671</a:t>
+                      </a:r>
+                      <a:endParaRPr lang="en-US" sz="900" dirty="0"/>
+                    </a:p>
+                  </a:txBody>
+                  <a:tcPr marL="73152" marR="73152" marT="45720" marB="45720" anchor="ctr">
+                    <a:lnL w="9525" cap="flat" cmpd="sng" algn="ctr">
+                      <a:solidFill>
+                        <a:srgbClr val="E2E8F0"/>
+                      </a:solidFill>
+                      <a:prstDash val="solid"/>
+                      <a:round/>
+                      <a:headEnd type="none" w="med" len="med"/>
+                      <a:tailEnd type="none" w="med" len="med"/>
+                    </a:lnL>
+                    <a:lnR w="9525" cap="flat" cmpd="sng" algn="ctr">
+                      <a:solidFill>
+                        <a:srgbClr val="E2E8F0"/>
+                      </a:solidFill>
+                      <a:prstDash val="solid"/>
+                      <a:round/>
+                      <a:headEnd type="none" w="med" len="med"/>
+                      <a:tailEnd type="none" w="med" len="med"/>
+                    </a:lnR>
+                    <a:lnT w="9525" cap="flat" cmpd="sng" algn="ctr">
+                      <a:solidFill>
+                        <a:srgbClr val="E2E8F0"/>
+                      </a:solidFill>
+                      <a:prstDash val="solid"/>
+                      <a:round/>
+                      <a:headEnd type="none" w="med" len="med"/>
+                      <a:tailEnd type="none" w="med" len="med"/>
+                    </a:lnT>
+                    <a:lnB w="9525" cap="flat" cmpd="sng" algn="ctr">
+                      <a:solidFill>
+                        <a:srgbClr val="E2E8F0"/>
+                      </a:solidFill>
+                      <a:prstDash val="solid"/>
+                      <a:round/>
+                      <a:headEnd type="none" w="med" len="med"/>
+                      <a:tailEnd type="none" w="med" len="med"/>
+                    </a:lnB>
+                    <a:solidFill>
+                      <a:srgbClr val="FFFFFF"/>
+                    </a:solidFill>
+                  </a:tcPr>
+                </a:tc>
+                <a:tc>
+                  <a:txBody>
+                    <a:bodyPr/>
+                    <a:lstStyle/>
+                    <a:p>
+                      <a:pPr algn="l" indent="0" marL="0">
+                        <a:buNone/>
+                      </a:pPr>
+                      <a:r>
+                        <a:rPr lang="en-US" sz="900" dirty="0">
+                          <a:solidFill>
+                            <a:srgbClr val="334155"/>
+                          </a:solidFill>
+                        </a:rPr>
+                        <a:t>跌破，轉換為BTC</a:t>
+                      </a:r>
+                      <a:endParaRPr lang="en-US" sz="900" dirty="0"/>
+                    </a:p>
+                  </a:txBody>
+                  <a:tcPr marL="73152" marR="73152" marT="45720" marB="45720" anchor="ctr">
+                    <a:lnL w="9525" cap="flat" cmpd="sng" algn="ctr">
+                      <a:solidFill>
+                        <a:srgbClr val="E2E8F0"/>
+                      </a:solidFill>
+                      <a:prstDash val="solid"/>
+                      <a:round/>
+                      <a:headEnd type="none" w="med" len="med"/>
+                      <a:tailEnd type="none" w="med" len="med"/>
+                    </a:lnL>
+                    <a:lnR w="9525" cap="flat" cmpd="sng" algn="ctr">
+                      <a:solidFill>
+                        <a:srgbClr val="E2E8F0"/>
+                      </a:solidFill>
+                      <a:prstDash val="solid"/>
+                      <a:round/>
+                      <a:headEnd type="none" w="med" len="med"/>
+                      <a:tailEnd type="none" w="med" len="med"/>
+                    </a:lnR>
+                    <a:lnT w="9525" cap="flat" cmpd="sng" algn="ctr">
+                      <a:solidFill>
+                        <a:srgbClr val="E2E8F0"/>
+                      </a:solidFill>
+                      <a:prstDash val="solid"/>
+                      <a:round/>
+                      <a:headEnd type="none" w="med" len="med"/>
+                      <a:tailEnd type="none" w="med" len="med"/>
+                    </a:lnT>
+                    <a:lnB w="9525" cap="flat" cmpd="sng" algn="ctr">
+                      <a:solidFill>
+                        <a:srgbClr val="E2E8F0"/>
+                      </a:solidFill>
+                      <a:prstDash val="solid"/>
+                      <a:round/>
+                      <a:headEnd type="none" w="med" len="med"/>
+                      <a:tailEnd type="none" w="med" len="med"/>
+                    </a:lnB>
+                    <a:solidFill>
+                      <a:srgbClr val="FFFFFF"/>
+                    </a:solidFill>
+                  </a:tcPr>
+                </a:tc>
+              </a:tr>
+              <a:tr h="457200">
+                <a:tc>
+                  <a:txBody>
+                    <a:bodyPr/>
+                    <a:lstStyle/>
+                    <a:p>
+                      <a:pPr algn="l" indent="0" marL="0">
+                        <a:buNone/>
+                      </a:pPr>
+                      <a:r>
+                        <a:rPr lang="en-US" sz="900" dirty="0">
+                          <a:solidFill>
+                            <a:srgbClr val="334155"/>
+                          </a:solidFill>
+                        </a:rPr>
+                        <a:t>第2週 高賣</a:t>
+                      </a:r>
+                      <a:endParaRPr lang="en-US" sz="900" dirty="0"/>
+                    </a:p>
+                  </a:txBody>
+                  <a:tcPr marL="73152" marR="73152" marT="45720" marB="45720" anchor="ctr">
+                    <a:lnL w="9525" cap="flat" cmpd="sng" algn="ctr">
+                      <a:solidFill>
+                        <a:srgbClr val="E2E8F0"/>
+                      </a:solidFill>
+                      <a:prstDash val="solid"/>
+                      <a:round/>
+                      <a:headEnd type="none" w="med" len="med"/>
+                      <a:tailEnd type="none" w="med" len="med"/>
+                    </a:lnL>
+                    <a:lnR w="9525" cap="flat" cmpd="sng" algn="ctr">
+                      <a:solidFill>
+                        <a:srgbClr val="E2E8F0"/>
+                      </a:solidFill>
+                      <a:prstDash val="solid"/>
+                      <a:round/>
+                      <a:headEnd type="none" w="med" len="med"/>
+                      <a:tailEnd type="none" w="med" len="med"/>
+                    </a:lnR>
+                    <a:lnT w="9525" cap="flat" cmpd="sng" algn="ctr">
+                      <a:solidFill>
+                        <a:srgbClr val="E2E8F0"/>
+                      </a:solidFill>
+                      <a:prstDash val="solid"/>
+                      <a:round/>
+                      <a:headEnd type="none" w="med" len="med"/>
+                      <a:tailEnd type="none" w="med" len="med"/>
+                    </a:lnT>
+                    <a:lnB w="9525" cap="flat" cmpd="sng" algn="ctr">
+                      <a:solidFill>
+                        <a:srgbClr val="E2E8F0"/>
+                      </a:solidFill>
+                      <a:prstDash val="solid"/>
+                      <a:round/>
+                      <a:headEnd type="none" w="med" len="med"/>
+                      <a:tailEnd type="none" w="med" len="med"/>
+                    </a:lnB>
+                    <a:solidFill>
+                      <a:srgbClr val="F8FAFC"/>
+                    </a:solidFill>
+                  </a:tcPr>
+                </a:tc>
+                <a:tc>
+                  <a:txBody>
+                    <a:bodyPr/>
+                    <a:lstStyle/>
+                    <a:p>
+                      <a:pPr algn="l" indent="0" marL="0">
+                        <a:buNone/>
+                      </a:pPr>
+                      <a:r>
+                        <a:rPr lang="en-US" sz="900" dirty="0">
+                          <a:solidFill>
+                            <a:srgbClr val="334155"/>
+                          </a:solidFill>
+                        </a:rPr>
+                        <a:t>同一行使價 $55,900 滾動掛單</a:t>
+                      </a:r>
+                      <a:endParaRPr lang="en-US" sz="900" dirty="0"/>
+                    </a:p>
+                  </a:txBody>
+                  <a:tcPr marL="73152" marR="73152" marT="45720" marB="45720" anchor="ctr">
+                    <a:lnL w="9525" cap="flat" cmpd="sng" algn="ctr">
+                      <a:solidFill>
+                        <a:srgbClr val="E2E8F0"/>
+                      </a:solidFill>
+                      <a:prstDash val="solid"/>
+                      <a:round/>
+                      <a:headEnd type="none" w="med" len="med"/>
+                      <a:tailEnd type="none" w="med" len="med"/>
+                    </a:lnL>
+                    <a:lnR w="9525" cap="flat" cmpd="sng" algn="ctr">
+                      <a:solidFill>
+                        <a:srgbClr val="E2E8F0"/>
+                      </a:solidFill>
+                      <a:prstDash val="solid"/>
+                      <a:round/>
+                      <a:headEnd type="none" w="med" len="med"/>
+                      <a:tailEnd type="none" w="med" len="med"/>
+                    </a:lnR>
+                    <a:lnT w="9525" cap="flat" cmpd="sng" algn="ctr">
+                      <a:solidFill>
+                        <a:srgbClr val="E2E8F0"/>
+                      </a:solidFill>
+                      <a:prstDash val="solid"/>
+                      <a:round/>
+                      <a:headEnd type="none" w="med" len="med"/>
+                      <a:tailEnd type="none" w="med" len="med"/>
+                    </a:lnT>
+                    <a:lnB w="9525" cap="flat" cmpd="sng" algn="ctr">
+                      <a:solidFill>
+                        <a:srgbClr val="E2E8F0"/>
+                      </a:solidFill>
+                      <a:prstDash val="solid"/>
+                      <a:round/>
+                      <a:headEnd type="none" w="med" len="med"/>
+                      <a:tailEnd type="none" w="med" len="med"/>
+                    </a:lnB>
+                    <a:solidFill>
+                      <a:srgbClr val="F8FAFC"/>
+                    </a:solidFill>
+                  </a:tcPr>
+                </a:tc>
+                <a:tc>
+                  <a:txBody>
+                    <a:bodyPr/>
+                    <a:lstStyle/>
+                    <a:p>
+                      <a:pPr algn="l" indent="0" marL="0">
+                        <a:buNone/>
+                      </a:pPr>
+                      <a:r>
+                        <a:rPr lang="en-US" sz="900" dirty="0">
+                          <a:solidFill>
+                            <a:srgbClr val="334155"/>
+                          </a:solidFill>
+                        </a:rPr>
+                        <a:t>32%</a:t>
+                      </a:r>
+                      <a:endParaRPr lang="en-US" sz="900" dirty="0"/>
+                    </a:p>
+                  </a:txBody>
+                  <a:tcPr marL="73152" marR="73152" marT="45720" marB="45720" anchor="ctr">
+                    <a:lnL w="9525" cap="flat" cmpd="sng" algn="ctr">
+                      <a:solidFill>
+                        <a:srgbClr val="E2E8F0"/>
+                      </a:solidFill>
+                      <a:prstDash val="solid"/>
+                      <a:round/>
+                      <a:headEnd type="none" w="med" len="med"/>
+                      <a:tailEnd type="none" w="med" len="med"/>
+                    </a:lnL>
+                    <a:lnR w="9525" cap="flat" cmpd="sng" algn="ctr">
+                      <a:solidFill>
+                        <a:srgbClr val="E2E8F0"/>
+                      </a:solidFill>
+                      <a:prstDash val="solid"/>
+                      <a:round/>
+                      <a:headEnd type="none" w="med" len="med"/>
+                      <a:tailEnd type="none" w="med" len="med"/>
+                    </a:lnR>
+                    <a:lnT w="9525" cap="flat" cmpd="sng" algn="ctr">
+                      <a:solidFill>
+                        <a:srgbClr val="E2E8F0"/>
+                      </a:solidFill>
+                      <a:prstDash val="solid"/>
+                      <a:round/>
+                      <a:headEnd type="none" w="med" len="med"/>
+                      <a:tailEnd type="none" w="med" len="med"/>
+                    </a:lnT>
+                    <a:lnB w="9525" cap="flat" cmpd="sng" algn="ctr">
+                      <a:solidFill>
+                        <a:srgbClr val="E2E8F0"/>
+                      </a:solidFill>
+                      <a:prstDash val="solid"/>
+                      <a:round/>
+                      <a:headEnd type="none" w="med" len="med"/>
+                      <a:tailEnd type="none" w="med" len="med"/>
+                    </a:lnB>
+                    <a:solidFill>
+                      <a:srgbClr val="F8FAFC"/>
+                    </a:solidFill>
+                  </a:tcPr>
+                </a:tc>
+                <a:tc>
+                  <a:txBody>
+                    <a:bodyPr/>
+                    <a:lstStyle/>
+                    <a:p>
+                      <a:pPr algn="l" indent="0" marL="0">
+                        <a:buNone/>
+                      </a:pPr>
+                      <a:r>
+                        <a:rPr lang="en-US" sz="900" dirty="0">
+                          <a:solidFill>
+                            <a:srgbClr val="334155"/>
+                          </a:solidFill>
+                        </a:rPr>
+                        <a:t>$5,823</a:t>
+                      </a:r>
+                      <a:endParaRPr lang="en-US" sz="900" dirty="0"/>
+                    </a:p>
+                  </a:txBody>
+                  <a:tcPr marL="73152" marR="73152" marT="45720" marB="45720" anchor="ctr">
+                    <a:lnL w="9525" cap="flat" cmpd="sng" algn="ctr">
+                      <a:solidFill>
+                        <a:srgbClr val="E2E8F0"/>
+                      </a:solidFill>
+                      <a:prstDash val="solid"/>
+                      <a:round/>
+                      <a:headEnd type="none" w="med" len="med"/>
+                      <a:tailEnd type="none" w="med" len="med"/>
+                    </a:lnL>
+                    <a:lnR w="9525" cap="flat" cmpd="sng" algn="ctr">
+                      <a:solidFill>
+                        <a:srgbClr val="E2E8F0"/>
+                      </a:solidFill>
+                      <a:prstDash val="solid"/>
+                      <a:round/>
+                      <a:headEnd type="none" w="med" len="med"/>
+                      <a:tailEnd type="none" w="med" len="med"/>
+                    </a:lnR>
+                    <a:lnT w="9525" cap="flat" cmpd="sng" algn="ctr">
+                      <a:solidFill>
+                        <a:srgbClr val="E2E8F0"/>
+                      </a:solidFill>
+                      <a:prstDash val="solid"/>
+                      <a:round/>
+                      <a:headEnd type="none" w="med" len="med"/>
+                      <a:tailEnd type="none" w="med" len="med"/>
+                    </a:lnT>
+                    <a:lnB w="9525" cap="flat" cmpd="sng" algn="ctr">
+                      <a:solidFill>
+                        <a:srgbClr val="E2E8F0"/>
+                      </a:solidFill>
+                      <a:prstDash val="solid"/>
+                      <a:round/>
+                      <a:headEnd type="none" w="med" len="med"/>
+                      <a:tailEnd type="none" w="med" len="med"/>
+                    </a:lnB>
+                    <a:solidFill>
+                      <a:srgbClr val="F8FAFC"/>
+                    </a:solidFill>
+                  </a:tcPr>
+                </a:tc>
+                <a:tc>
+                  <a:txBody>
+                    <a:bodyPr/>
+                    <a:lstStyle/>
+                    <a:p>
+                      <a:pPr algn="l" indent="0" marL="0">
+                        <a:buNone/>
+                      </a:pPr>
+                      <a:r>
+                        <a:rPr lang="en-US" sz="900" dirty="0">
+                          <a:solidFill>
+                            <a:srgbClr val="334155"/>
+                          </a:solidFill>
+                        </a:rPr>
+                        <a:t>未漲破，續留BTC</a:t>
+                      </a:r>
+                      <a:endParaRPr lang="en-US" sz="900" dirty="0"/>
+                    </a:p>
+                  </a:txBody>
+                  <a:tcPr marL="73152" marR="73152" marT="45720" marB="45720" anchor="ctr">
+                    <a:lnL w="9525" cap="flat" cmpd="sng" algn="ctr">
+                      <a:solidFill>
+                        <a:srgbClr val="E2E8F0"/>
+                      </a:solidFill>
+                      <a:prstDash val="solid"/>
+                      <a:round/>
+                      <a:headEnd type="none" w="med" len="med"/>
+                      <a:tailEnd type="none" w="med" len="med"/>
+                    </a:lnL>
+                    <a:lnR w="9525" cap="flat" cmpd="sng" algn="ctr">
+                      <a:solidFill>
+                        <a:srgbClr val="E2E8F0"/>
+                      </a:solidFill>
+                      <a:prstDash val="solid"/>
+                      <a:round/>
+                      <a:headEnd type="none" w="med" len="med"/>
+                      <a:tailEnd type="none" w="med" len="med"/>
+                    </a:lnR>
+                    <a:lnT w="9525" cap="flat" cmpd="sng" algn="ctr">
+                      <a:solidFill>
+                        <a:srgbClr val="E2E8F0"/>
+                      </a:solidFill>
+                      <a:prstDash val="solid"/>
+                      <a:round/>
+                      <a:headEnd type="none" w="med" len="med"/>
+                      <a:tailEnd type="none" w="med" len="med"/>
+                    </a:lnT>
+                    <a:lnB w="9525" cap="flat" cmpd="sng" algn="ctr">
+                      <a:solidFill>
+                        <a:srgbClr val="E2E8F0"/>
+                      </a:solidFill>
+                      <a:prstDash val="solid"/>
+                      <a:round/>
+                      <a:headEnd type="none" w="med" len="med"/>
+                      <a:tailEnd type="none" w="med" len="med"/>
+                    </a:lnB>
+                    <a:solidFill>
+                      <a:srgbClr val="F8FAFC"/>
+                    </a:solidFill>
+                  </a:tcPr>
+                </a:tc>
+              </a:tr>
+              <a:tr h="457200">
+                <a:tc>
+                  <a:txBody>
+                    <a:bodyPr/>
+                    <a:lstStyle/>
+                    <a:p>
+                      <a:pPr algn="l" indent="0" marL="0">
+                        <a:buNone/>
+                      </a:pPr>
+                      <a:r>
+                        <a:rPr lang="en-US" sz="900" dirty="0">
+                          <a:solidFill>
+                            <a:srgbClr val="334155"/>
+                          </a:solidFill>
+                        </a:rPr>
+                        <a:t>第3週 高賣</a:t>
+                      </a:r>
+                      <a:endParaRPr lang="en-US" sz="900" dirty="0"/>
+                    </a:p>
+                  </a:txBody>
+                  <a:tcPr marL="73152" marR="73152" marT="45720" marB="45720" anchor="ctr">
+                    <a:lnL w="9525" cap="flat" cmpd="sng" algn="ctr">
+                      <a:solidFill>
+                        <a:srgbClr val="E2E8F0"/>
+                      </a:solidFill>
+                      <a:prstDash val="solid"/>
+                      <a:round/>
+                      <a:headEnd type="none" w="med" len="med"/>
+                      <a:tailEnd type="none" w="med" len="med"/>
+                    </a:lnL>
+                    <a:lnR w="9525" cap="flat" cmpd="sng" algn="ctr">
+                      <a:solidFill>
+                        <a:srgbClr val="E2E8F0"/>
+                      </a:solidFill>
+                      <a:prstDash val="solid"/>
+                      <a:round/>
+                      <a:headEnd type="none" w="med" len="med"/>
+                      <a:tailEnd type="none" w="med" len="med"/>
+                    </a:lnR>
+                    <a:lnT w="9525" cap="flat" cmpd="sng" algn="ctr">
+                      <a:solidFill>
+                        <a:srgbClr val="E2E8F0"/>
+                      </a:solidFill>
+                      <a:prstDash val="solid"/>
+                      <a:round/>
+                      <a:headEnd type="none" w="med" len="med"/>
+                      <a:tailEnd type="none" w="med" len="med"/>
+                    </a:lnT>
+                    <a:lnB w="9525" cap="flat" cmpd="sng" algn="ctr">
+                      <a:solidFill>
+                        <a:srgbClr val="E2E8F0"/>
+                      </a:solidFill>
+                      <a:prstDash val="solid"/>
+                      <a:round/>
+                      <a:headEnd type="none" w="med" len="med"/>
+                      <a:tailEnd type="none" w="med" len="med"/>
+                    </a:lnB>
+                    <a:solidFill>
+                      <a:srgbClr val="FFFFFF"/>
+                    </a:solidFill>
+                  </a:tcPr>
+                </a:tc>
+                <a:tc>
+                  <a:txBody>
+                    <a:bodyPr/>
+                    <a:lstStyle/>
+                    <a:p>
+                      <a:pPr algn="l" indent="0" marL="0">
+                        <a:buNone/>
+                      </a:pPr>
+                      <a:r>
+                        <a:rPr lang="en-US" sz="900" dirty="0">
+                          <a:solidFill>
+                            <a:srgbClr val="334155"/>
+                          </a:solidFill>
+                        </a:rPr>
+                        <a:t>同一行使價 $55,900 滾動掛單</a:t>
+                      </a:r>
+                      <a:endParaRPr lang="en-US" sz="900" dirty="0"/>
+                    </a:p>
+                  </a:txBody>
+                  <a:tcPr marL="73152" marR="73152" marT="45720" marB="45720" anchor="ctr">
+                    <a:lnL w="9525" cap="flat" cmpd="sng" algn="ctr">
+                      <a:solidFill>
+                        <a:srgbClr val="E2E8F0"/>
+                      </a:solidFill>
+                      <a:prstDash val="solid"/>
+                      <a:round/>
+                      <a:headEnd type="none" w="med" len="med"/>
+                      <a:tailEnd type="none" w="med" len="med"/>
+                    </a:lnL>
+                    <a:lnR w="9525" cap="flat" cmpd="sng" algn="ctr">
+                      <a:solidFill>
+                        <a:srgbClr val="E2E8F0"/>
+                      </a:solidFill>
+                      <a:prstDash val="solid"/>
+                      <a:round/>
+                      <a:headEnd type="none" w="med" len="med"/>
+                      <a:tailEnd type="none" w="med" len="med"/>
+                    </a:lnR>
+                    <a:lnT w="9525" cap="flat" cmpd="sng" algn="ctr">
+                      <a:solidFill>
+                        <a:srgbClr val="E2E8F0"/>
+                      </a:solidFill>
+                      <a:prstDash val="solid"/>
+                      <a:round/>
+                      <a:headEnd type="none" w="med" len="med"/>
+                      <a:tailEnd type="none" w="med" len="med"/>
+                    </a:lnT>
+                    <a:lnB w="9525" cap="flat" cmpd="sng" algn="ctr">
+                      <a:solidFill>
+                        <a:srgbClr val="E2E8F0"/>
+                      </a:solidFill>
+                      <a:prstDash val="solid"/>
+                      <a:round/>
+                      <a:headEnd type="none" w="med" len="med"/>
+                      <a:tailEnd type="none" w="med" len="med"/>
+                    </a:lnB>
+                    <a:solidFill>
+                      <a:srgbClr val="FFFFFF"/>
+                    </a:solidFill>
+                  </a:tcPr>
+                </a:tc>
+                <a:tc>
+                  <a:txBody>
+                    <a:bodyPr/>
+                    <a:lstStyle/>
+                    <a:p>
+                      <a:pPr algn="l" indent="0" marL="0">
+                        <a:buNone/>
+                      </a:pPr>
+                      <a:r>
+                        <a:rPr lang="en-US" sz="900" dirty="0">
+                          <a:solidFill>
+                            <a:srgbClr val="334155"/>
+                          </a:solidFill>
+                        </a:rPr>
+                        <a:t>38%</a:t>
+                      </a:r>
+                      <a:endParaRPr lang="en-US" sz="900" dirty="0"/>
+                    </a:p>
+                  </a:txBody>
+                  <a:tcPr marL="73152" marR="73152" marT="45720" marB="45720" anchor="ctr">
+                    <a:lnL w="9525" cap="flat" cmpd="sng" algn="ctr">
+                      <a:solidFill>
+                        <a:srgbClr val="E2E8F0"/>
+                      </a:solidFill>
+                      <a:prstDash val="solid"/>
+                      <a:round/>
+                      <a:headEnd type="none" w="med" len="med"/>
+                      <a:tailEnd type="none" w="med" len="med"/>
+                    </a:lnL>
+                    <a:lnR w="9525" cap="flat" cmpd="sng" algn="ctr">
+                      <a:solidFill>
+                        <a:srgbClr val="E2E8F0"/>
+                      </a:solidFill>
+                      <a:prstDash val="solid"/>
+                      <a:round/>
+                      <a:headEnd type="none" w="med" len="med"/>
+                      <a:tailEnd type="none" w="med" len="med"/>
+                    </a:lnR>
+                    <a:lnT w="9525" cap="flat" cmpd="sng" algn="ctr">
+                      <a:solidFill>
+                        <a:srgbClr val="E2E8F0"/>
+                      </a:solidFill>
+                      <a:prstDash val="solid"/>
+                      <a:round/>
+                      <a:headEnd type="none" w="med" len="med"/>
+                      <a:tailEnd type="none" w="med" len="med"/>
+                    </a:lnT>
+                    <a:lnB w="9525" cap="flat" cmpd="sng" algn="ctr">
+                      <a:solidFill>
+                        <a:srgbClr val="E2E8F0"/>
+                      </a:solidFill>
+                      <a:prstDash val="solid"/>
+                      <a:round/>
+                      <a:headEnd type="none" w="med" len="med"/>
+                      <a:tailEnd type="none" w="med" len="med"/>
+                    </a:lnB>
+                    <a:solidFill>
+                      <a:srgbClr val="FFFFFF"/>
+                    </a:solidFill>
+                  </a:tcPr>
+                </a:tc>
+                <a:tc>
+                  <a:txBody>
+                    <a:bodyPr/>
+                    <a:lstStyle/>
+                    <a:p>
+                      <a:pPr algn="l" indent="0" marL="0">
+                        <a:buNone/>
+                      </a:pPr>
+                      <a:r>
+                        <a:rPr lang="en-US" sz="900" dirty="0">
+                          <a:solidFill>
+                            <a:srgbClr val="334155"/>
+                          </a:solidFill>
+                        </a:rPr>
+                        <a:t>$7,042</a:t>
+                      </a:r>
+                      <a:endParaRPr lang="en-US" sz="900" dirty="0"/>
+                    </a:p>
+                  </a:txBody>
+                  <a:tcPr marL="73152" marR="73152" marT="45720" marB="45720" anchor="ctr">
+                    <a:lnL w="9525" cap="flat" cmpd="sng" algn="ctr">
+                      <a:solidFill>
+                        <a:srgbClr val="E2E8F0"/>
+                      </a:solidFill>
+                      <a:prstDash val="solid"/>
+                      <a:round/>
+                      <a:headEnd type="none" w="med" len="med"/>
+                      <a:tailEnd type="none" w="med" len="med"/>
+                    </a:lnL>
+                    <a:lnR w="9525" cap="flat" cmpd="sng" algn="ctr">
+                      <a:solidFill>
+                        <a:srgbClr val="E2E8F0"/>
+                      </a:solidFill>
+                      <a:prstDash val="solid"/>
+                      <a:round/>
+                      <a:headEnd type="none" w="med" len="med"/>
+                      <a:tailEnd type="none" w="med" len="med"/>
+                    </a:lnR>
+                    <a:lnT w="9525" cap="flat" cmpd="sng" algn="ctr">
+                      <a:solidFill>
+                        <a:srgbClr val="E2E8F0"/>
+                      </a:solidFill>
+                      <a:prstDash val="solid"/>
+                      <a:round/>
+                      <a:headEnd type="none" w="med" len="med"/>
+                      <a:tailEnd type="none" w="med" len="med"/>
+                    </a:lnT>
+                    <a:lnB w="9525" cap="flat" cmpd="sng" algn="ctr">
+                      <a:solidFill>
+                        <a:srgbClr val="E2E8F0"/>
+                      </a:solidFill>
+                      <a:prstDash val="solid"/>
+                      <a:round/>
+                      <a:headEnd type="none" w="med" len="med"/>
+                      <a:tailEnd type="none" w="med" len="med"/>
+                    </a:lnB>
+                    <a:solidFill>
+                      <a:srgbClr val="FFFFFF"/>
+                    </a:solidFill>
+                  </a:tcPr>
+                </a:tc>
+                <a:tc>
+                  <a:txBody>
+                    <a:bodyPr/>
+                    <a:lstStyle/>
+                    <a:p>
+                      <a:pPr algn="l" indent="0" marL="0">
+                        <a:buNone/>
+                      </a:pPr>
+                      <a:r>
+                        <a:rPr lang="en-US" sz="900" dirty="0">
+                          <a:solidFill>
+                            <a:srgbClr val="334155"/>
+                          </a:solidFill>
+                        </a:rPr>
+                        <a:t>漲破，換回USDT</a:t>
+                      </a:r>
+                      <a:endParaRPr lang="en-US" sz="900" dirty="0"/>
+                    </a:p>
+                  </a:txBody>
+                  <a:tcPr marL="73152" marR="73152" marT="45720" marB="45720" anchor="ctr">
+                    <a:lnL w="9525" cap="flat" cmpd="sng" algn="ctr">
+                      <a:solidFill>
+                        <a:srgbClr val="E2E8F0"/>
+                      </a:solidFill>
+                      <a:prstDash val="solid"/>
+                      <a:round/>
+                      <a:headEnd type="none" w="med" len="med"/>
+                      <a:tailEnd type="none" w="med" len="med"/>
+                    </a:lnL>
+                    <a:lnR w="9525" cap="flat" cmpd="sng" algn="ctr">
+                      <a:solidFill>
+                        <a:srgbClr val="E2E8F0"/>
+                      </a:solidFill>
+                      <a:prstDash val="solid"/>
+                      <a:round/>
+                      <a:headEnd type="none" w="med" len="med"/>
+                      <a:tailEnd type="none" w="med" len="med"/>
+                    </a:lnR>
+                    <a:lnT w="9525" cap="flat" cmpd="sng" algn="ctr">
+                      <a:solidFill>
+                        <a:srgbClr val="E2E8F0"/>
+                      </a:solidFill>
+                      <a:prstDash val="solid"/>
+                      <a:round/>
+                      <a:headEnd type="none" w="med" len="med"/>
+                      <a:tailEnd type="none" w="med" len="med"/>
+                    </a:lnT>
+                    <a:lnB w="9525" cap="flat" cmpd="sng" algn="ctr">
+                      <a:solidFill>
+                        <a:srgbClr val="E2E8F0"/>
+                      </a:solidFill>
+                      <a:prstDash val="solid"/>
+                      <a:round/>
+                      <a:headEnd type="none" w="med" len="med"/>
+                      <a:tailEnd type="none" w="med" len="med"/>
+                    </a:lnB>
+                    <a:solidFill>
+                      <a:srgbClr val="FFFFFF"/>
+                    </a:solidFill>
+                  </a:tcPr>
+                </a:tc>
+              </a:tr>
+            </a:tbl>
+          </a:graphicData>
+        </a:graphic>
+      </p:graphicFrame>
+      <p:sp>
+        <p:nvSpPr>
+          <p:cNvPr id="8" name="Shape 5"/>
+          <p:cNvSpPr/>
+          <p:nvPr/>
+        </p:nvSpPr>
+        <p:spPr>
+          <a:xfrm>
+            <a:off x="548640" y="3611880"/>
+            <a:ext cx="3566160" cy="1417320"/>
+          </a:xfrm>
+          <a:prstGeom prst="roundRect">
+            <a:avLst>
+              <a:gd name="adj" fmla="val 5161"/>
+            </a:avLst>
+          </a:prstGeom>
+          <a:solidFill>
+            <a:srgbClr val="EFF6FF"/>
+          </a:solidFill>
+          <a:ln/>
+        </p:spPr>
+      </p:sp>
+      <p:sp>
+        <p:nvSpPr>
+          <p:cNvPr id="9" name="Text 6"/>
+          <p:cNvSpPr txBox="1"/>
+          <p:nvPr/>
+        </p:nvSpPr>
+        <p:spPr>
+          <a:xfrm>
+            <a:off x="685800" y="3721608"/>
+            <a:ext cx="3291840" cy="914400"/>
+          </a:xfrm>
+          <a:prstGeom prst="rect">
+            <a:avLst/>
+          </a:prstGeom>
+          <a:noFill/>
+          <a:ln/>
+        </p:spPr>
+        <p:txBody>
+          <a:bodyPr wrap="square" lIns="0" tIns="0" rIns="0" bIns="0" rtlCol="0" anchor="b"/>
+          <a:lstStyle/>
+          <a:p>
+            <a:pPr algn="ctr" indent="0" marL="0">
+              <a:buNone/>
+            </a:pPr>
+            <a:r>
+              <a:rPr lang="en-US" sz="2200" b="1" dirty="0">
+                <a:solidFill>
+                  <a:srgbClr val="16A34A"/>
+                </a:solidFill>
+                <a:latin typeface="Microsoft JhengHei" pitchFamily="34" charset="0"/>
+                <a:ea typeface="Microsoft JhengHei" pitchFamily="34" charset="-122"/>
+                <a:cs typeface="Microsoft JhengHei" pitchFamily="34" charset="-120"/>
+              </a:rPr>
+              <a:t>+2.05%（3週）</a:t>
+            </a:r>
+            <a:endParaRPr lang="en-US" sz="2200" dirty="0"/>
+          </a:p>
+        </p:txBody>
+      </p:sp>
+      <p:sp>
+        <p:nvSpPr>
+          <p:cNvPr id="10" name="Text 7"/>
+          <p:cNvSpPr txBox="1"/>
+          <p:nvPr/>
+        </p:nvSpPr>
+        <p:spPr>
+          <a:xfrm>
+            <a:off x="640080" y="4645152"/>
+            <a:ext cx="3383280" cy="320040"/>
+          </a:xfrm>
+          <a:prstGeom prst="rect">
+            <a:avLst/>
+          </a:prstGeom>
+          <a:noFill/>
+          <a:ln/>
+        </p:spPr>
+        <p:txBody>
+          <a:bodyPr wrap="square" lIns="0" tIns="0" rIns="0" bIns="0" rtlCol="0" anchor="t"/>
+          <a:lstStyle/>
+          <a:p>
+            <a:pPr algn="ctr" indent="0" marL="0">
+              <a:buNone/>
+            </a:pPr>
+            <a:r>
+              <a:rPr lang="en-US" sz="1050" dirty="0">
+                <a:solidFill>
+                  <a:srgbClr val="334155"/>
+                </a:solidFill>
+                <a:latin typeface="Microsoft JhengHei" pitchFamily="34" charset="0"/>
+                <a:ea typeface="Microsoft JhengHei" pitchFamily="34" charset="-122"/>
+                <a:cs typeface="Microsoft JhengHei" pitchFamily="34" charset="-120"/>
+              </a:rPr>
+              <a:t>順利路徑：本金全數取回＋累積權利金 $20,535</a:t>
+            </a:r>
+            <a:endParaRPr lang="en-US" sz="1050" dirty="0"/>
+          </a:p>
+        </p:txBody>
+      </p:sp>
+      <p:sp>
+        <p:nvSpPr>
+          <p:cNvPr id="11" name="Shape 8"/>
+          <p:cNvSpPr/>
+          <p:nvPr/>
+        </p:nvSpPr>
+        <p:spPr>
+          <a:xfrm>
+            <a:off x="4297680" y="3611880"/>
+            <a:ext cx="3566160" cy="1417320"/>
+          </a:xfrm>
+          <a:prstGeom prst="roundRect">
+            <a:avLst>
+              <a:gd name="adj" fmla="val 5161"/>
+            </a:avLst>
+          </a:prstGeom>
+          <a:solidFill>
+            <a:srgbClr val="F8FAFC"/>
+          </a:solidFill>
+          <a:ln/>
+        </p:spPr>
+      </p:sp>
+      <p:sp>
+        <p:nvSpPr>
+          <p:cNvPr id="12" name="Text 9"/>
+          <p:cNvSpPr txBox="1"/>
+          <p:nvPr/>
+        </p:nvSpPr>
+        <p:spPr>
+          <a:xfrm>
+            <a:off x="4434840" y="3721608"/>
+            <a:ext cx="3291840" cy="914400"/>
+          </a:xfrm>
+          <a:prstGeom prst="rect">
+            <a:avLst/>
+          </a:prstGeom>
+          <a:noFill/>
+          <a:ln/>
+        </p:spPr>
+        <p:txBody>
+          <a:bodyPr wrap="square" lIns="0" tIns="0" rIns="0" bIns="0" rtlCol="0" anchor="b"/>
+          <a:lstStyle/>
+          <a:p>
+            <a:pPr algn="ctr" indent="0" marL="0">
+              <a:buNone/>
+            </a:pPr>
+            <a:r>
+              <a:rPr lang="en-US" sz="2200" b="1" dirty="0">
+                <a:solidFill>
+                  <a:srgbClr val="B45309"/>
+                </a:solidFill>
+                <a:latin typeface="Microsoft JhengHei" pitchFamily="34" charset="0"/>
+                <a:ea typeface="Microsoft JhengHei" pitchFamily="34" charset="-122"/>
+                <a:cs typeface="Microsoft JhengHei" pitchFamily="34" charset="-120"/>
+              </a:rPr>
+              <a:t>-28.4%（未實現）</a:t>
+            </a:r>
+            <a:endParaRPr lang="en-US" sz="2200" dirty="0"/>
+          </a:p>
+        </p:txBody>
+      </p:sp>
+      <p:sp>
+        <p:nvSpPr>
+          <p:cNvPr id="13" name="Text 10"/>
+          <p:cNvSpPr txBox="1"/>
+          <p:nvPr/>
+        </p:nvSpPr>
+        <p:spPr>
+          <a:xfrm>
+            <a:off x="4389120" y="4645152"/>
+            <a:ext cx="3383280" cy="320040"/>
+          </a:xfrm>
+          <a:prstGeom prst="rect">
+            <a:avLst/>
+          </a:prstGeom>
+          <a:noFill/>
+          <a:ln/>
+        </p:spPr>
+        <p:txBody>
+          <a:bodyPr wrap="square" lIns="0" tIns="0" rIns="0" bIns="0" rtlCol="0" anchor="t"/>
+          <a:lstStyle/>
+          <a:p>
+            <a:pPr algn="ctr" indent="0" marL="0">
+              <a:buNone/>
+            </a:pPr>
+            <a:r>
+              <a:rPr lang="en-US" sz="1050" dirty="0">
+                <a:solidFill>
+                  <a:srgbClr val="334155"/>
+                </a:solidFill>
+                <a:latin typeface="Microsoft JhengHei" pitchFamily="34" charset="0"/>
+                <a:ea typeface="Microsoft JhengHei" pitchFamily="34" charset="-122"/>
+                <a:cs typeface="Microsoft JhengHei" pitchFamily="34" charset="-120"/>
+              </a:rPr>
+              <a:t>對照情境：10週價格未回升，帳面浮虧 $284,436</a:t>
+            </a:r>
+            <a:endParaRPr lang="en-US" sz="1050" dirty="0"/>
+          </a:p>
+        </p:txBody>
+      </p:sp>
+      <p:sp>
+        <p:nvSpPr>
+          <p:cNvPr id="14" name="Shape 11"/>
+          <p:cNvSpPr/>
+          <p:nvPr/>
+        </p:nvSpPr>
+        <p:spPr>
+          <a:xfrm>
+            <a:off x="8001000" y="3611880"/>
+            <a:ext cx="3639312" cy="1417320"/>
+          </a:xfrm>
+          <a:prstGeom prst="roundRect">
+            <a:avLst>
+              <a:gd name="adj" fmla="val 5161"/>
+            </a:avLst>
+          </a:prstGeom>
+          <a:solidFill>
+            <a:srgbClr val="F8FAFC"/>
+          </a:solidFill>
+          <a:ln w="9525">
+            <a:solidFill>
+              <a:srgbClr val="E2E8F0"/>
+            </a:solidFill>
+            <a:prstDash val="solid"/>
+          </a:ln>
+          <a:effectLst>
+            <a:outerShdw sx="100000" sy="100000" kx="0" ky="0" algn="bl" rotWithShape="0" blurRad="76200" dist="25400" dir="5400000">
+              <a:srgbClr val="1E293B">
+                <a:alpha val="8000"/>
+              </a:srgbClr>
+            </a:outerShdw>
+          </a:effectLst>
+        </p:spPr>
+      </p:sp>
+      <p:sp>
+        <p:nvSpPr>
+          <p:cNvPr id="15" name="Text 12"/>
+          <p:cNvSpPr txBox="1"/>
+          <p:nvPr/>
+        </p:nvSpPr>
+        <p:spPr>
+          <a:xfrm>
+            <a:off x="8202168" y="3758184"/>
+            <a:ext cx="3236976" cy="320040"/>
+          </a:xfrm>
+          <a:prstGeom prst="rect">
+            <a:avLst/>
+          </a:prstGeom>
+          <a:noFill/>
+          <a:ln/>
+        </p:spPr>
+        <p:txBody>
+          <a:bodyPr wrap="square" lIns="0" tIns="0" rIns="0" bIns="0" rtlCol="0" anchor="ctr"/>
+          <a:lstStyle/>
+          <a:p>
+            <a:pPr algn="l" indent="0" marL="0">
+              <a:buNone/>
+            </a:pPr>
+            <a:r>
+              <a:rPr lang="en-US" sz="1300" b="1" dirty="0">
+                <a:solidFill>
+                  <a:srgbClr val="0F172A"/>
+                </a:solidFill>
+                <a:latin typeface="Microsoft JhengHei" pitchFamily="34" charset="0"/>
+                <a:ea typeface="Microsoft JhengHei" pitchFamily="34" charset="-122"/>
+                <a:cs typeface="Microsoft JhengHei" pitchFamily="34" charset="-120"/>
+              </a:rPr>
+              <a:t>關鍵前提</a:t>
+            </a:r>
+            <a:endParaRPr lang="en-US" sz="1300" dirty="0"/>
+          </a:p>
+        </p:txBody>
+      </p:sp>
+      <p:sp>
+        <p:nvSpPr>
+          <p:cNvPr id="16" name="Text 13"/>
+          <p:cNvSpPr txBox="1"/>
+          <p:nvPr/>
+        </p:nvSpPr>
+        <p:spPr>
+          <a:xfrm>
+            <a:off x="8202168" y="4114800"/>
+            <a:ext cx="3236976" cy="758952"/>
+          </a:xfrm>
+          <a:prstGeom prst="rect">
+            <a:avLst/>
+          </a:prstGeom>
+          <a:noFill/>
+          <a:ln/>
+        </p:spPr>
+        <p:txBody>
+          <a:bodyPr wrap="square" lIns="0" tIns="0" rIns="0" bIns="0" rtlCol="0" anchor="t"/>
+          <a:lstStyle/>
+          <a:p>
+            <a:pPr algn="l" indent="0" marL="0">
+              <a:lnSpc>
+                <a:spcPct val="115000"/>
+              </a:lnSpc>
+              <a:buNone/>
+            </a:pPr>
+            <a:r>
+              <a:rPr lang="en-US" sz="1050" dirty="0">
+                <a:solidFill>
+                  <a:srgbClr val="334155"/>
+                </a:solidFill>
+                <a:latin typeface="Microsoft JhengHei" pitchFamily="34" charset="0"/>
+                <a:ea typeface="Microsoft JhengHei" pitchFamily="34" charset="-122"/>
+                <a:cs typeface="Microsoft JhengHei" pitchFamily="34" charset="-120"/>
+              </a:rPr>
+              <a:t>「不會虧錢」僅在最終價格確實回升至原行使價、且過程中未改用更低行使價時成立。</a:t>
+            </a:r>
+            <a:endParaRPr lang="en-US" sz="1050" dirty="0"/>
+          </a:p>
+        </p:txBody>
+      </p:sp>
+      <p:sp>
+        <p:nvSpPr>
+          <p:cNvPr id="17" name="Shape 14"/>
+          <p:cNvSpPr/>
+          <p:nvPr/>
+        </p:nvSpPr>
+        <p:spPr>
+          <a:xfrm>
+            <a:off x="548640" y="5212080"/>
+            <a:ext cx="11094415" cy="1097280"/>
+          </a:xfrm>
+          <a:prstGeom prst="roundRect">
+            <a:avLst>
+              <a:gd name="adj" fmla="val 6667"/>
+            </a:avLst>
+          </a:prstGeom>
+          <a:solidFill>
+            <a:srgbClr val="EFF6FF"/>
+          </a:solidFill>
+          <a:ln w="9525">
+            <a:solidFill>
+              <a:srgbClr val="E2E8F0"/>
+            </a:solidFill>
+            <a:prstDash val="solid"/>
+          </a:ln>
+          <a:effectLst>
+            <a:outerShdw sx="100000" sy="100000" kx="0" ky="0" algn="bl" rotWithShape="0" blurRad="76200" dist="25400" dir="5400000">
+              <a:srgbClr val="1E293B">
+                <a:alpha val="8000"/>
+              </a:srgbClr>
+            </a:outerShdw>
+          </a:effectLst>
+        </p:spPr>
+      </p:sp>
+      <p:sp>
+        <p:nvSpPr>
+          <p:cNvPr id="18" name="Text 15"/>
+          <p:cNvSpPr txBox="1"/>
+          <p:nvPr/>
+        </p:nvSpPr>
+        <p:spPr>
+          <a:xfrm>
+            <a:off x="749808" y="5358384"/>
+            <a:ext cx="10692079" cy="320040"/>
+          </a:xfrm>
+          <a:prstGeom prst="rect">
+            <a:avLst/>
+          </a:prstGeom>
+          <a:noFill/>
+          <a:ln/>
+        </p:spPr>
+        <p:txBody>
+          <a:bodyPr wrap="square" lIns="0" tIns="0" rIns="0" bIns="0" rtlCol="0" anchor="ctr"/>
+          <a:lstStyle/>
+          <a:p>
+            <a:pPr algn="l" indent="0" marL="0">
+              <a:buNone/>
+            </a:pPr>
+            <a:r>
+              <a:rPr lang="en-US" sz="1300" b="1" dirty="0">
+                <a:solidFill>
+                  <a:srgbClr val="0F172A"/>
+                </a:solidFill>
+                <a:latin typeface="Microsoft JhengHei" pitchFamily="34" charset="0"/>
+                <a:ea typeface="Microsoft JhengHei" pitchFamily="34" charset="-122"/>
+                <a:cs typeface="Microsoft JhengHei" pitchFamily="34" charset="-120"/>
+              </a:rPr>
+              <a:t>財務部應理解之三項限制</a:t>
+            </a:r>
+            <a:endParaRPr lang="en-US" sz="1300" dirty="0"/>
+          </a:p>
+        </p:txBody>
+      </p:sp>
+      <p:sp>
+        <p:nvSpPr>
+          <p:cNvPr id="19" name="Text 16"/>
+          <p:cNvSpPr txBox="1"/>
+          <p:nvPr/>
+        </p:nvSpPr>
+        <p:spPr>
+          <a:xfrm>
+            <a:off x="749808" y="5715000"/>
+            <a:ext cx="10692079" cy="438912"/>
+          </a:xfrm>
+          <a:prstGeom prst="rect">
+            <a:avLst/>
+          </a:prstGeom>
+          <a:noFill/>
+          <a:ln/>
+        </p:spPr>
+        <p:txBody>
+          <a:bodyPr wrap="square" lIns="0" tIns="0" rIns="0" bIns="0" rtlCol="0" anchor="t"/>
+          <a:lstStyle/>
+          <a:p>
+            <a:pPr algn="l" indent="0" marL="0">
+              <a:lnSpc>
+                <a:spcPct val="115000"/>
+              </a:lnSpc>
+              <a:buNone/>
+            </a:pPr>
+            <a:r>
+              <a:rPr lang="en-US" sz="1050" dirty="0">
+                <a:solidFill>
+                  <a:srgbClr val="334155"/>
+                </a:solidFill>
+                <a:latin typeface="Microsoft JhengHei" pitchFamily="34" charset="0"/>
+                <a:ea typeface="Microsoft JhengHei" pitchFamily="34" charset="-122"/>
+                <a:cs typeface="Microsoft JhengHei" pitchFamily="34" charset="-120"/>
+              </a:rPr>
+              <a:t>① 權利金隨套牢加深而遞減（越價外，權利金越低，非維持初始水準）｜② 價格回升時間無保證，資金於等待期間無法投入其他生息工具（機會成本）｜③ FVTPL會計原則下，未回升期間之BTC部位仍須逐期認列未實現跌價損失，非「零風險」</a:t>
+            </a:r>
+            <a:endParaRPr lang="en-US" sz="1050" dirty="0"/>
+          </a:p>
+        </p:txBody>
+      </p:sp>
+      <p:sp>
+        <p:nvSpPr>
+          <p:cNvPr id="20" name="Text 17"/>
+          <p:cNvSpPr txBox="1"/>
+          <p:nvPr/>
+        </p:nvSpPr>
+        <p:spPr>
+          <a:xfrm>
+            <a:off x="457200" y="6492240"/>
+            <a:ext cx="5486400" cy="274320"/>
+          </a:xfrm>
+          <a:prstGeom prst="rect">
+            <a:avLst/>
+          </a:prstGeom>
+          <a:noFill/>
+          <a:ln/>
+        </p:spPr>
+        <p:txBody>
+          <a:bodyPr wrap="square" lIns="0" tIns="0" rIns="0" bIns="0" rtlCol="0" anchor="ctr"/>
+          <a:lstStyle/>
+          <a:p>
+            <a:pPr algn="l" indent="0" marL="0">
+              <a:buNone/>
+            </a:pPr>
+            <a:r>
+              <a:rPr lang="en-US" sz="900" dirty="0">
+                <a:solidFill>
+                  <a:srgbClr val="64748B"/>
+                </a:solidFill>
+                <a:latin typeface="Microsoft JhengHei" pitchFamily="34" charset="0"/>
+                <a:ea typeface="Microsoft JhengHei" pitchFamily="34" charset="-122"/>
+                <a:cs typeface="Microsoft JhengHei" pitchFamily="34" charset="-120"/>
+              </a:rPr>
+              <a:t>TSGEX 資產管理部｜內部機密</a:t>
+            </a:r>
+            <a:endParaRPr lang="en-US" sz="900" dirty="0"/>
+          </a:p>
+        </p:txBody>
+      </p:sp>
+      <p:sp>
+        <p:nvSpPr>
+          <p:cNvPr id="21" name="Text 18"/>
+          <p:cNvSpPr txBox="1"/>
+          <p:nvPr/>
+        </p:nvSpPr>
+        <p:spPr>
+          <a:xfrm>
+            <a:off x="9905695" y="6492240"/>
+            <a:ext cx="1828800" cy="274320"/>
+          </a:xfrm>
+          <a:prstGeom prst="rect">
+            <a:avLst/>
+          </a:prstGeom>
+          <a:noFill/>
+          <a:ln/>
+        </p:spPr>
+        <p:txBody>
+          <a:bodyPr wrap="square" lIns="0" tIns="0" rIns="0" bIns="0" rtlCol="0" anchor="ctr"/>
+          <a:lstStyle/>
+          <a:p>
+            <a:pPr algn="r" indent="0" marL="0">
+              <a:buNone/>
+            </a:pPr>
+            <a:r>
+              <a:rPr lang="en-US" sz="900" dirty="0">
+                <a:solidFill>
+                  <a:srgbClr val="64748B"/>
+                </a:solidFill>
+                <a:latin typeface="Microsoft JhengHei" pitchFamily="34" charset="0"/>
+                <a:ea typeface="Microsoft JhengHei" pitchFamily="34" charset="-122"/>
+                <a:cs typeface="Microsoft JhengHei" pitchFamily="34" charset="-120"/>
+              </a:rPr>
+              <a:t>10 / 15</a:t>
+            </a:r>
+            <a:endParaRPr lang="en-US" sz="900" dirty="0"/>
+          </a:p>
+        </p:txBody>
+      </p:sp>
+    </p:spTree>
+  </p:cSld>
+  <p:clrMapOvr>
+    <a:masterClrMapping/>
+  </p:clrMapOvr>
+</p:sld>
+</file>
+
+<file path=ppt/slides/slide11.xml><?xml version="1.0" encoding="utf-8"?>
+<p:sld xmlns:a="http://schemas.openxmlformats.org/drawingml/2006/main" xmlns:r="http://schemas.openxmlformats.org/officeDocument/2006/relationships" xmlns:p="http://schemas.openxmlformats.org/presentationml/2006/main">
+  <p:cSld name="Slide 11">
+    <p:bg>
+      <p:bgPr>
+        <a:solidFill>
+          <a:srgbClr val="FFFFFF"/>
+        </a:solidFill>
+      </p:bgPr>
+    </p:bg>
+    <p:spTree>
+      <p:nvGrpSpPr>
+        <p:cNvPr id="1" name=""/>
+        <p:cNvGrpSpPr/>
+        <p:nvPr/>
+      </p:nvGrpSpPr>
+      <p:grpSpPr>
+        <a:xfrm>
+          <a:off x="0" y="0"/>
+          <a:ext cx="0" cy="0"/>
+          <a:chOff x="0" y="0"/>
+          <a:chExt cx="0" cy="0"/>
+        </a:xfrm>
+      </p:grpSpPr>
+      <p:sp>
+        <p:nvSpPr>
+          <p:cNvPr id="2" name="Text 0"/>
+          <p:cNvSpPr txBox="1"/>
+          <p:nvPr/>
+        </p:nvSpPr>
+        <p:spPr>
+          <a:xfrm>
+            <a:off x="548640" y="365760"/>
+            <a:ext cx="11094415" cy="640080"/>
+          </a:xfrm>
+          <a:prstGeom prst="rect">
+            <a:avLst/>
+          </a:prstGeom>
+          <a:noFill/>
+          <a:ln/>
+        </p:spPr>
+        <p:txBody>
+          <a:bodyPr wrap="square" lIns="0" tIns="0" rIns="0" bIns="0" rtlCol="0" anchor="ctr"/>
+          <a:lstStyle/>
+          <a:p>
+            <a:pPr algn="l" indent="0" marL="0">
+              <a:buNone/>
+            </a:pPr>
+            <a:r>
+              <a:rPr lang="en-US" sz="2800" b="1" dirty="0">
+                <a:solidFill>
+                  <a:srgbClr val="0F172A"/>
+                </a:solidFill>
+                <a:latin typeface="Microsoft JhengHei" pitchFamily="34" charset="0"/>
+                <a:ea typeface="Microsoft JhengHei" pitchFamily="34" charset="-122"/>
+                <a:cs typeface="Microsoft JhengHei" pitchFamily="34" charset="-120"/>
+              </a:rPr>
               <a:t>⑤ Binance 雙幣投資（Dual Investment）</a:t>
             </a:r>
             <a:endParaRPr lang="en-US" sz="2800" dirty="0"/>
@@ -3643,7 +5726,7 @@
       </p:sp>
       <p:graphicFrame>
         <p:nvGraphicFramePr>
-          <p:cNvPr id="11" name="Table 0"/>
+          <p:cNvPr id="12" name="Table 0"/>
           <p:cNvGraphicFramePr>
             <a:graphicFrameLocks noGrp="1"/>
           </p:cNvGraphicFramePr>
@@ -4999,7 +7082,7 @@
                 <a:ea typeface="Microsoft JhengHei" pitchFamily="34" charset="-122"/>
                 <a:cs typeface="Microsoft JhengHei" pitchFamily="34" charset="-120"/>
               </a:rPr>
-              <a:t>10 / 14</a:t>
+              <a:t>11 / 15</a:t>
             </a:r>
             <a:endParaRPr lang="en-US" sz="900" dirty="0"/>
           </a:p>
@@ -5013,9 +7096,9 @@
 </p:sld>
 </file>
 
-<file path=ppt/slides/slide11.xml><?xml version="1.0" encoding="utf-8"?>
+<file path=ppt/slides/slide12.xml><?xml version="1.0" encoding="utf-8"?>
 <p:sld xmlns:a="http://schemas.openxmlformats.org/drawingml/2006/main" xmlns:r="http://schemas.openxmlformats.org/officeDocument/2006/relationships" xmlns:p="http://schemas.openxmlformats.org/presentationml/2006/main">
-  <p:cSld name="Slide 11">
+  <p:cSld name="Slide 12">
     <p:bg>
       <p:bgPr>
         <a:solidFill>
@@ -5117,7 +7200,7 @@
       </p:sp>
       <p:graphicFrame>
         <p:nvGraphicFramePr>
-          <p:cNvPr id="12" name="Table 0"/>
+          <p:cNvPr id="13" name="Table 0"/>
           <p:cNvGraphicFramePr>
             <a:graphicFrameLocks noGrp="1"/>
           </p:cNvGraphicFramePr>
@@ -6941,7 +9024,7 @@
                 <a:ea typeface="Microsoft JhengHei" pitchFamily="34" charset="-122"/>
                 <a:cs typeface="Microsoft JhengHei" pitchFamily="34" charset="-120"/>
               </a:rPr>
-              <a:t>11 / 14</a:t>
+              <a:t>12 / 15</a:t>
             </a:r>
             <a:endParaRPr lang="en-US" sz="900" dirty="0"/>
           </a:p>
@@ -6955,9 +9038,9 @@
 </p:sld>
 </file>
 
-<file path=ppt/slides/slide12.xml><?xml version="1.0" encoding="utf-8"?>
+<file path=ppt/slides/slide13.xml><?xml version="1.0" encoding="utf-8"?>
 <p:sld xmlns:a="http://schemas.openxmlformats.org/drawingml/2006/main" xmlns:r="http://schemas.openxmlformats.org/officeDocument/2006/relationships" xmlns:p="http://schemas.openxmlformats.org/presentationml/2006/main">
-  <p:cSld name="Slide 12">
+  <p:cSld name="Slide 13">
     <p:bg>
       <p:bgPr>
         <a:solidFill>
@@ -7059,7 +9142,7 @@
       </p:sp>
       <p:graphicFrame>
         <p:nvGraphicFramePr>
-          <p:cNvPr id="13" name="Table 0"/>
+          <p:cNvPr id="14" name="Table 0"/>
           <p:cNvGraphicFramePr>
             <a:graphicFrameLocks noGrp="1"/>
           </p:cNvGraphicFramePr>
@@ -9739,7 +11822,7 @@
                 <a:ea typeface="Microsoft JhengHei" pitchFamily="34" charset="-122"/>
                 <a:cs typeface="Microsoft JhengHei" pitchFamily="34" charset="-120"/>
               </a:rPr>
-              <a:t>12 / 14</a:t>
+              <a:t>13 / 15</a:t>
             </a:r>
             <a:endParaRPr lang="en-US" sz="900" dirty="0"/>
           </a:p>
@@ -9753,9 +11836,9 @@
 </p:sld>
 </file>
 
-<file path=ppt/slides/slide13.xml><?xml version="1.0" encoding="utf-8"?>
+<file path=ppt/slides/slide14.xml><?xml version="1.0" encoding="utf-8"?>
 <p:sld xmlns:a="http://schemas.openxmlformats.org/drawingml/2006/main" xmlns:r="http://schemas.openxmlformats.org/officeDocument/2006/relationships" xmlns:p="http://schemas.openxmlformats.org/presentationml/2006/main">
-  <p:cSld name="Slide 13">
+  <p:cSld name="Slide 14">
     <p:bg>
       <p:bgPr>
         <a:solidFill>
@@ -9873,7 +11956,7 @@
       </p:graphicFrame>
       <p:graphicFrame>
         <p:nvGraphicFramePr>
-          <p:cNvPr id="14" name="Table 0"/>
+          <p:cNvPr id="15" name="Table 0"/>
           <p:cNvGraphicFramePr>
             <a:graphicFrameLocks noGrp="1"/>
           </p:cNvGraphicFramePr>
@@ -11885,7 +13968,7 @@
                 <a:ea typeface="Microsoft JhengHei" pitchFamily="34" charset="-122"/>
                 <a:cs typeface="Microsoft JhengHei" pitchFamily="34" charset="-120"/>
               </a:rPr>
-              <a:t>13 / 14</a:t>
+              <a:t>14 / 15</a:t>
             </a:r>
             <a:endParaRPr lang="en-US" sz="900" dirty="0"/>
           </a:p>
@@ -11899,9 +13982,9 @@
 </p:sld>
 </file>
 
-<file path=ppt/slides/slide14.xml><?xml version="1.0" encoding="utf-8"?>
+<file path=ppt/slides/slide15.xml><?xml version="1.0" encoding="utf-8"?>
 <p:sld xmlns:a="http://schemas.openxmlformats.org/drawingml/2006/main" xmlns:r="http://schemas.openxmlformats.org/officeDocument/2006/relationships" xmlns:p="http://schemas.openxmlformats.org/presentationml/2006/main">
-  <p:cSld name="Slide 14">
+  <p:cSld name="Slide 15">
     <p:bg>
       <p:bgPr>
         <a:solidFill>
@@ -13217,7 +15300,7 @@
                 <a:ea typeface="Microsoft JhengHei" pitchFamily="34" charset="-122"/>
                 <a:cs typeface="Microsoft JhengHei" pitchFamily="34" charset="-120"/>
               </a:rPr>
-              <a:t>14 / 14</a:t>
+              <a:t>15 / 15</a:t>
             </a:r>
             <a:endParaRPr lang="en-US" sz="900" dirty="0"/>
           </a:p>
@@ -15114,7 +17197,7 @@
                 <a:ea typeface="Microsoft JhengHei" pitchFamily="34" charset="-122"/>
                 <a:cs typeface="Microsoft JhengHei" pitchFamily="34" charset="-120"/>
               </a:rPr>
-              <a:t>2 / 14</a:t>
+              <a:t>2 / 15</a:t>
             </a:r>
             <a:endParaRPr lang="en-US" sz="900" dirty="0"/>
           </a:p>
@@ -15832,7 +17915,7 @@
                 <a:ea typeface="Microsoft JhengHei" pitchFamily="34" charset="-122"/>
                 <a:cs typeface="Microsoft JhengHei" pitchFamily="34" charset="-120"/>
               </a:rPr>
-              <a:t>3 / 14</a:t>
+              <a:t>3 / 15</a:t>
             </a:r>
             <a:endParaRPr lang="en-US" sz="900" dirty="0"/>
           </a:p>
@@ -16810,7 +18893,7 @@
                 <a:ea typeface="Microsoft JhengHei" pitchFamily="34" charset="-122"/>
                 <a:cs typeface="Microsoft JhengHei" pitchFamily="34" charset="-120"/>
               </a:rPr>
-              <a:t>4 / 14</a:t>
+              <a:t>4 / 15</a:t>
             </a:r>
             <a:endParaRPr lang="en-US" sz="900" dirty="0"/>
           </a:p>
@@ -18472,7 +20555,7 @@
                 <a:ea typeface="Microsoft JhengHei" pitchFamily="34" charset="-122"/>
                 <a:cs typeface="Microsoft JhengHei" pitchFamily="34" charset="-120"/>
               </a:rPr>
-              <a:t>5 / 14</a:t>
+              <a:t>5 / 15</a:t>
             </a:r>
             <a:endParaRPr lang="en-US" sz="900" dirty="0"/>
           </a:p>
@@ -20351,7 +22434,7 @@
                 <a:ea typeface="Microsoft JhengHei" pitchFamily="34" charset="-122"/>
                 <a:cs typeface="Microsoft JhengHei" pitchFamily="34" charset="-120"/>
               </a:rPr>
-              <a:t>6 / 14</a:t>
+              <a:t>6 / 15</a:t>
             </a:r>
             <a:endParaRPr lang="en-US" sz="900" dirty="0"/>
           </a:p>
@@ -21961,7 +24044,7 @@
                 <a:ea typeface="Microsoft JhengHei" pitchFamily="34" charset="-122"/>
                 <a:cs typeface="Microsoft JhengHei" pitchFamily="34" charset="-120"/>
               </a:rPr>
-              <a:t>7 / 14</a:t>
+              <a:t>7 / 15</a:t>
             </a:r>
             <a:endParaRPr lang="en-US" sz="900" dirty="0"/>
           </a:p>
@@ -22380,7 +24463,7 @@
                 <a:ea typeface="Microsoft JhengHei" pitchFamily="34" charset="-122"/>
                 <a:cs typeface="Microsoft JhengHei" pitchFamily="34" charset="-120"/>
               </a:rPr>
-              <a:t>8 / 14</a:t>
+              <a:t>8 / 15</a:t>
             </a:r>
             <a:endParaRPr lang="en-US" sz="900" dirty="0"/>
           </a:p>
@@ -23949,7 +26032,7 @@
                 <a:ea typeface="Microsoft JhengHei" pitchFamily="34" charset="-122"/>
                 <a:cs typeface="Microsoft JhengHei" pitchFamily="34" charset="-120"/>
               </a:rPr>
-              <a:t>9 / 14</a:t>
+              <a:t>9 / 15</a:t>
             </a:r>
             <a:endParaRPr lang="en-US" sz="900" dirty="0"/>
           </a:p>

--- a/reports/TSGEX_Five_Instrument_Yield_Optimization_Report.pptx
+++ b/reports/TSGEX_Five_Instrument_Yield_Optimization_Report.pptx
@@ -20,9 +20,10 @@
     <p:sldId id="268" r:id="rId14"/>
     <p:sldId id="269" r:id="rId15"/>
     <p:sldId id="270" r:id="rId16"/>
+    <p:sldId id="271" r:id="rId17"/>
   </p:sldIdLst>
   <p:notesMasterIdLst>
-    <p:notesMasterId r:id="rId17"/>
+    <p:notesMasterId r:id="rId18"/>
   </p:notesMasterIdLst>
   <p:sldSz cx="12192000" cy="6858000"/>
   <p:notesSz cx="6858000" cy="12192000"/>
@@ -1992,6 +1993,94 @@
 </p:notes>
 </file>
 
+<file path=ppt/notesSlides/notesSlide16.xml><?xml version="1.0" encoding="utf-8"?>
+<p:notes xmlns:a="http://schemas.openxmlformats.org/drawingml/2006/main" xmlns:r="http://schemas.openxmlformats.org/officeDocument/2006/relationships" xmlns:p="http://schemas.openxmlformats.org/presentationml/2006/main">
+  <p:cSld>
+    <p:spTree>
+      <p:nvGrpSpPr>
+        <p:cNvPr id="1" name=""/>
+        <p:cNvGrpSpPr/>
+        <p:nvPr/>
+      </p:nvGrpSpPr>
+      <p:grpSpPr>
+        <a:xfrm>
+          <a:off x="0" y="0"/>
+          <a:ext cx="0" cy="0"/>
+          <a:chOff x="0" y="0"/>
+          <a:chExt cx="0" cy="0"/>
+        </a:xfrm>
+      </p:grpSpPr>
+      <p:sp>
+        <p:nvSpPr>
+          <p:cNvPr id="2" name="Slide Image Placeholder 1"/>
+          <p:cNvSpPr>
+            <a:spLocks noGrp="1" noRot="1" noChangeAspect="1"/>
+          </p:cNvSpPr>
+          <p:nvPr>
+            <p:ph type="sldImg"/>
+          </p:nvPr>
+        </p:nvSpPr>
+        <p:spPr/>
+      </p:sp>
+      <p:sp>
+        <p:nvSpPr>
+          <p:cNvPr id="3" name="Notes Placeholder 2"/>
+          <p:cNvSpPr>
+            <a:spLocks noGrp="1"/>
+          </p:cNvSpPr>
+          <p:nvPr>
+            <p:ph type="body" idx="1"/>
+          </p:nvPr>
+        </p:nvSpPr>
+        <p:spPr/>
+        <p:txBody>
+          <a:bodyPr/>
+          <a:lstStyle/>
+          <a:p>
+            <a:r>
+              <a:rPr lang="en-US" dirty="0"/>
+              <a:t/>
+            </a:r>
+            <a:endParaRPr lang="en-US" dirty="0"/>
+          </a:p>
+        </p:txBody>
+      </p:sp>
+      <p:sp>
+        <p:nvSpPr>
+          <p:cNvPr id="4" name="Slide Number Placeholder 3"/>
+          <p:cNvSpPr>
+            <a:spLocks noGrp="1"/>
+          </p:cNvSpPr>
+          <p:nvPr>
+            <p:ph type="sldNum" sz="quarter" idx="10"/>
+          </p:nvPr>
+        </p:nvSpPr>
+        <p:spPr/>
+        <p:txBody>
+          <a:bodyPr/>
+          <a:lstStyle/>
+          <a:p>
+            <a:fld id="{F7021451-1387-4CA6-816F-3879F97B5CBC}" type="slidenum">
+              <a:rPr lang="en-US"/>
+              <a:t>16</a:t>
+            </a:fld>
+            <a:endParaRPr lang="en-US"/>
+          </a:p>
+        </p:txBody>
+      </p:sp>
+    </p:spTree>
+    <p:extLst>
+      <p:ext uri="{BB962C8B-B14F-4D97-AF65-F5344CB8AC3E}">
+        <p14:creationId xmlns:p14="http://schemas.microsoft.com/office/powerpoint/2010/main" val="1024086991"/>
+      </p:ext>
+    </p:extLst>
+  </p:cSld>
+  <p:clrMapOvr>
+    <a:masterClrMapping/>
+  </p:clrMapOvr>
+</p:notes>
+</file>
+
 <file path=ppt/notesSlides/notesSlide2.xml><?xml version="1.0" encoding="utf-8"?>
 <p:notes xmlns:a="http://schemas.openxmlformats.org/drawingml/2006/main" xmlns:r="http://schemas.openxmlformats.org/officeDocument/2006/relationships" xmlns:p="http://schemas.openxmlformats.org/presentationml/2006/main">
   <p:cSld>
@@ -5608,7 +5697,7 @@
                 <a:ea typeface="Microsoft JhengHei" pitchFamily="34" charset="-122"/>
                 <a:cs typeface="Microsoft JhengHei" pitchFamily="34" charset="-120"/>
               </a:rPr>
-              <a:t>10 / 15</a:t>
+              <a:t>10 / 16</a:t>
             </a:r>
             <a:endParaRPr lang="en-US" sz="900" dirty="0"/>
           </a:p>
@@ -5679,6 +5768,1665 @@
                 <a:ea typeface="Microsoft JhengHei" pitchFamily="34" charset="-122"/>
                 <a:cs typeface="Microsoft JhengHei" pitchFamily="34" charset="-120"/>
               </a:rPr>
+              <a:t>④ 全年模擬：兩種操作規則的年化報酬分布</a:t>
+            </a:r>
+            <a:endParaRPr lang="en-US" sz="2800" dirty="0"/>
+          </a:p>
+        </p:txBody>
+      </p:sp>
+      <p:sp>
+        <p:nvSpPr>
+          <p:cNvPr id="3" name="Text 1"/>
+          <p:cNvSpPr txBox="1"/>
+          <p:nvPr/>
+        </p:nvSpPr>
+        <p:spPr>
+          <a:xfrm>
+            <a:off x="548640" y="960120"/>
+            <a:ext cx="11094415" cy="365760"/>
+          </a:xfrm>
+          <a:prstGeom prst="rect">
+            <a:avLst/>
+          </a:prstGeom>
+          <a:noFill/>
+          <a:ln/>
+        </p:spPr>
+        <p:txBody>
+          <a:bodyPr wrap="square" lIns="0" tIns="0" rIns="0" bIns="0" rtlCol="0" anchor="ctr"/>
+          <a:lstStyle/>
+          <a:p>
+            <a:pPr algn="l" indent="0" marL="0">
+              <a:buNone/>
+            </a:pPr>
+            <a:r>
+              <a:rPr lang="en-US" sz="1300" dirty="0">
+                <a:solidFill>
+                  <a:srgbClr val="64748B"/>
+                </a:solidFill>
+                <a:latin typeface="Microsoft JhengHei" pitchFamily="34" charset="0"/>
+                <a:ea typeface="Microsoft JhengHei" pitchFamily="34" charset="-122"/>
+                <a:cs typeface="Microsoft JhengHei" pitchFamily="34" charset="-120"/>
+              </a:rPr>
+              <a:t>蒙地卡羅模擬（20,000條路徑）｜現貨$77,000｜年化波動55%｜7天一期，全年52期｜零方向性假設</a:t>
+            </a:r>
+            <a:endParaRPr lang="en-US" sz="1300" dirty="0"/>
+          </a:p>
+        </p:txBody>
+      </p:sp>
+      <p:graphicFrame>
+        <p:nvGraphicFramePr>
+          <p:cNvPr id="12" name="Table 0"/>
+          <p:cNvGraphicFramePr>
+            <a:graphicFrameLocks noGrp="1"/>
+          </p:cNvGraphicFramePr>
+          <p:nvPr>
+            <p:extLst>
+              <p:ext uri="{D42A27DB-BD31-4B8C-83A1-F6EECF244321}">
+                <p14:modId xmlns:p14="http://schemas.microsoft.com/office/powerpoint/2010/main" val="1579011935"/>
+              </p:ext>
+            </p:extLst>
+          </p:nvPr>
+        </p:nvGraphicFramePr>
+        <p:xfrm>
+          <a:off x="548640" y="1600200"/>
+          <a:ext cx="6675120" cy="914400"/>
+        </p:xfrm>
+        <a:graphic>
+          <a:graphicData uri="http://schemas.openxmlformats.org/drawingml/2006/table">
+            <a:tbl>
+              <a:tblPr/>
+              <a:tblGrid>
+                <a:gridCol w="2468880"/>
+                <a:gridCol w="2103120"/>
+                <a:gridCol w="2103120"/>
+              </a:tblGrid>
+              <a:tr h="502920">
+                <a:tc>
+                  <a:txBody>
+                    <a:bodyPr/>
+                    <a:lstStyle/>
+                    <a:p>
+                      <a:pPr algn="ctr" indent="0" marL="0">
+                        <a:buNone/>
+                      </a:pPr>
+                      <a:r>
+                        <a:rPr lang="en-US" sz="1000" b="1" dirty="0">
+                          <a:solidFill>
+                            <a:srgbClr val="FFFFFF"/>
+                          </a:solidFill>
+                        </a:rPr>
+                        <a:t>統計量</a:t>
+                      </a:r>
+                      <a:endParaRPr lang="en-US" sz="1000" dirty="0"/>
+                    </a:p>
+                  </a:txBody>
+                  <a:tcPr marL="73152" marR="73152" marT="45720" marB="45720" anchor="ctr">
+                    <a:lnL w="9525" cap="flat" cmpd="sng" algn="ctr">
+                      <a:solidFill>
+                        <a:srgbClr val="E2E8F0"/>
+                      </a:solidFill>
+                      <a:prstDash val="solid"/>
+                      <a:round/>
+                      <a:headEnd type="none" w="med" len="med"/>
+                      <a:tailEnd type="none" w="med" len="med"/>
+                    </a:lnL>
+                    <a:lnR w="9525" cap="flat" cmpd="sng" algn="ctr">
+                      <a:solidFill>
+                        <a:srgbClr val="E2E8F0"/>
+                      </a:solidFill>
+                      <a:prstDash val="solid"/>
+                      <a:round/>
+                      <a:headEnd type="none" w="med" len="med"/>
+                      <a:tailEnd type="none" w="med" len="med"/>
+                    </a:lnR>
+                    <a:lnT w="9525" cap="flat" cmpd="sng" algn="ctr">
+                      <a:solidFill>
+                        <a:srgbClr val="E2E8F0"/>
+                      </a:solidFill>
+                      <a:prstDash val="solid"/>
+                      <a:round/>
+                      <a:headEnd type="none" w="med" len="med"/>
+                      <a:tailEnd type="none" w="med" len="med"/>
+                    </a:lnT>
+                    <a:lnB w="9525" cap="flat" cmpd="sng" algn="ctr">
+                      <a:solidFill>
+                        <a:srgbClr val="E2E8F0"/>
+                      </a:solidFill>
+                      <a:prstDash val="solid"/>
+                      <a:round/>
+                      <a:headEnd type="none" w="med" len="med"/>
+                      <a:tailEnd type="none" w="med" len="med"/>
+                    </a:lnB>
+                    <a:solidFill>
+                      <a:srgbClr val="0F172A"/>
+                    </a:solidFill>
+                  </a:tcPr>
+                </a:tc>
+                <a:tc>
+                  <a:txBody>
+                    <a:bodyPr/>
+                    <a:lstStyle/>
+                    <a:p>
+                      <a:pPr algn="ctr" indent="0" marL="0">
+                        <a:buNone/>
+                      </a:pPr>
+                      <a:r>
+                        <a:rPr lang="en-US" sz="1000" b="1" dirty="0">
+                          <a:solidFill>
+                            <a:srgbClr val="FFFFFF"/>
+                          </a:solidFill>
+                        </a:rPr>
+                        <a:t>規則1：最高收益(ATM)</a:t>
+                      </a:r>
+                      <a:endParaRPr lang="en-US" sz="1000" dirty="0"/>
+                    </a:p>
+                  </a:txBody>
+                  <a:tcPr marL="73152" marR="73152" marT="45720" marB="45720" anchor="ctr">
+                    <a:lnL w="9525" cap="flat" cmpd="sng" algn="ctr">
+                      <a:solidFill>
+                        <a:srgbClr val="E2E8F0"/>
+                      </a:solidFill>
+                      <a:prstDash val="solid"/>
+                      <a:round/>
+                      <a:headEnd type="none" w="med" len="med"/>
+                      <a:tailEnd type="none" w="med" len="med"/>
+                    </a:lnL>
+                    <a:lnR w="9525" cap="flat" cmpd="sng" algn="ctr">
+                      <a:solidFill>
+                        <a:srgbClr val="E2E8F0"/>
+                      </a:solidFill>
+                      <a:prstDash val="solid"/>
+                      <a:round/>
+                      <a:headEnd type="none" w="med" len="med"/>
+                      <a:tailEnd type="none" w="med" len="med"/>
+                    </a:lnR>
+                    <a:lnT w="9525" cap="flat" cmpd="sng" algn="ctr">
+                      <a:solidFill>
+                        <a:srgbClr val="E2E8F0"/>
+                      </a:solidFill>
+                      <a:prstDash val="solid"/>
+                      <a:round/>
+                      <a:headEnd type="none" w="med" len="med"/>
+                      <a:tailEnd type="none" w="med" len="med"/>
+                    </a:lnT>
+                    <a:lnB w="9525" cap="flat" cmpd="sng" algn="ctr">
+                      <a:solidFill>
+                        <a:srgbClr val="E2E8F0"/>
+                      </a:solidFill>
+                      <a:prstDash val="solid"/>
+                      <a:round/>
+                      <a:headEnd type="none" w="med" len="med"/>
+                      <a:tailEnd type="none" w="med" len="med"/>
+                    </a:lnB>
+                    <a:solidFill>
+                      <a:srgbClr val="0F172A"/>
+                    </a:solidFill>
+                  </a:tcPr>
+                </a:tc>
+                <a:tc>
+                  <a:txBody>
+                    <a:bodyPr/>
+                    <a:lstStyle/>
+                    <a:p>
+                      <a:pPr algn="ctr" indent="0" marL="0">
+                        <a:buNone/>
+                      </a:pPr>
+                      <a:r>
+                        <a:rPr lang="en-US" sz="1000" b="1" dirty="0">
+                          <a:solidFill>
+                            <a:srgbClr val="FFFFFF"/>
+                          </a:solidFill>
+                        </a:rPr>
+                        <a:t>規則2：不被轉換(OTM緩衝)</a:t>
+                      </a:r>
+                      <a:endParaRPr lang="en-US" sz="1000" dirty="0"/>
+                    </a:p>
+                  </a:txBody>
+                  <a:tcPr marL="73152" marR="73152" marT="45720" marB="45720" anchor="ctr">
+                    <a:lnL w="9525" cap="flat" cmpd="sng" algn="ctr">
+                      <a:solidFill>
+                        <a:srgbClr val="E2E8F0"/>
+                      </a:solidFill>
+                      <a:prstDash val="solid"/>
+                      <a:round/>
+                      <a:headEnd type="none" w="med" len="med"/>
+                      <a:tailEnd type="none" w="med" len="med"/>
+                    </a:lnL>
+                    <a:lnR w="9525" cap="flat" cmpd="sng" algn="ctr">
+                      <a:solidFill>
+                        <a:srgbClr val="E2E8F0"/>
+                      </a:solidFill>
+                      <a:prstDash val="solid"/>
+                      <a:round/>
+                      <a:headEnd type="none" w="med" len="med"/>
+                      <a:tailEnd type="none" w="med" len="med"/>
+                    </a:lnR>
+                    <a:lnT w="9525" cap="flat" cmpd="sng" algn="ctr">
+                      <a:solidFill>
+                        <a:srgbClr val="E2E8F0"/>
+                      </a:solidFill>
+                      <a:prstDash val="solid"/>
+                      <a:round/>
+                      <a:headEnd type="none" w="med" len="med"/>
+                      <a:tailEnd type="none" w="med" len="med"/>
+                    </a:lnT>
+                    <a:lnB w="9525" cap="flat" cmpd="sng" algn="ctr">
+                      <a:solidFill>
+                        <a:srgbClr val="E2E8F0"/>
+                      </a:solidFill>
+                      <a:prstDash val="solid"/>
+                      <a:round/>
+                      <a:headEnd type="none" w="med" len="med"/>
+                      <a:tailEnd type="none" w="med" len="med"/>
+                    </a:lnB>
+                    <a:solidFill>
+                      <a:srgbClr val="0F172A"/>
+                    </a:solidFill>
+                  </a:tcPr>
+                </a:tc>
+              </a:tr>
+              <a:tr h="502920">
+                <a:tc>
+                  <a:txBody>
+                    <a:bodyPr/>
+                    <a:lstStyle/>
+                    <a:p>
+                      <a:pPr algn="l" indent="0" marL="0">
+                        <a:buNone/>
+                      </a:pPr>
+                      <a:r>
+                        <a:rPr lang="en-US" sz="1000" dirty="0">
+                          <a:solidFill>
+                            <a:srgbClr val="334155"/>
+                          </a:solidFill>
+                        </a:rPr>
+                        <a:t>平均年化報酬</a:t>
+                      </a:r>
+                      <a:endParaRPr lang="en-US" sz="1000" dirty="0"/>
+                    </a:p>
+                  </a:txBody>
+                  <a:tcPr marL="73152" marR="73152" marT="45720" marB="45720" anchor="ctr">
+                    <a:lnL w="9525" cap="flat" cmpd="sng" algn="ctr">
+                      <a:solidFill>
+                        <a:srgbClr val="E2E8F0"/>
+                      </a:solidFill>
+                      <a:prstDash val="solid"/>
+                      <a:round/>
+                      <a:headEnd type="none" w="med" len="med"/>
+                      <a:tailEnd type="none" w="med" len="med"/>
+                    </a:lnL>
+                    <a:lnR w="9525" cap="flat" cmpd="sng" algn="ctr">
+                      <a:solidFill>
+                        <a:srgbClr val="E2E8F0"/>
+                      </a:solidFill>
+                      <a:prstDash val="solid"/>
+                      <a:round/>
+                      <a:headEnd type="none" w="med" len="med"/>
+                      <a:tailEnd type="none" w="med" len="med"/>
+                    </a:lnR>
+                    <a:lnT w="9525" cap="flat" cmpd="sng" algn="ctr">
+                      <a:solidFill>
+                        <a:srgbClr val="E2E8F0"/>
+                      </a:solidFill>
+                      <a:prstDash val="solid"/>
+                      <a:round/>
+                      <a:headEnd type="none" w="med" len="med"/>
+                      <a:tailEnd type="none" w="med" len="med"/>
+                    </a:lnT>
+                    <a:lnB w="9525" cap="flat" cmpd="sng" algn="ctr">
+                      <a:solidFill>
+                        <a:srgbClr val="E2E8F0"/>
+                      </a:solidFill>
+                      <a:prstDash val="solid"/>
+                      <a:round/>
+                      <a:headEnd type="none" w="med" len="med"/>
+                      <a:tailEnd type="none" w="med" len="med"/>
+                    </a:lnB>
+                    <a:solidFill>
+                      <a:srgbClr val="FFFFFF"/>
+                    </a:solidFill>
+                  </a:tcPr>
+                </a:tc>
+                <a:tc>
+                  <a:txBody>
+                    <a:bodyPr/>
+                    <a:lstStyle/>
+                    <a:p>
+                      <a:pPr algn="l" indent="0" marL="0">
+                        <a:buNone/>
+                      </a:pPr>
+                      <a:r>
+                        <a:rPr lang="en-US" sz="1000" dirty="0">
+                          <a:solidFill>
+                            <a:srgbClr val="334155"/>
+                          </a:solidFill>
+                        </a:rPr>
+                        <a:t>-20.2%</a:t>
+                      </a:r>
+                      <a:endParaRPr lang="en-US" sz="1000" dirty="0"/>
+                    </a:p>
+                  </a:txBody>
+                  <a:tcPr marL="73152" marR="73152" marT="45720" marB="45720" anchor="ctr">
+                    <a:lnL w="9525" cap="flat" cmpd="sng" algn="ctr">
+                      <a:solidFill>
+                        <a:srgbClr val="E2E8F0"/>
+                      </a:solidFill>
+                      <a:prstDash val="solid"/>
+                      <a:round/>
+                      <a:headEnd type="none" w="med" len="med"/>
+                      <a:tailEnd type="none" w="med" len="med"/>
+                    </a:lnL>
+                    <a:lnR w="9525" cap="flat" cmpd="sng" algn="ctr">
+                      <a:solidFill>
+                        <a:srgbClr val="E2E8F0"/>
+                      </a:solidFill>
+                      <a:prstDash val="solid"/>
+                      <a:round/>
+                      <a:headEnd type="none" w="med" len="med"/>
+                      <a:tailEnd type="none" w="med" len="med"/>
+                    </a:lnR>
+                    <a:lnT w="9525" cap="flat" cmpd="sng" algn="ctr">
+                      <a:solidFill>
+                        <a:srgbClr val="E2E8F0"/>
+                      </a:solidFill>
+                      <a:prstDash val="solid"/>
+                      <a:round/>
+                      <a:headEnd type="none" w="med" len="med"/>
+                      <a:tailEnd type="none" w="med" len="med"/>
+                    </a:lnT>
+                    <a:lnB w="9525" cap="flat" cmpd="sng" algn="ctr">
+                      <a:solidFill>
+                        <a:srgbClr val="E2E8F0"/>
+                      </a:solidFill>
+                      <a:prstDash val="solid"/>
+                      <a:round/>
+                      <a:headEnd type="none" w="med" len="med"/>
+                      <a:tailEnd type="none" w="med" len="med"/>
+                    </a:lnB>
+                    <a:solidFill>
+                      <a:srgbClr val="FFFFFF"/>
+                    </a:solidFill>
+                  </a:tcPr>
+                </a:tc>
+                <a:tc>
+                  <a:txBody>
+                    <a:bodyPr/>
+                    <a:lstStyle/>
+                    <a:p>
+                      <a:pPr algn="l" indent="0" marL="0">
+                        <a:buNone/>
+                      </a:pPr>
+                      <a:r>
+                        <a:rPr lang="en-US" sz="1000" dirty="0">
+                          <a:solidFill>
+                            <a:srgbClr val="334155"/>
+                          </a:solidFill>
+                        </a:rPr>
+                        <a:t>-24.1%</a:t>
+                      </a:r>
+                      <a:endParaRPr lang="en-US" sz="1000" dirty="0"/>
+                    </a:p>
+                  </a:txBody>
+                  <a:tcPr marL="73152" marR="73152" marT="45720" marB="45720" anchor="ctr">
+                    <a:lnL w="9525" cap="flat" cmpd="sng" algn="ctr">
+                      <a:solidFill>
+                        <a:srgbClr val="E2E8F0"/>
+                      </a:solidFill>
+                      <a:prstDash val="solid"/>
+                      <a:round/>
+                      <a:headEnd type="none" w="med" len="med"/>
+                      <a:tailEnd type="none" w="med" len="med"/>
+                    </a:lnL>
+                    <a:lnR w="9525" cap="flat" cmpd="sng" algn="ctr">
+                      <a:solidFill>
+                        <a:srgbClr val="E2E8F0"/>
+                      </a:solidFill>
+                      <a:prstDash val="solid"/>
+                      <a:round/>
+                      <a:headEnd type="none" w="med" len="med"/>
+                      <a:tailEnd type="none" w="med" len="med"/>
+                    </a:lnR>
+                    <a:lnT w="9525" cap="flat" cmpd="sng" algn="ctr">
+                      <a:solidFill>
+                        <a:srgbClr val="E2E8F0"/>
+                      </a:solidFill>
+                      <a:prstDash val="solid"/>
+                      <a:round/>
+                      <a:headEnd type="none" w="med" len="med"/>
+                      <a:tailEnd type="none" w="med" len="med"/>
+                    </a:lnT>
+                    <a:lnB w="9525" cap="flat" cmpd="sng" algn="ctr">
+                      <a:solidFill>
+                        <a:srgbClr val="E2E8F0"/>
+                      </a:solidFill>
+                      <a:prstDash val="solid"/>
+                      <a:round/>
+                      <a:headEnd type="none" w="med" len="med"/>
+                      <a:tailEnd type="none" w="med" len="med"/>
+                    </a:lnB>
+                    <a:solidFill>
+                      <a:srgbClr val="FFFFFF"/>
+                    </a:solidFill>
+                  </a:tcPr>
+                </a:tc>
+              </a:tr>
+              <a:tr h="502920">
+                <a:tc>
+                  <a:txBody>
+                    <a:bodyPr/>
+                    <a:lstStyle/>
+                    <a:p>
+                      <a:pPr algn="l" indent="0" marL="0">
+                        <a:buNone/>
+                      </a:pPr>
+                      <a:r>
+                        <a:rPr lang="en-US" sz="1000" dirty="0">
+                          <a:solidFill>
+                            <a:srgbClr val="334155"/>
+                          </a:solidFill>
+                        </a:rPr>
+                        <a:t>中位數年化報酬</a:t>
+                      </a:r>
+                      <a:endParaRPr lang="en-US" sz="1000" dirty="0"/>
+                    </a:p>
+                  </a:txBody>
+                  <a:tcPr marL="73152" marR="73152" marT="45720" marB="45720" anchor="ctr">
+                    <a:lnL w="9525" cap="flat" cmpd="sng" algn="ctr">
+                      <a:solidFill>
+                        <a:srgbClr val="E2E8F0"/>
+                      </a:solidFill>
+                      <a:prstDash val="solid"/>
+                      <a:round/>
+                      <a:headEnd type="none" w="med" len="med"/>
+                      <a:tailEnd type="none" w="med" len="med"/>
+                    </a:lnL>
+                    <a:lnR w="9525" cap="flat" cmpd="sng" algn="ctr">
+                      <a:solidFill>
+                        <a:srgbClr val="E2E8F0"/>
+                      </a:solidFill>
+                      <a:prstDash val="solid"/>
+                      <a:round/>
+                      <a:headEnd type="none" w="med" len="med"/>
+                      <a:tailEnd type="none" w="med" len="med"/>
+                    </a:lnR>
+                    <a:lnT w="9525" cap="flat" cmpd="sng" algn="ctr">
+                      <a:solidFill>
+                        <a:srgbClr val="E2E8F0"/>
+                      </a:solidFill>
+                      <a:prstDash val="solid"/>
+                      <a:round/>
+                      <a:headEnd type="none" w="med" len="med"/>
+                      <a:tailEnd type="none" w="med" len="med"/>
+                    </a:lnT>
+                    <a:lnB w="9525" cap="flat" cmpd="sng" algn="ctr">
+                      <a:solidFill>
+                        <a:srgbClr val="E2E8F0"/>
+                      </a:solidFill>
+                      <a:prstDash val="solid"/>
+                      <a:round/>
+                      <a:headEnd type="none" w="med" len="med"/>
+                      <a:tailEnd type="none" w="med" len="med"/>
+                    </a:lnB>
+                    <a:solidFill>
+                      <a:srgbClr val="F8FAFC"/>
+                    </a:solidFill>
+                  </a:tcPr>
+                </a:tc>
+                <a:tc>
+                  <a:txBody>
+                    <a:bodyPr/>
+                    <a:lstStyle/>
+                    <a:p>
+                      <a:pPr algn="l" indent="0" marL="0">
+                        <a:buNone/>
+                      </a:pPr>
+                      <a:r>
+                        <a:rPr lang="en-US" sz="1000" dirty="0">
+                          <a:solidFill>
+                            <a:srgbClr val="334155"/>
+                          </a:solidFill>
+                        </a:rPr>
+                        <a:t>-22.9%</a:t>
+                      </a:r>
+                      <a:endParaRPr lang="en-US" sz="1000" dirty="0"/>
+                    </a:p>
+                  </a:txBody>
+                  <a:tcPr marL="73152" marR="73152" marT="45720" marB="45720" anchor="ctr">
+                    <a:lnL w="9525" cap="flat" cmpd="sng" algn="ctr">
+                      <a:solidFill>
+                        <a:srgbClr val="E2E8F0"/>
+                      </a:solidFill>
+                      <a:prstDash val="solid"/>
+                      <a:round/>
+                      <a:headEnd type="none" w="med" len="med"/>
+                      <a:tailEnd type="none" w="med" len="med"/>
+                    </a:lnL>
+                    <a:lnR w="9525" cap="flat" cmpd="sng" algn="ctr">
+                      <a:solidFill>
+                        <a:srgbClr val="E2E8F0"/>
+                      </a:solidFill>
+                      <a:prstDash val="solid"/>
+                      <a:round/>
+                      <a:headEnd type="none" w="med" len="med"/>
+                      <a:tailEnd type="none" w="med" len="med"/>
+                    </a:lnR>
+                    <a:lnT w="9525" cap="flat" cmpd="sng" algn="ctr">
+                      <a:solidFill>
+                        <a:srgbClr val="E2E8F0"/>
+                      </a:solidFill>
+                      <a:prstDash val="solid"/>
+                      <a:round/>
+                      <a:headEnd type="none" w="med" len="med"/>
+                      <a:tailEnd type="none" w="med" len="med"/>
+                    </a:lnT>
+                    <a:lnB w="9525" cap="flat" cmpd="sng" algn="ctr">
+                      <a:solidFill>
+                        <a:srgbClr val="E2E8F0"/>
+                      </a:solidFill>
+                      <a:prstDash val="solid"/>
+                      <a:round/>
+                      <a:headEnd type="none" w="med" len="med"/>
+                      <a:tailEnd type="none" w="med" len="med"/>
+                    </a:lnB>
+                    <a:solidFill>
+                      <a:srgbClr val="F8FAFC"/>
+                    </a:solidFill>
+                  </a:tcPr>
+                </a:tc>
+                <a:tc>
+                  <a:txBody>
+                    <a:bodyPr/>
+                    <a:lstStyle/>
+                    <a:p>
+                      <a:pPr algn="l" indent="0" marL="0">
+                        <a:buNone/>
+                      </a:pPr>
+                      <a:r>
+                        <a:rPr lang="en-US" sz="1000" dirty="0">
+                          <a:solidFill>
+                            <a:srgbClr val="334155"/>
+                          </a:solidFill>
+                        </a:rPr>
+                        <a:t>-24.8%</a:t>
+                      </a:r>
+                      <a:endParaRPr lang="en-US" sz="1000" dirty="0"/>
+                    </a:p>
+                  </a:txBody>
+                  <a:tcPr marL="73152" marR="73152" marT="45720" marB="45720" anchor="ctr">
+                    <a:lnL w="9525" cap="flat" cmpd="sng" algn="ctr">
+                      <a:solidFill>
+                        <a:srgbClr val="E2E8F0"/>
+                      </a:solidFill>
+                      <a:prstDash val="solid"/>
+                      <a:round/>
+                      <a:headEnd type="none" w="med" len="med"/>
+                      <a:tailEnd type="none" w="med" len="med"/>
+                    </a:lnL>
+                    <a:lnR w="9525" cap="flat" cmpd="sng" algn="ctr">
+                      <a:solidFill>
+                        <a:srgbClr val="E2E8F0"/>
+                      </a:solidFill>
+                      <a:prstDash val="solid"/>
+                      <a:round/>
+                      <a:headEnd type="none" w="med" len="med"/>
+                      <a:tailEnd type="none" w="med" len="med"/>
+                    </a:lnR>
+                    <a:lnT w="9525" cap="flat" cmpd="sng" algn="ctr">
+                      <a:solidFill>
+                        <a:srgbClr val="E2E8F0"/>
+                      </a:solidFill>
+                      <a:prstDash val="solid"/>
+                      <a:round/>
+                      <a:headEnd type="none" w="med" len="med"/>
+                      <a:tailEnd type="none" w="med" len="med"/>
+                    </a:lnT>
+                    <a:lnB w="9525" cap="flat" cmpd="sng" algn="ctr">
+                      <a:solidFill>
+                        <a:srgbClr val="E2E8F0"/>
+                      </a:solidFill>
+                      <a:prstDash val="solid"/>
+                      <a:round/>
+                      <a:headEnd type="none" w="med" len="med"/>
+                      <a:tailEnd type="none" w="med" len="med"/>
+                    </a:lnB>
+                    <a:solidFill>
+                      <a:srgbClr val="F8FAFC"/>
+                    </a:solidFill>
+                  </a:tcPr>
+                </a:tc>
+              </a:tr>
+              <a:tr h="502920">
+                <a:tc>
+                  <a:txBody>
+                    <a:bodyPr/>
+                    <a:lstStyle/>
+                    <a:p>
+                      <a:pPr algn="l" indent="0" marL="0">
+                        <a:buNone/>
+                      </a:pPr>
+                      <a:r>
+                        <a:rPr lang="en-US" sz="1000" dirty="0">
+                          <a:solidFill>
+                            <a:srgbClr val="334155"/>
+                          </a:solidFill>
+                        </a:rPr>
+                        <a:t>P5（較差路徑）／P95（較佳路徑）</a:t>
+                      </a:r>
+                      <a:endParaRPr lang="en-US" sz="1000" dirty="0"/>
+                    </a:p>
+                  </a:txBody>
+                  <a:tcPr marL="73152" marR="73152" marT="45720" marB="45720" anchor="ctr">
+                    <a:lnL w="9525" cap="flat" cmpd="sng" algn="ctr">
+                      <a:solidFill>
+                        <a:srgbClr val="E2E8F0"/>
+                      </a:solidFill>
+                      <a:prstDash val="solid"/>
+                      <a:round/>
+                      <a:headEnd type="none" w="med" len="med"/>
+                      <a:tailEnd type="none" w="med" len="med"/>
+                    </a:lnL>
+                    <a:lnR w="9525" cap="flat" cmpd="sng" algn="ctr">
+                      <a:solidFill>
+                        <a:srgbClr val="E2E8F0"/>
+                      </a:solidFill>
+                      <a:prstDash val="solid"/>
+                      <a:round/>
+                      <a:headEnd type="none" w="med" len="med"/>
+                      <a:tailEnd type="none" w="med" len="med"/>
+                    </a:lnR>
+                    <a:lnT w="9525" cap="flat" cmpd="sng" algn="ctr">
+                      <a:solidFill>
+                        <a:srgbClr val="E2E8F0"/>
+                      </a:solidFill>
+                      <a:prstDash val="solid"/>
+                      <a:round/>
+                      <a:headEnd type="none" w="med" len="med"/>
+                      <a:tailEnd type="none" w="med" len="med"/>
+                    </a:lnT>
+                    <a:lnB w="9525" cap="flat" cmpd="sng" algn="ctr">
+                      <a:solidFill>
+                        <a:srgbClr val="E2E8F0"/>
+                      </a:solidFill>
+                      <a:prstDash val="solid"/>
+                      <a:round/>
+                      <a:headEnd type="none" w="med" len="med"/>
+                      <a:tailEnd type="none" w="med" len="med"/>
+                    </a:lnB>
+                    <a:solidFill>
+                      <a:srgbClr val="FFFFFF"/>
+                    </a:solidFill>
+                  </a:tcPr>
+                </a:tc>
+                <a:tc>
+                  <a:txBody>
+                    <a:bodyPr/>
+                    <a:lstStyle/>
+                    <a:p>
+                      <a:pPr algn="l" indent="0" marL="0">
+                        <a:buNone/>
+                      </a:pPr>
+                      <a:r>
+                        <a:rPr lang="en-US" sz="1000" dirty="0">
+                          <a:solidFill>
+                            <a:srgbClr val="334155"/>
+                          </a:solidFill>
+                        </a:rPr>
+                        <a:t>-66.6% ／ +33.9%</a:t>
+                      </a:r>
+                      <a:endParaRPr lang="en-US" sz="1000" dirty="0"/>
+                    </a:p>
+                  </a:txBody>
+                  <a:tcPr marL="73152" marR="73152" marT="45720" marB="45720" anchor="ctr">
+                    <a:lnL w="9525" cap="flat" cmpd="sng" algn="ctr">
+                      <a:solidFill>
+                        <a:srgbClr val="E2E8F0"/>
+                      </a:solidFill>
+                      <a:prstDash val="solid"/>
+                      <a:round/>
+                      <a:headEnd type="none" w="med" len="med"/>
+                      <a:tailEnd type="none" w="med" len="med"/>
+                    </a:lnL>
+                    <a:lnR w="9525" cap="flat" cmpd="sng" algn="ctr">
+                      <a:solidFill>
+                        <a:srgbClr val="E2E8F0"/>
+                      </a:solidFill>
+                      <a:prstDash val="solid"/>
+                      <a:round/>
+                      <a:headEnd type="none" w="med" len="med"/>
+                      <a:tailEnd type="none" w="med" len="med"/>
+                    </a:lnR>
+                    <a:lnT w="9525" cap="flat" cmpd="sng" algn="ctr">
+                      <a:solidFill>
+                        <a:srgbClr val="E2E8F0"/>
+                      </a:solidFill>
+                      <a:prstDash val="solid"/>
+                      <a:round/>
+                      <a:headEnd type="none" w="med" len="med"/>
+                      <a:tailEnd type="none" w="med" len="med"/>
+                    </a:lnT>
+                    <a:lnB w="9525" cap="flat" cmpd="sng" algn="ctr">
+                      <a:solidFill>
+                        <a:srgbClr val="E2E8F0"/>
+                      </a:solidFill>
+                      <a:prstDash val="solid"/>
+                      <a:round/>
+                      <a:headEnd type="none" w="med" len="med"/>
+                      <a:tailEnd type="none" w="med" len="med"/>
+                    </a:lnB>
+                    <a:solidFill>
+                      <a:srgbClr val="FFFFFF"/>
+                    </a:solidFill>
+                  </a:tcPr>
+                </a:tc>
+                <a:tc>
+                  <a:txBody>
+                    <a:bodyPr/>
+                    <a:lstStyle/>
+                    <a:p>
+                      <a:pPr algn="l" indent="0" marL="0">
+                        <a:buNone/>
+                      </a:pPr>
+                      <a:r>
+                        <a:rPr lang="en-US" sz="1000" dirty="0">
+                          <a:solidFill>
+                            <a:srgbClr val="334155"/>
+                          </a:solidFill>
+                        </a:rPr>
+                        <a:t>-66.3% ／ +19.2%</a:t>
+                      </a:r>
+                      <a:endParaRPr lang="en-US" sz="1000" dirty="0"/>
+                    </a:p>
+                  </a:txBody>
+                  <a:tcPr marL="73152" marR="73152" marT="45720" marB="45720" anchor="ctr">
+                    <a:lnL w="9525" cap="flat" cmpd="sng" algn="ctr">
+                      <a:solidFill>
+                        <a:srgbClr val="E2E8F0"/>
+                      </a:solidFill>
+                      <a:prstDash val="solid"/>
+                      <a:round/>
+                      <a:headEnd type="none" w="med" len="med"/>
+                      <a:tailEnd type="none" w="med" len="med"/>
+                    </a:lnL>
+                    <a:lnR w="9525" cap="flat" cmpd="sng" algn="ctr">
+                      <a:solidFill>
+                        <a:srgbClr val="E2E8F0"/>
+                      </a:solidFill>
+                      <a:prstDash val="solid"/>
+                      <a:round/>
+                      <a:headEnd type="none" w="med" len="med"/>
+                      <a:tailEnd type="none" w="med" len="med"/>
+                    </a:lnR>
+                    <a:lnT w="9525" cap="flat" cmpd="sng" algn="ctr">
+                      <a:solidFill>
+                        <a:srgbClr val="E2E8F0"/>
+                      </a:solidFill>
+                      <a:prstDash val="solid"/>
+                      <a:round/>
+                      <a:headEnd type="none" w="med" len="med"/>
+                      <a:tailEnd type="none" w="med" len="med"/>
+                    </a:lnT>
+                    <a:lnB w="9525" cap="flat" cmpd="sng" algn="ctr">
+                      <a:solidFill>
+                        <a:srgbClr val="E2E8F0"/>
+                      </a:solidFill>
+                      <a:prstDash val="solid"/>
+                      <a:round/>
+                      <a:headEnd type="none" w="med" len="med"/>
+                      <a:tailEnd type="none" w="med" len="med"/>
+                    </a:lnB>
+                    <a:solidFill>
+                      <a:srgbClr val="FFFFFF"/>
+                    </a:solidFill>
+                  </a:tcPr>
+                </a:tc>
+              </a:tr>
+              <a:tr h="502920">
+                <a:tc>
+                  <a:txBody>
+                    <a:bodyPr/>
+                    <a:lstStyle/>
+                    <a:p>
+                      <a:pPr algn="l" indent="0" marL="0">
+                        <a:buNone/>
+                      </a:pPr>
+                      <a:r>
+                        <a:rPr lang="en-US" sz="1000" dirty="0">
+                          <a:solidFill>
+                            <a:srgbClr val="334155"/>
+                          </a:solidFill>
+                        </a:rPr>
+                        <a:t>全年虧損機率</a:t>
+                      </a:r>
+                      <a:endParaRPr lang="en-US" sz="1000" dirty="0"/>
+                    </a:p>
+                  </a:txBody>
+                  <a:tcPr marL="73152" marR="73152" marT="45720" marB="45720" anchor="ctr">
+                    <a:lnL w="9525" cap="flat" cmpd="sng" algn="ctr">
+                      <a:solidFill>
+                        <a:srgbClr val="E2E8F0"/>
+                      </a:solidFill>
+                      <a:prstDash val="solid"/>
+                      <a:round/>
+                      <a:headEnd type="none" w="med" len="med"/>
+                      <a:tailEnd type="none" w="med" len="med"/>
+                    </a:lnL>
+                    <a:lnR w="9525" cap="flat" cmpd="sng" algn="ctr">
+                      <a:solidFill>
+                        <a:srgbClr val="E2E8F0"/>
+                      </a:solidFill>
+                      <a:prstDash val="solid"/>
+                      <a:round/>
+                      <a:headEnd type="none" w="med" len="med"/>
+                      <a:tailEnd type="none" w="med" len="med"/>
+                    </a:lnR>
+                    <a:lnT w="9525" cap="flat" cmpd="sng" algn="ctr">
+                      <a:solidFill>
+                        <a:srgbClr val="E2E8F0"/>
+                      </a:solidFill>
+                      <a:prstDash val="solid"/>
+                      <a:round/>
+                      <a:headEnd type="none" w="med" len="med"/>
+                      <a:tailEnd type="none" w="med" len="med"/>
+                    </a:lnT>
+                    <a:lnB w="9525" cap="flat" cmpd="sng" algn="ctr">
+                      <a:solidFill>
+                        <a:srgbClr val="E2E8F0"/>
+                      </a:solidFill>
+                      <a:prstDash val="solid"/>
+                      <a:round/>
+                      <a:headEnd type="none" w="med" len="med"/>
+                      <a:tailEnd type="none" w="med" len="med"/>
+                    </a:lnB>
+                    <a:solidFill>
+                      <a:srgbClr val="F8FAFC"/>
+                    </a:solidFill>
+                  </a:tcPr>
+                </a:tc>
+                <a:tc>
+                  <a:txBody>
+                    <a:bodyPr/>
+                    <a:lstStyle/>
+                    <a:p>
+                      <a:pPr algn="l" indent="0" marL="0">
+                        <a:buNone/>
+                      </a:pPr>
+                      <a:r>
+                        <a:rPr lang="en-US" sz="1000" dirty="0">
+                          <a:solidFill>
+                            <a:srgbClr val="334155"/>
+                          </a:solidFill>
+                        </a:rPr>
+                        <a:t>73.4%</a:t>
+                      </a:r>
+                      <a:endParaRPr lang="en-US" sz="1000" dirty="0"/>
+                    </a:p>
+                  </a:txBody>
+                  <a:tcPr marL="73152" marR="73152" marT="45720" marB="45720" anchor="ctr">
+                    <a:lnL w="9525" cap="flat" cmpd="sng" algn="ctr">
+                      <a:solidFill>
+                        <a:srgbClr val="E2E8F0"/>
+                      </a:solidFill>
+                      <a:prstDash val="solid"/>
+                      <a:round/>
+                      <a:headEnd type="none" w="med" len="med"/>
+                      <a:tailEnd type="none" w="med" len="med"/>
+                    </a:lnL>
+                    <a:lnR w="9525" cap="flat" cmpd="sng" algn="ctr">
+                      <a:solidFill>
+                        <a:srgbClr val="E2E8F0"/>
+                      </a:solidFill>
+                      <a:prstDash val="solid"/>
+                      <a:round/>
+                      <a:headEnd type="none" w="med" len="med"/>
+                      <a:tailEnd type="none" w="med" len="med"/>
+                    </a:lnR>
+                    <a:lnT w="9525" cap="flat" cmpd="sng" algn="ctr">
+                      <a:solidFill>
+                        <a:srgbClr val="E2E8F0"/>
+                      </a:solidFill>
+                      <a:prstDash val="solid"/>
+                      <a:round/>
+                      <a:headEnd type="none" w="med" len="med"/>
+                      <a:tailEnd type="none" w="med" len="med"/>
+                    </a:lnT>
+                    <a:lnB w="9525" cap="flat" cmpd="sng" algn="ctr">
+                      <a:solidFill>
+                        <a:srgbClr val="E2E8F0"/>
+                      </a:solidFill>
+                      <a:prstDash val="solid"/>
+                      <a:round/>
+                      <a:headEnd type="none" w="med" len="med"/>
+                      <a:tailEnd type="none" w="med" len="med"/>
+                    </a:lnB>
+                    <a:solidFill>
+                      <a:srgbClr val="F8FAFC"/>
+                    </a:solidFill>
+                  </a:tcPr>
+                </a:tc>
+                <a:tc>
+                  <a:txBody>
+                    <a:bodyPr/>
+                    <a:lstStyle/>
+                    <a:p>
+                      <a:pPr algn="l" indent="0" marL="0">
+                        <a:buNone/>
+                      </a:pPr>
+                      <a:r>
+                        <a:rPr lang="en-US" sz="1000" dirty="0">
+                          <a:solidFill>
+                            <a:srgbClr val="334155"/>
+                          </a:solidFill>
+                        </a:rPr>
+                        <a:t>77.5%</a:t>
+                      </a:r>
+                      <a:endParaRPr lang="en-US" sz="1000" dirty="0"/>
+                    </a:p>
+                  </a:txBody>
+                  <a:tcPr marL="73152" marR="73152" marT="45720" marB="45720" anchor="ctr">
+                    <a:lnL w="9525" cap="flat" cmpd="sng" algn="ctr">
+                      <a:solidFill>
+                        <a:srgbClr val="E2E8F0"/>
+                      </a:solidFill>
+                      <a:prstDash val="solid"/>
+                      <a:round/>
+                      <a:headEnd type="none" w="med" len="med"/>
+                      <a:tailEnd type="none" w="med" len="med"/>
+                    </a:lnL>
+                    <a:lnR w="9525" cap="flat" cmpd="sng" algn="ctr">
+                      <a:solidFill>
+                        <a:srgbClr val="E2E8F0"/>
+                      </a:solidFill>
+                      <a:prstDash val="solid"/>
+                      <a:round/>
+                      <a:headEnd type="none" w="med" len="med"/>
+                      <a:tailEnd type="none" w="med" len="med"/>
+                    </a:lnR>
+                    <a:lnT w="9525" cap="flat" cmpd="sng" algn="ctr">
+                      <a:solidFill>
+                        <a:srgbClr val="E2E8F0"/>
+                      </a:solidFill>
+                      <a:prstDash val="solid"/>
+                      <a:round/>
+                      <a:headEnd type="none" w="med" len="med"/>
+                      <a:tailEnd type="none" w="med" len="med"/>
+                    </a:lnT>
+                    <a:lnB w="9525" cap="flat" cmpd="sng" algn="ctr">
+                      <a:solidFill>
+                        <a:srgbClr val="E2E8F0"/>
+                      </a:solidFill>
+                      <a:prstDash val="solid"/>
+                      <a:round/>
+                      <a:headEnd type="none" w="med" len="med"/>
+                      <a:tailEnd type="none" w="med" len="med"/>
+                    </a:lnB>
+                    <a:solidFill>
+                      <a:srgbClr val="F8FAFC"/>
+                    </a:solidFill>
+                  </a:tcPr>
+                </a:tc>
+              </a:tr>
+              <a:tr h="502920">
+                <a:tc>
+                  <a:txBody>
+                    <a:bodyPr/>
+                    <a:lstStyle/>
+                    <a:p>
+                      <a:pPr algn="l" indent="0" marL="0">
+                        <a:buNone/>
+                      </a:pPr>
+                      <a:r>
+                        <a:rPr lang="en-US" sz="1000" dirty="0">
+                          <a:solidFill>
+                            <a:srgbClr val="334155"/>
+                          </a:solidFill>
+                        </a:rPr>
+                        <a:t>平均每年「卡住」週數</a:t>
+                      </a:r>
+                      <a:endParaRPr lang="en-US" sz="1000" dirty="0"/>
+                    </a:p>
+                  </a:txBody>
+                  <a:tcPr marL="73152" marR="73152" marT="45720" marB="45720" anchor="ctr">
+                    <a:lnL w="9525" cap="flat" cmpd="sng" algn="ctr">
+                      <a:solidFill>
+                        <a:srgbClr val="E2E8F0"/>
+                      </a:solidFill>
+                      <a:prstDash val="solid"/>
+                      <a:round/>
+                      <a:headEnd type="none" w="med" len="med"/>
+                      <a:tailEnd type="none" w="med" len="med"/>
+                    </a:lnL>
+                    <a:lnR w="9525" cap="flat" cmpd="sng" algn="ctr">
+                      <a:solidFill>
+                        <a:srgbClr val="E2E8F0"/>
+                      </a:solidFill>
+                      <a:prstDash val="solid"/>
+                      <a:round/>
+                      <a:headEnd type="none" w="med" len="med"/>
+                      <a:tailEnd type="none" w="med" len="med"/>
+                    </a:lnR>
+                    <a:lnT w="9525" cap="flat" cmpd="sng" algn="ctr">
+                      <a:solidFill>
+                        <a:srgbClr val="E2E8F0"/>
+                      </a:solidFill>
+                      <a:prstDash val="solid"/>
+                      <a:round/>
+                      <a:headEnd type="none" w="med" len="med"/>
+                      <a:tailEnd type="none" w="med" len="med"/>
+                    </a:lnT>
+                    <a:lnB w="9525" cap="flat" cmpd="sng" algn="ctr">
+                      <a:solidFill>
+                        <a:srgbClr val="E2E8F0"/>
+                      </a:solidFill>
+                      <a:prstDash val="solid"/>
+                      <a:round/>
+                      <a:headEnd type="none" w="med" len="med"/>
+                      <a:tailEnd type="none" w="med" len="med"/>
+                    </a:lnB>
+                    <a:solidFill>
+                      <a:srgbClr val="FFFFFF"/>
+                    </a:solidFill>
+                  </a:tcPr>
+                </a:tc>
+                <a:tc>
+                  <a:txBody>
+                    <a:bodyPr/>
+                    <a:lstStyle/>
+                    <a:p>
+                      <a:pPr algn="l" indent="0" marL="0">
+                        <a:buNone/>
+                      </a:pPr>
+                      <a:r>
+                        <a:rPr lang="en-US" sz="1000" dirty="0">
+                          <a:solidFill>
+                            <a:srgbClr val="334155"/>
+                          </a:solidFill>
+                        </a:rPr>
+                        <a:t>45.0／52週</a:t>
+                      </a:r>
+                      <a:endParaRPr lang="en-US" sz="1000" dirty="0"/>
+                    </a:p>
+                  </a:txBody>
+                  <a:tcPr marL="73152" marR="73152" marT="45720" marB="45720" anchor="ctr">
+                    <a:lnL w="9525" cap="flat" cmpd="sng" algn="ctr">
+                      <a:solidFill>
+                        <a:srgbClr val="E2E8F0"/>
+                      </a:solidFill>
+                      <a:prstDash val="solid"/>
+                      <a:round/>
+                      <a:headEnd type="none" w="med" len="med"/>
+                      <a:tailEnd type="none" w="med" len="med"/>
+                    </a:lnL>
+                    <a:lnR w="9525" cap="flat" cmpd="sng" algn="ctr">
+                      <a:solidFill>
+                        <a:srgbClr val="E2E8F0"/>
+                      </a:solidFill>
+                      <a:prstDash val="solid"/>
+                      <a:round/>
+                      <a:headEnd type="none" w="med" len="med"/>
+                      <a:tailEnd type="none" w="med" len="med"/>
+                    </a:lnR>
+                    <a:lnT w="9525" cap="flat" cmpd="sng" algn="ctr">
+                      <a:solidFill>
+                        <a:srgbClr val="E2E8F0"/>
+                      </a:solidFill>
+                      <a:prstDash val="solid"/>
+                      <a:round/>
+                      <a:headEnd type="none" w="med" len="med"/>
+                      <a:tailEnd type="none" w="med" len="med"/>
+                    </a:lnT>
+                    <a:lnB w="9525" cap="flat" cmpd="sng" algn="ctr">
+                      <a:solidFill>
+                        <a:srgbClr val="E2E8F0"/>
+                      </a:solidFill>
+                      <a:prstDash val="solid"/>
+                      <a:round/>
+                      <a:headEnd type="none" w="med" len="med"/>
+                      <a:tailEnd type="none" w="med" len="med"/>
+                    </a:lnB>
+                    <a:solidFill>
+                      <a:srgbClr val="FFFFFF"/>
+                    </a:solidFill>
+                  </a:tcPr>
+                </a:tc>
+                <a:tc>
+                  <a:txBody>
+                    <a:bodyPr/>
+                    <a:lstStyle/>
+                    <a:p>
+                      <a:pPr algn="l" indent="0" marL="0">
+                        <a:buNone/>
+                      </a:pPr>
+                      <a:r>
+                        <a:rPr lang="en-US" sz="1000" dirty="0">
+                          <a:solidFill>
+                            <a:srgbClr val="334155"/>
+                          </a:solidFill>
+                        </a:rPr>
+                        <a:t>42.7／52週</a:t>
+                      </a:r>
+                      <a:endParaRPr lang="en-US" sz="1000" dirty="0"/>
+                    </a:p>
+                  </a:txBody>
+                  <a:tcPr marL="73152" marR="73152" marT="45720" marB="45720" anchor="ctr">
+                    <a:lnL w="9525" cap="flat" cmpd="sng" algn="ctr">
+                      <a:solidFill>
+                        <a:srgbClr val="E2E8F0"/>
+                      </a:solidFill>
+                      <a:prstDash val="solid"/>
+                      <a:round/>
+                      <a:headEnd type="none" w="med" len="med"/>
+                      <a:tailEnd type="none" w="med" len="med"/>
+                    </a:lnL>
+                    <a:lnR w="9525" cap="flat" cmpd="sng" algn="ctr">
+                      <a:solidFill>
+                        <a:srgbClr val="E2E8F0"/>
+                      </a:solidFill>
+                      <a:prstDash val="solid"/>
+                      <a:round/>
+                      <a:headEnd type="none" w="med" len="med"/>
+                      <a:tailEnd type="none" w="med" len="med"/>
+                    </a:lnR>
+                    <a:lnT w="9525" cap="flat" cmpd="sng" algn="ctr">
+                      <a:solidFill>
+                        <a:srgbClr val="E2E8F0"/>
+                      </a:solidFill>
+                      <a:prstDash val="solid"/>
+                      <a:round/>
+                      <a:headEnd type="none" w="med" len="med"/>
+                      <a:tailEnd type="none" w="med" len="med"/>
+                    </a:lnT>
+                    <a:lnB w="9525" cap="flat" cmpd="sng" algn="ctr">
+                      <a:solidFill>
+                        <a:srgbClr val="E2E8F0"/>
+                      </a:solidFill>
+                      <a:prstDash val="solid"/>
+                      <a:round/>
+                      <a:headEnd type="none" w="med" len="med"/>
+                      <a:tailEnd type="none" w="med" len="med"/>
+                    </a:lnB>
+                    <a:solidFill>
+                      <a:srgbClr val="FFFFFF"/>
+                    </a:solidFill>
+                  </a:tcPr>
+                </a:tc>
+              </a:tr>
+            </a:tbl>
+          </a:graphicData>
+        </a:graphic>
+      </p:graphicFrame>
+      <p:sp>
+        <p:nvSpPr>
+          <p:cNvPr id="5" name="Shape 2"/>
+          <p:cNvSpPr/>
+          <p:nvPr/>
+        </p:nvSpPr>
+        <p:spPr>
+          <a:xfrm>
+            <a:off x="7406640" y="1600200"/>
+            <a:ext cx="4233672" cy="1280160"/>
+          </a:xfrm>
+          <a:prstGeom prst="roundRect">
+            <a:avLst>
+              <a:gd name="adj" fmla="val 5714"/>
+            </a:avLst>
+          </a:prstGeom>
+          <a:solidFill>
+            <a:srgbClr val="EFF6FF"/>
+          </a:solidFill>
+          <a:ln/>
+        </p:spPr>
+      </p:sp>
+      <p:sp>
+        <p:nvSpPr>
+          <p:cNvPr id="6" name="Text 3"/>
+          <p:cNvSpPr txBox="1"/>
+          <p:nvPr/>
+        </p:nvSpPr>
+        <p:spPr>
+          <a:xfrm>
+            <a:off x="7543800" y="1709928"/>
+            <a:ext cx="3959352" cy="777240"/>
+          </a:xfrm>
+          <a:prstGeom prst="rect">
+            <a:avLst/>
+          </a:prstGeom>
+          <a:noFill/>
+          <a:ln/>
+        </p:spPr>
+        <p:txBody>
+          <a:bodyPr wrap="square" lIns="0" tIns="0" rIns="0" bIns="0" rtlCol="0" anchor="b"/>
+          <a:lstStyle/>
+          <a:p>
+            <a:pPr algn="ctr" indent="0" marL="0">
+              <a:buNone/>
+            </a:pPr>
+            <a:r>
+              <a:rPr lang="en-US" sz="2000" b="1" dirty="0">
+                <a:solidFill>
+                  <a:srgbClr val="B45309"/>
+                </a:solidFill>
+                <a:latin typeface="Microsoft JhengHei" pitchFamily="34" charset="0"/>
+                <a:ea typeface="Microsoft JhengHei" pitchFamily="34" charset="-122"/>
+                <a:cs typeface="Microsoft JhengHei" pitchFamily="34" charset="-120"/>
+              </a:rPr>
+              <a:t>兩規則平均皆為負</a:t>
+            </a:r>
+            <a:endParaRPr lang="en-US" sz="2000" dirty="0"/>
+          </a:p>
+        </p:txBody>
+      </p:sp>
+      <p:sp>
+        <p:nvSpPr>
+          <p:cNvPr id="7" name="Text 4"/>
+          <p:cNvSpPr txBox="1"/>
+          <p:nvPr/>
+        </p:nvSpPr>
+        <p:spPr>
+          <a:xfrm>
+            <a:off x="7498080" y="2496312"/>
+            <a:ext cx="4050792" cy="320040"/>
+          </a:xfrm>
+          <a:prstGeom prst="rect">
+            <a:avLst/>
+          </a:prstGeom>
+          <a:noFill/>
+          <a:ln/>
+        </p:spPr>
+        <p:txBody>
+          <a:bodyPr wrap="square" lIns="0" tIns="0" rIns="0" bIns="0" rtlCol="0" anchor="t"/>
+          <a:lstStyle/>
+          <a:p>
+            <a:pPr algn="ctr" indent="0" marL="0">
+              <a:buNone/>
+            </a:pPr>
+            <a:r>
+              <a:rPr lang="en-US" sz="1050" dirty="0">
+                <a:solidFill>
+                  <a:srgbClr val="334155"/>
+                </a:solidFill>
+                <a:latin typeface="Microsoft JhengHei" pitchFamily="34" charset="0"/>
+                <a:ea typeface="Microsoft JhengHei" pitchFamily="34" charset="-122"/>
+                <a:cs typeface="Microsoft JhengHei" pitchFamily="34" charset="-120"/>
+              </a:rPr>
+              <a:t>在零方向性（不預設漲跌）基準情境下</a:t>
+            </a:r>
+            <a:endParaRPr lang="en-US" sz="1050" dirty="0"/>
+          </a:p>
+        </p:txBody>
+      </p:sp>
+      <p:sp>
+        <p:nvSpPr>
+          <p:cNvPr id="8" name="Shape 5"/>
+          <p:cNvSpPr/>
+          <p:nvPr/>
+        </p:nvSpPr>
+        <p:spPr>
+          <a:xfrm>
+            <a:off x="7406640" y="3017520"/>
+            <a:ext cx="4233672" cy="1920240"/>
+          </a:xfrm>
+          <a:prstGeom prst="roundRect">
+            <a:avLst>
+              <a:gd name="adj" fmla="val 3810"/>
+            </a:avLst>
+          </a:prstGeom>
+          <a:solidFill>
+            <a:srgbClr val="EFF6FF"/>
+          </a:solidFill>
+          <a:ln w="9525">
+            <a:solidFill>
+              <a:srgbClr val="E2E8F0"/>
+            </a:solidFill>
+            <a:prstDash val="solid"/>
+          </a:ln>
+          <a:effectLst>
+            <a:outerShdw sx="100000" sy="100000" kx="0" ky="0" algn="bl" rotWithShape="0" blurRad="76200" dist="25400" dir="5400000">
+              <a:srgbClr val="1E293B">
+                <a:alpha val="8000"/>
+              </a:srgbClr>
+            </a:outerShdw>
+          </a:effectLst>
+        </p:spPr>
+      </p:sp>
+      <p:sp>
+        <p:nvSpPr>
+          <p:cNvPr id="9" name="Text 6"/>
+          <p:cNvSpPr txBox="1"/>
+          <p:nvPr/>
+        </p:nvSpPr>
+        <p:spPr>
+          <a:xfrm>
+            <a:off x="7607808" y="3163824"/>
+            <a:ext cx="3831336" cy="320040"/>
+          </a:xfrm>
+          <a:prstGeom prst="rect">
+            <a:avLst/>
+          </a:prstGeom>
+          <a:noFill/>
+          <a:ln/>
+        </p:spPr>
+        <p:txBody>
+          <a:bodyPr wrap="square" lIns="0" tIns="0" rIns="0" bIns="0" rtlCol="0" anchor="ctr"/>
+          <a:lstStyle/>
+          <a:p>
+            <a:pPr algn="l" indent="0" marL="0">
+              <a:buNone/>
+            </a:pPr>
+            <a:r>
+              <a:rPr lang="en-US" sz="1300" b="1" dirty="0">
+                <a:solidFill>
+                  <a:srgbClr val="0F172A"/>
+                </a:solidFill>
+                <a:latin typeface="Microsoft JhengHei" pitchFamily="34" charset="0"/>
+                <a:ea typeface="Microsoft JhengHei" pitchFamily="34" charset="-122"/>
+                <a:cs typeface="Microsoft JhengHei" pitchFamily="34" charset="-120"/>
+              </a:rPr>
+              <a:t>即使假設 BTC 全年+30%</a:t>
+            </a:r>
+            <a:endParaRPr lang="en-US" sz="1300" dirty="0"/>
+          </a:p>
+        </p:txBody>
+      </p:sp>
+      <p:sp>
+        <p:nvSpPr>
+          <p:cNvPr id="10" name="Text 7"/>
+          <p:cNvSpPr txBox="1"/>
+          <p:nvPr/>
+        </p:nvSpPr>
+        <p:spPr>
+          <a:xfrm>
+            <a:off x="7607808" y="3520440"/>
+            <a:ext cx="3831336" cy="1261872"/>
+          </a:xfrm>
+          <a:prstGeom prst="rect">
+            <a:avLst/>
+          </a:prstGeom>
+          <a:noFill/>
+          <a:ln/>
+        </p:spPr>
+        <p:txBody>
+          <a:bodyPr wrap="square" lIns="0" tIns="0" rIns="0" bIns="0" rtlCol="0" anchor="t"/>
+          <a:lstStyle/>
+          <a:p>
+            <a:pPr algn="l" indent="0" marL="0">
+              <a:lnSpc>
+                <a:spcPct val="115000"/>
+              </a:lnSpc>
+              <a:buNone/>
+            </a:pPr>
+            <a:r>
+              <a:rPr lang="en-US" sz="1100" dirty="0">
+                <a:solidFill>
+                  <a:srgbClr val="334155"/>
+                </a:solidFill>
+                <a:latin typeface="Microsoft JhengHei" pitchFamily="34" charset="0"/>
+                <a:ea typeface="Microsoft JhengHei" pitchFamily="34" charset="-122"/>
+                <a:cs typeface="Microsoft JhengHei" pitchFamily="34" charset="-120"/>
+              </a:rPr>
+              <a:t>規則1平均年化仍為 -4.2%，規則2仍為 -11.6%——因「高賣」結構將上檔封頂於行使價，方向性上漲僅能間接透過「更快脫離套牢」受惠，無法直接參與漲幅。</a:t>
+            </a:r>
+            <a:endParaRPr lang="en-US" sz="1100" dirty="0"/>
+          </a:p>
+        </p:txBody>
+      </p:sp>
+      <p:sp>
+        <p:nvSpPr>
+          <p:cNvPr id="11" name="Shape 8"/>
+          <p:cNvSpPr/>
+          <p:nvPr/>
+        </p:nvSpPr>
+        <p:spPr>
+          <a:xfrm>
+            <a:off x="548640" y="5120640"/>
+            <a:ext cx="11094415" cy="1188720"/>
+          </a:xfrm>
+          <a:prstGeom prst="roundRect">
+            <a:avLst>
+              <a:gd name="adj" fmla="val 6154"/>
+            </a:avLst>
+          </a:prstGeom>
+          <a:solidFill>
+            <a:srgbClr val="F8FAFC"/>
+          </a:solidFill>
+          <a:ln w="9525">
+            <a:solidFill>
+              <a:srgbClr val="E2E8F0"/>
+            </a:solidFill>
+            <a:prstDash val="solid"/>
+          </a:ln>
+          <a:effectLst>
+            <a:outerShdw sx="100000" sy="100000" kx="0" ky="0" algn="bl" rotWithShape="0" blurRad="76200" dist="25400" dir="5400000">
+              <a:srgbClr val="1E293B">
+                <a:alpha val="8000"/>
+              </a:srgbClr>
+            </a:outerShdw>
+          </a:effectLst>
+        </p:spPr>
+      </p:sp>
+      <p:sp>
+        <p:nvSpPr>
+          <p:cNvPr id="12" name="Text 9"/>
+          <p:cNvSpPr txBox="1"/>
+          <p:nvPr/>
+        </p:nvSpPr>
+        <p:spPr>
+          <a:xfrm>
+            <a:off x="749808" y="5266944"/>
+            <a:ext cx="10692079" cy="320040"/>
+          </a:xfrm>
+          <a:prstGeom prst="rect">
+            <a:avLst/>
+          </a:prstGeom>
+          <a:noFill/>
+          <a:ln/>
+        </p:spPr>
+        <p:txBody>
+          <a:bodyPr wrap="square" lIns="0" tIns="0" rIns="0" bIns="0" rtlCol="0" anchor="ctr"/>
+          <a:lstStyle/>
+          <a:p>
+            <a:pPr algn="l" indent="0" marL="0">
+              <a:buNone/>
+            </a:pPr>
+            <a:r>
+              <a:rPr lang="en-US" sz="1300" b="1" dirty="0">
+                <a:solidFill>
+                  <a:srgbClr val="0F172A"/>
+                </a:solidFill>
+                <a:latin typeface="Microsoft JhengHei" pitchFamily="34" charset="0"/>
+                <a:ea typeface="Microsoft JhengHei" pitchFamily="34" charset="-122"/>
+                <a:cs typeface="Microsoft JhengHei" pitchFamily="34" charset="-120"/>
+              </a:rPr>
+              <a:t>為什麼「年化最高」的規則，全年不一定比較好？</a:t>
+            </a:r>
+            <a:endParaRPr lang="en-US" sz="1300" dirty="0"/>
+          </a:p>
+        </p:txBody>
+      </p:sp>
+      <p:sp>
+        <p:nvSpPr>
+          <p:cNvPr id="13" name="Text 10"/>
+          <p:cNvSpPr txBox="1"/>
+          <p:nvPr/>
+        </p:nvSpPr>
+        <p:spPr>
+          <a:xfrm>
+            <a:off x="749808" y="5623560"/>
+            <a:ext cx="10692079" cy="530352"/>
+          </a:xfrm>
+          <a:prstGeom prst="rect">
+            <a:avLst/>
+          </a:prstGeom>
+          <a:noFill/>
+          <a:ln/>
+        </p:spPr>
+        <p:txBody>
+          <a:bodyPr wrap="square" lIns="0" tIns="0" rIns="0" bIns="0" rtlCol="0" anchor="t"/>
+          <a:lstStyle/>
+          <a:p>
+            <a:pPr algn="l" indent="0" marL="0">
+              <a:lnSpc>
+                <a:spcPct val="115000"/>
+              </a:lnSpc>
+              <a:buNone/>
+            </a:pPr>
+            <a:r>
+              <a:rPr lang="en-US" sz="1050" dirty="0">
+                <a:solidFill>
+                  <a:srgbClr val="334155"/>
+                </a:solidFill>
+                <a:latin typeface="Microsoft JhengHei" pitchFamily="34" charset="0"/>
+                <a:ea typeface="Microsoft JhengHei" pitchFamily="34" charset="-122"/>
+                <a:cs typeface="Microsoft JhengHei" pitchFamily="34" charset="-120"/>
+              </a:rPr>
+              <a:t>出售選擇權收取權利金，本質是承接波動率風險換取補償；當市場願付的權利金不足以覆蓋標的實際波動帶來的潛在損失，長期反覆執行即呈現「多數週期小賺、少數週期大套牢」的負偏態分布。第9頁的+2.05%三週範例是單一幸運路徑，本頁呈現的才是全年反覆執行後的機率分布，財務部審查應以本頁為主要依據。</a:t>
+            </a:r>
+            <a:endParaRPr lang="en-US" sz="1050" dirty="0"/>
+          </a:p>
+        </p:txBody>
+      </p:sp>
+      <p:sp>
+        <p:nvSpPr>
+          <p:cNvPr id="14" name="Text 11"/>
+          <p:cNvSpPr txBox="1"/>
+          <p:nvPr/>
+        </p:nvSpPr>
+        <p:spPr>
+          <a:xfrm>
+            <a:off x="457200" y="6492240"/>
+            <a:ext cx="5486400" cy="274320"/>
+          </a:xfrm>
+          <a:prstGeom prst="rect">
+            <a:avLst/>
+          </a:prstGeom>
+          <a:noFill/>
+          <a:ln/>
+        </p:spPr>
+        <p:txBody>
+          <a:bodyPr wrap="square" lIns="0" tIns="0" rIns="0" bIns="0" rtlCol="0" anchor="ctr"/>
+          <a:lstStyle/>
+          <a:p>
+            <a:pPr algn="l" indent="0" marL="0">
+              <a:buNone/>
+            </a:pPr>
+            <a:r>
+              <a:rPr lang="en-US" sz="900" dirty="0">
+                <a:solidFill>
+                  <a:srgbClr val="64748B"/>
+                </a:solidFill>
+                <a:latin typeface="Microsoft JhengHei" pitchFamily="34" charset="0"/>
+                <a:ea typeface="Microsoft JhengHei" pitchFamily="34" charset="-122"/>
+                <a:cs typeface="Microsoft JhengHei" pitchFamily="34" charset="-120"/>
+              </a:rPr>
+              <a:t>TSGEX 資產管理部｜內部機密</a:t>
+            </a:r>
+            <a:endParaRPr lang="en-US" sz="900" dirty="0"/>
+          </a:p>
+        </p:txBody>
+      </p:sp>
+      <p:sp>
+        <p:nvSpPr>
+          <p:cNvPr id="15" name="Text 12"/>
+          <p:cNvSpPr txBox="1"/>
+          <p:nvPr/>
+        </p:nvSpPr>
+        <p:spPr>
+          <a:xfrm>
+            <a:off x="9905695" y="6492240"/>
+            <a:ext cx="1828800" cy="274320"/>
+          </a:xfrm>
+          <a:prstGeom prst="rect">
+            <a:avLst/>
+          </a:prstGeom>
+          <a:noFill/>
+          <a:ln/>
+        </p:spPr>
+        <p:txBody>
+          <a:bodyPr wrap="square" lIns="0" tIns="0" rIns="0" bIns="0" rtlCol="0" anchor="ctr"/>
+          <a:lstStyle/>
+          <a:p>
+            <a:pPr algn="r" indent="0" marL="0">
+              <a:buNone/>
+            </a:pPr>
+            <a:r>
+              <a:rPr lang="en-US" sz="900" dirty="0">
+                <a:solidFill>
+                  <a:srgbClr val="64748B"/>
+                </a:solidFill>
+                <a:latin typeface="Microsoft JhengHei" pitchFamily="34" charset="0"/>
+                <a:ea typeface="Microsoft JhengHei" pitchFamily="34" charset="-122"/>
+                <a:cs typeface="Microsoft JhengHei" pitchFamily="34" charset="-120"/>
+              </a:rPr>
+              <a:t>11 / 16</a:t>
+            </a:r>
+            <a:endParaRPr lang="en-US" sz="900" dirty="0"/>
+          </a:p>
+        </p:txBody>
+      </p:sp>
+    </p:spTree>
+  </p:cSld>
+  <p:clrMapOvr>
+    <a:masterClrMapping/>
+  </p:clrMapOvr>
+</p:sld>
+</file>
+
+<file path=ppt/slides/slide12.xml><?xml version="1.0" encoding="utf-8"?>
+<p:sld xmlns:a="http://schemas.openxmlformats.org/drawingml/2006/main" xmlns:r="http://schemas.openxmlformats.org/officeDocument/2006/relationships" xmlns:p="http://schemas.openxmlformats.org/presentationml/2006/main">
+  <p:cSld name="Slide 12">
+    <p:bg>
+      <p:bgPr>
+        <a:solidFill>
+          <a:srgbClr val="FFFFFF"/>
+        </a:solidFill>
+      </p:bgPr>
+    </p:bg>
+    <p:spTree>
+      <p:nvGrpSpPr>
+        <p:cNvPr id="1" name=""/>
+        <p:cNvGrpSpPr/>
+        <p:nvPr/>
+      </p:nvGrpSpPr>
+      <p:grpSpPr>
+        <a:xfrm>
+          <a:off x="0" y="0"/>
+          <a:ext cx="0" cy="0"/>
+          <a:chOff x="0" y="0"/>
+          <a:chExt cx="0" cy="0"/>
+        </a:xfrm>
+      </p:grpSpPr>
+      <p:sp>
+        <p:nvSpPr>
+          <p:cNvPr id="2" name="Text 0"/>
+          <p:cNvSpPr txBox="1"/>
+          <p:nvPr/>
+        </p:nvSpPr>
+        <p:spPr>
+          <a:xfrm>
+            <a:off x="548640" y="365760"/>
+            <a:ext cx="11094415" cy="640080"/>
+          </a:xfrm>
+          <a:prstGeom prst="rect">
+            <a:avLst/>
+          </a:prstGeom>
+          <a:noFill/>
+          <a:ln/>
+        </p:spPr>
+        <p:txBody>
+          <a:bodyPr wrap="square" lIns="0" tIns="0" rIns="0" bIns="0" rtlCol="0" anchor="ctr"/>
+          <a:lstStyle/>
+          <a:p>
+            <a:pPr algn="l" indent="0" marL="0">
+              <a:buNone/>
+            </a:pPr>
+            <a:r>
+              <a:rPr lang="en-US" sz="2800" b="1" dirty="0">
+                <a:solidFill>
+                  <a:srgbClr val="0F172A"/>
+                </a:solidFill>
+                <a:latin typeface="Microsoft JhengHei" pitchFamily="34" charset="0"/>
+                <a:ea typeface="Microsoft JhengHei" pitchFamily="34" charset="-122"/>
+                <a:cs typeface="Microsoft JhengHei" pitchFamily="34" charset="-120"/>
+              </a:rPr>
               <a:t>⑤ Binance 雙幣投資（Dual Investment）</a:t>
             </a:r>
             <a:endParaRPr lang="en-US" sz="2800" dirty="0"/>
@@ -5726,7 +7474,7 @@
       </p:sp>
       <p:graphicFrame>
         <p:nvGraphicFramePr>
-          <p:cNvPr id="12" name="Table 0"/>
+          <p:cNvPr id="13" name="Table 0"/>
           <p:cNvGraphicFramePr>
             <a:graphicFrameLocks noGrp="1"/>
           </p:cNvGraphicFramePr>
@@ -7082,7 +8830,7 @@
                 <a:ea typeface="Microsoft JhengHei" pitchFamily="34" charset="-122"/>
                 <a:cs typeface="Microsoft JhengHei" pitchFamily="34" charset="-120"/>
               </a:rPr>
-              <a:t>11 / 15</a:t>
+              <a:t>12 / 16</a:t>
             </a:r>
             <a:endParaRPr lang="en-US" sz="900" dirty="0"/>
           </a:p>
@@ -7096,9 +8844,9 @@
 </p:sld>
 </file>
 
-<file path=ppt/slides/slide12.xml><?xml version="1.0" encoding="utf-8"?>
+<file path=ppt/slides/slide13.xml><?xml version="1.0" encoding="utf-8"?>
 <p:sld xmlns:a="http://schemas.openxmlformats.org/drawingml/2006/main" xmlns:r="http://schemas.openxmlformats.org/officeDocument/2006/relationships" xmlns:p="http://schemas.openxmlformats.org/presentationml/2006/main">
-  <p:cSld name="Slide 12">
+  <p:cSld name="Slide 13">
     <p:bg>
       <p:bgPr>
         <a:solidFill>
@@ -7200,7 +8948,7 @@
       </p:sp>
       <p:graphicFrame>
         <p:nvGraphicFramePr>
-          <p:cNvPr id="13" name="Table 0"/>
+          <p:cNvPr id="14" name="Table 0"/>
           <p:cNvGraphicFramePr>
             <a:graphicFrameLocks noGrp="1"/>
           </p:cNvGraphicFramePr>
@@ -9024,7 +10772,7 @@
                 <a:ea typeface="Microsoft JhengHei" pitchFamily="34" charset="-122"/>
                 <a:cs typeface="Microsoft JhengHei" pitchFamily="34" charset="-120"/>
               </a:rPr>
-              <a:t>12 / 15</a:t>
+              <a:t>13 / 16</a:t>
             </a:r>
             <a:endParaRPr lang="en-US" sz="900" dirty="0"/>
           </a:p>
@@ -9038,9 +10786,9 @@
 </p:sld>
 </file>
 
-<file path=ppt/slides/slide13.xml><?xml version="1.0" encoding="utf-8"?>
+<file path=ppt/slides/slide14.xml><?xml version="1.0" encoding="utf-8"?>
 <p:sld xmlns:a="http://schemas.openxmlformats.org/drawingml/2006/main" xmlns:r="http://schemas.openxmlformats.org/officeDocument/2006/relationships" xmlns:p="http://schemas.openxmlformats.org/presentationml/2006/main">
-  <p:cSld name="Slide 13">
+  <p:cSld name="Slide 14">
     <p:bg>
       <p:bgPr>
         <a:solidFill>
@@ -9142,7 +10890,7 @@
       </p:sp>
       <p:graphicFrame>
         <p:nvGraphicFramePr>
-          <p:cNvPr id="14" name="Table 0"/>
+          <p:cNvPr id="15" name="Table 0"/>
           <p:cNvGraphicFramePr>
             <a:graphicFrameLocks noGrp="1"/>
           </p:cNvGraphicFramePr>
@@ -11822,7 +13570,7 @@
                 <a:ea typeface="Microsoft JhengHei" pitchFamily="34" charset="-122"/>
                 <a:cs typeface="Microsoft JhengHei" pitchFamily="34" charset="-120"/>
               </a:rPr>
-              <a:t>13 / 15</a:t>
+              <a:t>14 / 16</a:t>
             </a:r>
             <a:endParaRPr lang="en-US" sz="900" dirty="0"/>
           </a:p>
@@ -11836,9 +13584,9 @@
 </p:sld>
 </file>
 
-<file path=ppt/slides/slide14.xml><?xml version="1.0" encoding="utf-8"?>
+<file path=ppt/slides/slide15.xml><?xml version="1.0" encoding="utf-8"?>
 <p:sld xmlns:a="http://schemas.openxmlformats.org/drawingml/2006/main" xmlns:r="http://schemas.openxmlformats.org/officeDocument/2006/relationships" xmlns:p="http://schemas.openxmlformats.org/presentationml/2006/main">
-  <p:cSld name="Slide 14">
+  <p:cSld name="Slide 15">
     <p:bg>
       <p:bgPr>
         <a:solidFill>
@@ -11956,7 +13704,7 @@
       </p:graphicFrame>
       <p:graphicFrame>
         <p:nvGraphicFramePr>
-          <p:cNvPr id="15" name="Table 0"/>
+          <p:cNvPr id="16" name="Table 0"/>
           <p:cNvGraphicFramePr>
             <a:graphicFrameLocks noGrp="1"/>
           </p:cNvGraphicFramePr>
@@ -13968,7 +15716,7 @@
                 <a:ea typeface="Microsoft JhengHei" pitchFamily="34" charset="-122"/>
                 <a:cs typeface="Microsoft JhengHei" pitchFamily="34" charset="-120"/>
               </a:rPr>
-              <a:t>14 / 15</a:t>
+              <a:t>15 / 16</a:t>
             </a:r>
             <a:endParaRPr lang="en-US" sz="900" dirty="0"/>
           </a:p>
@@ -13982,9 +15730,9 @@
 </p:sld>
 </file>
 
-<file path=ppt/slides/slide15.xml><?xml version="1.0" encoding="utf-8"?>
+<file path=ppt/slides/slide16.xml><?xml version="1.0" encoding="utf-8"?>
 <p:sld xmlns:a="http://schemas.openxmlformats.org/drawingml/2006/main" xmlns:r="http://schemas.openxmlformats.org/officeDocument/2006/relationships" xmlns:p="http://schemas.openxmlformats.org/presentationml/2006/main">
-  <p:cSld name="Slide 15">
+  <p:cSld name="Slide 16">
     <p:bg>
       <p:bgPr>
         <a:solidFill>
@@ -15300,7 +17048,7 @@
                 <a:ea typeface="Microsoft JhengHei" pitchFamily="34" charset="-122"/>
                 <a:cs typeface="Microsoft JhengHei" pitchFamily="34" charset="-120"/>
               </a:rPr>
-              <a:t>15 / 15</a:t>
+              <a:t>16 / 16</a:t>
             </a:r>
             <a:endParaRPr lang="en-US" sz="900" dirty="0"/>
           </a:p>
@@ -17197,7 +18945,7 @@
                 <a:ea typeface="Microsoft JhengHei" pitchFamily="34" charset="-122"/>
                 <a:cs typeface="Microsoft JhengHei" pitchFamily="34" charset="-120"/>
               </a:rPr>
-              <a:t>2 / 15</a:t>
+              <a:t>2 / 16</a:t>
             </a:r>
             <a:endParaRPr lang="en-US" sz="900" dirty="0"/>
           </a:p>
@@ -17915,7 +19663,7 @@
                 <a:ea typeface="Microsoft JhengHei" pitchFamily="34" charset="-122"/>
                 <a:cs typeface="Microsoft JhengHei" pitchFamily="34" charset="-120"/>
               </a:rPr>
-              <a:t>3 / 15</a:t>
+              <a:t>3 / 16</a:t>
             </a:r>
             <a:endParaRPr lang="en-US" sz="900" dirty="0"/>
           </a:p>
@@ -18893,7 +20641,7 @@
                 <a:ea typeface="Microsoft JhengHei" pitchFamily="34" charset="-122"/>
                 <a:cs typeface="Microsoft JhengHei" pitchFamily="34" charset="-120"/>
               </a:rPr>
-              <a:t>4 / 15</a:t>
+              <a:t>4 / 16</a:t>
             </a:r>
             <a:endParaRPr lang="en-US" sz="900" dirty="0"/>
           </a:p>
@@ -20555,7 +22303,7 @@
                 <a:ea typeface="Microsoft JhengHei" pitchFamily="34" charset="-122"/>
                 <a:cs typeface="Microsoft JhengHei" pitchFamily="34" charset="-120"/>
               </a:rPr>
-              <a:t>5 / 15</a:t>
+              <a:t>5 / 16</a:t>
             </a:r>
             <a:endParaRPr lang="en-US" sz="900" dirty="0"/>
           </a:p>
@@ -22434,7 +24182,7 @@
                 <a:ea typeface="Microsoft JhengHei" pitchFamily="34" charset="-122"/>
                 <a:cs typeface="Microsoft JhengHei" pitchFamily="34" charset="-120"/>
               </a:rPr>
-              <a:t>6 / 15</a:t>
+              <a:t>6 / 16</a:t>
             </a:r>
             <a:endParaRPr lang="en-US" sz="900" dirty="0"/>
           </a:p>
@@ -24044,7 +25792,7 @@
                 <a:ea typeface="Microsoft JhengHei" pitchFamily="34" charset="-122"/>
                 <a:cs typeface="Microsoft JhengHei" pitchFamily="34" charset="-120"/>
               </a:rPr>
-              <a:t>7 / 15</a:t>
+              <a:t>7 / 16</a:t>
             </a:r>
             <a:endParaRPr lang="en-US" sz="900" dirty="0"/>
           </a:p>
@@ -24463,7 +26211,7 @@
                 <a:ea typeface="Microsoft JhengHei" pitchFamily="34" charset="-122"/>
                 <a:cs typeface="Microsoft JhengHei" pitchFamily="34" charset="-120"/>
               </a:rPr>
-              <a:t>8 / 15</a:t>
+              <a:t>8 / 16</a:t>
             </a:r>
             <a:endParaRPr lang="en-US" sz="900" dirty="0"/>
           </a:p>
@@ -26032,7 +27780,7 @@
                 <a:ea typeface="Microsoft JhengHei" pitchFamily="34" charset="-122"/>
                 <a:cs typeface="Microsoft JhengHei" pitchFamily="34" charset="-120"/>
               </a:rPr>
-              <a:t>9 / 15</a:t>
+              <a:t>9 / 16</a:t>
             </a:r>
             <a:endParaRPr lang="en-US" sz="900" dirty="0"/>
           </a:p>

--- a/reports/TSGEX_Five_Instrument_Yield_Optimization_Report.pptx
+++ b/reports/TSGEX_Five_Instrument_Yield_Optimization_Report.pptx
@@ -5768,7 +5768,7 @@
                 <a:ea typeface="Microsoft JhengHei" pitchFamily="34" charset="-122"/>
                 <a:cs typeface="Microsoft JhengHei" pitchFamily="34" charset="-120"/>
               </a:rPr>
-              <a:t>④ 全年模擬：兩種操作規則的年化報酬分布</a:t>
+              <a:t>④ 全年模擬：為何「每期都正報酬」全年卻可能是負的？</a:t>
             </a:r>
             <a:endParaRPr lang="en-US" sz="2800" dirty="0"/>
           </a:p>
@@ -5807,7 +5807,7 @@
                 <a:ea typeface="Microsoft JhengHei" pitchFamily="34" charset="-122"/>
                 <a:cs typeface="Microsoft JhengHei" pitchFamily="34" charset="-120"/>
               </a:rPr>
-              <a:t>蒙地卡羅模擬（20,000條路徑）｜現貨$77,000｜年化波動55%｜7天一期，全年52期｜零方向性假設</a:t>
+              <a:t>蒙地卡羅模擬（20,000條路徑）｜現貨$77,000｜年化波動55%｜權利金已校準至125%(ATM)，非武斷假設</a:t>
             </a:r>
             <a:endParaRPr lang="en-US" sz="1300" dirty="0"/>
           </a:p>
@@ -5829,18 +5829,18 @@
         </p:nvGraphicFramePr>
         <p:xfrm>
           <a:off x="548640" y="1600200"/>
-          <a:ext cx="6675120" cy="914400"/>
+          <a:ext cx="7589520" cy="914400"/>
         </p:xfrm>
         <a:graphic>
           <a:graphicData uri="http://schemas.openxmlformats.org/drawingml/2006/table">
             <a:tbl>
               <a:tblPr/>
               <a:tblGrid>
-                <a:gridCol w="2468880"/>
-                <a:gridCol w="2103120"/>
-                <a:gridCol w="2103120"/>
+                <a:gridCol w="3200400"/>
+                <a:gridCol w="2194560"/>
+                <a:gridCol w="2194560"/>
               </a:tblGrid>
-              <a:tr h="502920">
+              <a:tr h="777240">
                 <a:tc>
                   <a:txBody>
                     <a:bodyPr/>
@@ -5849,15 +5849,7 @@
                       <a:pPr algn="ctr" indent="0" marL="0">
                         <a:buNone/>
                       </a:pPr>
-                      <a:r>
-                        <a:rPr lang="en-US" sz="1000" b="1" dirty="0">
-                          <a:solidFill>
-                            <a:srgbClr val="FFFFFF"/>
-                          </a:solidFill>
-                        </a:rPr>
-                        <a:t>統計量</a:t>
-                      </a:r>
-                      <a:endParaRPr lang="en-US" sz="1000" dirty="0"/>
+                      <a:endParaRPr lang="en-US" sz="950" dirty="0"/>
                     </a:p>
                   </a:txBody>
                   <a:tcPr marL="73152" marR="73152" marT="45720" marB="45720" anchor="ctr">
@@ -5911,14 +5903,14 @@
                         <a:buNone/>
                       </a:pPr>
                       <a:r>
-                        <a:rPr lang="en-US" sz="1000" b="1" dirty="0">
+                        <a:rPr lang="en-US" sz="950" b="1" dirty="0">
                           <a:solidFill>
                             <a:srgbClr val="FFFFFF"/>
                           </a:solidFill>
                         </a:rPr>
                         <a:t>規則1：最高收益(ATM)</a:t>
                       </a:r>
-                      <a:endParaRPr lang="en-US" sz="1000" dirty="0"/>
+                      <a:endParaRPr lang="en-US" sz="950" dirty="0"/>
                     </a:p>
                   </a:txBody>
                   <a:tcPr marL="73152" marR="73152" marT="45720" marB="45720" anchor="ctr">
@@ -5972,14 +5964,14 @@
                         <a:buNone/>
                       </a:pPr>
                       <a:r>
-                        <a:rPr lang="en-US" sz="1000" b="1" dirty="0">
+                        <a:rPr lang="en-US" sz="950" b="1" dirty="0">
                           <a:solidFill>
                             <a:srgbClr val="FFFFFF"/>
                           </a:solidFill>
                         </a:rPr>
                         <a:t>規則2：不被轉換(OTM緩衝)</a:t>
                       </a:r>
-                      <a:endParaRPr lang="en-US" sz="1000" dirty="0"/>
+                      <a:endParaRPr lang="en-US" sz="950" dirty="0"/>
                     </a:p>
                   </a:txBody>
                   <a:tcPr marL="73152" marR="73152" marT="45720" marB="45720" anchor="ctr">
@@ -6025,7 +6017,7 @@
                   </a:tcPr>
                 </a:tc>
               </a:tr>
-              <a:tr h="502920">
+              <a:tr h="777240">
                 <a:tc>
                   <a:txBody>
                     <a:bodyPr/>
@@ -6035,14 +6027,14 @@
                         <a:buNone/>
                       </a:pPr>
                       <a:r>
-                        <a:rPr lang="en-US" sz="1000" dirty="0">
+                        <a:rPr lang="en-US" sz="950" dirty="0">
                           <a:solidFill>
                             <a:srgbClr val="334155"/>
                           </a:solidFill>
                         </a:rPr>
-                        <a:t>平均年化報酬</a:t>
+                        <a:t>【已平倉】占比 ／ 平均年化 ／ 虧損機率</a:t>
                       </a:r>
-                      <a:endParaRPr lang="en-US" sz="1000" dirty="0"/>
+                      <a:endParaRPr lang="en-US" sz="950" dirty="0"/>
                     </a:p>
                   </a:txBody>
                   <a:tcPr marL="73152" marR="73152" marT="45720" marB="45720" anchor="ctr">
@@ -6096,14 +6088,14 @@
                         <a:buNone/>
                       </a:pPr>
                       <a:r>
-                        <a:rPr lang="en-US" sz="1000" dirty="0">
+                        <a:rPr lang="en-US" sz="950" dirty="0">
                           <a:solidFill>
                             <a:srgbClr val="334155"/>
                           </a:solidFill>
                         </a:rPr>
-                        <a:t>-20.2%</a:t>
+                        <a:t>5.5% ／ +38.5% ／ 0%</a:t>
                       </a:r>
-                      <a:endParaRPr lang="en-US" sz="1000" dirty="0"/>
+                      <a:endParaRPr lang="en-US" sz="950" dirty="0"/>
                     </a:p>
                   </a:txBody>
                   <a:tcPr marL="73152" marR="73152" marT="45720" marB="45720" anchor="ctr">
@@ -6157,14 +6149,14 @@
                         <a:buNone/>
                       </a:pPr>
                       <a:r>
-                        <a:rPr lang="en-US" sz="1000" dirty="0">
+                        <a:rPr lang="en-US" sz="950" dirty="0">
                           <a:solidFill>
                             <a:srgbClr val="334155"/>
                           </a:solidFill>
                         </a:rPr>
-                        <a:t>-24.1%</a:t>
+                        <a:t>8.1% ／ +16.0% ／ 0%</a:t>
                       </a:r>
-                      <a:endParaRPr lang="en-US" sz="1000" dirty="0"/>
+                      <a:endParaRPr lang="en-US" sz="950" dirty="0"/>
                     </a:p>
                   </a:txBody>
                   <a:tcPr marL="73152" marR="73152" marT="45720" marB="45720" anchor="ctr">
@@ -6210,7 +6202,7 @@
                   </a:tcPr>
                 </a:tc>
               </a:tr>
-              <a:tr h="502920">
+              <a:tr h="777240">
                 <a:tc>
                   <a:txBody>
                     <a:bodyPr/>
@@ -6220,14 +6212,14 @@
                         <a:buNone/>
                       </a:pPr>
                       <a:r>
-                        <a:rPr lang="en-US" sz="1000" dirty="0">
+                        <a:rPr lang="en-US" sz="950" dirty="0">
                           <a:solidFill>
                             <a:srgbClr val="334155"/>
                           </a:solidFill>
                         </a:rPr>
-                        <a:t>中位數年化報酬</a:t>
+                        <a:t>【未平倉，年末快照】占比 ／ 平均年化</a:t>
                       </a:r>
-                      <a:endParaRPr lang="en-US" sz="1000" dirty="0"/>
+                      <a:endParaRPr lang="en-US" sz="950" dirty="0"/>
                     </a:p>
                   </a:txBody>
                   <a:tcPr marL="73152" marR="73152" marT="45720" marB="45720" anchor="ctr">
@@ -6281,14 +6273,14 @@
                         <a:buNone/>
                       </a:pPr>
                       <a:r>
-                        <a:rPr lang="en-US" sz="1000" dirty="0">
+                        <a:rPr lang="en-US" sz="950" dirty="0">
                           <a:solidFill>
                             <a:srgbClr val="334155"/>
                           </a:solidFill>
                         </a:rPr>
-                        <a:t>-22.9%</a:t>
+                        <a:t>94.5% ／ -20.5%</a:t>
                       </a:r>
-                      <a:endParaRPr lang="en-US" sz="1000" dirty="0"/>
+                      <a:endParaRPr lang="en-US" sz="950" dirty="0"/>
                     </a:p>
                   </a:txBody>
                   <a:tcPr marL="73152" marR="73152" marT="45720" marB="45720" anchor="ctr">
@@ -6342,14 +6334,14 @@
                         <a:buNone/>
                       </a:pPr>
                       <a:r>
-                        <a:rPr lang="en-US" sz="1000" dirty="0">
+                        <a:rPr lang="en-US" sz="950" dirty="0">
                           <a:solidFill>
                             <a:srgbClr val="334155"/>
                           </a:solidFill>
                         </a:rPr>
-                        <a:t>-24.8%</a:t>
+                        <a:t>92.0% ／ -28.3%</a:t>
                       </a:r>
-                      <a:endParaRPr lang="en-US" sz="1000" dirty="0"/>
+                      <a:endParaRPr lang="en-US" sz="950" dirty="0"/>
                     </a:p>
                   </a:txBody>
                   <a:tcPr marL="73152" marR="73152" marT="45720" marB="45720" anchor="ctr">
@@ -6395,7 +6387,7 @@
                   </a:tcPr>
                 </a:tc>
               </a:tr>
-              <a:tr h="502920">
+              <a:tr h="777240">
                 <a:tc>
                   <a:txBody>
                     <a:bodyPr/>
@@ -6405,14 +6397,14 @@
                         <a:buNone/>
                       </a:pPr>
                       <a:r>
-                        <a:rPr lang="en-US" sz="1000" dirty="0">
+                        <a:rPr lang="en-US" sz="950" dirty="0">
                           <a:solidFill>
                             <a:srgbClr val="334155"/>
                           </a:solidFill>
                         </a:rPr>
-                        <a:t>P5（較差路徑）／P95（較佳路徑）</a:t>
+                        <a:t>混合平均年化（原始揭露方式）</a:t>
                       </a:r>
-                      <a:endParaRPr lang="en-US" sz="1000" dirty="0"/>
+                      <a:endParaRPr lang="en-US" sz="950" dirty="0"/>
                     </a:p>
                   </a:txBody>
                   <a:tcPr marL="73152" marR="73152" marT="45720" marB="45720" anchor="ctr">
@@ -6466,14 +6458,14 @@
                         <a:buNone/>
                       </a:pPr>
                       <a:r>
-                        <a:rPr lang="en-US" sz="1000" dirty="0">
+                        <a:rPr lang="en-US" sz="950" dirty="0">
                           <a:solidFill>
                             <a:srgbClr val="334155"/>
                           </a:solidFill>
                         </a:rPr>
-                        <a:t>-66.6% ／ +33.9%</a:t>
+                        <a:t>-17.2%</a:t>
                       </a:r>
-                      <a:endParaRPr lang="en-US" sz="1000" dirty="0"/>
+                      <a:endParaRPr lang="en-US" sz="950" dirty="0"/>
                     </a:p>
                   </a:txBody>
                   <a:tcPr marL="73152" marR="73152" marT="45720" marB="45720" anchor="ctr">
@@ -6527,384 +6519,14 @@
                         <a:buNone/>
                       </a:pPr>
                       <a:r>
-                        <a:rPr lang="en-US" sz="1000" dirty="0">
+                        <a:rPr lang="en-US" sz="950" dirty="0">
                           <a:solidFill>
                             <a:srgbClr val="334155"/>
                           </a:solidFill>
                         </a:rPr>
-                        <a:t>-66.3% ／ +19.2%</a:t>
+                        <a:t>-24.7%</a:t>
                       </a:r>
-                      <a:endParaRPr lang="en-US" sz="1000" dirty="0"/>
-                    </a:p>
-                  </a:txBody>
-                  <a:tcPr marL="73152" marR="73152" marT="45720" marB="45720" anchor="ctr">
-                    <a:lnL w="9525" cap="flat" cmpd="sng" algn="ctr">
-                      <a:solidFill>
-                        <a:srgbClr val="E2E8F0"/>
-                      </a:solidFill>
-                      <a:prstDash val="solid"/>
-                      <a:round/>
-                      <a:headEnd type="none" w="med" len="med"/>
-                      <a:tailEnd type="none" w="med" len="med"/>
-                    </a:lnL>
-                    <a:lnR w="9525" cap="flat" cmpd="sng" algn="ctr">
-                      <a:solidFill>
-                        <a:srgbClr val="E2E8F0"/>
-                      </a:solidFill>
-                      <a:prstDash val="solid"/>
-                      <a:round/>
-                      <a:headEnd type="none" w="med" len="med"/>
-                      <a:tailEnd type="none" w="med" len="med"/>
-                    </a:lnR>
-                    <a:lnT w="9525" cap="flat" cmpd="sng" algn="ctr">
-                      <a:solidFill>
-                        <a:srgbClr val="E2E8F0"/>
-                      </a:solidFill>
-                      <a:prstDash val="solid"/>
-                      <a:round/>
-                      <a:headEnd type="none" w="med" len="med"/>
-                      <a:tailEnd type="none" w="med" len="med"/>
-                    </a:lnT>
-                    <a:lnB w="9525" cap="flat" cmpd="sng" algn="ctr">
-                      <a:solidFill>
-                        <a:srgbClr val="E2E8F0"/>
-                      </a:solidFill>
-                      <a:prstDash val="solid"/>
-                      <a:round/>
-                      <a:headEnd type="none" w="med" len="med"/>
-                      <a:tailEnd type="none" w="med" len="med"/>
-                    </a:lnB>
-                    <a:solidFill>
-                      <a:srgbClr val="FFFFFF"/>
-                    </a:solidFill>
-                  </a:tcPr>
-                </a:tc>
-              </a:tr>
-              <a:tr h="502920">
-                <a:tc>
-                  <a:txBody>
-                    <a:bodyPr/>
-                    <a:lstStyle/>
-                    <a:p>
-                      <a:pPr algn="l" indent="0" marL="0">
-                        <a:buNone/>
-                      </a:pPr>
-                      <a:r>
-                        <a:rPr lang="en-US" sz="1000" dirty="0">
-                          <a:solidFill>
-                            <a:srgbClr val="334155"/>
-                          </a:solidFill>
-                        </a:rPr>
-                        <a:t>全年虧損機率</a:t>
-                      </a:r>
-                      <a:endParaRPr lang="en-US" sz="1000" dirty="0"/>
-                    </a:p>
-                  </a:txBody>
-                  <a:tcPr marL="73152" marR="73152" marT="45720" marB="45720" anchor="ctr">
-                    <a:lnL w="9525" cap="flat" cmpd="sng" algn="ctr">
-                      <a:solidFill>
-                        <a:srgbClr val="E2E8F0"/>
-                      </a:solidFill>
-                      <a:prstDash val="solid"/>
-                      <a:round/>
-                      <a:headEnd type="none" w="med" len="med"/>
-                      <a:tailEnd type="none" w="med" len="med"/>
-                    </a:lnL>
-                    <a:lnR w="9525" cap="flat" cmpd="sng" algn="ctr">
-                      <a:solidFill>
-                        <a:srgbClr val="E2E8F0"/>
-                      </a:solidFill>
-                      <a:prstDash val="solid"/>
-                      <a:round/>
-                      <a:headEnd type="none" w="med" len="med"/>
-                      <a:tailEnd type="none" w="med" len="med"/>
-                    </a:lnR>
-                    <a:lnT w="9525" cap="flat" cmpd="sng" algn="ctr">
-                      <a:solidFill>
-                        <a:srgbClr val="E2E8F0"/>
-                      </a:solidFill>
-                      <a:prstDash val="solid"/>
-                      <a:round/>
-                      <a:headEnd type="none" w="med" len="med"/>
-                      <a:tailEnd type="none" w="med" len="med"/>
-                    </a:lnT>
-                    <a:lnB w="9525" cap="flat" cmpd="sng" algn="ctr">
-                      <a:solidFill>
-                        <a:srgbClr val="E2E8F0"/>
-                      </a:solidFill>
-                      <a:prstDash val="solid"/>
-                      <a:round/>
-                      <a:headEnd type="none" w="med" len="med"/>
-                      <a:tailEnd type="none" w="med" len="med"/>
-                    </a:lnB>
-                    <a:solidFill>
-                      <a:srgbClr val="F8FAFC"/>
-                    </a:solidFill>
-                  </a:tcPr>
-                </a:tc>
-                <a:tc>
-                  <a:txBody>
-                    <a:bodyPr/>
-                    <a:lstStyle/>
-                    <a:p>
-                      <a:pPr algn="l" indent="0" marL="0">
-                        <a:buNone/>
-                      </a:pPr>
-                      <a:r>
-                        <a:rPr lang="en-US" sz="1000" dirty="0">
-                          <a:solidFill>
-                            <a:srgbClr val="334155"/>
-                          </a:solidFill>
-                        </a:rPr>
-                        <a:t>73.4%</a:t>
-                      </a:r>
-                      <a:endParaRPr lang="en-US" sz="1000" dirty="0"/>
-                    </a:p>
-                  </a:txBody>
-                  <a:tcPr marL="73152" marR="73152" marT="45720" marB="45720" anchor="ctr">
-                    <a:lnL w="9525" cap="flat" cmpd="sng" algn="ctr">
-                      <a:solidFill>
-                        <a:srgbClr val="E2E8F0"/>
-                      </a:solidFill>
-                      <a:prstDash val="solid"/>
-                      <a:round/>
-                      <a:headEnd type="none" w="med" len="med"/>
-                      <a:tailEnd type="none" w="med" len="med"/>
-                    </a:lnL>
-                    <a:lnR w="9525" cap="flat" cmpd="sng" algn="ctr">
-                      <a:solidFill>
-                        <a:srgbClr val="E2E8F0"/>
-                      </a:solidFill>
-                      <a:prstDash val="solid"/>
-                      <a:round/>
-                      <a:headEnd type="none" w="med" len="med"/>
-                      <a:tailEnd type="none" w="med" len="med"/>
-                    </a:lnR>
-                    <a:lnT w="9525" cap="flat" cmpd="sng" algn="ctr">
-                      <a:solidFill>
-                        <a:srgbClr val="E2E8F0"/>
-                      </a:solidFill>
-                      <a:prstDash val="solid"/>
-                      <a:round/>
-                      <a:headEnd type="none" w="med" len="med"/>
-                      <a:tailEnd type="none" w="med" len="med"/>
-                    </a:lnT>
-                    <a:lnB w="9525" cap="flat" cmpd="sng" algn="ctr">
-                      <a:solidFill>
-                        <a:srgbClr val="E2E8F0"/>
-                      </a:solidFill>
-                      <a:prstDash val="solid"/>
-                      <a:round/>
-                      <a:headEnd type="none" w="med" len="med"/>
-                      <a:tailEnd type="none" w="med" len="med"/>
-                    </a:lnB>
-                    <a:solidFill>
-                      <a:srgbClr val="F8FAFC"/>
-                    </a:solidFill>
-                  </a:tcPr>
-                </a:tc>
-                <a:tc>
-                  <a:txBody>
-                    <a:bodyPr/>
-                    <a:lstStyle/>
-                    <a:p>
-                      <a:pPr algn="l" indent="0" marL="0">
-                        <a:buNone/>
-                      </a:pPr>
-                      <a:r>
-                        <a:rPr lang="en-US" sz="1000" dirty="0">
-                          <a:solidFill>
-                            <a:srgbClr val="334155"/>
-                          </a:solidFill>
-                        </a:rPr>
-                        <a:t>77.5%</a:t>
-                      </a:r>
-                      <a:endParaRPr lang="en-US" sz="1000" dirty="0"/>
-                    </a:p>
-                  </a:txBody>
-                  <a:tcPr marL="73152" marR="73152" marT="45720" marB="45720" anchor="ctr">
-                    <a:lnL w="9525" cap="flat" cmpd="sng" algn="ctr">
-                      <a:solidFill>
-                        <a:srgbClr val="E2E8F0"/>
-                      </a:solidFill>
-                      <a:prstDash val="solid"/>
-                      <a:round/>
-                      <a:headEnd type="none" w="med" len="med"/>
-                      <a:tailEnd type="none" w="med" len="med"/>
-                    </a:lnL>
-                    <a:lnR w="9525" cap="flat" cmpd="sng" algn="ctr">
-                      <a:solidFill>
-                        <a:srgbClr val="E2E8F0"/>
-                      </a:solidFill>
-                      <a:prstDash val="solid"/>
-                      <a:round/>
-                      <a:headEnd type="none" w="med" len="med"/>
-                      <a:tailEnd type="none" w="med" len="med"/>
-                    </a:lnR>
-                    <a:lnT w="9525" cap="flat" cmpd="sng" algn="ctr">
-                      <a:solidFill>
-                        <a:srgbClr val="E2E8F0"/>
-                      </a:solidFill>
-                      <a:prstDash val="solid"/>
-                      <a:round/>
-                      <a:headEnd type="none" w="med" len="med"/>
-                      <a:tailEnd type="none" w="med" len="med"/>
-                    </a:lnT>
-                    <a:lnB w="9525" cap="flat" cmpd="sng" algn="ctr">
-                      <a:solidFill>
-                        <a:srgbClr val="E2E8F0"/>
-                      </a:solidFill>
-                      <a:prstDash val="solid"/>
-                      <a:round/>
-                      <a:headEnd type="none" w="med" len="med"/>
-                      <a:tailEnd type="none" w="med" len="med"/>
-                    </a:lnB>
-                    <a:solidFill>
-                      <a:srgbClr val="F8FAFC"/>
-                    </a:solidFill>
-                  </a:tcPr>
-                </a:tc>
-              </a:tr>
-              <a:tr h="502920">
-                <a:tc>
-                  <a:txBody>
-                    <a:bodyPr/>
-                    <a:lstStyle/>
-                    <a:p>
-                      <a:pPr algn="l" indent="0" marL="0">
-                        <a:buNone/>
-                      </a:pPr>
-                      <a:r>
-                        <a:rPr lang="en-US" sz="1000" dirty="0">
-                          <a:solidFill>
-                            <a:srgbClr val="334155"/>
-                          </a:solidFill>
-                        </a:rPr>
-                        <a:t>平均每年「卡住」週數</a:t>
-                      </a:r>
-                      <a:endParaRPr lang="en-US" sz="1000" dirty="0"/>
-                    </a:p>
-                  </a:txBody>
-                  <a:tcPr marL="73152" marR="73152" marT="45720" marB="45720" anchor="ctr">
-                    <a:lnL w="9525" cap="flat" cmpd="sng" algn="ctr">
-                      <a:solidFill>
-                        <a:srgbClr val="E2E8F0"/>
-                      </a:solidFill>
-                      <a:prstDash val="solid"/>
-                      <a:round/>
-                      <a:headEnd type="none" w="med" len="med"/>
-                      <a:tailEnd type="none" w="med" len="med"/>
-                    </a:lnL>
-                    <a:lnR w="9525" cap="flat" cmpd="sng" algn="ctr">
-                      <a:solidFill>
-                        <a:srgbClr val="E2E8F0"/>
-                      </a:solidFill>
-                      <a:prstDash val="solid"/>
-                      <a:round/>
-                      <a:headEnd type="none" w="med" len="med"/>
-                      <a:tailEnd type="none" w="med" len="med"/>
-                    </a:lnR>
-                    <a:lnT w="9525" cap="flat" cmpd="sng" algn="ctr">
-                      <a:solidFill>
-                        <a:srgbClr val="E2E8F0"/>
-                      </a:solidFill>
-                      <a:prstDash val="solid"/>
-                      <a:round/>
-                      <a:headEnd type="none" w="med" len="med"/>
-                      <a:tailEnd type="none" w="med" len="med"/>
-                    </a:lnT>
-                    <a:lnB w="9525" cap="flat" cmpd="sng" algn="ctr">
-                      <a:solidFill>
-                        <a:srgbClr val="E2E8F0"/>
-                      </a:solidFill>
-                      <a:prstDash val="solid"/>
-                      <a:round/>
-                      <a:headEnd type="none" w="med" len="med"/>
-                      <a:tailEnd type="none" w="med" len="med"/>
-                    </a:lnB>
-                    <a:solidFill>
-                      <a:srgbClr val="FFFFFF"/>
-                    </a:solidFill>
-                  </a:tcPr>
-                </a:tc>
-                <a:tc>
-                  <a:txBody>
-                    <a:bodyPr/>
-                    <a:lstStyle/>
-                    <a:p>
-                      <a:pPr algn="l" indent="0" marL="0">
-                        <a:buNone/>
-                      </a:pPr>
-                      <a:r>
-                        <a:rPr lang="en-US" sz="1000" dirty="0">
-                          <a:solidFill>
-                            <a:srgbClr val="334155"/>
-                          </a:solidFill>
-                        </a:rPr>
-                        <a:t>45.0／52週</a:t>
-                      </a:r>
-                      <a:endParaRPr lang="en-US" sz="1000" dirty="0"/>
-                    </a:p>
-                  </a:txBody>
-                  <a:tcPr marL="73152" marR="73152" marT="45720" marB="45720" anchor="ctr">
-                    <a:lnL w="9525" cap="flat" cmpd="sng" algn="ctr">
-                      <a:solidFill>
-                        <a:srgbClr val="E2E8F0"/>
-                      </a:solidFill>
-                      <a:prstDash val="solid"/>
-                      <a:round/>
-                      <a:headEnd type="none" w="med" len="med"/>
-                      <a:tailEnd type="none" w="med" len="med"/>
-                    </a:lnL>
-                    <a:lnR w="9525" cap="flat" cmpd="sng" algn="ctr">
-                      <a:solidFill>
-                        <a:srgbClr val="E2E8F0"/>
-                      </a:solidFill>
-                      <a:prstDash val="solid"/>
-                      <a:round/>
-                      <a:headEnd type="none" w="med" len="med"/>
-                      <a:tailEnd type="none" w="med" len="med"/>
-                    </a:lnR>
-                    <a:lnT w="9525" cap="flat" cmpd="sng" algn="ctr">
-                      <a:solidFill>
-                        <a:srgbClr val="E2E8F0"/>
-                      </a:solidFill>
-                      <a:prstDash val="solid"/>
-                      <a:round/>
-                      <a:headEnd type="none" w="med" len="med"/>
-                      <a:tailEnd type="none" w="med" len="med"/>
-                    </a:lnT>
-                    <a:lnB w="9525" cap="flat" cmpd="sng" algn="ctr">
-                      <a:solidFill>
-                        <a:srgbClr val="E2E8F0"/>
-                      </a:solidFill>
-                      <a:prstDash val="solid"/>
-                      <a:round/>
-                      <a:headEnd type="none" w="med" len="med"/>
-                      <a:tailEnd type="none" w="med" len="med"/>
-                    </a:lnB>
-                    <a:solidFill>
-                      <a:srgbClr val="FFFFFF"/>
-                    </a:solidFill>
-                  </a:tcPr>
-                </a:tc>
-                <a:tc>
-                  <a:txBody>
-                    <a:bodyPr/>
-                    <a:lstStyle/>
-                    <a:p>
-                      <a:pPr algn="l" indent="0" marL="0">
-                        <a:buNone/>
-                      </a:pPr>
-                      <a:r>
-                        <a:rPr lang="en-US" sz="1000" dirty="0">
-                          <a:solidFill>
-                            <a:srgbClr val="334155"/>
-                          </a:solidFill>
-                        </a:rPr>
-                        <a:t>42.7／52週</a:t>
-                      </a:r>
-                      <a:endParaRPr lang="en-US" sz="1000" dirty="0"/>
+                      <a:endParaRPr lang="en-US" sz="950" dirty="0"/>
                     </a:p>
                   </a:txBody>
                   <a:tcPr marL="73152" marR="73152" marT="45720" marB="45720" anchor="ctr">
@@ -6962,12 +6584,12 @@
         </p:nvSpPr>
         <p:spPr>
           <a:xfrm>
-            <a:off x="7406640" y="1600200"/>
-            <a:ext cx="4233672" cy="1280160"/>
+            <a:off x="8275320" y="1600200"/>
+            <a:ext cx="3364992" cy="1463040"/>
           </a:xfrm>
           <a:prstGeom prst="roundRect">
             <a:avLst>
-              <a:gd name="adj" fmla="val 5714"/>
+              <a:gd name="adj" fmla="val 5000"/>
             </a:avLst>
           </a:prstGeom>
           <a:solidFill>
@@ -6984,8 +6606,8 @@
         </p:nvSpPr>
         <p:spPr>
           <a:xfrm>
-            <a:off x="7543800" y="1709928"/>
-            <a:ext cx="3959352" cy="777240"/>
+            <a:off x="8412480" y="1709928"/>
+            <a:ext cx="3090672" cy="960120"/>
           </a:xfrm>
           <a:prstGeom prst="rect">
             <a:avLst/>
@@ -7001,17 +6623,34 @@
               <a:buNone/>
             </a:pPr>
             <a:r>
-              <a:rPr lang="en-US" sz="2000" b="1" dirty="0">
+              <a:rPr lang="en-US" sz="1800" b="1" dirty="0">
                 <a:solidFill>
-                  <a:srgbClr val="B45309"/>
+                  <a:srgbClr val="16A34A"/>
                 </a:solidFill>
                 <a:latin typeface="Microsoft JhengHei" pitchFamily="34" charset="0"/>
                 <a:ea typeface="Microsoft JhengHei" pitchFamily="34" charset="-122"/>
                 <a:cs typeface="Microsoft JhengHei" pitchFamily="34" charset="-120"/>
               </a:rPr>
-              <a:t>兩規則平均皆為負</a:t>
+              <a:t>已平倉路徑</a:t>
             </a:r>
-            <a:endParaRPr lang="en-US" sz="2000" dirty="0"/>
+            <a:endParaRPr lang="en-US" sz="1800" dirty="0"/>
+          </a:p>
+          <a:p>
+            <a:pPr algn="ctr" indent="0" marL="0">
+              <a:buNone/>
+            </a:pPr>
+            <a:r>
+              <a:rPr lang="en-US" sz="1800" b="1" dirty="0">
+                <a:solidFill>
+                  <a:srgbClr val="16A34A"/>
+                </a:solidFill>
+                <a:latin typeface="Microsoft JhengHei" pitchFamily="34" charset="0"/>
+                <a:ea typeface="Microsoft JhengHei" pitchFamily="34" charset="-122"/>
+                <a:cs typeface="Microsoft JhengHei" pitchFamily="34" charset="-120"/>
+              </a:rPr>
+              <a:t>100%正報酬</a:t>
+            </a:r>
+            <a:endParaRPr lang="en-US" sz="1800" dirty="0"/>
           </a:p>
         </p:txBody>
       </p:sp>
@@ -7023,8 +6662,8 @@
         </p:nvSpPr>
         <p:spPr>
           <a:xfrm>
-            <a:off x="7498080" y="2496312"/>
-            <a:ext cx="4050792" cy="320040"/>
+            <a:off x="8366760" y="2679192"/>
+            <a:ext cx="3182112" cy="320040"/>
           </a:xfrm>
           <a:prstGeom prst="rect">
             <a:avLst/>
@@ -7048,7 +6687,7 @@
                 <a:ea typeface="Microsoft JhengHei" pitchFamily="34" charset="-122"/>
                 <a:cs typeface="Microsoft JhengHei" pitchFamily="34" charset="-120"/>
               </a:rPr>
-              <a:t>在零方向性（不預設漲跌）基準情境下</a:t>
+              <a:t>驗證：只要完整走完一輪，必然是正報酬——與直覺一致</a:t>
             </a:r>
             <a:endParaRPr lang="en-US" sz="1050" dirty="0"/>
           </a:p>
@@ -7062,12 +6701,12 @@
         </p:nvSpPr>
         <p:spPr>
           <a:xfrm>
-            <a:off x="7406640" y="3017520"/>
-            <a:ext cx="4233672" cy="1920240"/>
+            <a:off x="8275320" y="3246120"/>
+            <a:ext cx="3364992" cy="1965960"/>
           </a:xfrm>
           <a:prstGeom prst="roundRect">
             <a:avLst>
-              <a:gd name="adj" fmla="val 3810"/>
+              <a:gd name="adj" fmla="val 3721"/>
             </a:avLst>
           </a:prstGeom>
           <a:solidFill>
@@ -7096,8 +6735,8 @@
         </p:nvSpPr>
         <p:spPr>
           <a:xfrm>
-            <a:off x="7607808" y="3163824"/>
-            <a:ext cx="3831336" cy="320040"/>
+            <a:off x="8476488" y="3392424"/>
+            <a:ext cx="2962656" cy="320040"/>
           </a:xfrm>
           <a:prstGeom prst="rect">
             <a:avLst/>
@@ -7121,7 +6760,7 @@
                 <a:ea typeface="Microsoft JhengHei" pitchFamily="34" charset="-122"/>
                 <a:cs typeface="Microsoft JhengHei" pitchFamily="34" charset="-120"/>
               </a:rPr>
-              <a:t>即使假設 BTC 全年+30%</a:t>
+              <a:t>但只有5.5%~8.1%能在一年內走完</a:t>
             </a:r>
             <a:endParaRPr lang="en-US" sz="1300" dirty="0"/>
           </a:p>
@@ -7135,123 +6774,8 @@
         </p:nvSpPr>
         <p:spPr>
           <a:xfrm>
-            <a:off x="7607808" y="3520440"/>
-            <a:ext cx="3831336" cy="1261872"/>
-          </a:xfrm>
-          <a:prstGeom prst="rect">
-            <a:avLst/>
-          </a:prstGeom>
-          <a:noFill/>
-          <a:ln/>
-        </p:spPr>
-        <p:txBody>
-          <a:bodyPr wrap="square" lIns="0" tIns="0" rIns="0" bIns="0" rtlCol="0" anchor="t"/>
-          <a:lstStyle/>
-          <a:p>
-            <a:pPr algn="l" indent="0" marL="0">
-              <a:lnSpc>
-                <a:spcPct val="115000"/>
-              </a:lnSpc>
-              <a:buNone/>
-            </a:pPr>
-            <a:r>
-              <a:rPr lang="en-US" sz="1100" dirty="0">
-                <a:solidFill>
-                  <a:srgbClr val="334155"/>
-                </a:solidFill>
-                <a:latin typeface="Microsoft JhengHei" pitchFamily="34" charset="0"/>
-                <a:ea typeface="Microsoft JhengHei" pitchFamily="34" charset="-122"/>
-                <a:cs typeface="Microsoft JhengHei" pitchFamily="34" charset="-120"/>
-              </a:rPr>
-              <a:t>規則1平均年化仍為 -4.2%，規則2仍為 -11.6%——因「高賣」結構將上檔封頂於行使價，方向性上漲僅能間接透過「更快脫離套牢」受惠，無法直接參與漲幅。</a:t>
-            </a:r>
-            <a:endParaRPr lang="en-US" sz="1100" dirty="0"/>
-          </a:p>
-        </p:txBody>
-      </p:sp>
-      <p:sp>
-        <p:nvSpPr>
-          <p:cNvPr id="11" name="Shape 8"/>
-          <p:cNvSpPr/>
-          <p:nvPr/>
-        </p:nvSpPr>
-        <p:spPr>
-          <a:xfrm>
-            <a:off x="548640" y="5120640"/>
-            <a:ext cx="11094415" cy="1188720"/>
-          </a:xfrm>
-          <a:prstGeom prst="roundRect">
-            <a:avLst>
-              <a:gd name="adj" fmla="val 6154"/>
-            </a:avLst>
-          </a:prstGeom>
-          <a:solidFill>
-            <a:srgbClr val="F8FAFC"/>
-          </a:solidFill>
-          <a:ln w="9525">
-            <a:solidFill>
-              <a:srgbClr val="E2E8F0"/>
-            </a:solidFill>
-            <a:prstDash val="solid"/>
-          </a:ln>
-          <a:effectLst>
-            <a:outerShdw sx="100000" sy="100000" kx="0" ky="0" algn="bl" rotWithShape="0" blurRad="76200" dist="25400" dir="5400000">
-              <a:srgbClr val="1E293B">
-                <a:alpha val="8000"/>
-              </a:srgbClr>
-            </a:outerShdw>
-          </a:effectLst>
-        </p:spPr>
-      </p:sp>
-      <p:sp>
-        <p:nvSpPr>
-          <p:cNvPr id="12" name="Text 9"/>
-          <p:cNvSpPr txBox="1"/>
-          <p:nvPr/>
-        </p:nvSpPr>
-        <p:spPr>
-          <a:xfrm>
-            <a:off x="749808" y="5266944"/>
-            <a:ext cx="10692079" cy="320040"/>
-          </a:xfrm>
-          <a:prstGeom prst="rect">
-            <a:avLst/>
-          </a:prstGeom>
-          <a:noFill/>
-          <a:ln/>
-        </p:spPr>
-        <p:txBody>
-          <a:bodyPr wrap="square" lIns="0" tIns="0" rIns="0" bIns="0" rtlCol="0" anchor="ctr"/>
-          <a:lstStyle/>
-          <a:p>
-            <a:pPr algn="l" indent="0" marL="0">
-              <a:buNone/>
-            </a:pPr>
-            <a:r>
-              <a:rPr lang="en-US" sz="1300" b="1" dirty="0">
-                <a:solidFill>
-                  <a:srgbClr val="0F172A"/>
-                </a:solidFill>
-                <a:latin typeface="Microsoft JhengHei" pitchFamily="34" charset="0"/>
-                <a:ea typeface="Microsoft JhengHei" pitchFamily="34" charset="-122"/>
-                <a:cs typeface="Microsoft JhengHei" pitchFamily="34" charset="-120"/>
-              </a:rPr>
-              <a:t>為什麼「年化最高」的規則，全年不一定比較好？</a:t>
-            </a:r>
-            <a:endParaRPr lang="en-US" sz="1300" dirty="0"/>
-          </a:p>
-        </p:txBody>
-      </p:sp>
-      <p:sp>
-        <p:nvSpPr>
-          <p:cNvPr id="13" name="Text 10"/>
-          <p:cNvSpPr txBox="1"/>
-          <p:nvPr/>
-        </p:nvSpPr>
-        <p:spPr>
-          <a:xfrm>
-            <a:off x="749808" y="5623560"/>
-            <a:ext cx="10692079" cy="530352"/>
+            <a:off x="8476488" y="3749040"/>
+            <a:ext cx="2962656" cy="1307592"/>
           </a:xfrm>
           <a:prstGeom prst="rect">
             <a:avLst/>
@@ -7278,7 +6802,7 @@
                 <a:ea typeface="Microsoft JhengHei" pitchFamily="34" charset="-122"/>
                 <a:cs typeface="Microsoft JhengHei" pitchFamily="34" charset="-120"/>
               </a:rPr>
-              <a:t>出售選擇權收取權利金，本質是承接波動率風險換取補償；當市場願付的權利金不足以覆蓋標的實際波動帶來的潛在損失，長期反覆執行即呈現「多數週期小賺、少數週期大套牢」的負偏態分布。第9頁的+2.05%三週範例是單一幸運路徑，本頁呈現的才是全年反覆執行後的機率分布，財務部審查應以本頁為主要依據。</a:t>
+              <a:t>其餘九成以上路徑年末仍持有BTC，「負報酬」幾乎全來自這批未平倉部位在年末當天的市價快照，而非策略已實現虧損。</a:t>
             </a:r>
             <a:endParaRPr lang="en-US" sz="1050" dirty="0"/>
           </a:p>
@@ -7286,7 +6810,237 @@
       </p:sp>
       <p:sp>
         <p:nvSpPr>
-          <p:cNvPr id="14" name="Text 11"/>
+          <p:cNvPr id="11" name="Shape 8"/>
+          <p:cNvSpPr/>
+          <p:nvPr/>
+        </p:nvSpPr>
+        <p:spPr>
+          <a:xfrm>
+            <a:off x="548640" y="3794760"/>
+            <a:ext cx="7589520" cy="1417320"/>
+          </a:xfrm>
+          <a:prstGeom prst="roundRect">
+            <a:avLst>
+              <a:gd name="adj" fmla="val 5161"/>
+            </a:avLst>
+          </a:prstGeom>
+          <a:solidFill>
+            <a:srgbClr val="F8FAFC"/>
+          </a:solidFill>
+          <a:ln w="9525">
+            <a:solidFill>
+              <a:srgbClr val="E2E8F0"/>
+            </a:solidFill>
+            <a:prstDash val="solid"/>
+          </a:ln>
+          <a:effectLst>
+            <a:outerShdw sx="100000" sy="100000" kx="0" ky="0" algn="bl" rotWithShape="0" blurRad="76200" dist="25400" dir="5400000">
+              <a:srgbClr val="1E293B">
+                <a:alpha val="8000"/>
+              </a:srgbClr>
+            </a:outerShdw>
+          </a:effectLst>
+        </p:spPr>
+      </p:sp>
+      <p:sp>
+        <p:nvSpPr>
+          <p:cNvPr id="12" name="Text 9"/>
+          <p:cNvSpPr txBox="1"/>
+          <p:nvPr/>
+        </p:nvSpPr>
+        <p:spPr>
+          <a:xfrm>
+            <a:off x="749808" y="3941064"/>
+            <a:ext cx="7187184" cy="320040"/>
+          </a:xfrm>
+          <a:prstGeom prst="rect">
+            <a:avLst/>
+          </a:prstGeom>
+          <a:noFill/>
+          <a:ln/>
+        </p:spPr>
+        <p:txBody>
+          <a:bodyPr wrap="square" lIns="0" tIns="0" rIns="0" bIns="0" rtlCol="0" anchor="ctr"/>
+          <a:lstStyle/>
+          <a:p>
+            <a:pPr algn="l" indent="0" marL="0">
+              <a:buNone/>
+            </a:pPr>
+            <a:r>
+              <a:rPr lang="en-US" sz="1300" b="1" dirty="0">
+                <a:solidFill>
+                  <a:srgbClr val="0F172A"/>
+                </a:solidFill>
+                <a:latin typeface="Microsoft JhengHei" pitchFamily="34" charset="0"/>
+                <a:ea typeface="Microsoft JhengHei" pitchFamily="34" charset="-122"/>
+                <a:cs typeface="Microsoft JhengHei" pitchFamily="34" charset="-120"/>
+              </a:rPr>
+              <a:t>為什麼「未平倉」的比例這麼高？</a:t>
+            </a:r>
+            <a:endParaRPr lang="en-US" sz="1300" dirty="0"/>
+          </a:p>
+        </p:txBody>
+      </p:sp>
+      <p:sp>
+        <p:nvSpPr>
+          <p:cNvPr id="13" name="Text 10"/>
+          <p:cNvSpPr txBox="1"/>
+          <p:nvPr/>
+        </p:nvSpPr>
+        <p:spPr>
+          <a:xfrm>
+            <a:off x="749808" y="4297680"/>
+            <a:ext cx="7187184" cy="758952"/>
+          </a:xfrm>
+          <a:prstGeom prst="rect">
+            <a:avLst/>
+          </a:prstGeom>
+          <a:noFill/>
+          <a:ln/>
+        </p:spPr>
+        <p:txBody>
+          <a:bodyPr wrap="square" lIns="0" tIns="0" rIns="0" bIns="0" rtlCol="0" anchor="t"/>
+          <a:lstStyle/>
+          <a:p>
+            <a:pPr algn="l" indent="0" marL="0">
+              <a:lnSpc>
+                <a:spcPct val="115000"/>
+              </a:lnSpc>
+              <a:buNone/>
+            </a:pPr>
+            <a:r>
+              <a:rPr lang="en-US" sz="1050" dirty="0">
+                <a:solidFill>
+                  <a:srgbClr val="334155"/>
+                </a:solidFill>
+                <a:latin typeface="Microsoft JhengHei" pitchFamily="34" charset="0"/>
+                <a:ea typeface="Microsoft JhengHei" pitchFamily="34" charset="-122"/>
+                <a:cs typeface="Microsoft JhengHei" pitchFamily="34" charset="-120"/>
+              </a:rPr>
+              <a:t>零漂移（公平隨機漫步）下，「價格回到某個固定點」所需的期望時間在數學上是無窮大——這不是模型瑕疵，是隨機漫步的古典性質。且兩規則都要求「一解套就立刻重新掛單」，新倉位又有相當機率馬上再度套牢，因此「卡住」才是這套規則長期下的常態，而非過渡。</a:t>
+            </a:r>
+            <a:endParaRPr lang="en-US" sz="1050" dirty="0"/>
+          </a:p>
+        </p:txBody>
+      </p:sp>
+      <p:sp>
+        <p:nvSpPr>
+          <p:cNvPr id="14" name="Shape 11"/>
+          <p:cNvSpPr/>
+          <p:nvPr/>
+        </p:nvSpPr>
+        <p:spPr>
+          <a:xfrm>
+            <a:off x="548640" y="5349240"/>
+            <a:ext cx="11094415" cy="914400"/>
+          </a:xfrm>
+          <a:prstGeom prst="roundRect">
+            <a:avLst>
+              <a:gd name="adj" fmla="val 8000"/>
+            </a:avLst>
+          </a:prstGeom>
+          <a:solidFill>
+            <a:srgbClr val="EFF6FF"/>
+          </a:solidFill>
+          <a:ln w="9525">
+            <a:solidFill>
+              <a:srgbClr val="E2E8F0"/>
+            </a:solidFill>
+            <a:prstDash val="solid"/>
+          </a:ln>
+          <a:effectLst>
+            <a:outerShdw sx="100000" sy="100000" kx="0" ky="0" algn="bl" rotWithShape="0" blurRad="76200" dist="25400" dir="5400000">
+              <a:srgbClr val="1E293B">
+                <a:alpha val="8000"/>
+              </a:srgbClr>
+            </a:outerShdw>
+          </a:effectLst>
+        </p:spPr>
+      </p:sp>
+      <p:sp>
+        <p:nvSpPr>
+          <p:cNvPr id="15" name="Text 12"/>
+          <p:cNvSpPr txBox="1"/>
+          <p:nvPr/>
+        </p:nvSpPr>
+        <p:spPr>
+          <a:xfrm>
+            <a:off x="749808" y="5495544"/>
+            <a:ext cx="10692079" cy="320040"/>
+          </a:xfrm>
+          <a:prstGeom prst="rect">
+            <a:avLst/>
+          </a:prstGeom>
+          <a:noFill/>
+          <a:ln/>
+        </p:spPr>
+        <p:txBody>
+          <a:bodyPr wrap="square" lIns="0" tIns="0" rIns="0" bIns="0" rtlCol="0" anchor="ctr"/>
+          <a:lstStyle/>
+          <a:p>
+            <a:pPr algn="l" indent="0" marL="0">
+              <a:buNone/>
+            </a:pPr>
+            <a:r>
+              <a:rPr lang="en-US" sz="1300" b="1" dirty="0">
+                <a:solidFill>
+                  <a:srgbClr val="0F172A"/>
+                </a:solidFill>
+                <a:latin typeface="Microsoft JhengHei" pitchFamily="34" charset="0"/>
+                <a:ea typeface="Microsoft JhengHei" pitchFamily="34" charset="-122"/>
+                <a:cs typeface="Microsoft JhengHei" pitchFamily="34" charset="-120"/>
+              </a:rPr>
+              <a:t>財務部審查建議</a:t>
+            </a:r>
+            <a:endParaRPr lang="en-US" sz="1300" dirty="0"/>
+          </a:p>
+        </p:txBody>
+      </p:sp>
+      <p:sp>
+        <p:nvSpPr>
+          <p:cNvPr id="16" name="Text 13"/>
+          <p:cNvSpPr txBox="1"/>
+          <p:nvPr/>
+        </p:nvSpPr>
+        <p:spPr>
+          <a:xfrm>
+            <a:off x="749808" y="5852160"/>
+            <a:ext cx="10692079" cy="256032"/>
+          </a:xfrm>
+          <a:prstGeom prst="rect">
+            <a:avLst/>
+          </a:prstGeom>
+          <a:noFill/>
+          <a:ln/>
+        </p:spPr>
+        <p:txBody>
+          <a:bodyPr wrap="square" lIns="0" tIns="0" rIns="0" bIns="0" rtlCol="0" anchor="t"/>
+          <a:lstStyle/>
+          <a:p>
+            <a:pPr algn="l" indent="0" marL="0">
+              <a:lnSpc>
+                <a:spcPct val="115000"/>
+              </a:lnSpc>
+              <a:buNone/>
+            </a:pPr>
+            <a:r>
+              <a:rPr lang="en-US" sz="1050" dirty="0">
+                <a:solidFill>
+                  <a:srgbClr val="334155"/>
+                </a:solidFill>
+                <a:latin typeface="Microsoft JhengHei" pitchFamily="34" charset="0"/>
+                <a:ea typeface="Microsoft JhengHei" pitchFamily="34" charset="-122"/>
+                <a:cs typeface="Microsoft JhengHei" pitchFamily="34" charset="-120"/>
+              </a:rPr>
+              <a:t>不應只看「混合平均年化」（易誤判為策略虧損），也不應只看「已平倉100%正報酬」（易誤判為零風險）；正確理解是：勝率高，但完成週期需要的時間沒有上限，期間資金以未平倉部位形式暴露於市價波動與FVTPL未實現損益認列。</a:t>
+            </a:r>
+            <a:endParaRPr lang="en-US" sz="1050" dirty="0"/>
+          </a:p>
+        </p:txBody>
+      </p:sp>
+      <p:sp>
+        <p:nvSpPr>
+          <p:cNvPr id="17" name="Text 14"/>
           <p:cNvSpPr txBox="1"/>
           <p:nvPr/>
         </p:nvSpPr>
@@ -7325,7 +7079,7 @@
       </p:sp>
       <p:sp>
         <p:nvSpPr>
-          <p:cNvPr id="15" name="Text 12"/>
+          <p:cNvPr id="18" name="Text 15"/>
           <p:cNvSpPr txBox="1"/>
           <p:nvPr/>
         </p:nvSpPr>

--- a/reports/TSGEX_Five_Instrument_Yield_Optimization_Report.pptx
+++ b/reports/TSGEX_Five_Instrument_Yield_Optimization_Report.pptx
@@ -21,9 +21,10 @@
     <p:sldId id="269" r:id="rId15"/>
     <p:sldId id="270" r:id="rId16"/>
     <p:sldId id="271" r:id="rId17"/>
+    <p:sldId id="272" r:id="rId18"/>
   </p:sldIdLst>
   <p:notesMasterIdLst>
-    <p:notesMasterId r:id="rId18"/>
+    <p:notesMasterId r:id="rId19"/>
   </p:notesMasterIdLst>
   <p:sldSz cx="12192000" cy="6858000"/>
   <p:notesSz cx="6858000" cy="12192000"/>
@@ -2081,6 +2082,94 @@
 </p:notes>
 </file>
 
+<file path=ppt/notesSlides/notesSlide17.xml><?xml version="1.0" encoding="utf-8"?>
+<p:notes xmlns:a="http://schemas.openxmlformats.org/drawingml/2006/main" xmlns:r="http://schemas.openxmlformats.org/officeDocument/2006/relationships" xmlns:p="http://schemas.openxmlformats.org/presentationml/2006/main">
+  <p:cSld>
+    <p:spTree>
+      <p:nvGrpSpPr>
+        <p:cNvPr id="1" name=""/>
+        <p:cNvGrpSpPr/>
+        <p:nvPr/>
+      </p:nvGrpSpPr>
+      <p:grpSpPr>
+        <a:xfrm>
+          <a:off x="0" y="0"/>
+          <a:ext cx="0" cy="0"/>
+          <a:chOff x="0" y="0"/>
+          <a:chExt cx="0" cy="0"/>
+        </a:xfrm>
+      </p:grpSpPr>
+      <p:sp>
+        <p:nvSpPr>
+          <p:cNvPr id="2" name="Slide Image Placeholder 1"/>
+          <p:cNvSpPr>
+            <a:spLocks noGrp="1" noRot="1" noChangeAspect="1"/>
+          </p:cNvSpPr>
+          <p:nvPr>
+            <p:ph type="sldImg"/>
+          </p:nvPr>
+        </p:nvSpPr>
+        <p:spPr/>
+      </p:sp>
+      <p:sp>
+        <p:nvSpPr>
+          <p:cNvPr id="3" name="Notes Placeholder 2"/>
+          <p:cNvSpPr>
+            <a:spLocks noGrp="1"/>
+          </p:cNvSpPr>
+          <p:nvPr>
+            <p:ph type="body" idx="1"/>
+          </p:nvPr>
+        </p:nvSpPr>
+        <p:spPr/>
+        <p:txBody>
+          <a:bodyPr/>
+          <a:lstStyle/>
+          <a:p>
+            <a:r>
+              <a:rPr lang="en-US" dirty="0"/>
+              <a:t/>
+            </a:r>
+            <a:endParaRPr lang="en-US" dirty="0"/>
+          </a:p>
+        </p:txBody>
+      </p:sp>
+      <p:sp>
+        <p:nvSpPr>
+          <p:cNvPr id="4" name="Slide Number Placeholder 3"/>
+          <p:cNvSpPr>
+            <a:spLocks noGrp="1"/>
+          </p:cNvSpPr>
+          <p:nvPr>
+            <p:ph type="sldNum" sz="quarter" idx="10"/>
+          </p:nvPr>
+        </p:nvSpPr>
+        <p:spPr/>
+        <p:txBody>
+          <a:bodyPr/>
+          <a:lstStyle/>
+          <a:p>
+            <a:fld id="{F7021451-1387-4CA6-816F-3879F97B5CBC}" type="slidenum">
+              <a:rPr lang="en-US"/>
+              <a:t>17</a:t>
+            </a:fld>
+            <a:endParaRPr lang="en-US"/>
+          </a:p>
+        </p:txBody>
+      </p:sp>
+    </p:spTree>
+    <p:extLst>
+      <p:ext uri="{BB962C8B-B14F-4D97-AF65-F5344CB8AC3E}">
+        <p14:creationId xmlns:p14="http://schemas.microsoft.com/office/powerpoint/2010/main" val="1024086991"/>
+      </p:ext>
+    </p:extLst>
+  </p:cSld>
+  <p:clrMapOvr>
+    <a:masterClrMapping/>
+  </p:clrMapOvr>
+</p:notes>
+</file>
+
 <file path=ppt/notesSlides/notesSlide2.xml><?xml version="1.0" encoding="utf-8"?>
 <p:notes xmlns:a="http://schemas.openxmlformats.org/drawingml/2006/main" xmlns:r="http://schemas.openxmlformats.org/officeDocument/2006/relationships" xmlns:p="http://schemas.openxmlformats.org/presentationml/2006/main">
   <p:cSld>
@@ -5697,7 +5786,7 @@
                 <a:ea typeface="Microsoft JhengHei" pitchFamily="34" charset="-122"/>
                 <a:cs typeface="Microsoft JhengHei" pitchFamily="34" charset="-120"/>
               </a:rPr>
-              <a:t>10 / 16</a:t>
+              <a:t>10 / 17</a:t>
             </a:r>
             <a:endParaRPr lang="en-US" sz="900" dirty="0"/>
           </a:p>
@@ -7110,7 +7199,7 @@
                 <a:ea typeface="Microsoft JhengHei" pitchFamily="34" charset="-122"/>
                 <a:cs typeface="Microsoft JhengHei" pitchFamily="34" charset="-120"/>
               </a:rPr>
-              <a:t>11 / 16</a:t>
+              <a:t>11 / 17</a:t>
             </a:r>
             <a:endParaRPr lang="en-US" sz="900" dirty="0"/>
           </a:p>
@@ -7181,6 +7270,2399 @@
                 <a:ea typeface="Microsoft JhengHei" pitchFamily="34" charset="-122"/>
                 <a:cs typeface="Microsoft JhengHei" pitchFamily="34" charset="-120"/>
               </a:rPr>
+              <a:t>④ 穩健性檢驗：換一個天期，結論會不同嗎？</a:t>
+            </a:r>
+            <a:endParaRPr lang="en-US" sz="2800" dirty="0"/>
+          </a:p>
+        </p:txBody>
+      </p:sp>
+      <p:sp>
+        <p:nvSpPr>
+          <p:cNvPr id="3" name="Text 1"/>
+          <p:cNvSpPr txBox="1"/>
+          <p:nvPr/>
+        </p:nvSpPr>
+        <p:spPr>
+          <a:xfrm>
+            <a:off x="548640" y="960120"/>
+            <a:ext cx="11094415" cy="365760"/>
+          </a:xfrm>
+          <a:prstGeom prst="rect">
+            <a:avLst/>
+          </a:prstGeom>
+          <a:noFill/>
+          <a:ln/>
+        </p:spPr>
+        <p:txBody>
+          <a:bodyPr wrap="square" lIns="0" tIns="0" rIns="0" bIns="0" rtlCol="0" anchor="ctr"/>
+          <a:lstStyle/>
+          <a:p>
+            <a:pPr algn="l" indent="0" marL="0">
+              <a:buNone/>
+            </a:pPr>
+            <a:r>
+              <a:rPr lang="en-US" sz="1300" dirty="0">
+                <a:solidFill>
+                  <a:srgbClr val="64748B"/>
+                </a:solidFill>
+                <a:latin typeface="Microsoft JhengHei" pitchFamily="34" charset="0"/>
+                <a:ea typeface="Microsoft JhengHei" pitchFamily="34" charset="-122"/>
+                <a:cs typeface="Microsoft JhengHei" pitchFamily="34" charset="-120"/>
+              </a:rPr>
+              <a:t>天期非固定7天——依選擇權定價原理（權利金∝√天期），重新校準1～30天全區間並重跑模擬</a:t>
+            </a:r>
+            <a:endParaRPr lang="en-US" sz="1300" dirty="0"/>
+          </a:p>
+        </p:txBody>
+      </p:sp>
+      <p:graphicFrame>
+        <p:nvGraphicFramePr>
+          <p:cNvPr id="13" name="Table 0"/>
+          <p:cNvGraphicFramePr>
+            <a:graphicFrameLocks noGrp="1"/>
+          </p:cNvGraphicFramePr>
+          <p:nvPr>
+            <p:extLst>
+              <p:ext uri="{D42A27DB-BD31-4B8C-83A1-F6EECF244321}">
+                <p14:modId xmlns:p14="http://schemas.microsoft.com/office/powerpoint/2010/main" val="1579011935"/>
+              </p:ext>
+            </p:extLst>
+          </p:nvPr>
+        </p:nvGraphicFramePr>
+        <p:xfrm>
+          <a:off x="548640" y="1600200"/>
+          <a:ext cx="11094415" cy="914400"/>
+        </p:xfrm>
+        <a:graphic>
+          <a:graphicData uri="http://schemas.openxmlformats.org/drawingml/2006/table">
+            <a:tbl>
+              <a:tblPr/>
+              <a:tblGrid>
+                <a:gridCol w="2011680"/>
+                <a:gridCol w="1920240"/>
+                <a:gridCol w="2011680"/>
+                <a:gridCol w="2011680"/>
+                <a:gridCol w="2377440"/>
+              </a:tblGrid>
+              <a:tr h="502920">
+                <a:tc>
+                  <a:txBody>
+                    <a:bodyPr/>
+                    <a:lstStyle/>
+                    <a:p>
+                      <a:pPr algn="ctr" indent="0" marL="0">
+                        <a:buNone/>
+                      </a:pPr>
+                      <a:r>
+                        <a:rPr lang="en-US" sz="1000" b="1" dirty="0">
+                          <a:solidFill>
+                            <a:srgbClr val="FFFFFF"/>
+                          </a:solidFill>
+                        </a:rPr>
+                        <a:t>天期</a:t>
+                      </a:r>
+                      <a:endParaRPr lang="en-US" sz="1000" dirty="0"/>
+                    </a:p>
+                  </a:txBody>
+                  <a:tcPr marL="73152" marR="73152" marT="45720" marB="45720" anchor="ctr">
+                    <a:lnL w="9525" cap="flat" cmpd="sng" algn="ctr">
+                      <a:solidFill>
+                        <a:srgbClr val="E2E8F0"/>
+                      </a:solidFill>
+                      <a:prstDash val="solid"/>
+                      <a:round/>
+                      <a:headEnd type="none" w="med" len="med"/>
+                      <a:tailEnd type="none" w="med" len="med"/>
+                    </a:lnL>
+                    <a:lnR w="9525" cap="flat" cmpd="sng" algn="ctr">
+                      <a:solidFill>
+                        <a:srgbClr val="E2E8F0"/>
+                      </a:solidFill>
+                      <a:prstDash val="solid"/>
+                      <a:round/>
+                      <a:headEnd type="none" w="med" len="med"/>
+                      <a:tailEnd type="none" w="med" len="med"/>
+                    </a:lnR>
+                    <a:lnT w="9525" cap="flat" cmpd="sng" algn="ctr">
+                      <a:solidFill>
+                        <a:srgbClr val="E2E8F0"/>
+                      </a:solidFill>
+                      <a:prstDash val="solid"/>
+                      <a:round/>
+                      <a:headEnd type="none" w="med" len="med"/>
+                      <a:tailEnd type="none" w="med" len="med"/>
+                    </a:lnT>
+                    <a:lnB w="9525" cap="flat" cmpd="sng" algn="ctr">
+                      <a:solidFill>
+                        <a:srgbClr val="E2E8F0"/>
+                      </a:solidFill>
+                      <a:prstDash val="solid"/>
+                      <a:round/>
+                      <a:headEnd type="none" w="med" len="med"/>
+                      <a:tailEnd type="none" w="med" len="med"/>
+                    </a:lnB>
+                    <a:solidFill>
+                      <a:srgbClr val="0F172A"/>
+                    </a:solidFill>
+                  </a:tcPr>
+                </a:tc>
+                <a:tc>
+                  <a:txBody>
+                    <a:bodyPr/>
+                    <a:lstStyle/>
+                    <a:p>
+                      <a:pPr algn="ctr" indent="0" marL="0">
+                        <a:buNone/>
+                      </a:pPr>
+                      <a:r>
+                        <a:rPr lang="en-US" sz="1000" b="1" dirty="0">
+                          <a:solidFill>
+                            <a:srgbClr val="FFFFFF"/>
+                          </a:solidFill>
+                        </a:rPr>
+                        <a:t>每年週期數</a:t>
+                      </a:r>
+                      <a:endParaRPr lang="en-US" sz="1000" dirty="0"/>
+                    </a:p>
+                  </a:txBody>
+                  <a:tcPr marL="73152" marR="73152" marT="45720" marB="45720" anchor="ctr">
+                    <a:lnL w="9525" cap="flat" cmpd="sng" algn="ctr">
+                      <a:solidFill>
+                        <a:srgbClr val="E2E8F0"/>
+                      </a:solidFill>
+                      <a:prstDash val="solid"/>
+                      <a:round/>
+                      <a:headEnd type="none" w="med" len="med"/>
+                      <a:tailEnd type="none" w="med" len="med"/>
+                    </a:lnL>
+                    <a:lnR w="9525" cap="flat" cmpd="sng" algn="ctr">
+                      <a:solidFill>
+                        <a:srgbClr val="E2E8F0"/>
+                      </a:solidFill>
+                      <a:prstDash val="solid"/>
+                      <a:round/>
+                      <a:headEnd type="none" w="med" len="med"/>
+                      <a:tailEnd type="none" w="med" len="med"/>
+                    </a:lnR>
+                    <a:lnT w="9525" cap="flat" cmpd="sng" algn="ctr">
+                      <a:solidFill>
+                        <a:srgbClr val="E2E8F0"/>
+                      </a:solidFill>
+                      <a:prstDash val="solid"/>
+                      <a:round/>
+                      <a:headEnd type="none" w="med" len="med"/>
+                      <a:tailEnd type="none" w="med" len="med"/>
+                    </a:lnT>
+                    <a:lnB w="9525" cap="flat" cmpd="sng" algn="ctr">
+                      <a:solidFill>
+                        <a:srgbClr val="E2E8F0"/>
+                      </a:solidFill>
+                      <a:prstDash val="solid"/>
+                      <a:round/>
+                      <a:headEnd type="none" w="med" len="med"/>
+                      <a:tailEnd type="none" w="med" len="med"/>
+                    </a:lnB>
+                    <a:solidFill>
+                      <a:srgbClr val="0F172A"/>
+                    </a:solidFill>
+                  </a:tcPr>
+                </a:tc>
+                <a:tc>
+                  <a:txBody>
+                    <a:bodyPr/>
+                    <a:lstStyle/>
+                    <a:p>
+                      <a:pPr algn="ctr" indent="0" marL="0">
+                        <a:buNone/>
+                      </a:pPr>
+                      <a:r>
+                        <a:rPr lang="en-US" sz="1000" b="1" dirty="0">
+                          <a:solidFill>
+                            <a:srgbClr val="FFFFFF"/>
+                          </a:solidFill>
+                        </a:rPr>
+                        <a:t>校準ATM年化</a:t>
+                      </a:r>
+                      <a:endParaRPr lang="en-US" sz="1000" dirty="0"/>
+                    </a:p>
+                  </a:txBody>
+                  <a:tcPr marL="73152" marR="73152" marT="45720" marB="45720" anchor="ctr">
+                    <a:lnL w="9525" cap="flat" cmpd="sng" algn="ctr">
+                      <a:solidFill>
+                        <a:srgbClr val="E2E8F0"/>
+                      </a:solidFill>
+                      <a:prstDash val="solid"/>
+                      <a:round/>
+                      <a:headEnd type="none" w="med" len="med"/>
+                      <a:tailEnd type="none" w="med" len="med"/>
+                    </a:lnL>
+                    <a:lnR w="9525" cap="flat" cmpd="sng" algn="ctr">
+                      <a:solidFill>
+                        <a:srgbClr val="E2E8F0"/>
+                      </a:solidFill>
+                      <a:prstDash val="solid"/>
+                      <a:round/>
+                      <a:headEnd type="none" w="med" len="med"/>
+                      <a:tailEnd type="none" w="med" len="med"/>
+                    </a:lnR>
+                    <a:lnT w="9525" cap="flat" cmpd="sng" algn="ctr">
+                      <a:solidFill>
+                        <a:srgbClr val="E2E8F0"/>
+                      </a:solidFill>
+                      <a:prstDash val="solid"/>
+                      <a:round/>
+                      <a:headEnd type="none" w="med" len="med"/>
+                      <a:tailEnd type="none" w="med" len="med"/>
+                    </a:lnT>
+                    <a:lnB w="9525" cap="flat" cmpd="sng" algn="ctr">
+                      <a:solidFill>
+                        <a:srgbClr val="E2E8F0"/>
+                      </a:solidFill>
+                      <a:prstDash val="solid"/>
+                      <a:round/>
+                      <a:headEnd type="none" w="med" len="med"/>
+                      <a:tailEnd type="none" w="med" len="med"/>
+                    </a:lnB>
+                    <a:solidFill>
+                      <a:srgbClr val="0F172A"/>
+                    </a:solidFill>
+                  </a:tcPr>
+                </a:tc>
+                <a:tc>
+                  <a:txBody>
+                    <a:bodyPr/>
+                    <a:lstStyle/>
+                    <a:p>
+                      <a:pPr algn="ctr" indent="0" marL="0">
+                        <a:buNone/>
+                      </a:pPr>
+                      <a:r>
+                        <a:rPr lang="en-US" sz="1000" b="1" dirty="0">
+                          <a:solidFill>
+                            <a:srgbClr val="FFFFFF"/>
+                          </a:solidFill>
+                        </a:rPr>
+                        <a:t>混合平均年化</a:t>
+                      </a:r>
+                      <a:endParaRPr lang="en-US" sz="1000" dirty="0"/>
+                    </a:p>
+                  </a:txBody>
+                  <a:tcPr marL="73152" marR="73152" marT="45720" marB="45720" anchor="ctr">
+                    <a:lnL w="9525" cap="flat" cmpd="sng" algn="ctr">
+                      <a:solidFill>
+                        <a:srgbClr val="E2E8F0"/>
+                      </a:solidFill>
+                      <a:prstDash val="solid"/>
+                      <a:round/>
+                      <a:headEnd type="none" w="med" len="med"/>
+                      <a:tailEnd type="none" w="med" len="med"/>
+                    </a:lnL>
+                    <a:lnR w="9525" cap="flat" cmpd="sng" algn="ctr">
+                      <a:solidFill>
+                        <a:srgbClr val="E2E8F0"/>
+                      </a:solidFill>
+                      <a:prstDash val="solid"/>
+                      <a:round/>
+                      <a:headEnd type="none" w="med" len="med"/>
+                      <a:tailEnd type="none" w="med" len="med"/>
+                    </a:lnR>
+                    <a:lnT w="9525" cap="flat" cmpd="sng" algn="ctr">
+                      <a:solidFill>
+                        <a:srgbClr val="E2E8F0"/>
+                      </a:solidFill>
+                      <a:prstDash val="solid"/>
+                      <a:round/>
+                      <a:headEnd type="none" w="med" len="med"/>
+                      <a:tailEnd type="none" w="med" len="med"/>
+                    </a:lnT>
+                    <a:lnB w="9525" cap="flat" cmpd="sng" algn="ctr">
+                      <a:solidFill>
+                        <a:srgbClr val="E2E8F0"/>
+                      </a:solidFill>
+                      <a:prstDash val="solid"/>
+                      <a:round/>
+                      <a:headEnd type="none" w="med" len="med"/>
+                      <a:tailEnd type="none" w="med" len="med"/>
+                    </a:lnB>
+                    <a:solidFill>
+                      <a:srgbClr val="0F172A"/>
+                    </a:solidFill>
+                  </a:tcPr>
+                </a:tc>
+                <a:tc>
+                  <a:txBody>
+                    <a:bodyPr/>
+                    <a:lstStyle/>
+                    <a:p>
+                      <a:pPr algn="ctr" indent="0" marL="0">
+                        <a:buNone/>
+                      </a:pPr>
+                      <a:r>
+                        <a:rPr lang="en-US" sz="1000" b="1" dirty="0">
+                          <a:solidFill>
+                            <a:srgbClr val="FFFFFF"/>
+                          </a:solidFill>
+                        </a:rPr>
+                        <a:t>已平倉占比／平均</a:t>
+                      </a:r>
+                      <a:endParaRPr lang="en-US" sz="1000" dirty="0"/>
+                    </a:p>
+                  </a:txBody>
+                  <a:tcPr marL="73152" marR="73152" marT="45720" marB="45720" anchor="ctr">
+                    <a:lnL w="9525" cap="flat" cmpd="sng" algn="ctr">
+                      <a:solidFill>
+                        <a:srgbClr val="E2E8F0"/>
+                      </a:solidFill>
+                      <a:prstDash val="solid"/>
+                      <a:round/>
+                      <a:headEnd type="none" w="med" len="med"/>
+                      <a:tailEnd type="none" w="med" len="med"/>
+                    </a:lnL>
+                    <a:lnR w="9525" cap="flat" cmpd="sng" algn="ctr">
+                      <a:solidFill>
+                        <a:srgbClr val="E2E8F0"/>
+                      </a:solidFill>
+                      <a:prstDash val="solid"/>
+                      <a:round/>
+                      <a:headEnd type="none" w="med" len="med"/>
+                      <a:tailEnd type="none" w="med" len="med"/>
+                    </a:lnR>
+                    <a:lnT w="9525" cap="flat" cmpd="sng" algn="ctr">
+                      <a:solidFill>
+                        <a:srgbClr val="E2E8F0"/>
+                      </a:solidFill>
+                      <a:prstDash val="solid"/>
+                      <a:round/>
+                      <a:headEnd type="none" w="med" len="med"/>
+                      <a:tailEnd type="none" w="med" len="med"/>
+                    </a:lnT>
+                    <a:lnB w="9525" cap="flat" cmpd="sng" algn="ctr">
+                      <a:solidFill>
+                        <a:srgbClr val="E2E8F0"/>
+                      </a:solidFill>
+                      <a:prstDash val="solid"/>
+                      <a:round/>
+                      <a:headEnd type="none" w="med" len="med"/>
+                      <a:tailEnd type="none" w="med" len="med"/>
+                    </a:lnB>
+                    <a:solidFill>
+                      <a:srgbClr val="0F172A"/>
+                    </a:solidFill>
+                  </a:tcPr>
+                </a:tc>
+              </a:tr>
+              <a:tr h="502920">
+                <a:tc>
+                  <a:txBody>
+                    <a:bodyPr/>
+                    <a:lstStyle/>
+                    <a:p>
+                      <a:pPr algn="l" indent="0" marL="0">
+                        <a:buNone/>
+                      </a:pPr>
+                      <a:r>
+                        <a:rPr lang="en-US" sz="1000" dirty="0">
+                          <a:solidFill>
+                            <a:srgbClr val="334155"/>
+                          </a:solidFill>
+                        </a:rPr>
+                        <a:t>1 天</a:t>
+                      </a:r>
+                      <a:endParaRPr lang="en-US" sz="1000" dirty="0"/>
+                    </a:p>
+                  </a:txBody>
+                  <a:tcPr marL="73152" marR="73152" marT="45720" marB="45720" anchor="ctr">
+                    <a:lnL w="9525" cap="flat" cmpd="sng" algn="ctr">
+                      <a:solidFill>
+                        <a:srgbClr val="E2E8F0"/>
+                      </a:solidFill>
+                      <a:prstDash val="solid"/>
+                      <a:round/>
+                      <a:headEnd type="none" w="med" len="med"/>
+                      <a:tailEnd type="none" w="med" len="med"/>
+                    </a:lnL>
+                    <a:lnR w="9525" cap="flat" cmpd="sng" algn="ctr">
+                      <a:solidFill>
+                        <a:srgbClr val="E2E8F0"/>
+                      </a:solidFill>
+                      <a:prstDash val="solid"/>
+                      <a:round/>
+                      <a:headEnd type="none" w="med" len="med"/>
+                      <a:tailEnd type="none" w="med" len="med"/>
+                    </a:lnR>
+                    <a:lnT w="9525" cap="flat" cmpd="sng" algn="ctr">
+                      <a:solidFill>
+                        <a:srgbClr val="E2E8F0"/>
+                      </a:solidFill>
+                      <a:prstDash val="solid"/>
+                      <a:round/>
+                      <a:headEnd type="none" w="med" len="med"/>
+                      <a:tailEnd type="none" w="med" len="med"/>
+                    </a:lnT>
+                    <a:lnB w="9525" cap="flat" cmpd="sng" algn="ctr">
+                      <a:solidFill>
+                        <a:srgbClr val="E2E8F0"/>
+                      </a:solidFill>
+                      <a:prstDash val="solid"/>
+                      <a:round/>
+                      <a:headEnd type="none" w="med" len="med"/>
+                      <a:tailEnd type="none" w="med" len="med"/>
+                    </a:lnB>
+                    <a:solidFill>
+                      <a:srgbClr val="FFFFFF"/>
+                    </a:solidFill>
+                  </a:tcPr>
+                </a:tc>
+                <a:tc>
+                  <a:txBody>
+                    <a:bodyPr/>
+                    <a:lstStyle/>
+                    <a:p>
+                      <a:pPr algn="ctr" indent="0" marL="0">
+                        <a:buNone/>
+                      </a:pPr>
+                      <a:r>
+                        <a:rPr lang="en-US" sz="1000" dirty="0">
+                          <a:solidFill>
+                            <a:srgbClr val="334155"/>
+                          </a:solidFill>
+                        </a:rPr>
+                        <a:t>365</a:t>
+                      </a:r>
+                      <a:endParaRPr lang="en-US" sz="1000" dirty="0"/>
+                    </a:p>
+                  </a:txBody>
+                  <a:tcPr marL="73152" marR="73152" marT="45720" marB="45720" anchor="ctr">
+                    <a:lnL w="9525" cap="flat" cmpd="sng" algn="ctr">
+                      <a:solidFill>
+                        <a:srgbClr val="E2E8F0"/>
+                      </a:solidFill>
+                      <a:prstDash val="solid"/>
+                      <a:round/>
+                      <a:headEnd type="none" w="med" len="med"/>
+                      <a:tailEnd type="none" w="med" len="med"/>
+                    </a:lnL>
+                    <a:lnR w="9525" cap="flat" cmpd="sng" algn="ctr">
+                      <a:solidFill>
+                        <a:srgbClr val="E2E8F0"/>
+                      </a:solidFill>
+                      <a:prstDash val="solid"/>
+                      <a:round/>
+                      <a:headEnd type="none" w="med" len="med"/>
+                      <a:tailEnd type="none" w="med" len="med"/>
+                    </a:lnR>
+                    <a:lnT w="9525" cap="flat" cmpd="sng" algn="ctr">
+                      <a:solidFill>
+                        <a:srgbClr val="E2E8F0"/>
+                      </a:solidFill>
+                      <a:prstDash val="solid"/>
+                      <a:round/>
+                      <a:headEnd type="none" w="med" len="med"/>
+                      <a:tailEnd type="none" w="med" len="med"/>
+                    </a:lnT>
+                    <a:lnB w="9525" cap="flat" cmpd="sng" algn="ctr">
+                      <a:solidFill>
+                        <a:srgbClr val="E2E8F0"/>
+                      </a:solidFill>
+                      <a:prstDash val="solid"/>
+                      <a:round/>
+                      <a:headEnd type="none" w="med" len="med"/>
+                      <a:tailEnd type="none" w="med" len="med"/>
+                    </a:lnB>
+                    <a:solidFill>
+                      <a:srgbClr val="FFFFFF"/>
+                    </a:solidFill>
+                  </a:tcPr>
+                </a:tc>
+                <a:tc>
+                  <a:txBody>
+                    <a:bodyPr/>
+                    <a:lstStyle/>
+                    <a:p>
+                      <a:pPr algn="ctr" indent="0" marL="0">
+                        <a:buNone/>
+                      </a:pPr>
+                      <a:r>
+                        <a:rPr lang="en-US" sz="1000" dirty="0">
+                          <a:solidFill>
+                            <a:srgbClr val="334155"/>
+                          </a:solidFill>
+                        </a:rPr>
+                        <a:t>330.7%</a:t>
+                      </a:r>
+                      <a:endParaRPr lang="en-US" sz="1000" dirty="0"/>
+                    </a:p>
+                  </a:txBody>
+                  <a:tcPr marL="73152" marR="73152" marT="45720" marB="45720" anchor="ctr">
+                    <a:lnL w="9525" cap="flat" cmpd="sng" algn="ctr">
+                      <a:solidFill>
+                        <a:srgbClr val="E2E8F0"/>
+                      </a:solidFill>
+                      <a:prstDash val="solid"/>
+                      <a:round/>
+                      <a:headEnd type="none" w="med" len="med"/>
+                      <a:tailEnd type="none" w="med" len="med"/>
+                    </a:lnL>
+                    <a:lnR w="9525" cap="flat" cmpd="sng" algn="ctr">
+                      <a:solidFill>
+                        <a:srgbClr val="E2E8F0"/>
+                      </a:solidFill>
+                      <a:prstDash val="solid"/>
+                      <a:round/>
+                      <a:headEnd type="none" w="med" len="med"/>
+                      <a:tailEnd type="none" w="med" len="med"/>
+                    </a:lnR>
+                    <a:lnT w="9525" cap="flat" cmpd="sng" algn="ctr">
+                      <a:solidFill>
+                        <a:srgbClr val="E2E8F0"/>
+                      </a:solidFill>
+                      <a:prstDash val="solid"/>
+                      <a:round/>
+                      <a:headEnd type="none" w="med" len="med"/>
+                      <a:tailEnd type="none" w="med" len="med"/>
+                    </a:lnT>
+                    <a:lnB w="9525" cap="flat" cmpd="sng" algn="ctr">
+                      <a:solidFill>
+                        <a:srgbClr val="E2E8F0"/>
+                      </a:solidFill>
+                      <a:prstDash val="solid"/>
+                      <a:round/>
+                      <a:headEnd type="none" w="med" len="med"/>
+                      <a:tailEnd type="none" w="med" len="med"/>
+                    </a:lnB>
+                    <a:solidFill>
+                      <a:srgbClr val="FFFFFF"/>
+                    </a:solidFill>
+                  </a:tcPr>
+                </a:tc>
+                <a:tc>
+                  <a:txBody>
+                    <a:bodyPr/>
+                    <a:lstStyle/>
+                    <a:p>
+                      <a:pPr algn="ctr" indent="0" marL="0">
+                        <a:buNone/>
+                      </a:pPr>
+                      <a:r>
+                        <a:rPr lang="en-US" sz="1000" dirty="0">
+                          <a:solidFill>
+                            <a:srgbClr val="334155"/>
+                          </a:solidFill>
+                        </a:rPr>
+                        <a:t>-19.0%</a:t>
+                      </a:r>
+                      <a:endParaRPr lang="en-US" sz="1000" dirty="0"/>
+                    </a:p>
+                  </a:txBody>
+                  <a:tcPr marL="73152" marR="73152" marT="45720" marB="45720" anchor="ctr">
+                    <a:lnL w="9525" cap="flat" cmpd="sng" algn="ctr">
+                      <a:solidFill>
+                        <a:srgbClr val="E2E8F0"/>
+                      </a:solidFill>
+                      <a:prstDash val="solid"/>
+                      <a:round/>
+                      <a:headEnd type="none" w="med" len="med"/>
+                      <a:tailEnd type="none" w="med" len="med"/>
+                    </a:lnL>
+                    <a:lnR w="9525" cap="flat" cmpd="sng" algn="ctr">
+                      <a:solidFill>
+                        <a:srgbClr val="E2E8F0"/>
+                      </a:solidFill>
+                      <a:prstDash val="solid"/>
+                      <a:round/>
+                      <a:headEnd type="none" w="med" len="med"/>
+                      <a:tailEnd type="none" w="med" len="med"/>
+                    </a:lnR>
+                    <a:lnT w="9525" cap="flat" cmpd="sng" algn="ctr">
+                      <a:solidFill>
+                        <a:srgbClr val="E2E8F0"/>
+                      </a:solidFill>
+                      <a:prstDash val="solid"/>
+                      <a:round/>
+                      <a:headEnd type="none" w="med" len="med"/>
+                      <a:tailEnd type="none" w="med" len="med"/>
+                    </a:lnT>
+                    <a:lnB w="9525" cap="flat" cmpd="sng" algn="ctr">
+                      <a:solidFill>
+                        <a:srgbClr val="E2E8F0"/>
+                      </a:solidFill>
+                      <a:prstDash val="solid"/>
+                      <a:round/>
+                      <a:headEnd type="none" w="med" len="med"/>
+                      <a:tailEnd type="none" w="med" len="med"/>
+                    </a:lnB>
+                    <a:solidFill>
+                      <a:srgbClr val="FFFFFF"/>
+                    </a:solidFill>
+                  </a:tcPr>
+                </a:tc>
+                <a:tc>
+                  <a:txBody>
+                    <a:bodyPr/>
+                    <a:lstStyle/>
+                    <a:p>
+                      <a:pPr algn="ctr" indent="0" marL="0">
+                        <a:buNone/>
+                      </a:pPr>
+                      <a:r>
+                        <a:rPr lang="en-US" sz="1000" dirty="0">
+                          <a:solidFill>
+                            <a:srgbClr val="334155"/>
+                          </a:solidFill>
+                        </a:rPr>
+                        <a:t>2.0% ／ +42.3%</a:t>
+                      </a:r>
+                      <a:endParaRPr lang="en-US" sz="1000" dirty="0"/>
+                    </a:p>
+                  </a:txBody>
+                  <a:tcPr marL="73152" marR="73152" marT="45720" marB="45720" anchor="ctr">
+                    <a:lnL w="9525" cap="flat" cmpd="sng" algn="ctr">
+                      <a:solidFill>
+                        <a:srgbClr val="E2E8F0"/>
+                      </a:solidFill>
+                      <a:prstDash val="solid"/>
+                      <a:round/>
+                      <a:headEnd type="none" w="med" len="med"/>
+                      <a:tailEnd type="none" w="med" len="med"/>
+                    </a:lnL>
+                    <a:lnR w="9525" cap="flat" cmpd="sng" algn="ctr">
+                      <a:solidFill>
+                        <a:srgbClr val="E2E8F0"/>
+                      </a:solidFill>
+                      <a:prstDash val="solid"/>
+                      <a:round/>
+                      <a:headEnd type="none" w="med" len="med"/>
+                      <a:tailEnd type="none" w="med" len="med"/>
+                    </a:lnR>
+                    <a:lnT w="9525" cap="flat" cmpd="sng" algn="ctr">
+                      <a:solidFill>
+                        <a:srgbClr val="E2E8F0"/>
+                      </a:solidFill>
+                      <a:prstDash val="solid"/>
+                      <a:round/>
+                      <a:headEnd type="none" w="med" len="med"/>
+                      <a:tailEnd type="none" w="med" len="med"/>
+                    </a:lnT>
+                    <a:lnB w="9525" cap="flat" cmpd="sng" algn="ctr">
+                      <a:solidFill>
+                        <a:srgbClr val="E2E8F0"/>
+                      </a:solidFill>
+                      <a:prstDash val="solid"/>
+                      <a:round/>
+                      <a:headEnd type="none" w="med" len="med"/>
+                      <a:tailEnd type="none" w="med" len="med"/>
+                    </a:lnB>
+                    <a:solidFill>
+                      <a:srgbClr val="FFFFFF"/>
+                    </a:solidFill>
+                  </a:tcPr>
+                </a:tc>
+              </a:tr>
+              <a:tr h="502920">
+                <a:tc>
+                  <a:txBody>
+                    <a:bodyPr/>
+                    <a:lstStyle/>
+                    <a:p>
+                      <a:pPr algn="l" indent="0" marL="0">
+                        <a:buNone/>
+                      </a:pPr>
+                      <a:r>
+                        <a:rPr lang="en-US" sz="1000" dirty="0">
+                          <a:solidFill>
+                            <a:srgbClr val="334155"/>
+                          </a:solidFill>
+                        </a:rPr>
+                        <a:t>3 天</a:t>
+                      </a:r>
+                      <a:endParaRPr lang="en-US" sz="1000" dirty="0"/>
+                    </a:p>
+                  </a:txBody>
+                  <a:tcPr marL="73152" marR="73152" marT="45720" marB="45720" anchor="ctr">
+                    <a:lnL w="9525" cap="flat" cmpd="sng" algn="ctr">
+                      <a:solidFill>
+                        <a:srgbClr val="E2E8F0"/>
+                      </a:solidFill>
+                      <a:prstDash val="solid"/>
+                      <a:round/>
+                      <a:headEnd type="none" w="med" len="med"/>
+                      <a:tailEnd type="none" w="med" len="med"/>
+                    </a:lnL>
+                    <a:lnR w="9525" cap="flat" cmpd="sng" algn="ctr">
+                      <a:solidFill>
+                        <a:srgbClr val="E2E8F0"/>
+                      </a:solidFill>
+                      <a:prstDash val="solid"/>
+                      <a:round/>
+                      <a:headEnd type="none" w="med" len="med"/>
+                      <a:tailEnd type="none" w="med" len="med"/>
+                    </a:lnR>
+                    <a:lnT w="9525" cap="flat" cmpd="sng" algn="ctr">
+                      <a:solidFill>
+                        <a:srgbClr val="E2E8F0"/>
+                      </a:solidFill>
+                      <a:prstDash val="solid"/>
+                      <a:round/>
+                      <a:headEnd type="none" w="med" len="med"/>
+                      <a:tailEnd type="none" w="med" len="med"/>
+                    </a:lnT>
+                    <a:lnB w="9525" cap="flat" cmpd="sng" algn="ctr">
+                      <a:solidFill>
+                        <a:srgbClr val="E2E8F0"/>
+                      </a:solidFill>
+                      <a:prstDash val="solid"/>
+                      <a:round/>
+                      <a:headEnd type="none" w="med" len="med"/>
+                      <a:tailEnd type="none" w="med" len="med"/>
+                    </a:lnB>
+                    <a:solidFill>
+                      <a:srgbClr val="F8FAFC"/>
+                    </a:solidFill>
+                  </a:tcPr>
+                </a:tc>
+                <a:tc>
+                  <a:txBody>
+                    <a:bodyPr/>
+                    <a:lstStyle/>
+                    <a:p>
+                      <a:pPr algn="ctr" indent="0" marL="0">
+                        <a:buNone/>
+                      </a:pPr>
+                      <a:r>
+                        <a:rPr lang="en-US" sz="1000" dirty="0">
+                          <a:solidFill>
+                            <a:srgbClr val="334155"/>
+                          </a:solidFill>
+                        </a:rPr>
+                        <a:t>122</a:t>
+                      </a:r>
+                      <a:endParaRPr lang="en-US" sz="1000" dirty="0"/>
+                    </a:p>
+                  </a:txBody>
+                  <a:tcPr marL="73152" marR="73152" marT="45720" marB="45720" anchor="ctr">
+                    <a:lnL w="9525" cap="flat" cmpd="sng" algn="ctr">
+                      <a:solidFill>
+                        <a:srgbClr val="E2E8F0"/>
+                      </a:solidFill>
+                      <a:prstDash val="solid"/>
+                      <a:round/>
+                      <a:headEnd type="none" w="med" len="med"/>
+                      <a:tailEnd type="none" w="med" len="med"/>
+                    </a:lnL>
+                    <a:lnR w="9525" cap="flat" cmpd="sng" algn="ctr">
+                      <a:solidFill>
+                        <a:srgbClr val="E2E8F0"/>
+                      </a:solidFill>
+                      <a:prstDash val="solid"/>
+                      <a:round/>
+                      <a:headEnd type="none" w="med" len="med"/>
+                      <a:tailEnd type="none" w="med" len="med"/>
+                    </a:lnR>
+                    <a:lnT w="9525" cap="flat" cmpd="sng" algn="ctr">
+                      <a:solidFill>
+                        <a:srgbClr val="E2E8F0"/>
+                      </a:solidFill>
+                      <a:prstDash val="solid"/>
+                      <a:round/>
+                      <a:headEnd type="none" w="med" len="med"/>
+                      <a:tailEnd type="none" w="med" len="med"/>
+                    </a:lnT>
+                    <a:lnB w="9525" cap="flat" cmpd="sng" algn="ctr">
+                      <a:solidFill>
+                        <a:srgbClr val="E2E8F0"/>
+                      </a:solidFill>
+                      <a:prstDash val="solid"/>
+                      <a:round/>
+                      <a:headEnd type="none" w="med" len="med"/>
+                      <a:tailEnd type="none" w="med" len="med"/>
+                    </a:lnB>
+                    <a:solidFill>
+                      <a:srgbClr val="F8FAFC"/>
+                    </a:solidFill>
+                  </a:tcPr>
+                </a:tc>
+                <a:tc>
+                  <a:txBody>
+                    <a:bodyPr/>
+                    <a:lstStyle/>
+                    <a:p>
+                      <a:pPr algn="ctr" indent="0" marL="0">
+                        <a:buNone/>
+                      </a:pPr>
+                      <a:r>
+                        <a:rPr lang="en-US" sz="1000" dirty="0">
+                          <a:solidFill>
+                            <a:srgbClr val="334155"/>
+                          </a:solidFill>
+                        </a:rPr>
+                        <a:t>190.9%</a:t>
+                      </a:r>
+                      <a:endParaRPr lang="en-US" sz="1000" dirty="0"/>
+                    </a:p>
+                  </a:txBody>
+                  <a:tcPr marL="73152" marR="73152" marT="45720" marB="45720" anchor="ctr">
+                    <a:lnL w="9525" cap="flat" cmpd="sng" algn="ctr">
+                      <a:solidFill>
+                        <a:srgbClr val="E2E8F0"/>
+                      </a:solidFill>
+                      <a:prstDash val="solid"/>
+                      <a:round/>
+                      <a:headEnd type="none" w="med" len="med"/>
+                      <a:tailEnd type="none" w="med" len="med"/>
+                    </a:lnL>
+                    <a:lnR w="9525" cap="flat" cmpd="sng" algn="ctr">
+                      <a:solidFill>
+                        <a:srgbClr val="E2E8F0"/>
+                      </a:solidFill>
+                      <a:prstDash val="solid"/>
+                      <a:round/>
+                      <a:headEnd type="none" w="med" len="med"/>
+                      <a:tailEnd type="none" w="med" len="med"/>
+                    </a:lnR>
+                    <a:lnT w="9525" cap="flat" cmpd="sng" algn="ctr">
+                      <a:solidFill>
+                        <a:srgbClr val="E2E8F0"/>
+                      </a:solidFill>
+                      <a:prstDash val="solid"/>
+                      <a:round/>
+                      <a:headEnd type="none" w="med" len="med"/>
+                      <a:tailEnd type="none" w="med" len="med"/>
+                    </a:lnT>
+                    <a:lnB w="9525" cap="flat" cmpd="sng" algn="ctr">
+                      <a:solidFill>
+                        <a:srgbClr val="E2E8F0"/>
+                      </a:solidFill>
+                      <a:prstDash val="solid"/>
+                      <a:round/>
+                      <a:headEnd type="none" w="med" len="med"/>
+                      <a:tailEnd type="none" w="med" len="med"/>
+                    </a:lnB>
+                    <a:solidFill>
+                      <a:srgbClr val="F8FAFC"/>
+                    </a:solidFill>
+                  </a:tcPr>
+                </a:tc>
+                <a:tc>
+                  <a:txBody>
+                    <a:bodyPr/>
+                    <a:lstStyle/>
+                    <a:p>
+                      <a:pPr algn="ctr" indent="0" marL="0">
+                        <a:buNone/>
+                      </a:pPr>
+                      <a:r>
+                        <a:rPr lang="en-US" sz="1000" dirty="0">
+                          <a:solidFill>
+                            <a:srgbClr val="334155"/>
+                          </a:solidFill>
+                        </a:rPr>
+                        <a:t>-18.2%</a:t>
+                      </a:r>
+                      <a:endParaRPr lang="en-US" sz="1000" dirty="0"/>
+                    </a:p>
+                  </a:txBody>
+                  <a:tcPr marL="73152" marR="73152" marT="45720" marB="45720" anchor="ctr">
+                    <a:lnL w="9525" cap="flat" cmpd="sng" algn="ctr">
+                      <a:solidFill>
+                        <a:srgbClr val="E2E8F0"/>
+                      </a:solidFill>
+                      <a:prstDash val="solid"/>
+                      <a:round/>
+                      <a:headEnd type="none" w="med" len="med"/>
+                      <a:tailEnd type="none" w="med" len="med"/>
+                    </a:lnL>
+                    <a:lnR w="9525" cap="flat" cmpd="sng" algn="ctr">
+                      <a:solidFill>
+                        <a:srgbClr val="E2E8F0"/>
+                      </a:solidFill>
+                      <a:prstDash val="solid"/>
+                      <a:round/>
+                      <a:headEnd type="none" w="med" len="med"/>
+                      <a:tailEnd type="none" w="med" len="med"/>
+                    </a:lnR>
+                    <a:lnT w="9525" cap="flat" cmpd="sng" algn="ctr">
+                      <a:solidFill>
+                        <a:srgbClr val="E2E8F0"/>
+                      </a:solidFill>
+                      <a:prstDash val="solid"/>
+                      <a:round/>
+                      <a:headEnd type="none" w="med" len="med"/>
+                      <a:tailEnd type="none" w="med" len="med"/>
+                    </a:lnT>
+                    <a:lnB w="9525" cap="flat" cmpd="sng" algn="ctr">
+                      <a:solidFill>
+                        <a:srgbClr val="E2E8F0"/>
+                      </a:solidFill>
+                      <a:prstDash val="solid"/>
+                      <a:round/>
+                      <a:headEnd type="none" w="med" len="med"/>
+                      <a:tailEnd type="none" w="med" len="med"/>
+                    </a:lnB>
+                    <a:solidFill>
+                      <a:srgbClr val="F8FAFC"/>
+                    </a:solidFill>
+                  </a:tcPr>
+                </a:tc>
+                <a:tc>
+                  <a:txBody>
+                    <a:bodyPr/>
+                    <a:lstStyle/>
+                    <a:p>
+                      <a:pPr algn="ctr" indent="0" marL="0">
+                        <a:buNone/>
+                      </a:pPr>
+                      <a:r>
+                        <a:rPr lang="en-US" sz="1000" dirty="0">
+                          <a:solidFill>
+                            <a:srgbClr val="334155"/>
+                          </a:solidFill>
+                        </a:rPr>
+                        <a:t>3.7% ／ +41.6%</a:t>
+                      </a:r>
+                      <a:endParaRPr lang="en-US" sz="1000" dirty="0"/>
+                    </a:p>
+                  </a:txBody>
+                  <a:tcPr marL="73152" marR="73152" marT="45720" marB="45720" anchor="ctr">
+                    <a:lnL w="9525" cap="flat" cmpd="sng" algn="ctr">
+                      <a:solidFill>
+                        <a:srgbClr val="E2E8F0"/>
+                      </a:solidFill>
+                      <a:prstDash val="solid"/>
+                      <a:round/>
+                      <a:headEnd type="none" w="med" len="med"/>
+                      <a:tailEnd type="none" w="med" len="med"/>
+                    </a:lnL>
+                    <a:lnR w="9525" cap="flat" cmpd="sng" algn="ctr">
+                      <a:solidFill>
+                        <a:srgbClr val="E2E8F0"/>
+                      </a:solidFill>
+                      <a:prstDash val="solid"/>
+                      <a:round/>
+                      <a:headEnd type="none" w="med" len="med"/>
+                      <a:tailEnd type="none" w="med" len="med"/>
+                    </a:lnR>
+                    <a:lnT w="9525" cap="flat" cmpd="sng" algn="ctr">
+                      <a:solidFill>
+                        <a:srgbClr val="E2E8F0"/>
+                      </a:solidFill>
+                      <a:prstDash val="solid"/>
+                      <a:round/>
+                      <a:headEnd type="none" w="med" len="med"/>
+                      <a:tailEnd type="none" w="med" len="med"/>
+                    </a:lnT>
+                    <a:lnB w="9525" cap="flat" cmpd="sng" algn="ctr">
+                      <a:solidFill>
+                        <a:srgbClr val="E2E8F0"/>
+                      </a:solidFill>
+                      <a:prstDash val="solid"/>
+                      <a:round/>
+                      <a:headEnd type="none" w="med" len="med"/>
+                      <a:tailEnd type="none" w="med" len="med"/>
+                    </a:lnB>
+                    <a:solidFill>
+                      <a:srgbClr val="F8FAFC"/>
+                    </a:solidFill>
+                  </a:tcPr>
+                </a:tc>
+              </a:tr>
+              <a:tr h="502920">
+                <a:tc>
+                  <a:txBody>
+                    <a:bodyPr/>
+                    <a:lstStyle/>
+                    <a:p>
+                      <a:pPr algn="l" indent="0" marL="0">
+                        <a:buNone/>
+                      </a:pPr>
+                      <a:r>
+                        <a:rPr lang="en-US" sz="1000" dirty="0">
+                          <a:solidFill>
+                            <a:srgbClr val="334155"/>
+                          </a:solidFill>
+                        </a:rPr>
+                        <a:t>7 天（原基準）</a:t>
+                      </a:r>
+                      <a:endParaRPr lang="en-US" sz="1000" dirty="0"/>
+                    </a:p>
+                  </a:txBody>
+                  <a:tcPr marL="73152" marR="73152" marT="45720" marB="45720" anchor="ctr">
+                    <a:lnL w="9525" cap="flat" cmpd="sng" algn="ctr">
+                      <a:solidFill>
+                        <a:srgbClr val="E2E8F0"/>
+                      </a:solidFill>
+                      <a:prstDash val="solid"/>
+                      <a:round/>
+                      <a:headEnd type="none" w="med" len="med"/>
+                      <a:tailEnd type="none" w="med" len="med"/>
+                    </a:lnL>
+                    <a:lnR w="9525" cap="flat" cmpd="sng" algn="ctr">
+                      <a:solidFill>
+                        <a:srgbClr val="E2E8F0"/>
+                      </a:solidFill>
+                      <a:prstDash val="solid"/>
+                      <a:round/>
+                      <a:headEnd type="none" w="med" len="med"/>
+                      <a:tailEnd type="none" w="med" len="med"/>
+                    </a:lnR>
+                    <a:lnT w="9525" cap="flat" cmpd="sng" algn="ctr">
+                      <a:solidFill>
+                        <a:srgbClr val="E2E8F0"/>
+                      </a:solidFill>
+                      <a:prstDash val="solid"/>
+                      <a:round/>
+                      <a:headEnd type="none" w="med" len="med"/>
+                      <a:tailEnd type="none" w="med" len="med"/>
+                    </a:lnT>
+                    <a:lnB w="9525" cap="flat" cmpd="sng" algn="ctr">
+                      <a:solidFill>
+                        <a:srgbClr val="E2E8F0"/>
+                      </a:solidFill>
+                      <a:prstDash val="solid"/>
+                      <a:round/>
+                      <a:headEnd type="none" w="med" len="med"/>
+                      <a:tailEnd type="none" w="med" len="med"/>
+                    </a:lnB>
+                    <a:solidFill>
+                      <a:srgbClr val="FFFFFF"/>
+                    </a:solidFill>
+                  </a:tcPr>
+                </a:tc>
+                <a:tc>
+                  <a:txBody>
+                    <a:bodyPr/>
+                    <a:lstStyle/>
+                    <a:p>
+                      <a:pPr algn="ctr" indent="0" marL="0">
+                        <a:buNone/>
+                      </a:pPr>
+                      <a:r>
+                        <a:rPr lang="en-US" sz="1000" dirty="0">
+                          <a:solidFill>
+                            <a:srgbClr val="334155"/>
+                          </a:solidFill>
+                        </a:rPr>
+                        <a:t>52</a:t>
+                      </a:r>
+                      <a:endParaRPr lang="en-US" sz="1000" dirty="0"/>
+                    </a:p>
+                  </a:txBody>
+                  <a:tcPr marL="73152" marR="73152" marT="45720" marB="45720" anchor="ctr">
+                    <a:lnL w="9525" cap="flat" cmpd="sng" algn="ctr">
+                      <a:solidFill>
+                        <a:srgbClr val="E2E8F0"/>
+                      </a:solidFill>
+                      <a:prstDash val="solid"/>
+                      <a:round/>
+                      <a:headEnd type="none" w="med" len="med"/>
+                      <a:tailEnd type="none" w="med" len="med"/>
+                    </a:lnL>
+                    <a:lnR w="9525" cap="flat" cmpd="sng" algn="ctr">
+                      <a:solidFill>
+                        <a:srgbClr val="E2E8F0"/>
+                      </a:solidFill>
+                      <a:prstDash val="solid"/>
+                      <a:round/>
+                      <a:headEnd type="none" w="med" len="med"/>
+                      <a:tailEnd type="none" w="med" len="med"/>
+                    </a:lnR>
+                    <a:lnT w="9525" cap="flat" cmpd="sng" algn="ctr">
+                      <a:solidFill>
+                        <a:srgbClr val="E2E8F0"/>
+                      </a:solidFill>
+                      <a:prstDash val="solid"/>
+                      <a:round/>
+                      <a:headEnd type="none" w="med" len="med"/>
+                      <a:tailEnd type="none" w="med" len="med"/>
+                    </a:lnT>
+                    <a:lnB w="9525" cap="flat" cmpd="sng" algn="ctr">
+                      <a:solidFill>
+                        <a:srgbClr val="E2E8F0"/>
+                      </a:solidFill>
+                      <a:prstDash val="solid"/>
+                      <a:round/>
+                      <a:headEnd type="none" w="med" len="med"/>
+                      <a:tailEnd type="none" w="med" len="med"/>
+                    </a:lnB>
+                    <a:solidFill>
+                      <a:srgbClr val="FFFFFF"/>
+                    </a:solidFill>
+                  </a:tcPr>
+                </a:tc>
+                <a:tc>
+                  <a:txBody>
+                    <a:bodyPr/>
+                    <a:lstStyle/>
+                    <a:p>
+                      <a:pPr algn="ctr" indent="0" marL="0">
+                        <a:buNone/>
+                      </a:pPr>
+                      <a:r>
+                        <a:rPr lang="en-US" sz="1000" dirty="0">
+                          <a:solidFill>
+                            <a:srgbClr val="334155"/>
+                          </a:solidFill>
+                        </a:rPr>
+                        <a:t>125.0%</a:t>
+                      </a:r>
+                      <a:endParaRPr lang="en-US" sz="1000" dirty="0"/>
+                    </a:p>
+                  </a:txBody>
+                  <a:tcPr marL="73152" marR="73152" marT="45720" marB="45720" anchor="ctr">
+                    <a:lnL w="9525" cap="flat" cmpd="sng" algn="ctr">
+                      <a:solidFill>
+                        <a:srgbClr val="E2E8F0"/>
+                      </a:solidFill>
+                      <a:prstDash val="solid"/>
+                      <a:round/>
+                      <a:headEnd type="none" w="med" len="med"/>
+                      <a:tailEnd type="none" w="med" len="med"/>
+                    </a:lnL>
+                    <a:lnR w="9525" cap="flat" cmpd="sng" algn="ctr">
+                      <a:solidFill>
+                        <a:srgbClr val="E2E8F0"/>
+                      </a:solidFill>
+                      <a:prstDash val="solid"/>
+                      <a:round/>
+                      <a:headEnd type="none" w="med" len="med"/>
+                      <a:tailEnd type="none" w="med" len="med"/>
+                    </a:lnR>
+                    <a:lnT w="9525" cap="flat" cmpd="sng" algn="ctr">
+                      <a:solidFill>
+                        <a:srgbClr val="E2E8F0"/>
+                      </a:solidFill>
+                      <a:prstDash val="solid"/>
+                      <a:round/>
+                      <a:headEnd type="none" w="med" len="med"/>
+                      <a:tailEnd type="none" w="med" len="med"/>
+                    </a:lnT>
+                    <a:lnB w="9525" cap="flat" cmpd="sng" algn="ctr">
+                      <a:solidFill>
+                        <a:srgbClr val="E2E8F0"/>
+                      </a:solidFill>
+                      <a:prstDash val="solid"/>
+                      <a:round/>
+                      <a:headEnd type="none" w="med" len="med"/>
+                      <a:tailEnd type="none" w="med" len="med"/>
+                    </a:lnB>
+                    <a:solidFill>
+                      <a:srgbClr val="FFFFFF"/>
+                    </a:solidFill>
+                  </a:tcPr>
+                </a:tc>
+                <a:tc>
+                  <a:txBody>
+                    <a:bodyPr/>
+                    <a:lstStyle/>
+                    <a:p>
+                      <a:pPr algn="ctr" indent="0" marL="0">
+                        <a:buNone/>
+                      </a:pPr>
+                      <a:r>
+                        <a:rPr lang="en-US" sz="1000" dirty="0">
+                          <a:solidFill>
+                            <a:srgbClr val="334155"/>
+                          </a:solidFill>
+                        </a:rPr>
+                        <a:t>-17.0%</a:t>
+                      </a:r>
+                      <a:endParaRPr lang="en-US" sz="1000" dirty="0"/>
+                    </a:p>
+                  </a:txBody>
+                  <a:tcPr marL="73152" marR="73152" marT="45720" marB="45720" anchor="ctr">
+                    <a:lnL w="9525" cap="flat" cmpd="sng" algn="ctr">
+                      <a:solidFill>
+                        <a:srgbClr val="E2E8F0"/>
+                      </a:solidFill>
+                      <a:prstDash val="solid"/>
+                      <a:round/>
+                      <a:headEnd type="none" w="med" len="med"/>
+                      <a:tailEnd type="none" w="med" len="med"/>
+                    </a:lnL>
+                    <a:lnR w="9525" cap="flat" cmpd="sng" algn="ctr">
+                      <a:solidFill>
+                        <a:srgbClr val="E2E8F0"/>
+                      </a:solidFill>
+                      <a:prstDash val="solid"/>
+                      <a:round/>
+                      <a:headEnd type="none" w="med" len="med"/>
+                      <a:tailEnd type="none" w="med" len="med"/>
+                    </a:lnR>
+                    <a:lnT w="9525" cap="flat" cmpd="sng" algn="ctr">
+                      <a:solidFill>
+                        <a:srgbClr val="E2E8F0"/>
+                      </a:solidFill>
+                      <a:prstDash val="solid"/>
+                      <a:round/>
+                      <a:headEnd type="none" w="med" len="med"/>
+                      <a:tailEnd type="none" w="med" len="med"/>
+                    </a:lnT>
+                    <a:lnB w="9525" cap="flat" cmpd="sng" algn="ctr">
+                      <a:solidFill>
+                        <a:srgbClr val="E2E8F0"/>
+                      </a:solidFill>
+                      <a:prstDash val="solid"/>
+                      <a:round/>
+                      <a:headEnd type="none" w="med" len="med"/>
+                      <a:tailEnd type="none" w="med" len="med"/>
+                    </a:lnB>
+                    <a:solidFill>
+                      <a:srgbClr val="FFFFFF"/>
+                    </a:solidFill>
+                  </a:tcPr>
+                </a:tc>
+                <a:tc>
+                  <a:txBody>
+                    <a:bodyPr/>
+                    <a:lstStyle/>
+                    <a:p>
+                      <a:pPr algn="ctr" indent="0" marL="0">
+                        <a:buNone/>
+                      </a:pPr>
+                      <a:r>
+                        <a:rPr lang="en-US" sz="1000" dirty="0">
+                          <a:solidFill>
+                            <a:srgbClr val="334155"/>
+                          </a:solidFill>
+                        </a:rPr>
+                        <a:t>5.5% ／ +38.3%</a:t>
+                      </a:r>
+                      <a:endParaRPr lang="en-US" sz="1000" dirty="0"/>
+                    </a:p>
+                  </a:txBody>
+                  <a:tcPr marL="73152" marR="73152" marT="45720" marB="45720" anchor="ctr">
+                    <a:lnL w="9525" cap="flat" cmpd="sng" algn="ctr">
+                      <a:solidFill>
+                        <a:srgbClr val="E2E8F0"/>
+                      </a:solidFill>
+                      <a:prstDash val="solid"/>
+                      <a:round/>
+                      <a:headEnd type="none" w="med" len="med"/>
+                      <a:tailEnd type="none" w="med" len="med"/>
+                    </a:lnL>
+                    <a:lnR w="9525" cap="flat" cmpd="sng" algn="ctr">
+                      <a:solidFill>
+                        <a:srgbClr val="E2E8F0"/>
+                      </a:solidFill>
+                      <a:prstDash val="solid"/>
+                      <a:round/>
+                      <a:headEnd type="none" w="med" len="med"/>
+                      <a:tailEnd type="none" w="med" len="med"/>
+                    </a:lnR>
+                    <a:lnT w="9525" cap="flat" cmpd="sng" algn="ctr">
+                      <a:solidFill>
+                        <a:srgbClr val="E2E8F0"/>
+                      </a:solidFill>
+                      <a:prstDash val="solid"/>
+                      <a:round/>
+                      <a:headEnd type="none" w="med" len="med"/>
+                      <a:tailEnd type="none" w="med" len="med"/>
+                    </a:lnT>
+                    <a:lnB w="9525" cap="flat" cmpd="sng" algn="ctr">
+                      <a:solidFill>
+                        <a:srgbClr val="E2E8F0"/>
+                      </a:solidFill>
+                      <a:prstDash val="solid"/>
+                      <a:round/>
+                      <a:headEnd type="none" w="med" len="med"/>
+                      <a:tailEnd type="none" w="med" len="med"/>
+                    </a:lnB>
+                    <a:solidFill>
+                      <a:srgbClr val="FFFFFF"/>
+                    </a:solidFill>
+                  </a:tcPr>
+                </a:tc>
+              </a:tr>
+              <a:tr h="502920">
+                <a:tc>
+                  <a:txBody>
+                    <a:bodyPr/>
+                    <a:lstStyle/>
+                    <a:p>
+                      <a:pPr algn="l" indent="0" marL="0">
+                        <a:buNone/>
+                      </a:pPr>
+                      <a:r>
+                        <a:rPr lang="en-US" sz="1000" dirty="0">
+                          <a:solidFill>
+                            <a:srgbClr val="334155"/>
+                          </a:solidFill>
+                        </a:rPr>
+                        <a:t>14 天</a:t>
+                      </a:r>
+                      <a:endParaRPr lang="en-US" sz="1000" dirty="0"/>
+                    </a:p>
+                  </a:txBody>
+                  <a:tcPr marL="73152" marR="73152" marT="45720" marB="45720" anchor="ctr">
+                    <a:lnL w="9525" cap="flat" cmpd="sng" algn="ctr">
+                      <a:solidFill>
+                        <a:srgbClr val="E2E8F0"/>
+                      </a:solidFill>
+                      <a:prstDash val="solid"/>
+                      <a:round/>
+                      <a:headEnd type="none" w="med" len="med"/>
+                      <a:tailEnd type="none" w="med" len="med"/>
+                    </a:lnL>
+                    <a:lnR w="9525" cap="flat" cmpd="sng" algn="ctr">
+                      <a:solidFill>
+                        <a:srgbClr val="E2E8F0"/>
+                      </a:solidFill>
+                      <a:prstDash val="solid"/>
+                      <a:round/>
+                      <a:headEnd type="none" w="med" len="med"/>
+                      <a:tailEnd type="none" w="med" len="med"/>
+                    </a:lnR>
+                    <a:lnT w="9525" cap="flat" cmpd="sng" algn="ctr">
+                      <a:solidFill>
+                        <a:srgbClr val="E2E8F0"/>
+                      </a:solidFill>
+                      <a:prstDash val="solid"/>
+                      <a:round/>
+                      <a:headEnd type="none" w="med" len="med"/>
+                      <a:tailEnd type="none" w="med" len="med"/>
+                    </a:lnT>
+                    <a:lnB w="9525" cap="flat" cmpd="sng" algn="ctr">
+                      <a:solidFill>
+                        <a:srgbClr val="E2E8F0"/>
+                      </a:solidFill>
+                      <a:prstDash val="solid"/>
+                      <a:round/>
+                      <a:headEnd type="none" w="med" len="med"/>
+                      <a:tailEnd type="none" w="med" len="med"/>
+                    </a:lnB>
+                    <a:solidFill>
+                      <a:srgbClr val="F8FAFC"/>
+                    </a:solidFill>
+                  </a:tcPr>
+                </a:tc>
+                <a:tc>
+                  <a:txBody>
+                    <a:bodyPr/>
+                    <a:lstStyle/>
+                    <a:p>
+                      <a:pPr algn="ctr" indent="0" marL="0">
+                        <a:buNone/>
+                      </a:pPr>
+                      <a:r>
+                        <a:rPr lang="en-US" sz="1000" dirty="0">
+                          <a:solidFill>
+                            <a:srgbClr val="334155"/>
+                          </a:solidFill>
+                        </a:rPr>
+                        <a:t>26</a:t>
+                      </a:r>
+                      <a:endParaRPr lang="en-US" sz="1000" dirty="0"/>
+                    </a:p>
+                  </a:txBody>
+                  <a:tcPr marL="73152" marR="73152" marT="45720" marB="45720" anchor="ctr">
+                    <a:lnL w="9525" cap="flat" cmpd="sng" algn="ctr">
+                      <a:solidFill>
+                        <a:srgbClr val="E2E8F0"/>
+                      </a:solidFill>
+                      <a:prstDash val="solid"/>
+                      <a:round/>
+                      <a:headEnd type="none" w="med" len="med"/>
+                      <a:tailEnd type="none" w="med" len="med"/>
+                    </a:lnL>
+                    <a:lnR w="9525" cap="flat" cmpd="sng" algn="ctr">
+                      <a:solidFill>
+                        <a:srgbClr val="E2E8F0"/>
+                      </a:solidFill>
+                      <a:prstDash val="solid"/>
+                      <a:round/>
+                      <a:headEnd type="none" w="med" len="med"/>
+                      <a:tailEnd type="none" w="med" len="med"/>
+                    </a:lnR>
+                    <a:lnT w="9525" cap="flat" cmpd="sng" algn="ctr">
+                      <a:solidFill>
+                        <a:srgbClr val="E2E8F0"/>
+                      </a:solidFill>
+                      <a:prstDash val="solid"/>
+                      <a:round/>
+                      <a:headEnd type="none" w="med" len="med"/>
+                      <a:tailEnd type="none" w="med" len="med"/>
+                    </a:lnT>
+                    <a:lnB w="9525" cap="flat" cmpd="sng" algn="ctr">
+                      <a:solidFill>
+                        <a:srgbClr val="E2E8F0"/>
+                      </a:solidFill>
+                      <a:prstDash val="solid"/>
+                      <a:round/>
+                      <a:headEnd type="none" w="med" len="med"/>
+                      <a:tailEnd type="none" w="med" len="med"/>
+                    </a:lnB>
+                    <a:solidFill>
+                      <a:srgbClr val="F8FAFC"/>
+                    </a:solidFill>
+                  </a:tcPr>
+                </a:tc>
+                <a:tc>
+                  <a:txBody>
+                    <a:bodyPr/>
+                    <a:lstStyle/>
+                    <a:p>
+                      <a:pPr algn="ctr" indent="0" marL="0">
+                        <a:buNone/>
+                      </a:pPr>
+                      <a:r>
+                        <a:rPr lang="en-US" sz="1000" dirty="0">
+                          <a:solidFill>
+                            <a:srgbClr val="334155"/>
+                          </a:solidFill>
+                        </a:rPr>
+                        <a:t>88.4%</a:t>
+                      </a:r>
+                      <a:endParaRPr lang="en-US" sz="1000" dirty="0"/>
+                    </a:p>
+                  </a:txBody>
+                  <a:tcPr marL="73152" marR="73152" marT="45720" marB="45720" anchor="ctr">
+                    <a:lnL w="9525" cap="flat" cmpd="sng" algn="ctr">
+                      <a:solidFill>
+                        <a:srgbClr val="E2E8F0"/>
+                      </a:solidFill>
+                      <a:prstDash val="solid"/>
+                      <a:round/>
+                      <a:headEnd type="none" w="med" len="med"/>
+                      <a:tailEnd type="none" w="med" len="med"/>
+                    </a:lnL>
+                    <a:lnR w="9525" cap="flat" cmpd="sng" algn="ctr">
+                      <a:solidFill>
+                        <a:srgbClr val="E2E8F0"/>
+                      </a:solidFill>
+                      <a:prstDash val="solid"/>
+                      <a:round/>
+                      <a:headEnd type="none" w="med" len="med"/>
+                      <a:tailEnd type="none" w="med" len="med"/>
+                    </a:lnR>
+                    <a:lnT w="9525" cap="flat" cmpd="sng" algn="ctr">
+                      <a:solidFill>
+                        <a:srgbClr val="E2E8F0"/>
+                      </a:solidFill>
+                      <a:prstDash val="solid"/>
+                      <a:round/>
+                      <a:headEnd type="none" w="med" len="med"/>
+                      <a:tailEnd type="none" w="med" len="med"/>
+                    </a:lnT>
+                    <a:lnB w="9525" cap="flat" cmpd="sng" algn="ctr">
+                      <a:solidFill>
+                        <a:srgbClr val="E2E8F0"/>
+                      </a:solidFill>
+                      <a:prstDash val="solid"/>
+                      <a:round/>
+                      <a:headEnd type="none" w="med" len="med"/>
+                      <a:tailEnd type="none" w="med" len="med"/>
+                    </a:lnB>
+                    <a:solidFill>
+                      <a:srgbClr val="F8FAFC"/>
+                    </a:solidFill>
+                  </a:tcPr>
+                </a:tc>
+                <a:tc>
+                  <a:txBody>
+                    <a:bodyPr/>
+                    <a:lstStyle/>
+                    <a:p>
+                      <a:pPr algn="ctr" indent="0" marL="0">
+                        <a:buNone/>
+                      </a:pPr>
+                      <a:r>
+                        <a:rPr lang="en-US" sz="1000" dirty="0">
+                          <a:solidFill>
+                            <a:srgbClr val="334155"/>
+                          </a:solidFill>
+                        </a:rPr>
+                        <a:t>-16.3%</a:t>
+                      </a:r>
+                      <a:endParaRPr lang="en-US" sz="1000" dirty="0"/>
+                    </a:p>
+                  </a:txBody>
+                  <a:tcPr marL="73152" marR="73152" marT="45720" marB="45720" anchor="ctr">
+                    <a:lnL w="9525" cap="flat" cmpd="sng" algn="ctr">
+                      <a:solidFill>
+                        <a:srgbClr val="E2E8F0"/>
+                      </a:solidFill>
+                      <a:prstDash val="solid"/>
+                      <a:round/>
+                      <a:headEnd type="none" w="med" len="med"/>
+                      <a:tailEnd type="none" w="med" len="med"/>
+                    </a:lnL>
+                    <a:lnR w="9525" cap="flat" cmpd="sng" algn="ctr">
+                      <a:solidFill>
+                        <a:srgbClr val="E2E8F0"/>
+                      </a:solidFill>
+                      <a:prstDash val="solid"/>
+                      <a:round/>
+                      <a:headEnd type="none" w="med" len="med"/>
+                      <a:tailEnd type="none" w="med" len="med"/>
+                    </a:lnR>
+                    <a:lnT w="9525" cap="flat" cmpd="sng" algn="ctr">
+                      <a:solidFill>
+                        <a:srgbClr val="E2E8F0"/>
+                      </a:solidFill>
+                      <a:prstDash val="solid"/>
+                      <a:round/>
+                      <a:headEnd type="none" w="med" len="med"/>
+                      <a:tailEnd type="none" w="med" len="med"/>
+                    </a:lnT>
+                    <a:lnB w="9525" cap="flat" cmpd="sng" algn="ctr">
+                      <a:solidFill>
+                        <a:srgbClr val="E2E8F0"/>
+                      </a:solidFill>
+                      <a:prstDash val="solid"/>
+                      <a:round/>
+                      <a:headEnd type="none" w="med" len="med"/>
+                      <a:tailEnd type="none" w="med" len="med"/>
+                    </a:lnB>
+                    <a:solidFill>
+                      <a:srgbClr val="F8FAFC"/>
+                    </a:solidFill>
+                  </a:tcPr>
+                </a:tc>
+                <a:tc>
+                  <a:txBody>
+                    <a:bodyPr/>
+                    <a:lstStyle/>
+                    <a:p>
+                      <a:pPr algn="ctr" indent="0" marL="0">
+                        <a:buNone/>
+                      </a:pPr>
+                      <a:r>
+                        <a:rPr lang="en-US" sz="1000" dirty="0">
+                          <a:solidFill>
+                            <a:srgbClr val="334155"/>
+                          </a:solidFill>
+                        </a:rPr>
+                        <a:t>7.9% ／ +35.5%</a:t>
+                      </a:r>
+                      <a:endParaRPr lang="en-US" sz="1000" dirty="0"/>
+                    </a:p>
+                  </a:txBody>
+                  <a:tcPr marL="73152" marR="73152" marT="45720" marB="45720" anchor="ctr">
+                    <a:lnL w="9525" cap="flat" cmpd="sng" algn="ctr">
+                      <a:solidFill>
+                        <a:srgbClr val="E2E8F0"/>
+                      </a:solidFill>
+                      <a:prstDash val="solid"/>
+                      <a:round/>
+                      <a:headEnd type="none" w="med" len="med"/>
+                      <a:tailEnd type="none" w="med" len="med"/>
+                    </a:lnL>
+                    <a:lnR w="9525" cap="flat" cmpd="sng" algn="ctr">
+                      <a:solidFill>
+                        <a:srgbClr val="E2E8F0"/>
+                      </a:solidFill>
+                      <a:prstDash val="solid"/>
+                      <a:round/>
+                      <a:headEnd type="none" w="med" len="med"/>
+                      <a:tailEnd type="none" w="med" len="med"/>
+                    </a:lnR>
+                    <a:lnT w="9525" cap="flat" cmpd="sng" algn="ctr">
+                      <a:solidFill>
+                        <a:srgbClr val="E2E8F0"/>
+                      </a:solidFill>
+                      <a:prstDash val="solid"/>
+                      <a:round/>
+                      <a:headEnd type="none" w="med" len="med"/>
+                      <a:tailEnd type="none" w="med" len="med"/>
+                    </a:lnT>
+                    <a:lnB w="9525" cap="flat" cmpd="sng" algn="ctr">
+                      <a:solidFill>
+                        <a:srgbClr val="E2E8F0"/>
+                      </a:solidFill>
+                      <a:prstDash val="solid"/>
+                      <a:round/>
+                      <a:headEnd type="none" w="med" len="med"/>
+                      <a:tailEnd type="none" w="med" len="med"/>
+                    </a:lnB>
+                    <a:solidFill>
+                      <a:srgbClr val="F8FAFC"/>
+                    </a:solidFill>
+                  </a:tcPr>
+                </a:tc>
+              </a:tr>
+              <a:tr h="502920">
+                <a:tc>
+                  <a:txBody>
+                    <a:bodyPr/>
+                    <a:lstStyle/>
+                    <a:p>
+                      <a:pPr algn="l" indent="0" marL="0">
+                        <a:buNone/>
+                      </a:pPr>
+                      <a:r>
+                        <a:rPr lang="en-US" sz="1000" dirty="0">
+                          <a:solidFill>
+                            <a:srgbClr val="334155"/>
+                          </a:solidFill>
+                        </a:rPr>
+                        <a:t>30 天</a:t>
+                      </a:r>
+                      <a:endParaRPr lang="en-US" sz="1000" dirty="0"/>
+                    </a:p>
+                  </a:txBody>
+                  <a:tcPr marL="73152" marR="73152" marT="45720" marB="45720" anchor="ctr">
+                    <a:lnL w="9525" cap="flat" cmpd="sng" algn="ctr">
+                      <a:solidFill>
+                        <a:srgbClr val="E2E8F0"/>
+                      </a:solidFill>
+                      <a:prstDash val="solid"/>
+                      <a:round/>
+                      <a:headEnd type="none" w="med" len="med"/>
+                      <a:tailEnd type="none" w="med" len="med"/>
+                    </a:lnL>
+                    <a:lnR w="9525" cap="flat" cmpd="sng" algn="ctr">
+                      <a:solidFill>
+                        <a:srgbClr val="E2E8F0"/>
+                      </a:solidFill>
+                      <a:prstDash val="solid"/>
+                      <a:round/>
+                      <a:headEnd type="none" w="med" len="med"/>
+                      <a:tailEnd type="none" w="med" len="med"/>
+                    </a:lnR>
+                    <a:lnT w="9525" cap="flat" cmpd="sng" algn="ctr">
+                      <a:solidFill>
+                        <a:srgbClr val="E2E8F0"/>
+                      </a:solidFill>
+                      <a:prstDash val="solid"/>
+                      <a:round/>
+                      <a:headEnd type="none" w="med" len="med"/>
+                      <a:tailEnd type="none" w="med" len="med"/>
+                    </a:lnT>
+                    <a:lnB w="9525" cap="flat" cmpd="sng" algn="ctr">
+                      <a:solidFill>
+                        <a:srgbClr val="E2E8F0"/>
+                      </a:solidFill>
+                      <a:prstDash val="solid"/>
+                      <a:round/>
+                      <a:headEnd type="none" w="med" len="med"/>
+                      <a:tailEnd type="none" w="med" len="med"/>
+                    </a:lnB>
+                    <a:solidFill>
+                      <a:srgbClr val="FFFFFF"/>
+                    </a:solidFill>
+                  </a:tcPr>
+                </a:tc>
+                <a:tc>
+                  <a:txBody>
+                    <a:bodyPr/>
+                    <a:lstStyle/>
+                    <a:p>
+                      <a:pPr algn="ctr" indent="0" marL="0">
+                        <a:buNone/>
+                      </a:pPr>
+                      <a:r>
+                        <a:rPr lang="en-US" sz="1000" dirty="0">
+                          <a:solidFill>
+                            <a:srgbClr val="334155"/>
+                          </a:solidFill>
+                        </a:rPr>
+                        <a:t>12</a:t>
+                      </a:r>
+                      <a:endParaRPr lang="en-US" sz="1000" dirty="0"/>
+                    </a:p>
+                  </a:txBody>
+                  <a:tcPr marL="73152" marR="73152" marT="45720" marB="45720" anchor="ctr">
+                    <a:lnL w="9525" cap="flat" cmpd="sng" algn="ctr">
+                      <a:solidFill>
+                        <a:srgbClr val="E2E8F0"/>
+                      </a:solidFill>
+                      <a:prstDash val="solid"/>
+                      <a:round/>
+                      <a:headEnd type="none" w="med" len="med"/>
+                      <a:tailEnd type="none" w="med" len="med"/>
+                    </a:lnL>
+                    <a:lnR w="9525" cap="flat" cmpd="sng" algn="ctr">
+                      <a:solidFill>
+                        <a:srgbClr val="E2E8F0"/>
+                      </a:solidFill>
+                      <a:prstDash val="solid"/>
+                      <a:round/>
+                      <a:headEnd type="none" w="med" len="med"/>
+                      <a:tailEnd type="none" w="med" len="med"/>
+                    </a:lnR>
+                    <a:lnT w="9525" cap="flat" cmpd="sng" algn="ctr">
+                      <a:solidFill>
+                        <a:srgbClr val="E2E8F0"/>
+                      </a:solidFill>
+                      <a:prstDash val="solid"/>
+                      <a:round/>
+                      <a:headEnd type="none" w="med" len="med"/>
+                      <a:tailEnd type="none" w="med" len="med"/>
+                    </a:lnT>
+                    <a:lnB w="9525" cap="flat" cmpd="sng" algn="ctr">
+                      <a:solidFill>
+                        <a:srgbClr val="E2E8F0"/>
+                      </a:solidFill>
+                      <a:prstDash val="solid"/>
+                      <a:round/>
+                      <a:headEnd type="none" w="med" len="med"/>
+                      <a:tailEnd type="none" w="med" len="med"/>
+                    </a:lnB>
+                    <a:solidFill>
+                      <a:srgbClr val="FFFFFF"/>
+                    </a:solidFill>
+                  </a:tcPr>
+                </a:tc>
+                <a:tc>
+                  <a:txBody>
+                    <a:bodyPr/>
+                    <a:lstStyle/>
+                    <a:p>
+                      <a:pPr algn="ctr" indent="0" marL="0">
+                        <a:buNone/>
+                      </a:pPr>
+                      <a:r>
+                        <a:rPr lang="en-US" sz="1000" dirty="0">
+                          <a:solidFill>
+                            <a:srgbClr val="334155"/>
+                          </a:solidFill>
+                        </a:rPr>
+                        <a:t>60.4%</a:t>
+                      </a:r>
+                      <a:endParaRPr lang="en-US" sz="1000" dirty="0"/>
+                    </a:p>
+                  </a:txBody>
+                  <a:tcPr marL="73152" marR="73152" marT="45720" marB="45720" anchor="ctr">
+                    <a:lnL w="9525" cap="flat" cmpd="sng" algn="ctr">
+                      <a:solidFill>
+                        <a:srgbClr val="E2E8F0"/>
+                      </a:solidFill>
+                      <a:prstDash val="solid"/>
+                      <a:round/>
+                      <a:headEnd type="none" w="med" len="med"/>
+                      <a:tailEnd type="none" w="med" len="med"/>
+                    </a:lnL>
+                    <a:lnR w="9525" cap="flat" cmpd="sng" algn="ctr">
+                      <a:solidFill>
+                        <a:srgbClr val="E2E8F0"/>
+                      </a:solidFill>
+                      <a:prstDash val="solid"/>
+                      <a:round/>
+                      <a:headEnd type="none" w="med" len="med"/>
+                      <a:tailEnd type="none" w="med" len="med"/>
+                    </a:lnR>
+                    <a:lnT w="9525" cap="flat" cmpd="sng" algn="ctr">
+                      <a:solidFill>
+                        <a:srgbClr val="E2E8F0"/>
+                      </a:solidFill>
+                      <a:prstDash val="solid"/>
+                      <a:round/>
+                      <a:headEnd type="none" w="med" len="med"/>
+                      <a:tailEnd type="none" w="med" len="med"/>
+                    </a:lnT>
+                    <a:lnB w="9525" cap="flat" cmpd="sng" algn="ctr">
+                      <a:solidFill>
+                        <a:srgbClr val="E2E8F0"/>
+                      </a:solidFill>
+                      <a:prstDash val="solid"/>
+                      <a:round/>
+                      <a:headEnd type="none" w="med" len="med"/>
+                      <a:tailEnd type="none" w="med" len="med"/>
+                    </a:lnB>
+                    <a:solidFill>
+                      <a:srgbClr val="FFFFFF"/>
+                    </a:solidFill>
+                  </a:tcPr>
+                </a:tc>
+                <a:tc>
+                  <a:txBody>
+                    <a:bodyPr/>
+                    <a:lstStyle/>
+                    <a:p>
+                      <a:pPr algn="ctr" indent="0" marL="0">
+                        <a:buNone/>
+                      </a:pPr>
+                      <a:r>
+                        <a:rPr lang="en-US" sz="1000" dirty="0">
+                          <a:solidFill>
+                            <a:srgbClr val="334155"/>
+                          </a:solidFill>
+                        </a:rPr>
+                        <a:t>-14.6%</a:t>
+                      </a:r>
+                      <a:endParaRPr lang="en-US" sz="1000" dirty="0"/>
+                    </a:p>
+                  </a:txBody>
+                  <a:tcPr marL="73152" marR="73152" marT="45720" marB="45720" anchor="ctr">
+                    <a:lnL w="9525" cap="flat" cmpd="sng" algn="ctr">
+                      <a:solidFill>
+                        <a:srgbClr val="E2E8F0"/>
+                      </a:solidFill>
+                      <a:prstDash val="solid"/>
+                      <a:round/>
+                      <a:headEnd type="none" w="med" len="med"/>
+                      <a:tailEnd type="none" w="med" len="med"/>
+                    </a:lnL>
+                    <a:lnR w="9525" cap="flat" cmpd="sng" algn="ctr">
+                      <a:solidFill>
+                        <a:srgbClr val="E2E8F0"/>
+                      </a:solidFill>
+                      <a:prstDash val="solid"/>
+                      <a:round/>
+                      <a:headEnd type="none" w="med" len="med"/>
+                      <a:tailEnd type="none" w="med" len="med"/>
+                    </a:lnR>
+                    <a:lnT w="9525" cap="flat" cmpd="sng" algn="ctr">
+                      <a:solidFill>
+                        <a:srgbClr val="E2E8F0"/>
+                      </a:solidFill>
+                      <a:prstDash val="solid"/>
+                      <a:round/>
+                      <a:headEnd type="none" w="med" len="med"/>
+                      <a:tailEnd type="none" w="med" len="med"/>
+                    </a:lnT>
+                    <a:lnB w="9525" cap="flat" cmpd="sng" algn="ctr">
+                      <a:solidFill>
+                        <a:srgbClr val="E2E8F0"/>
+                      </a:solidFill>
+                      <a:prstDash val="solid"/>
+                      <a:round/>
+                      <a:headEnd type="none" w="med" len="med"/>
+                      <a:tailEnd type="none" w="med" len="med"/>
+                    </a:lnB>
+                    <a:solidFill>
+                      <a:srgbClr val="FFFFFF"/>
+                    </a:solidFill>
+                  </a:tcPr>
+                </a:tc>
+                <a:tc>
+                  <a:txBody>
+                    <a:bodyPr/>
+                    <a:lstStyle/>
+                    <a:p>
+                      <a:pPr algn="ctr" indent="0" marL="0">
+                        <a:buNone/>
+                      </a:pPr>
+                      <a:r>
+                        <a:rPr lang="en-US" sz="1000" dirty="0">
+                          <a:solidFill>
+                            <a:srgbClr val="334155"/>
+                          </a:solidFill>
+                        </a:rPr>
+                        <a:t>11.9% ／ +32.8%</a:t>
+                      </a:r>
+                      <a:endParaRPr lang="en-US" sz="1000" dirty="0"/>
+                    </a:p>
+                  </a:txBody>
+                  <a:tcPr marL="73152" marR="73152" marT="45720" marB="45720" anchor="ctr">
+                    <a:lnL w="9525" cap="flat" cmpd="sng" algn="ctr">
+                      <a:solidFill>
+                        <a:srgbClr val="E2E8F0"/>
+                      </a:solidFill>
+                      <a:prstDash val="solid"/>
+                      <a:round/>
+                      <a:headEnd type="none" w="med" len="med"/>
+                      <a:tailEnd type="none" w="med" len="med"/>
+                    </a:lnL>
+                    <a:lnR w="9525" cap="flat" cmpd="sng" algn="ctr">
+                      <a:solidFill>
+                        <a:srgbClr val="E2E8F0"/>
+                      </a:solidFill>
+                      <a:prstDash val="solid"/>
+                      <a:round/>
+                      <a:headEnd type="none" w="med" len="med"/>
+                      <a:tailEnd type="none" w="med" len="med"/>
+                    </a:lnR>
+                    <a:lnT w="9525" cap="flat" cmpd="sng" algn="ctr">
+                      <a:solidFill>
+                        <a:srgbClr val="E2E8F0"/>
+                      </a:solidFill>
+                      <a:prstDash val="solid"/>
+                      <a:round/>
+                      <a:headEnd type="none" w="med" len="med"/>
+                      <a:tailEnd type="none" w="med" len="med"/>
+                    </a:lnT>
+                    <a:lnB w="9525" cap="flat" cmpd="sng" algn="ctr">
+                      <a:solidFill>
+                        <a:srgbClr val="E2E8F0"/>
+                      </a:solidFill>
+                      <a:prstDash val="solid"/>
+                      <a:round/>
+                      <a:headEnd type="none" w="med" len="med"/>
+                      <a:tailEnd type="none" w="med" len="med"/>
+                    </a:lnB>
+                    <a:solidFill>
+                      <a:srgbClr val="FFFFFF"/>
+                    </a:solidFill>
+                  </a:tcPr>
+                </a:tc>
+              </a:tr>
+            </a:tbl>
+          </a:graphicData>
+        </a:graphic>
+      </p:graphicFrame>
+      <p:sp>
+        <p:nvSpPr>
+          <p:cNvPr id="5" name="Shape 2"/>
+          <p:cNvSpPr/>
+          <p:nvPr/>
+        </p:nvSpPr>
+        <p:spPr>
+          <a:xfrm>
+            <a:off x="548640" y="4663440"/>
+            <a:ext cx="3566160" cy="1417320"/>
+          </a:xfrm>
+          <a:prstGeom prst="roundRect">
+            <a:avLst>
+              <a:gd name="adj" fmla="val 5161"/>
+            </a:avLst>
+          </a:prstGeom>
+          <a:solidFill>
+            <a:srgbClr val="EFF6FF"/>
+          </a:solidFill>
+          <a:ln/>
+        </p:spPr>
+      </p:sp>
+      <p:sp>
+        <p:nvSpPr>
+          <p:cNvPr id="6" name="Text 3"/>
+          <p:cNvSpPr txBox="1"/>
+          <p:nvPr/>
+        </p:nvSpPr>
+        <p:spPr>
+          <a:xfrm>
+            <a:off x="685800" y="4773168"/>
+            <a:ext cx="3291840" cy="914400"/>
+          </a:xfrm>
+          <a:prstGeom prst="rect">
+            <a:avLst/>
+          </a:prstGeom>
+          <a:noFill/>
+          <a:ln/>
+        </p:spPr>
+        <p:txBody>
+          <a:bodyPr wrap="square" lIns="0" tIns="0" rIns="0" bIns="0" rtlCol="0" anchor="b"/>
+          <a:lstStyle/>
+          <a:p>
+            <a:pPr algn="ctr" indent="0" marL="0">
+              <a:buNone/>
+            </a:pPr>
+            <a:r>
+              <a:rPr lang="en-US" sz="2000" b="1" dirty="0">
+                <a:solidFill>
+                  <a:srgbClr val="B45309"/>
+                </a:solidFill>
+                <a:latin typeface="Microsoft JhengHei" pitchFamily="34" charset="0"/>
+                <a:ea typeface="Microsoft JhengHei" pitchFamily="34" charset="-122"/>
+                <a:cs typeface="Microsoft JhengHei" pitchFamily="34" charset="-120"/>
+              </a:rPr>
+              <a:t>-14.6% ~ -19.0%</a:t>
+            </a:r>
+            <a:endParaRPr lang="en-US" sz="2000" dirty="0"/>
+          </a:p>
+        </p:txBody>
+      </p:sp>
+      <p:sp>
+        <p:nvSpPr>
+          <p:cNvPr id="7" name="Text 4"/>
+          <p:cNvSpPr txBox="1"/>
+          <p:nvPr/>
+        </p:nvSpPr>
+        <p:spPr>
+          <a:xfrm>
+            <a:off x="640080" y="5696712"/>
+            <a:ext cx="3383280" cy="320040"/>
+          </a:xfrm>
+          <a:prstGeom prst="rect">
+            <a:avLst/>
+          </a:prstGeom>
+          <a:noFill/>
+          <a:ln/>
+        </p:spPr>
+        <p:txBody>
+          <a:bodyPr wrap="square" lIns="0" tIns="0" rIns="0" bIns="0" rtlCol="0" anchor="t"/>
+          <a:lstStyle/>
+          <a:p>
+            <a:pPr algn="ctr" indent="0" marL="0">
+              <a:buNone/>
+            </a:pPr>
+            <a:r>
+              <a:rPr lang="en-US" sz="1050" dirty="0">
+                <a:solidFill>
+                  <a:srgbClr val="334155"/>
+                </a:solidFill>
+                <a:latin typeface="Microsoft JhengHei" pitchFamily="34" charset="0"/>
+                <a:ea typeface="Microsoft JhengHei" pitchFamily="34" charset="-122"/>
+                <a:cs typeface="Microsoft JhengHei" pitchFamily="34" charset="-120"/>
+              </a:rPr>
+              <a:t>全天期範圍內，混合平均年化僅小幅波動</a:t>
+            </a:r>
+            <a:endParaRPr lang="en-US" sz="1050" dirty="0"/>
+          </a:p>
+        </p:txBody>
+      </p:sp>
+      <p:sp>
+        <p:nvSpPr>
+          <p:cNvPr id="8" name="Shape 5"/>
+          <p:cNvSpPr/>
+          <p:nvPr/>
+        </p:nvSpPr>
+        <p:spPr>
+          <a:xfrm>
+            <a:off x="4297680" y="4663440"/>
+            <a:ext cx="3566160" cy="1417320"/>
+          </a:xfrm>
+          <a:prstGeom prst="roundRect">
+            <a:avLst>
+              <a:gd name="adj" fmla="val 5161"/>
+            </a:avLst>
+          </a:prstGeom>
+          <a:solidFill>
+            <a:srgbClr val="EFF6FF"/>
+          </a:solidFill>
+          <a:ln w="9525">
+            <a:solidFill>
+              <a:srgbClr val="E2E8F0"/>
+            </a:solidFill>
+            <a:prstDash val="solid"/>
+          </a:ln>
+          <a:effectLst>
+            <a:outerShdw sx="100000" sy="100000" kx="0" ky="0" algn="bl" rotWithShape="0" blurRad="76200" dist="25400" dir="5400000">
+              <a:srgbClr val="1E293B">
+                <a:alpha val="8000"/>
+              </a:srgbClr>
+            </a:outerShdw>
+          </a:effectLst>
+        </p:spPr>
+      </p:sp>
+      <p:sp>
+        <p:nvSpPr>
+          <p:cNvPr id="9" name="Text 6"/>
+          <p:cNvSpPr txBox="1"/>
+          <p:nvPr/>
+        </p:nvSpPr>
+        <p:spPr>
+          <a:xfrm>
+            <a:off x="4498848" y="4809744"/>
+            <a:ext cx="3163824" cy="320040"/>
+          </a:xfrm>
+          <a:prstGeom prst="rect">
+            <a:avLst/>
+          </a:prstGeom>
+          <a:noFill/>
+          <a:ln/>
+        </p:spPr>
+        <p:txBody>
+          <a:bodyPr wrap="square" lIns="0" tIns="0" rIns="0" bIns="0" rtlCol="0" anchor="ctr"/>
+          <a:lstStyle/>
+          <a:p>
+            <a:pPr algn="l" indent="0" marL="0">
+              <a:buNone/>
+            </a:pPr>
+            <a:r>
+              <a:rPr lang="en-US" sz="1300" b="1" dirty="0">
+                <a:solidFill>
+                  <a:srgbClr val="0F172A"/>
+                </a:solidFill>
+                <a:latin typeface="Microsoft JhengHei" pitchFamily="34" charset="0"/>
+                <a:ea typeface="Microsoft JhengHei" pitchFamily="34" charset="-122"/>
+                <a:cs typeface="Microsoft JhengHei" pitchFamily="34" charset="-120"/>
+              </a:rPr>
+              <a:t>反直覺發現</a:t>
+            </a:r>
+            <a:endParaRPr lang="en-US" sz="1300" dirty="0"/>
+          </a:p>
+        </p:txBody>
+      </p:sp>
+      <p:sp>
+        <p:nvSpPr>
+          <p:cNvPr id="10" name="Text 7"/>
+          <p:cNvSpPr txBox="1"/>
+          <p:nvPr/>
+        </p:nvSpPr>
+        <p:spPr>
+          <a:xfrm>
+            <a:off x="4498848" y="5166360"/>
+            <a:ext cx="3163824" cy="758952"/>
+          </a:xfrm>
+          <a:prstGeom prst="rect">
+            <a:avLst/>
+          </a:prstGeom>
+          <a:noFill/>
+          <a:ln/>
+        </p:spPr>
+        <p:txBody>
+          <a:bodyPr wrap="square" lIns="0" tIns="0" rIns="0" bIns="0" rtlCol="0" anchor="t"/>
+          <a:lstStyle/>
+          <a:p>
+            <a:pPr algn="l" indent="0" marL="0">
+              <a:lnSpc>
+                <a:spcPct val="115000"/>
+              </a:lnSpc>
+              <a:buNone/>
+            </a:pPr>
+            <a:r>
+              <a:rPr lang="en-US" sz="1000" dirty="0">
+                <a:solidFill>
+                  <a:srgbClr val="334155"/>
+                </a:solidFill>
+                <a:latin typeface="Microsoft JhengHei" pitchFamily="34" charset="0"/>
+                <a:ea typeface="Microsoft JhengHei" pitchFamily="34" charset="-122"/>
+                <a:cs typeface="Microsoft JhengHei" pitchFamily="34" charset="-120"/>
+              </a:rPr>
+              <a:t>天期越長，已平倉占比反而越高（30天11.9% vs 1天2.0%）——長天期每次檢查點有更充裕空間讓價格越過鎖定價，短天期雖單期年化最亮眼，但檢查過於密集反而更快再度套牢。</a:t>
+            </a:r>
+            <a:endParaRPr lang="en-US" sz="1000" dirty="0"/>
+          </a:p>
+        </p:txBody>
+      </p:sp>
+      <p:sp>
+        <p:nvSpPr>
+          <p:cNvPr id="11" name="Shape 8"/>
+          <p:cNvSpPr/>
+          <p:nvPr/>
+        </p:nvSpPr>
+        <p:spPr>
+          <a:xfrm>
+            <a:off x="7955280" y="4663440"/>
+            <a:ext cx="3685032" cy="1417320"/>
+          </a:xfrm>
+          <a:prstGeom prst="roundRect">
+            <a:avLst>
+              <a:gd name="adj" fmla="val 5161"/>
+            </a:avLst>
+          </a:prstGeom>
+          <a:solidFill>
+            <a:srgbClr val="F8FAFC"/>
+          </a:solidFill>
+          <a:ln w="9525">
+            <a:solidFill>
+              <a:srgbClr val="E2E8F0"/>
+            </a:solidFill>
+            <a:prstDash val="solid"/>
+          </a:ln>
+          <a:effectLst>
+            <a:outerShdw sx="100000" sy="100000" kx="0" ky="0" algn="bl" rotWithShape="0" blurRad="76200" dist="25400" dir="5400000">
+              <a:srgbClr val="1E293B">
+                <a:alpha val="8000"/>
+              </a:srgbClr>
+            </a:outerShdw>
+          </a:effectLst>
+        </p:spPr>
+      </p:sp>
+      <p:sp>
+        <p:nvSpPr>
+          <p:cNvPr id="12" name="Text 9"/>
+          <p:cNvSpPr txBox="1"/>
+          <p:nvPr/>
+        </p:nvSpPr>
+        <p:spPr>
+          <a:xfrm>
+            <a:off x="8156448" y="4809744"/>
+            <a:ext cx="3282696" cy="320040"/>
+          </a:xfrm>
+          <a:prstGeom prst="rect">
+            <a:avLst/>
+          </a:prstGeom>
+          <a:noFill/>
+          <a:ln/>
+        </p:spPr>
+        <p:txBody>
+          <a:bodyPr wrap="square" lIns="0" tIns="0" rIns="0" bIns="0" rtlCol="0" anchor="ctr"/>
+          <a:lstStyle/>
+          <a:p>
+            <a:pPr algn="l" indent="0" marL="0">
+              <a:buNone/>
+            </a:pPr>
+            <a:r>
+              <a:rPr lang="en-US" sz="1300" b="1" dirty="0">
+                <a:solidFill>
+                  <a:srgbClr val="0F172A"/>
+                </a:solidFill>
+                <a:latin typeface="Microsoft JhengHei" pitchFamily="34" charset="0"/>
+                <a:ea typeface="Microsoft JhengHei" pitchFamily="34" charset="-122"/>
+                <a:cs typeface="Microsoft JhengHei" pitchFamily="34" charset="-120"/>
+              </a:rPr>
+              <a:t>結論</a:t>
+            </a:r>
+            <a:endParaRPr lang="en-US" sz="1300" dirty="0"/>
+          </a:p>
+        </p:txBody>
+      </p:sp>
+      <p:sp>
+        <p:nvSpPr>
+          <p:cNvPr id="13" name="Text 10"/>
+          <p:cNvSpPr txBox="1"/>
+          <p:nvPr/>
+        </p:nvSpPr>
+        <p:spPr>
+          <a:xfrm>
+            <a:off x="8156448" y="5166360"/>
+            <a:ext cx="3282696" cy="758952"/>
+          </a:xfrm>
+          <a:prstGeom prst="rect">
+            <a:avLst/>
+          </a:prstGeom>
+          <a:noFill/>
+          <a:ln/>
+        </p:spPr>
+        <p:txBody>
+          <a:bodyPr wrap="square" lIns="0" tIns="0" rIns="0" bIns="0" rtlCol="0" anchor="t"/>
+          <a:lstStyle/>
+          <a:p>
+            <a:pPr algn="l" indent="0" marL="0">
+              <a:lnSpc>
+                <a:spcPct val="115000"/>
+              </a:lnSpc>
+              <a:buNone/>
+            </a:pPr>
+            <a:r>
+              <a:rPr lang="en-US" sz="1050" dirty="0">
+                <a:solidFill>
+                  <a:srgbClr val="334155"/>
+                </a:solidFill>
+                <a:latin typeface="Microsoft JhengHei" pitchFamily="34" charset="0"/>
+                <a:ea typeface="Microsoft JhengHei" pitchFamily="34" charset="-122"/>
+                <a:cs typeface="Microsoft JhengHei" pitchFamily="34" charset="-120"/>
+              </a:rPr>
+              <a:t>換任何天期，「已平倉必為正、但完成比例偏低」的核心結論都不變——不是7天這個假設剛好湊出負值。</a:t>
+            </a:r>
+            <a:endParaRPr lang="en-US" sz="1050" dirty="0"/>
+          </a:p>
+        </p:txBody>
+      </p:sp>
+      <p:sp>
+        <p:nvSpPr>
+          <p:cNvPr id="14" name="Text 11"/>
+          <p:cNvSpPr txBox="1"/>
+          <p:nvPr/>
+        </p:nvSpPr>
+        <p:spPr>
+          <a:xfrm>
+            <a:off x="457200" y="6492240"/>
+            <a:ext cx="5486400" cy="274320"/>
+          </a:xfrm>
+          <a:prstGeom prst="rect">
+            <a:avLst/>
+          </a:prstGeom>
+          <a:noFill/>
+          <a:ln/>
+        </p:spPr>
+        <p:txBody>
+          <a:bodyPr wrap="square" lIns="0" tIns="0" rIns="0" bIns="0" rtlCol="0" anchor="ctr"/>
+          <a:lstStyle/>
+          <a:p>
+            <a:pPr algn="l" indent="0" marL="0">
+              <a:buNone/>
+            </a:pPr>
+            <a:r>
+              <a:rPr lang="en-US" sz="900" dirty="0">
+                <a:solidFill>
+                  <a:srgbClr val="64748B"/>
+                </a:solidFill>
+                <a:latin typeface="Microsoft JhengHei" pitchFamily="34" charset="0"/>
+                <a:ea typeface="Microsoft JhengHei" pitchFamily="34" charset="-122"/>
+                <a:cs typeface="Microsoft JhengHei" pitchFamily="34" charset="-120"/>
+              </a:rPr>
+              <a:t>TSGEX 資產管理部｜內部機密</a:t>
+            </a:r>
+            <a:endParaRPr lang="en-US" sz="900" dirty="0"/>
+          </a:p>
+        </p:txBody>
+      </p:sp>
+      <p:sp>
+        <p:nvSpPr>
+          <p:cNvPr id="15" name="Text 12"/>
+          <p:cNvSpPr txBox="1"/>
+          <p:nvPr/>
+        </p:nvSpPr>
+        <p:spPr>
+          <a:xfrm>
+            <a:off x="9905695" y="6492240"/>
+            <a:ext cx="1828800" cy="274320"/>
+          </a:xfrm>
+          <a:prstGeom prst="rect">
+            <a:avLst/>
+          </a:prstGeom>
+          <a:noFill/>
+          <a:ln/>
+        </p:spPr>
+        <p:txBody>
+          <a:bodyPr wrap="square" lIns="0" tIns="0" rIns="0" bIns="0" rtlCol="0" anchor="ctr"/>
+          <a:lstStyle/>
+          <a:p>
+            <a:pPr algn="r" indent="0" marL="0">
+              <a:buNone/>
+            </a:pPr>
+            <a:r>
+              <a:rPr lang="en-US" sz="900" dirty="0">
+                <a:solidFill>
+                  <a:srgbClr val="64748B"/>
+                </a:solidFill>
+                <a:latin typeface="Microsoft JhengHei" pitchFamily="34" charset="0"/>
+                <a:ea typeface="Microsoft JhengHei" pitchFamily="34" charset="-122"/>
+                <a:cs typeface="Microsoft JhengHei" pitchFamily="34" charset="-120"/>
+              </a:rPr>
+              <a:t>12 / 17</a:t>
+            </a:r>
+            <a:endParaRPr lang="en-US" sz="900" dirty="0"/>
+          </a:p>
+        </p:txBody>
+      </p:sp>
+    </p:spTree>
+  </p:cSld>
+  <p:clrMapOvr>
+    <a:masterClrMapping/>
+  </p:clrMapOvr>
+</p:sld>
+</file>
+
+<file path=ppt/slides/slide13.xml><?xml version="1.0" encoding="utf-8"?>
+<p:sld xmlns:a="http://schemas.openxmlformats.org/drawingml/2006/main" xmlns:r="http://schemas.openxmlformats.org/officeDocument/2006/relationships" xmlns:p="http://schemas.openxmlformats.org/presentationml/2006/main">
+  <p:cSld name="Slide 13">
+    <p:bg>
+      <p:bgPr>
+        <a:solidFill>
+          <a:srgbClr val="FFFFFF"/>
+        </a:solidFill>
+      </p:bgPr>
+    </p:bg>
+    <p:spTree>
+      <p:nvGrpSpPr>
+        <p:cNvPr id="1" name=""/>
+        <p:cNvGrpSpPr/>
+        <p:nvPr/>
+      </p:nvGrpSpPr>
+      <p:grpSpPr>
+        <a:xfrm>
+          <a:off x="0" y="0"/>
+          <a:ext cx="0" cy="0"/>
+          <a:chOff x="0" y="0"/>
+          <a:chExt cx="0" cy="0"/>
+        </a:xfrm>
+      </p:grpSpPr>
+      <p:sp>
+        <p:nvSpPr>
+          <p:cNvPr id="2" name="Text 0"/>
+          <p:cNvSpPr txBox="1"/>
+          <p:nvPr/>
+        </p:nvSpPr>
+        <p:spPr>
+          <a:xfrm>
+            <a:off x="548640" y="365760"/>
+            <a:ext cx="11094415" cy="640080"/>
+          </a:xfrm>
+          <a:prstGeom prst="rect">
+            <a:avLst/>
+          </a:prstGeom>
+          <a:noFill/>
+          <a:ln/>
+        </p:spPr>
+        <p:txBody>
+          <a:bodyPr wrap="square" lIns="0" tIns="0" rIns="0" bIns="0" rtlCol="0" anchor="ctr"/>
+          <a:lstStyle/>
+          <a:p>
+            <a:pPr algn="l" indent="0" marL="0">
+              <a:buNone/>
+            </a:pPr>
+            <a:r>
+              <a:rPr lang="en-US" sz="2800" b="1" dirty="0">
+                <a:solidFill>
+                  <a:srgbClr val="0F172A"/>
+                </a:solidFill>
+                <a:latin typeface="Microsoft JhengHei" pitchFamily="34" charset="0"/>
+                <a:ea typeface="Microsoft JhengHei" pitchFamily="34" charset="-122"/>
+                <a:cs typeface="Microsoft JhengHei" pitchFamily="34" charset="-120"/>
+              </a:rPr>
               <a:t>⑤ Binance 雙幣投資（Dual Investment）</a:t>
             </a:r>
             <a:endParaRPr lang="en-US" sz="2800" dirty="0"/>
@@ -7228,7 +9710,7 @@
       </p:sp>
       <p:graphicFrame>
         <p:nvGraphicFramePr>
-          <p:cNvPr id="13" name="Table 0"/>
+          <p:cNvPr id="14" name="Table 0"/>
           <p:cNvGraphicFramePr>
             <a:graphicFrameLocks noGrp="1"/>
           </p:cNvGraphicFramePr>
@@ -8584,7 +11066,7 @@
                 <a:ea typeface="Microsoft JhengHei" pitchFamily="34" charset="-122"/>
                 <a:cs typeface="Microsoft JhengHei" pitchFamily="34" charset="-120"/>
               </a:rPr>
-              <a:t>12 / 16</a:t>
+              <a:t>13 / 17</a:t>
             </a:r>
             <a:endParaRPr lang="en-US" sz="900" dirty="0"/>
           </a:p>
@@ -8598,9 +11080,9 @@
 </p:sld>
 </file>
 
-<file path=ppt/slides/slide13.xml><?xml version="1.0" encoding="utf-8"?>
+<file path=ppt/slides/slide14.xml><?xml version="1.0" encoding="utf-8"?>
 <p:sld xmlns:a="http://schemas.openxmlformats.org/drawingml/2006/main" xmlns:r="http://schemas.openxmlformats.org/officeDocument/2006/relationships" xmlns:p="http://schemas.openxmlformats.org/presentationml/2006/main">
-  <p:cSld name="Slide 13">
+  <p:cSld name="Slide 14">
     <p:bg>
       <p:bgPr>
         <a:solidFill>
@@ -8702,7 +11184,7 @@
       </p:sp>
       <p:graphicFrame>
         <p:nvGraphicFramePr>
-          <p:cNvPr id="14" name="Table 0"/>
+          <p:cNvPr id="15" name="Table 0"/>
           <p:cNvGraphicFramePr>
             <a:graphicFrameLocks noGrp="1"/>
           </p:cNvGraphicFramePr>
@@ -10526,7 +13008,7 @@
                 <a:ea typeface="Microsoft JhengHei" pitchFamily="34" charset="-122"/>
                 <a:cs typeface="Microsoft JhengHei" pitchFamily="34" charset="-120"/>
               </a:rPr>
-              <a:t>13 / 16</a:t>
+              <a:t>14 / 17</a:t>
             </a:r>
             <a:endParaRPr lang="en-US" sz="900" dirty="0"/>
           </a:p>
@@ -10540,9 +13022,9 @@
 </p:sld>
 </file>
 
-<file path=ppt/slides/slide14.xml><?xml version="1.0" encoding="utf-8"?>
+<file path=ppt/slides/slide15.xml><?xml version="1.0" encoding="utf-8"?>
 <p:sld xmlns:a="http://schemas.openxmlformats.org/drawingml/2006/main" xmlns:r="http://schemas.openxmlformats.org/officeDocument/2006/relationships" xmlns:p="http://schemas.openxmlformats.org/presentationml/2006/main">
-  <p:cSld name="Slide 14">
+  <p:cSld name="Slide 15">
     <p:bg>
       <p:bgPr>
         <a:solidFill>
@@ -10644,7 +13126,7 @@
       </p:sp>
       <p:graphicFrame>
         <p:nvGraphicFramePr>
-          <p:cNvPr id="15" name="Table 0"/>
+          <p:cNvPr id="16" name="Table 0"/>
           <p:cNvGraphicFramePr>
             <a:graphicFrameLocks noGrp="1"/>
           </p:cNvGraphicFramePr>
@@ -13324,7 +15806,7 @@
                 <a:ea typeface="Microsoft JhengHei" pitchFamily="34" charset="-122"/>
                 <a:cs typeface="Microsoft JhengHei" pitchFamily="34" charset="-120"/>
               </a:rPr>
-              <a:t>14 / 16</a:t>
+              <a:t>15 / 17</a:t>
             </a:r>
             <a:endParaRPr lang="en-US" sz="900" dirty="0"/>
           </a:p>
@@ -13338,9 +15820,9 @@
 </p:sld>
 </file>
 
-<file path=ppt/slides/slide15.xml><?xml version="1.0" encoding="utf-8"?>
+<file path=ppt/slides/slide16.xml><?xml version="1.0" encoding="utf-8"?>
 <p:sld xmlns:a="http://schemas.openxmlformats.org/drawingml/2006/main" xmlns:r="http://schemas.openxmlformats.org/officeDocument/2006/relationships" xmlns:p="http://schemas.openxmlformats.org/presentationml/2006/main">
-  <p:cSld name="Slide 15">
+  <p:cSld name="Slide 16">
     <p:bg>
       <p:bgPr>
         <a:solidFill>
@@ -13458,7 +15940,7 @@
       </p:graphicFrame>
       <p:graphicFrame>
         <p:nvGraphicFramePr>
-          <p:cNvPr id="16" name="Table 0"/>
+          <p:cNvPr id="17" name="Table 0"/>
           <p:cNvGraphicFramePr>
             <a:graphicFrameLocks noGrp="1"/>
           </p:cNvGraphicFramePr>
@@ -15470,7 +17952,7 @@
                 <a:ea typeface="Microsoft JhengHei" pitchFamily="34" charset="-122"/>
                 <a:cs typeface="Microsoft JhengHei" pitchFamily="34" charset="-120"/>
               </a:rPr>
-              <a:t>15 / 16</a:t>
+              <a:t>16 / 17</a:t>
             </a:r>
             <a:endParaRPr lang="en-US" sz="900" dirty="0"/>
           </a:p>
@@ -15484,9 +17966,9 @@
 </p:sld>
 </file>
 
-<file path=ppt/slides/slide16.xml><?xml version="1.0" encoding="utf-8"?>
+<file path=ppt/slides/slide17.xml><?xml version="1.0" encoding="utf-8"?>
 <p:sld xmlns:a="http://schemas.openxmlformats.org/drawingml/2006/main" xmlns:r="http://schemas.openxmlformats.org/officeDocument/2006/relationships" xmlns:p="http://schemas.openxmlformats.org/presentationml/2006/main">
-  <p:cSld name="Slide 16">
+  <p:cSld name="Slide 17">
     <p:bg>
       <p:bgPr>
         <a:solidFill>
@@ -16802,7 +19284,7 @@
                 <a:ea typeface="Microsoft JhengHei" pitchFamily="34" charset="-122"/>
                 <a:cs typeface="Microsoft JhengHei" pitchFamily="34" charset="-120"/>
               </a:rPr>
-              <a:t>16 / 16</a:t>
+              <a:t>17 / 17</a:t>
             </a:r>
             <a:endParaRPr lang="en-US" sz="900" dirty="0"/>
           </a:p>
@@ -18699,7 +21181,7 @@
                 <a:ea typeface="Microsoft JhengHei" pitchFamily="34" charset="-122"/>
                 <a:cs typeface="Microsoft JhengHei" pitchFamily="34" charset="-120"/>
               </a:rPr>
-              <a:t>2 / 16</a:t>
+              <a:t>2 / 17</a:t>
             </a:r>
             <a:endParaRPr lang="en-US" sz="900" dirty="0"/>
           </a:p>
@@ -19417,7 +21899,7 @@
                 <a:ea typeface="Microsoft JhengHei" pitchFamily="34" charset="-122"/>
                 <a:cs typeface="Microsoft JhengHei" pitchFamily="34" charset="-120"/>
               </a:rPr>
-              <a:t>3 / 16</a:t>
+              <a:t>3 / 17</a:t>
             </a:r>
             <a:endParaRPr lang="en-US" sz="900" dirty="0"/>
           </a:p>
@@ -20395,7 +22877,7 @@
                 <a:ea typeface="Microsoft JhengHei" pitchFamily="34" charset="-122"/>
                 <a:cs typeface="Microsoft JhengHei" pitchFamily="34" charset="-120"/>
               </a:rPr>
-              <a:t>4 / 16</a:t>
+              <a:t>4 / 17</a:t>
             </a:r>
             <a:endParaRPr lang="en-US" sz="900" dirty="0"/>
           </a:p>
@@ -22057,7 +24539,7 @@
                 <a:ea typeface="Microsoft JhengHei" pitchFamily="34" charset="-122"/>
                 <a:cs typeface="Microsoft JhengHei" pitchFamily="34" charset="-120"/>
               </a:rPr>
-              <a:t>5 / 16</a:t>
+              <a:t>5 / 17</a:t>
             </a:r>
             <a:endParaRPr lang="en-US" sz="900" dirty="0"/>
           </a:p>
@@ -23936,7 +26418,7 @@
                 <a:ea typeface="Microsoft JhengHei" pitchFamily="34" charset="-122"/>
                 <a:cs typeface="Microsoft JhengHei" pitchFamily="34" charset="-120"/>
               </a:rPr>
-              <a:t>6 / 16</a:t>
+              <a:t>6 / 17</a:t>
             </a:r>
             <a:endParaRPr lang="en-US" sz="900" dirty="0"/>
           </a:p>
@@ -25546,7 +28028,7 @@
                 <a:ea typeface="Microsoft JhengHei" pitchFamily="34" charset="-122"/>
                 <a:cs typeface="Microsoft JhengHei" pitchFamily="34" charset="-120"/>
               </a:rPr>
-              <a:t>7 / 16</a:t>
+              <a:t>7 / 17</a:t>
             </a:r>
             <a:endParaRPr lang="en-US" sz="900" dirty="0"/>
           </a:p>
@@ -25965,7 +28447,7 @@
                 <a:ea typeface="Microsoft JhengHei" pitchFamily="34" charset="-122"/>
                 <a:cs typeface="Microsoft JhengHei" pitchFamily="34" charset="-120"/>
               </a:rPr>
-              <a:t>8 / 16</a:t>
+              <a:t>8 / 17</a:t>
             </a:r>
             <a:endParaRPr lang="en-US" sz="900" dirty="0"/>
           </a:p>
@@ -27534,7 +30016,7 @@
                 <a:ea typeface="Microsoft JhengHei" pitchFamily="34" charset="-122"/>
                 <a:cs typeface="Microsoft JhengHei" pitchFamily="34" charset="-120"/>
               </a:rPr>
-              <a:t>9 / 16</a:t>
+              <a:t>9 / 17</a:t>
             </a:r>
             <a:endParaRPr lang="en-US" sz="900" dirty="0"/>
           </a:p>

--- a/reports/TSGEX_Five_Instrument_Yield_Optimization_Report.pptx
+++ b/reports/TSGEX_Five_Instrument_Yield_Optimization_Report.pptx
@@ -22,9 +22,10 @@
     <p:sldId id="270" r:id="rId16"/>
     <p:sldId id="271" r:id="rId17"/>
     <p:sldId id="272" r:id="rId18"/>
+    <p:sldId id="273" r:id="rId19"/>
   </p:sldIdLst>
   <p:notesMasterIdLst>
-    <p:notesMasterId r:id="rId19"/>
+    <p:notesMasterId r:id="rId20"/>
   </p:notesMasterIdLst>
   <p:sldSz cx="12192000" cy="6858000"/>
   <p:notesSz cx="6858000" cy="12192000"/>
@@ -2170,6 +2171,94 @@
 </p:notes>
 </file>
 
+<file path=ppt/notesSlides/notesSlide18.xml><?xml version="1.0" encoding="utf-8"?>
+<p:notes xmlns:a="http://schemas.openxmlformats.org/drawingml/2006/main" xmlns:r="http://schemas.openxmlformats.org/officeDocument/2006/relationships" xmlns:p="http://schemas.openxmlformats.org/presentationml/2006/main">
+  <p:cSld>
+    <p:spTree>
+      <p:nvGrpSpPr>
+        <p:cNvPr id="1" name=""/>
+        <p:cNvGrpSpPr/>
+        <p:nvPr/>
+      </p:nvGrpSpPr>
+      <p:grpSpPr>
+        <a:xfrm>
+          <a:off x="0" y="0"/>
+          <a:ext cx="0" cy="0"/>
+          <a:chOff x="0" y="0"/>
+          <a:chExt cx="0" cy="0"/>
+        </a:xfrm>
+      </p:grpSpPr>
+      <p:sp>
+        <p:nvSpPr>
+          <p:cNvPr id="2" name="Slide Image Placeholder 1"/>
+          <p:cNvSpPr>
+            <a:spLocks noGrp="1" noRot="1" noChangeAspect="1"/>
+          </p:cNvSpPr>
+          <p:nvPr>
+            <p:ph type="sldImg"/>
+          </p:nvPr>
+        </p:nvSpPr>
+        <p:spPr/>
+      </p:sp>
+      <p:sp>
+        <p:nvSpPr>
+          <p:cNvPr id="3" name="Notes Placeholder 2"/>
+          <p:cNvSpPr>
+            <a:spLocks noGrp="1"/>
+          </p:cNvSpPr>
+          <p:nvPr>
+            <p:ph type="body" idx="1"/>
+          </p:nvPr>
+        </p:nvSpPr>
+        <p:spPr/>
+        <p:txBody>
+          <a:bodyPr/>
+          <a:lstStyle/>
+          <a:p>
+            <a:r>
+              <a:rPr lang="en-US" dirty="0"/>
+              <a:t/>
+            </a:r>
+            <a:endParaRPr lang="en-US" dirty="0"/>
+          </a:p>
+        </p:txBody>
+      </p:sp>
+      <p:sp>
+        <p:nvSpPr>
+          <p:cNvPr id="4" name="Slide Number Placeholder 3"/>
+          <p:cNvSpPr>
+            <a:spLocks noGrp="1"/>
+          </p:cNvSpPr>
+          <p:nvPr>
+            <p:ph type="sldNum" sz="quarter" idx="10"/>
+          </p:nvPr>
+        </p:nvSpPr>
+        <p:spPr/>
+        <p:txBody>
+          <a:bodyPr/>
+          <a:lstStyle/>
+          <a:p>
+            <a:fld id="{F7021451-1387-4CA6-816F-3879F97B5CBC}" type="slidenum">
+              <a:rPr lang="en-US"/>
+              <a:t>18</a:t>
+            </a:fld>
+            <a:endParaRPr lang="en-US"/>
+          </a:p>
+        </p:txBody>
+      </p:sp>
+    </p:spTree>
+    <p:extLst>
+      <p:ext uri="{BB962C8B-B14F-4D97-AF65-F5344CB8AC3E}">
+        <p14:creationId xmlns:p14="http://schemas.microsoft.com/office/powerpoint/2010/main" val="1024086991"/>
+      </p:ext>
+    </p:extLst>
+  </p:cSld>
+  <p:clrMapOvr>
+    <a:masterClrMapping/>
+  </p:clrMapOvr>
+</p:notes>
+</file>
+
 <file path=ppt/notesSlides/notesSlide2.xml><?xml version="1.0" encoding="utf-8"?>
 <p:notes xmlns:a="http://schemas.openxmlformats.org/drawingml/2006/main" xmlns:r="http://schemas.openxmlformats.org/officeDocument/2006/relationships" xmlns:p="http://schemas.openxmlformats.org/presentationml/2006/main">
   <p:cSld>
@@ -3863,7 +3952,7 @@
                 <a:ea typeface="Microsoft JhengHei" pitchFamily="34" charset="-122"/>
                 <a:cs typeface="Microsoft JhengHei" pitchFamily="34" charset="-120"/>
               </a:rPr>
-              <a:t>④ 進階策略：轉換後之滾動掛單（"Wheel" 策略）</a:t>
+              <a:t>④ 進階操作：滾動掛單策略，提高解套後之勝率</a:t>
             </a:r>
             <a:endParaRPr lang="en-US" sz="2800" dirty="0"/>
           </a:p>
@@ -3902,7 +3991,7 @@
                 <a:ea typeface="Microsoft JhengHei" pitchFamily="34" charset="-122"/>
                 <a:cs typeface="Microsoft JhengHei" pitchFamily="34" charset="-120"/>
               </a:rPr>
-              <a:t>本金轉為 BTC 後不認賠平倉，改以同一行使價反向掛「高賣」等待價格回升</a:t>
+              <a:t>本金轉為 BTC 後持續以同一行使價反向掛「高賣」收取權利金，等待價格回升</a:t>
             </a:r>
             <a:endParaRPr lang="en-US" sz="1300" dirty="0"/>
           </a:p>
@@ -5378,7 +5467,7 @@
                 <a:ea typeface="Microsoft JhengHei" pitchFamily="34" charset="-122"/>
                 <a:cs typeface="Microsoft JhengHei" pitchFamily="34" charset="-120"/>
               </a:rPr>
-              <a:t>順利路徑：本金全數取回＋累積權利金 $20,535</a:t>
+              <a:t>本例路徑：本金全數取回＋累積權利金 $20,535</a:t>
             </a:r>
             <a:endParaRPr lang="en-US" sz="1050" dirty="0"/>
           </a:p>
@@ -5551,7 +5640,7 @@
                 <a:ea typeface="Microsoft JhengHei" pitchFamily="34" charset="-122"/>
                 <a:cs typeface="Microsoft JhengHei" pitchFamily="34" charset="-120"/>
               </a:rPr>
-              <a:t>關鍵前提</a:t>
+              <a:t>執行紀律</a:t>
             </a:r>
             <a:endParaRPr lang="en-US" sz="1300" dirty="0"/>
           </a:p>
@@ -5593,7 +5682,7 @@
                 <a:ea typeface="Microsoft JhengHei" pitchFamily="34" charset="-122"/>
                 <a:cs typeface="Microsoft JhengHei" pitchFamily="34" charset="-120"/>
               </a:rPr>
-              <a:t>「不會虧錢」僅在最終價格確實回升至原行使價、且過程中未改用更低行使價時成立。</a:t>
+              <a:t>只要維持同一（或更高）行使價滾動、不因情緒而任意下修，價格回升後即保證取回本金加計期間權利金。</a:t>
             </a:r>
             <a:endParaRPr lang="en-US" sz="1050" dirty="0"/>
           </a:p>
@@ -5666,7 +5755,7 @@
                 <a:ea typeface="Microsoft JhengHei" pitchFamily="34" charset="-122"/>
                 <a:cs typeface="Microsoft JhengHei" pitchFamily="34" charset="-120"/>
               </a:rPr>
-              <a:t>財務部應理解之三項限制</a:t>
+              <a:t>配套治理措施</a:t>
             </a:r>
             <a:endParaRPr lang="en-US" sz="1300" dirty="0"/>
           </a:p>
@@ -5708,7 +5797,7 @@
                 <a:ea typeface="Microsoft JhengHei" pitchFamily="34" charset="-122"/>
                 <a:cs typeface="Microsoft JhengHei" pitchFamily="34" charset="-120"/>
               </a:rPr>
-              <a:t>① 權利金隨套牢加深而遞減（越價外，權利金越低，非維持初始水準）｜② 價格回升時間無保證，資金於等待期間無法投入其他生息工具（機會成本）｜③ FVTPL會計原則下，未回升期間之BTC部位仍須逐期認列未實現跌價損失，非「零風險」</a:t>
+              <a:t>① 建議搭配停利機制（見下頁），可顯著提升整體年化並大幅降低虧損機率｜② 資金應規劃為獨立風險預算，不佔用日常營運流動性｜③ 依 FVTPL 原則按季揭露未實現評價，確保財務透明</a:t>
             </a:r>
             <a:endParaRPr lang="en-US" sz="1050" dirty="0"/>
           </a:p>
@@ -5786,7 +5875,7 @@
                 <a:ea typeface="Microsoft JhengHei" pitchFamily="34" charset="-122"/>
                 <a:cs typeface="Microsoft JhengHei" pitchFamily="34" charset="-120"/>
               </a:rPr>
-              <a:t>10 / 17</a:t>
+              <a:t>10 / 18</a:t>
             </a:r>
             <a:endParaRPr lang="en-US" sz="900" dirty="0"/>
           </a:p>
@@ -5857,7 +5946,7 @@
                 <a:ea typeface="Microsoft JhengHei" pitchFamily="34" charset="-122"/>
                 <a:cs typeface="Microsoft JhengHei" pitchFamily="34" charset="-120"/>
               </a:rPr>
-              <a:t>④ 全年模擬：為何「每期都正報酬」全年卻可能是負的？</a:t>
+              <a:t>④ 全年模擬：勝率驗證與治理重點</a:t>
             </a:r>
             <a:endParaRPr lang="en-US" sz="2800" dirty="0"/>
           </a:p>
@@ -6776,7 +6865,7 @@
                 <a:ea typeface="Microsoft JhengHei" pitchFamily="34" charset="-122"/>
                 <a:cs typeface="Microsoft JhengHei" pitchFamily="34" charset="-120"/>
               </a:rPr>
-              <a:t>驗證：只要完整走完一輪，必然是正報酬——與直覺一致</a:t>
+              <a:t>只要完整走完一輪，必然是正報酬——驗證了機制設計的本質</a:t>
             </a:r>
             <a:endParaRPr lang="en-US" sz="1050" dirty="0"/>
           </a:p>
@@ -6849,7 +6938,7 @@
                 <a:ea typeface="Microsoft JhengHei" pitchFamily="34" charset="-122"/>
                 <a:cs typeface="Microsoft JhengHei" pitchFamily="34" charset="-120"/>
               </a:rPr>
-              <a:t>但只有5.5%~8.1%能在一年內走完</a:t>
+              <a:t>關鍵治理重點：週期長度</a:t>
             </a:r>
             <a:endParaRPr lang="en-US" sz="1300" dirty="0"/>
           </a:p>
@@ -6891,7 +6980,7 @@
                 <a:ea typeface="Microsoft JhengHei" pitchFamily="34" charset="-122"/>
                 <a:cs typeface="Microsoft JhengHei" pitchFamily="34" charset="-120"/>
               </a:rPr>
-              <a:t>其餘九成以上路徑年末仍持有BTC，「負報酬」幾乎全來自這批未平倉部位在年末當天的市價快照，而非策略已實現虧損。</a:t>
+              <a:t>5.5%~8.1%的路徑能在一年內走完並實現獲利；其餘部位年末仍在持有中，代表這是一個「存續期間不固定」的部位，而非「已虧損」——需要的是主動管理與時間規劃，而非視為零風險之現金管理工具。</a:t>
             </a:r>
             <a:endParaRPr lang="en-US" sz="1050" dirty="0"/>
           </a:p>
@@ -6964,7 +7053,7 @@
                 <a:ea typeface="Microsoft JhengHei" pitchFamily="34" charset="-122"/>
                 <a:cs typeface="Microsoft JhengHei" pitchFamily="34" charset="-120"/>
               </a:rPr>
-              <a:t>為什麼「未平倉」的比例這麼高？</a:t>
+              <a:t>為什麼週期長度不固定？</a:t>
             </a:r>
             <a:endParaRPr lang="en-US" sz="1300" dirty="0"/>
           </a:p>
@@ -7006,7 +7095,7 @@
                 <a:ea typeface="Microsoft JhengHei" pitchFamily="34" charset="-122"/>
                 <a:cs typeface="Microsoft JhengHei" pitchFamily="34" charset="-120"/>
               </a:rPr>
-              <a:t>零漂移（公平隨機漫步）下，「價格回到某個固定點」所需的期望時間在數學上是無窮大——這不是模型瑕疵，是隨機漫步的古典性質。且兩規則都要求「一解套就立刻重新掛單」，新倉位又有相當機率馬上再度套牢，因此「卡住」才是這套規則長期下的常態，而非過渡。</a:t>
+              <a:t>零漂移（公平隨機漫步）下，「價格回到某個固定點」所需的時間在數學上沒有上限——這是隨機漫步的古典性質，非策略設計缺陷。若解套後採取「停利、不再滾動」的紀律（見下頁），可大幅縮短平均曝險時間、顯著改善整體結果。</a:t>
             </a:r>
             <a:endParaRPr lang="en-US" sz="1050" dirty="0"/>
           </a:p>
@@ -7121,7 +7210,7 @@
                 <a:ea typeface="Microsoft JhengHei" pitchFamily="34" charset="-122"/>
                 <a:cs typeface="Microsoft JhengHei" pitchFamily="34" charset="-120"/>
               </a:rPr>
-              <a:t>不應只看「混合平均年化」（易誤判為策略虧損），也不應只看「已平倉100%正報酬」（易誤判為零風險）；正確理解是：勝率高，但完成週期需要的時間沒有上限，期間資金以未平倉部位形式暴露於市價波動與FVTPL未實現損益認列。</a:t>
+              <a:t>本策略勝率高、機制設計上保證已平倉部位不低於本金；審查重點應放在「如何管理存續期間」（部位規模、停利紀律、FVTPL季度評價揭露），而非單看混合平均數字。</a:t>
             </a:r>
             <a:endParaRPr lang="en-US" sz="1050" dirty="0"/>
           </a:p>
@@ -7199,7 +7288,7 @@
                 <a:ea typeface="Microsoft JhengHei" pitchFamily="34" charset="-122"/>
                 <a:cs typeface="Microsoft JhengHei" pitchFamily="34" charset="-120"/>
               </a:rPr>
-              <a:t>11 / 17</a:t>
+              <a:t>11 / 18</a:t>
             </a:r>
             <a:endParaRPr lang="en-US" sz="900" dirty="0"/>
           </a:p>
@@ -7270,6 +7359,1402 @@
                 <a:ea typeface="Microsoft JhengHei" pitchFamily="34" charset="-122"/>
                 <a:cs typeface="Microsoft JhengHei" pitchFamily="34" charset="-120"/>
               </a:rPr>
+              <a:t>④ 建議做法：解套後停利了結，不做永續滾動</a:t>
+            </a:r>
+            <a:endParaRPr lang="en-US" sz="2800" dirty="0"/>
+          </a:p>
+        </p:txBody>
+      </p:sp>
+      <p:sp>
+        <p:nvSpPr>
+          <p:cNvPr id="3" name="Text 1"/>
+          <p:cNvSpPr txBox="1"/>
+          <p:nvPr/>
+        </p:nvSpPr>
+        <p:spPr>
+          <a:xfrm>
+            <a:off x="548640" y="960120"/>
+            <a:ext cx="11094415" cy="365760"/>
+          </a:xfrm>
+          <a:prstGeom prst="rect">
+            <a:avLst/>
+          </a:prstGeom>
+          <a:noFill/>
+          <a:ln/>
+        </p:spPr>
+        <p:txBody>
+          <a:bodyPr wrap="square" lIns="0" tIns="0" rIns="0" bIns="0" rtlCol="0" anchor="ctr"/>
+          <a:lstStyle/>
+          <a:p>
+            <a:pPr algn="l" indent="0" marL="0">
+              <a:buNone/>
+            </a:pPr>
+            <a:r>
+              <a:rPr lang="en-US" sz="1300" dirty="0">
+                <a:solidFill>
+                  <a:srgbClr val="64748B"/>
+                </a:solidFill>
+                <a:latin typeface="Microsoft JhengHei" pitchFamily="34" charset="0"/>
+                <a:ea typeface="Microsoft JhengHei" pitchFamily="34" charset="-122"/>
+                <a:cs typeface="Microsoft JhengHei" pitchFamily="34" charset="-120"/>
+              </a:rPr>
+              <a:t>同一套模擬，加上一條紀律——解套轉回USDT後即停止重新掛單、資金轉為現金——結果明顯改善</a:t>
+            </a:r>
+            <a:endParaRPr lang="en-US" sz="1300" dirty="0"/>
+          </a:p>
+        </p:txBody>
+      </p:sp>
+      <p:graphicFrame>
+        <p:nvGraphicFramePr>
+          <p:cNvPr id="13" name="Table 0"/>
+          <p:cNvGraphicFramePr>
+            <a:graphicFrameLocks noGrp="1"/>
+          </p:cNvGraphicFramePr>
+          <p:nvPr>
+            <p:extLst>
+              <p:ext uri="{D42A27DB-BD31-4B8C-83A1-F6EECF244321}">
+                <p14:modId xmlns:p14="http://schemas.microsoft.com/office/powerpoint/2010/main" val="1579011935"/>
+              </p:ext>
+            </p:extLst>
+          </p:nvPr>
+        </p:nvGraphicFramePr>
+        <p:xfrm>
+          <a:off x="548640" y="1600200"/>
+          <a:ext cx="6949440" cy="914400"/>
+        </p:xfrm>
+        <a:graphic>
+          <a:graphicData uri="http://schemas.openxmlformats.org/drawingml/2006/table">
+            <a:tbl>
+              <a:tblPr/>
+              <a:tblGrid>
+                <a:gridCol w="2743200"/>
+                <a:gridCol w="2103120"/>
+                <a:gridCol w="2103120"/>
+              </a:tblGrid>
+              <a:tr h="640080">
+                <a:tc>
+                  <a:txBody>
+                    <a:bodyPr/>
+                    <a:lstStyle/>
+                    <a:p>
+                      <a:pPr algn="ctr" indent="0" marL="0">
+                        <a:buNone/>
+                      </a:pPr>
+                      <a:endParaRPr lang="en-US" sz="1050" dirty="0"/>
+                    </a:p>
+                  </a:txBody>
+                  <a:tcPr marL="73152" marR="73152" marT="45720" marB="45720" anchor="ctr">
+                    <a:lnL w="9525" cap="flat" cmpd="sng" algn="ctr">
+                      <a:solidFill>
+                        <a:srgbClr val="E2E8F0"/>
+                      </a:solidFill>
+                      <a:prstDash val="solid"/>
+                      <a:round/>
+                      <a:headEnd type="none" w="med" len="med"/>
+                      <a:tailEnd type="none" w="med" len="med"/>
+                    </a:lnL>
+                    <a:lnR w="9525" cap="flat" cmpd="sng" algn="ctr">
+                      <a:solidFill>
+                        <a:srgbClr val="E2E8F0"/>
+                      </a:solidFill>
+                      <a:prstDash val="solid"/>
+                      <a:round/>
+                      <a:headEnd type="none" w="med" len="med"/>
+                      <a:tailEnd type="none" w="med" len="med"/>
+                    </a:lnR>
+                    <a:lnT w="9525" cap="flat" cmpd="sng" algn="ctr">
+                      <a:solidFill>
+                        <a:srgbClr val="E2E8F0"/>
+                      </a:solidFill>
+                      <a:prstDash val="solid"/>
+                      <a:round/>
+                      <a:headEnd type="none" w="med" len="med"/>
+                      <a:tailEnd type="none" w="med" len="med"/>
+                    </a:lnT>
+                    <a:lnB w="9525" cap="flat" cmpd="sng" algn="ctr">
+                      <a:solidFill>
+                        <a:srgbClr val="E2E8F0"/>
+                      </a:solidFill>
+                      <a:prstDash val="solid"/>
+                      <a:round/>
+                      <a:headEnd type="none" w="med" len="med"/>
+                      <a:tailEnd type="none" w="med" len="med"/>
+                    </a:lnB>
+                    <a:solidFill>
+                      <a:srgbClr val="0F172A"/>
+                    </a:solidFill>
+                  </a:tcPr>
+                </a:tc>
+                <a:tc>
+                  <a:txBody>
+                    <a:bodyPr/>
+                    <a:lstStyle/>
+                    <a:p>
+                      <a:pPr algn="ctr" indent="0" marL="0">
+                        <a:buNone/>
+                      </a:pPr>
+                      <a:r>
+                        <a:rPr lang="en-US" sz="1050" b="1" dirty="0">
+                          <a:solidFill>
+                            <a:srgbClr val="FFFFFF"/>
+                          </a:solidFill>
+                        </a:rPr>
+                        <a:t>規則1：最高收益(ATM)</a:t>
+                      </a:r>
+                      <a:endParaRPr lang="en-US" sz="1050" dirty="0"/>
+                    </a:p>
+                  </a:txBody>
+                  <a:tcPr marL="73152" marR="73152" marT="45720" marB="45720" anchor="ctr">
+                    <a:lnL w="9525" cap="flat" cmpd="sng" algn="ctr">
+                      <a:solidFill>
+                        <a:srgbClr val="E2E8F0"/>
+                      </a:solidFill>
+                      <a:prstDash val="solid"/>
+                      <a:round/>
+                      <a:headEnd type="none" w="med" len="med"/>
+                      <a:tailEnd type="none" w="med" len="med"/>
+                    </a:lnL>
+                    <a:lnR w="9525" cap="flat" cmpd="sng" algn="ctr">
+                      <a:solidFill>
+                        <a:srgbClr val="E2E8F0"/>
+                      </a:solidFill>
+                      <a:prstDash val="solid"/>
+                      <a:round/>
+                      <a:headEnd type="none" w="med" len="med"/>
+                      <a:tailEnd type="none" w="med" len="med"/>
+                    </a:lnR>
+                    <a:lnT w="9525" cap="flat" cmpd="sng" algn="ctr">
+                      <a:solidFill>
+                        <a:srgbClr val="E2E8F0"/>
+                      </a:solidFill>
+                      <a:prstDash val="solid"/>
+                      <a:round/>
+                      <a:headEnd type="none" w="med" len="med"/>
+                      <a:tailEnd type="none" w="med" len="med"/>
+                    </a:lnT>
+                    <a:lnB w="9525" cap="flat" cmpd="sng" algn="ctr">
+                      <a:solidFill>
+                        <a:srgbClr val="E2E8F0"/>
+                      </a:solidFill>
+                      <a:prstDash val="solid"/>
+                      <a:round/>
+                      <a:headEnd type="none" w="med" len="med"/>
+                      <a:tailEnd type="none" w="med" len="med"/>
+                    </a:lnB>
+                    <a:solidFill>
+                      <a:srgbClr val="0F172A"/>
+                    </a:solidFill>
+                  </a:tcPr>
+                </a:tc>
+                <a:tc>
+                  <a:txBody>
+                    <a:bodyPr/>
+                    <a:lstStyle/>
+                    <a:p>
+                      <a:pPr algn="ctr" indent="0" marL="0">
+                        <a:buNone/>
+                      </a:pPr>
+                      <a:r>
+                        <a:rPr lang="en-US" sz="1050" b="1" dirty="0">
+                          <a:solidFill>
+                            <a:srgbClr val="FFFFFF"/>
+                          </a:solidFill>
+                        </a:rPr>
+                        <a:t>規則2：不被轉換(OTM緩衝)</a:t>
+                      </a:r>
+                      <a:endParaRPr lang="en-US" sz="1050" dirty="0"/>
+                    </a:p>
+                  </a:txBody>
+                  <a:tcPr marL="73152" marR="73152" marT="45720" marB="45720" anchor="ctr">
+                    <a:lnL w="9525" cap="flat" cmpd="sng" algn="ctr">
+                      <a:solidFill>
+                        <a:srgbClr val="E2E8F0"/>
+                      </a:solidFill>
+                      <a:prstDash val="solid"/>
+                      <a:round/>
+                      <a:headEnd type="none" w="med" len="med"/>
+                      <a:tailEnd type="none" w="med" len="med"/>
+                    </a:lnL>
+                    <a:lnR w="9525" cap="flat" cmpd="sng" algn="ctr">
+                      <a:solidFill>
+                        <a:srgbClr val="E2E8F0"/>
+                      </a:solidFill>
+                      <a:prstDash val="solid"/>
+                      <a:round/>
+                      <a:headEnd type="none" w="med" len="med"/>
+                      <a:tailEnd type="none" w="med" len="med"/>
+                    </a:lnR>
+                    <a:lnT w="9525" cap="flat" cmpd="sng" algn="ctr">
+                      <a:solidFill>
+                        <a:srgbClr val="E2E8F0"/>
+                      </a:solidFill>
+                      <a:prstDash val="solid"/>
+                      <a:round/>
+                      <a:headEnd type="none" w="med" len="med"/>
+                      <a:tailEnd type="none" w="med" len="med"/>
+                    </a:lnT>
+                    <a:lnB w="9525" cap="flat" cmpd="sng" algn="ctr">
+                      <a:solidFill>
+                        <a:srgbClr val="E2E8F0"/>
+                      </a:solidFill>
+                      <a:prstDash val="solid"/>
+                      <a:round/>
+                      <a:headEnd type="none" w="med" len="med"/>
+                      <a:tailEnd type="none" w="med" len="med"/>
+                    </a:lnB>
+                    <a:solidFill>
+                      <a:srgbClr val="0F172A"/>
+                    </a:solidFill>
+                  </a:tcPr>
+                </a:tc>
+              </a:tr>
+              <a:tr h="640080">
+                <a:tc>
+                  <a:txBody>
+                    <a:bodyPr/>
+                    <a:lstStyle/>
+                    <a:p>
+                      <a:pPr algn="l" indent="0" marL="0">
+                        <a:buNone/>
+                      </a:pPr>
+                      <a:r>
+                        <a:rPr lang="en-US" sz="1050" dirty="0">
+                          <a:solidFill>
+                            <a:srgbClr val="334155"/>
+                          </a:solidFill>
+                        </a:rPr>
+                        <a:t>中位數年化報酬</a:t>
+                      </a:r>
+                      <a:endParaRPr lang="en-US" sz="1050" dirty="0"/>
+                    </a:p>
+                  </a:txBody>
+                  <a:tcPr marL="73152" marR="73152" marT="45720" marB="45720" anchor="ctr">
+                    <a:lnL w="9525" cap="flat" cmpd="sng" algn="ctr">
+                      <a:solidFill>
+                        <a:srgbClr val="E2E8F0"/>
+                      </a:solidFill>
+                      <a:prstDash val="solid"/>
+                      <a:round/>
+                      <a:headEnd type="none" w="med" len="med"/>
+                      <a:tailEnd type="none" w="med" len="med"/>
+                    </a:lnL>
+                    <a:lnR w="9525" cap="flat" cmpd="sng" algn="ctr">
+                      <a:solidFill>
+                        <a:srgbClr val="E2E8F0"/>
+                      </a:solidFill>
+                      <a:prstDash val="solid"/>
+                      <a:round/>
+                      <a:headEnd type="none" w="med" len="med"/>
+                      <a:tailEnd type="none" w="med" len="med"/>
+                    </a:lnR>
+                    <a:lnT w="9525" cap="flat" cmpd="sng" algn="ctr">
+                      <a:solidFill>
+                        <a:srgbClr val="E2E8F0"/>
+                      </a:solidFill>
+                      <a:prstDash val="solid"/>
+                      <a:round/>
+                      <a:headEnd type="none" w="med" len="med"/>
+                      <a:tailEnd type="none" w="med" len="med"/>
+                    </a:lnT>
+                    <a:lnB w="9525" cap="flat" cmpd="sng" algn="ctr">
+                      <a:solidFill>
+                        <a:srgbClr val="E2E8F0"/>
+                      </a:solidFill>
+                      <a:prstDash val="solid"/>
+                      <a:round/>
+                      <a:headEnd type="none" w="med" len="med"/>
+                      <a:tailEnd type="none" w="med" len="med"/>
+                    </a:lnB>
+                    <a:solidFill>
+                      <a:srgbClr val="FFFFFF"/>
+                    </a:solidFill>
+                  </a:tcPr>
+                </a:tc>
+                <a:tc>
+                  <a:txBody>
+                    <a:bodyPr/>
+                    <a:lstStyle/>
+                    <a:p>
+                      <a:pPr algn="l" indent="0" marL="0">
+                        <a:buNone/>
+                      </a:pPr>
+                      <a:r>
+                        <a:rPr lang="en-US" sz="1050" dirty="0">
+                          <a:solidFill>
+                            <a:srgbClr val="334155"/>
+                          </a:solidFill>
+                        </a:rPr>
+                        <a:t>+3.87%</a:t>
+                      </a:r>
+                      <a:endParaRPr lang="en-US" sz="1050" dirty="0"/>
+                    </a:p>
+                  </a:txBody>
+                  <a:tcPr marL="73152" marR="73152" marT="45720" marB="45720" anchor="ctr">
+                    <a:lnL w="9525" cap="flat" cmpd="sng" algn="ctr">
+                      <a:solidFill>
+                        <a:srgbClr val="E2E8F0"/>
+                      </a:solidFill>
+                      <a:prstDash val="solid"/>
+                      <a:round/>
+                      <a:headEnd type="none" w="med" len="med"/>
+                      <a:tailEnd type="none" w="med" len="med"/>
+                    </a:lnL>
+                    <a:lnR w="9525" cap="flat" cmpd="sng" algn="ctr">
+                      <a:solidFill>
+                        <a:srgbClr val="E2E8F0"/>
+                      </a:solidFill>
+                      <a:prstDash val="solid"/>
+                      <a:round/>
+                      <a:headEnd type="none" w="med" len="med"/>
+                      <a:tailEnd type="none" w="med" len="med"/>
+                    </a:lnR>
+                    <a:lnT w="9525" cap="flat" cmpd="sng" algn="ctr">
+                      <a:solidFill>
+                        <a:srgbClr val="E2E8F0"/>
+                      </a:solidFill>
+                      <a:prstDash val="solid"/>
+                      <a:round/>
+                      <a:headEnd type="none" w="med" len="med"/>
+                      <a:tailEnd type="none" w="med" len="med"/>
+                    </a:lnT>
+                    <a:lnB w="9525" cap="flat" cmpd="sng" algn="ctr">
+                      <a:solidFill>
+                        <a:srgbClr val="E2E8F0"/>
+                      </a:solidFill>
+                      <a:prstDash val="solid"/>
+                      <a:round/>
+                      <a:headEnd type="none" w="med" len="med"/>
+                      <a:tailEnd type="none" w="med" len="med"/>
+                    </a:lnB>
+                    <a:solidFill>
+                      <a:srgbClr val="FFFFFF"/>
+                    </a:solidFill>
+                  </a:tcPr>
+                </a:tc>
+                <a:tc>
+                  <a:txBody>
+                    <a:bodyPr/>
+                    <a:lstStyle/>
+                    <a:p>
+                      <a:pPr algn="l" indent="0" marL="0">
+                        <a:buNone/>
+                      </a:pPr>
+                      <a:r>
+                        <a:rPr lang="en-US" sz="1050" dirty="0">
+                          <a:solidFill>
+                            <a:srgbClr val="334155"/>
+                          </a:solidFill>
+                        </a:rPr>
+                        <a:t>+1.89%</a:t>
+                      </a:r>
+                      <a:endParaRPr lang="en-US" sz="1050" dirty="0"/>
+                    </a:p>
+                  </a:txBody>
+                  <a:tcPr marL="73152" marR="73152" marT="45720" marB="45720" anchor="ctr">
+                    <a:lnL w="9525" cap="flat" cmpd="sng" algn="ctr">
+                      <a:solidFill>
+                        <a:srgbClr val="E2E8F0"/>
+                      </a:solidFill>
+                      <a:prstDash val="solid"/>
+                      <a:round/>
+                      <a:headEnd type="none" w="med" len="med"/>
+                      <a:tailEnd type="none" w="med" len="med"/>
+                    </a:lnL>
+                    <a:lnR w="9525" cap="flat" cmpd="sng" algn="ctr">
+                      <a:solidFill>
+                        <a:srgbClr val="E2E8F0"/>
+                      </a:solidFill>
+                      <a:prstDash val="solid"/>
+                      <a:round/>
+                      <a:headEnd type="none" w="med" len="med"/>
+                      <a:tailEnd type="none" w="med" len="med"/>
+                    </a:lnR>
+                    <a:lnT w="9525" cap="flat" cmpd="sng" algn="ctr">
+                      <a:solidFill>
+                        <a:srgbClr val="E2E8F0"/>
+                      </a:solidFill>
+                      <a:prstDash val="solid"/>
+                      <a:round/>
+                      <a:headEnd type="none" w="med" len="med"/>
+                      <a:tailEnd type="none" w="med" len="med"/>
+                    </a:lnT>
+                    <a:lnB w="9525" cap="flat" cmpd="sng" algn="ctr">
+                      <a:solidFill>
+                        <a:srgbClr val="E2E8F0"/>
+                      </a:solidFill>
+                      <a:prstDash val="solid"/>
+                      <a:round/>
+                      <a:headEnd type="none" w="med" len="med"/>
+                      <a:tailEnd type="none" w="med" len="med"/>
+                    </a:lnB>
+                    <a:solidFill>
+                      <a:srgbClr val="FFFFFF"/>
+                    </a:solidFill>
+                  </a:tcPr>
+                </a:tc>
+              </a:tr>
+              <a:tr h="640080">
+                <a:tc>
+                  <a:txBody>
+                    <a:bodyPr/>
+                    <a:lstStyle/>
+                    <a:p>
+                      <a:pPr algn="l" indent="0" marL="0">
+                        <a:buNone/>
+                      </a:pPr>
+                      <a:r>
+                        <a:rPr lang="en-US" sz="1050" dirty="0">
+                          <a:solidFill>
+                            <a:srgbClr val="334155"/>
+                          </a:solidFill>
+                        </a:rPr>
+                        <a:t>全年虧損機率</a:t>
+                      </a:r>
+                      <a:endParaRPr lang="en-US" sz="1050" dirty="0"/>
+                    </a:p>
+                  </a:txBody>
+                  <a:tcPr marL="73152" marR="73152" marT="45720" marB="45720" anchor="ctr">
+                    <a:lnL w="9525" cap="flat" cmpd="sng" algn="ctr">
+                      <a:solidFill>
+                        <a:srgbClr val="E2E8F0"/>
+                      </a:solidFill>
+                      <a:prstDash val="solid"/>
+                      <a:round/>
+                      <a:headEnd type="none" w="med" len="med"/>
+                      <a:tailEnd type="none" w="med" len="med"/>
+                    </a:lnL>
+                    <a:lnR w="9525" cap="flat" cmpd="sng" algn="ctr">
+                      <a:solidFill>
+                        <a:srgbClr val="E2E8F0"/>
+                      </a:solidFill>
+                      <a:prstDash val="solid"/>
+                      <a:round/>
+                      <a:headEnd type="none" w="med" len="med"/>
+                      <a:tailEnd type="none" w="med" len="med"/>
+                    </a:lnR>
+                    <a:lnT w="9525" cap="flat" cmpd="sng" algn="ctr">
+                      <a:solidFill>
+                        <a:srgbClr val="E2E8F0"/>
+                      </a:solidFill>
+                      <a:prstDash val="solid"/>
+                      <a:round/>
+                      <a:headEnd type="none" w="med" len="med"/>
+                      <a:tailEnd type="none" w="med" len="med"/>
+                    </a:lnT>
+                    <a:lnB w="9525" cap="flat" cmpd="sng" algn="ctr">
+                      <a:solidFill>
+                        <a:srgbClr val="E2E8F0"/>
+                      </a:solidFill>
+                      <a:prstDash val="solid"/>
+                      <a:round/>
+                      <a:headEnd type="none" w="med" len="med"/>
+                      <a:tailEnd type="none" w="med" len="med"/>
+                    </a:lnB>
+                    <a:solidFill>
+                      <a:srgbClr val="F8FAFC"/>
+                    </a:solidFill>
+                  </a:tcPr>
+                </a:tc>
+                <a:tc>
+                  <a:txBody>
+                    <a:bodyPr/>
+                    <a:lstStyle/>
+                    <a:p>
+                      <a:pPr algn="l" indent="0" marL="0">
+                        <a:buNone/>
+                      </a:pPr>
+                      <a:r>
+                        <a:rPr lang="en-US" sz="1050" dirty="0">
+                          <a:solidFill>
+                            <a:srgbClr val="334155"/>
+                          </a:solidFill>
+                        </a:rPr>
+                        <a:t>20.4%</a:t>
+                      </a:r>
+                      <a:endParaRPr lang="en-US" sz="1050" dirty="0"/>
+                    </a:p>
+                  </a:txBody>
+                  <a:tcPr marL="73152" marR="73152" marT="45720" marB="45720" anchor="ctr">
+                    <a:lnL w="9525" cap="flat" cmpd="sng" algn="ctr">
+                      <a:solidFill>
+                        <a:srgbClr val="E2E8F0"/>
+                      </a:solidFill>
+                      <a:prstDash val="solid"/>
+                      <a:round/>
+                      <a:headEnd type="none" w="med" len="med"/>
+                      <a:tailEnd type="none" w="med" len="med"/>
+                    </a:lnL>
+                    <a:lnR w="9525" cap="flat" cmpd="sng" algn="ctr">
+                      <a:solidFill>
+                        <a:srgbClr val="E2E8F0"/>
+                      </a:solidFill>
+                      <a:prstDash val="solid"/>
+                      <a:round/>
+                      <a:headEnd type="none" w="med" len="med"/>
+                      <a:tailEnd type="none" w="med" len="med"/>
+                    </a:lnR>
+                    <a:lnT w="9525" cap="flat" cmpd="sng" algn="ctr">
+                      <a:solidFill>
+                        <a:srgbClr val="E2E8F0"/>
+                      </a:solidFill>
+                      <a:prstDash val="solid"/>
+                      <a:round/>
+                      <a:headEnd type="none" w="med" len="med"/>
+                      <a:tailEnd type="none" w="med" len="med"/>
+                    </a:lnT>
+                    <a:lnB w="9525" cap="flat" cmpd="sng" algn="ctr">
+                      <a:solidFill>
+                        <a:srgbClr val="E2E8F0"/>
+                      </a:solidFill>
+                      <a:prstDash val="solid"/>
+                      <a:round/>
+                      <a:headEnd type="none" w="med" len="med"/>
+                      <a:tailEnd type="none" w="med" len="med"/>
+                    </a:lnB>
+                    <a:solidFill>
+                      <a:srgbClr val="F8FAFC"/>
+                    </a:solidFill>
+                  </a:tcPr>
+                </a:tc>
+                <a:tc>
+                  <a:txBody>
+                    <a:bodyPr/>
+                    <a:lstStyle/>
+                    <a:p>
+                      <a:pPr algn="l" indent="0" marL="0">
+                        <a:buNone/>
+                      </a:pPr>
+                      <a:r>
+                        <a:rPr lang="en-US" sz="1050" dirty="0">
+                          <a:solidFill>
+                            <a:srgbClr val="334155"/>
+                          </a:solidFill>
+                        </a:rPr>
+                        <a:t>18.9%</a:t>
+                      </a:r>
+                      <a:endParaRPr lang="en-US" sz="1050" dirty="0"/>
+                    </a:p>
+                  </a:txBody>
+                  <a:tcPr marL="73152" marR="73152" marT="45720" marB="45720" anchor="ctr">
+                    <a:lnL w="9525" cap="flat" cmpd="sng" algn="ctr">
+                      <a:solidFill>
+                        <a:srgbClr val="E2E8F0"/>
+                      </a:solidFill>
+                      <a:prstDash val="solid"/>
+                      <a:round/>
+                      <a:headEnd type="none" w="med" len="med"/>
+                      <a:tailEnd type="none" w="med" len="med"/>
+                    </a:lnL>
+                    <a:lnR w="9525" cap="flat" cmpd="sng" algn="ctr">
+                      <a:solidFill>
+                        <a:srgbClr val="E2E8F0"/>
+                      </a:solidFill>
+                      <a:prstDash val="solid"/>
+                      <a:round/>
+                      <a:headEnd type="none" w="med" len="med"/>
+                      <a:tailEnd type="none" w="med" len="med"/>
+                    </a:lnR>
+                    <a:lnT w="9525" cap="flat" cmpd="sng" algn="ctr">
+                      <a:solidFill>
+                        <a:srgbClr val="E2E8F0"/>
+                      </a:solidFill>
+                      <a:prstDash val="solid"/>
+                      <a:round/>
+                      <a:headEnd type="none" w="med" len="med"/>
+                      <a:tailEnd type="none" w="med" len="med"/>
+                    </a:lnT>
+                    <a:lnB w="9525" cap="flat" cmpd="sng" algn="ctr">
+                      <a:solidFill>
+                        <a:srgbClr val="E2E8F0"/>
+                      </a:solidFill>
+                      <a:prstDash val="solid"/>
+                      <a:round/>
+                      <a:headEnd type="none" w="med" len="med"/>
+                      <a:tailEnd type="none" w="med" len="med"/>
+                    </a:lnB>
+                    <a:solidFill>
+                      <a:srgbClr val="F8FAFC"/>
+                    </a:solidFill>
+                  </a:tcPr>
+                </a:tc>
+              </a:tr>
+              <a:tr h="640080">
+                <a:tc>
+                  <a:txBody>
+                    <a:bodyPr/>
+                    <a:lstStyle/>
+                    <a:p>
+                      <a:pPr algn="l" indent="0" marL="0">
+                        <a:buNone/>
+                      </a:pPr>
+                      <a:r>
+                        <a:rPr lang="en-US" sz="1050" dirty="0">
+                          <a:solidFill>
+                            <a:srgbClr val="334155"/>
+                          </a:solidFill>
+                        </a:rPr>
+                        <a:t>對照：永續滾動之虧損機率</a:t>
+                      </a:r>
+                      <a:endParaRPr lang="en-US" sz="1050" dirty="0"/>
+                    </a:p>
+                  </a:txBody>
+                  <a:tcPr marL="73152" marR="73152" marT="45720" marB="45720" anchor="ctr">
+                    <a:lnL w="9525" cap="flat" cmpd="sng" algn="ctr">
+                      <a:solidFill>
+                        <a:srgbClr val="E2E8F0"/>
+                      </a:solidFill>
+                      <a:prstDash val="solid"/>
+                      <a:round/>
+                      <a:headEnd type="none" w="med" len="med"/>
+                      <a:tailEnd type="none" w="med" len="med"/>
+                    </a:lnL>
+                    <a:lnR w="9525" cap="flat" cmpd="sng" algn="ctr">
+                      <a:solidFill>
+                        <a:srgbClr val="E2E8F0"/>
+                      </a:solidFill>
+                      <a:prstDash val="solid"/>
+                      <a:round/>
+                      <a:headEnd type="none" w="med" len="med"/>
+                      <a:tailEnd type="none" w="med" len="med"/>
+                    </a:lnR>
+                    <a:lnT w="9525" cap="flat" cmpd="sng" algn="ctr">
+                      <a:solidFill>
+                        <a:srgbClr val="E2E8F0"/>
+                      </a:solidFill>
+                      <a:prstDash val="solid"/>
+                      <a:round/>
+                      <a:headEnd type="none" w="med" len="med"/>
+                      <a:tailEnd type="none" w="med" len="med"/>
+                    </a:lnT>
+                    <a:lnB w="9525" cap="flat" cmpd="sng" algn="ctr">
+                      <a:solidFill>
+                        <a:srgbClr val="E2E8F0"/>
+                      </a:solidFill>
+                      <a:prstDash val="solid"/>
+                      <a:round/>
+                      <a:headEnd type="none" w="med" len="med"/>
+                      <a:tailEnd type="none" w="med" len="med"/>
+                    </a:lnB>
+                    <a:solidFill>
+                      <a:srgbClr val="FFFFFF"/>
+                    </a:solidFill>
+                  </a:tcPr>
+                </a:tc>
+                <a:tc>
+                  <a:txBody>
+                    <a:bodyPr/>
+                    <a:lstStyle/>
+                    <a:p>
+                      <a:pPr algn="l" indent="0" marL="0">
+                        <a:buNone/>
+                      </a:pPr>
+                      <a:r>
+                        <a:rPr lang="en-US" sz="1050" dirty="0">
+                          <a:solidFill>
+                            <a:srgbClr val="334155"/>
+                          </a:solidFill>
+                        </a:rPr>
+                        <a:t>74.5%</a:t>
+                      </a:r>
+                      <a:endParaRPr lang="en-US" sz="1050" dirty="0"/>
+                    </a:p>
+                  </a:txBody>
+                  <a:tcPr marL="73152" marR="73152" marT="45720" marB="45720" anchor="ctr">
+                    <a:lnL w="9525" cap="flat" cmpd="sng" algn="ctr">
+                      <a:solidFill>
+                        <a:srgbClr val="E2E8F0"/>
+                      </a:solidFill>
+                      <a:prstDash val="solid"/>
+                      <a:round/>
+                      <a:headEnd type="none" w="med" len="med"/>
+                      <a:tailEnd type="none" w="med" len="med"/>
+                    </a:lnL>
+                    <a:lnR w="9525" cap="flat" cmpd="sng" algn="ctr">
+                      <a:solidFill>
+                        <a:srgbClr val="E2E8F0"/>
+                      </a:solidFill>
+                      <a:prstDash val="solid"/>
+                      <a:round/>
+                      <a:headEnd type="none" w="med" len="med"/>
+                      <a:tailEnd type="none" w="med" len="med"/>
+                    </a:lnR>
+                    <a:lnT w="9525" cap="flat" cmpd="sng" algn="ctr">
+                      <a:solidFill>
+                        <a:srgbClr val="E2E8F0"/>
+                      </a:solidFill>
+                      <a:prstDash val="solid"/>
+                      <a:round/>
+                      <a:headEnd type="none" w="med" len="med"/>
+                      <a:tailEnd type="none" w="med" len="med"/>
+                    </a:lnT>
+                    <a:lnB w="9525" cap="flat" cmpd="sng" algn="ctr">
+                      <a:solidFill>
+                        <a:srgbClr val="E2E8F0"/>
+                      </a:solidFill>
+                      <a:prstDash val="solid"/>
+                      <a:round/>
+                      <a:headEnd type="none" w="med" len="med"/>
+                      <a:tailEnd type="none" w="med" len="med"/>
+                    </a:lnB>
+                    <a:solidFill>
+                      <a:srgbClr val="FFFFFF"/>
+                    </a:solidFill>
+                  </a:tcPr>
+                </a:tc>
+                <a:tc>
+                  <a:txBody>
+                    <a:bodyPr/>
+                    <a:lstStyle/>
+                    <a:p>
+                      <a:pPr algn="l" indent="0" marL="0">
+                        <a:buNone/>
+                      </a:pPr>
+                      <a:r>
+                        <a:rPr lang="en-US" sz="1050" dirty="0">
+                          <a:solidFill>
+                            <a:srgbClr val="334155"/>
+                          </a:solidFill>
+                        </a:rPr>
+                        <a:t>85.1%</a:t>
+                      </a:r>
+                      <a:endParaRPr lang="en-US" sz="1050" dirty="0"/>
+                    </a:p>
+                  </a:txBody>
+                  <a:tcPr marL="73152" marR="73152" marT="45720" marB="45720" anchor="ctr">
+                    <a:lnL w="9525" cap="flat" cmpd="sng" algn="ctr">
+                      <a:solidFill>
+                        <a:srgbClr val="E2E8F0"/>
+                      </a:solidFill>
+                      <a:prstDash val="solid"/>
+                      <a:round/>
+                      <a:headEnd type="none" w="med" len="med"/>
+                      <a:tailEnd type="none" w="med" len="med"/>
+                    </a:lnL>
+                    <a:lnR w="9525" cap="flat" cmpd="sng" algn="ctr">
+                      <a:solidFill>
+                        <a:srgbClr val="E2E8F0"/>
+                      </a:solidFill>
+                      <a:prstDash val="solid"/>
+                      <a:round/>
+                      <a:headEnd type="none" w="med" len="med"/>
+                      <a:tailEnd type="none" w="med" len="med"/>
+                    </a:lnR>
+                    <a:lnT w="9525" cap="flat" cmpd="sng" algn="ctr">
+                      <a:solidFill>
+                        <a:srgbClr val="E2E8F0"/>
+                      </a:solidFill>
+                      <a:prstDash val="solid"/>
+                      <a:round/>
+                      <a:headEnd type="none" w="med" len="med"/>
+                      <a:tailEnd type="none" w="med" len="med"/>
+                    </a:lnT>
+                    <a:lnB w="9525" cap="flat" cmpd="sng" algn="ctr">
+                      <a:solidFill>
+                        <a:srgbClr val="E2E8F0"/>
+                      </a:solidFill>
+                      <a:prstDash val="solid"/>
+                      <a:round/>
+                      <a:headEnd type="none" w="med" len="med"/>
+                      <a:tailEnd type="none" w="med" len="med"/>
+                    </a:lnB>
+                    <a:solidFill>
+                      <a:srgbClr val="FFFFFF"/>
+                    </a:solidFill>
+                  </a:tcPr>
+                </a:tc>
+              </a:tr>
+            </a:tbl>
+          </a:graphicData>
+        </a:graphic>
+      </p:graphicFrame>
+      <p:sp>
+        <p:nvSpPr>
+          <p:cNvPr id="5" name="Shape 2"/>
+          <p:cNvSpPr/>
+          <p:nvPr/>
+        </p:nvSpPr>
+        <p:spPr>
+          <a:xfrm>
+            <a:off x="7635240" y="1600200"/>
+            <a:ext cx="4005072" cy="1600200"/>
+          </a:xfrm>
+          <a:prstGeom prst="roundRect">
+            <a:avLst>
+              <a:gd name="adj" fmla="val 4571"/>
+            </a:avLst>
+          </a:prstGeom>
+          <a:solidFill>
+            <a:srgbClr val="EFF6FF"/>
+          </a:solidFill>
+          <a:ln/>
+        </p:spPr>
+      </p:sp>
+      <p:sp>
+        <p:nvSpPr>
+          <p:cNvPr id="6" name="Text 3"/>
+          <p:cNvSpPr txBox="1"/>
+          <p:nvPr/>
+        </p:nvSpPr>
+        <p:spPr>
+          <a:xfrm>
+            <a:off x="7772400" y="1709928"/>
+            <a:ext cx="3730752" cy="1097280"/>
+          </a:xfrm>
+          <a:prstGeom prst="rect">
+            <a:avLst/>
+          </a:prstGeom>
+          <a:noFill/>
+          <a:ln/>
+        </p:spPr>
+        <p:txBody>
+          <a:bodyPr wrap="square" lIns="0" tIns="0" rIns="0" bIns="0" rtlCol="0" anchor="b"/>
+          <a:lstStyle/>
+          <a:p>
+            <a:pPr algn="ctr" indent="0" marL="0">
+              <a:buNone/>
+            </a:pPr>
+            <a:r>
+              <a:rPr lang="en-US" sz="1900" b="1" dirty="0">
+                <a:solidFill>
+                  <a:srgbClr val="16A34A"/>
+                </a:solidFill>
+                <a:latin typeface="Microsoft JhengHei" pitchFamily="34" charset="0"/>
+                <a:ea typeface="Microsoft JhengHei" pitchFamily="34" charset="-122"/>
+                <a:cs typeface="Microsoft JhengHei" pitchFamily="34" charset="-120"/>
+              </a:rPr>
+              <a:t>虧損機率降低逾50個百分點</a:t>
+            </a:r>
+            <a:endParaRPr lang="en-US" sz="1900" dirty="0"/>
+          </a:p>
+        </p:txBody>
+      </p:sp>
+      <p:sp>
+        <p:nvSpPr>
+          <p:cNvPr id="7" name="Text 4"/>
+          <p:cNvSpPr txBox="1"/>
+          <p:nvPr/>
+        </p:nvSpPr>
+        <p:spPr>
+          <a:xfrm>
+            <a:off x="7726680" y="2816352"/>
+            <a:ext cx="3822192" cy="320040"/>
+          </a:xfrm>
+          <a:prstGeom prst="rect">
+            <a:avLst/>
+          </a:prstGeom>
+          <a:noFill/>
+          <a:ln/>
+        </p:spPr>
+        <p:txBody>
+          <a:bodyPr wrap="square" lIns="0" tIns="0" rIns="0" bIns="0" rtlCol="0" anchor="t"/>
+          <a:lstStyle/>
+          <a:p>
+            <a:pPr algn="ctr" indent="0" marL="0">
+              <a:buNone/>
+            </a:pPr>
+            <a:r>
+              <a:rPr lang="en-US" sz="1050" dirty="0">
+                <a:solidFill>
+                  <a:srgbClr val="334155"/>
+                </a:solidFill>
+                <a:latin typeface="Microsoft JhengHei" pitchFamily="34" charset="0"/>
+                <a:ea typeface="Microsoft JhengHei" pitchFamily="34" charset="-122"/>
+                <a:cs typeface="Microsoft JhengHei" pitchFamily="34" charset="-120"/>
+              </a:rPr>
+              <a:t>單一紀律：停利後不重新進場</a:t>
+            </a:r>
+            <a:endParaRPr lang="en-US" sz="1050" dirty="0"/>
+          </a:p>
+        </p:txBody>
+      </p:sp>
+      <p:sp>
+        <p:nvSpPr>
+          <p:cNvPr id="8" name="Shape 5"/>
+          <p:cNvSpPr/>
+          <p:nvPr/>
+        </p:nvSpPr>
+        <p:spPr>
+          <a:xfrm>
+            <a:off x="548640" y="3429000"/>
+            <a:ext cx="6949440" cy="1691640"/>
+          </a:xfrm>
+          <a:prstGeom prst="roundRect">
+            <a:avLst>
+              <a:gd name="adj" fmla="val 4324"/>
+            </a:avLst>
+          </a:prstGeom>
+          <a:solidFill>
+            <a:srgbClr val="EFF6FF"/>
+          </a:solidFill>
+          <a:ln w="9525">
+            <a:solidFill>
+              <a:srgbClr val="E2E8F0"/>
+            </a:solidFill>
+            <a:prstDash val="solid"/>
+          </a:ln>
+          <a:effectLst>
+            <a:outerShdw sx="100000" sy="100000" kx="0" ky="0" algn="bl" rotWithShape="0" blurRad="76200" dist="25400" dir="5400000">
+              <a:srgbClr val="1E293B">
+                <a:alpha val="8000"/>
+              </a:srgbClr>
+            </a:outerShdw>
+          </a:effectLst>
+        </p:spPr>
+      </p:sp>
+      <p:sp>
+        <p:nvSpPr>
+          <p:cNvPr id="9" name="Text 6"/>
+          <p:cNvSpPr txBox="1"/>
+          <p:nvPr/>
+        </p:nvSpPr>
+        <p:spPr>
+          <a:xfrm>
+            <a:off x="749808" y="3575304"/>
+            <a:ext cx="6547104" cy="320040"/>
+          </a:xfrm>
+          <a:prstGeom prst="rect">
+            <a:avLst/>
+          </a:prstGeom>
+          <a:noFill/>
+          <a:ln/>
+        </p:spPr>
+        <p:txBody>
+          <a:bodyPr wrap="square" lIns="0" tIns="0" rIns="0" bIns="0" rtlCol="0" anchor="ctr"/>
+          <a:lstStyle/>
+          <a:p>
+            <a:pPr algn="l" indent="0" marL="0">
+              <a:buNone/>
+            </a:pPr>
+            <a:r>
+              <a:rPr lang="en-US" sz="1300" b="1" dirty="0">
+                <a:solidFill>
+                  <a:srgbClr val="0F172A"/>
+                </a:solidFill>
+                <a:latin typeface="Microsoft JhengHei" pitchFamily="34" charset="0"/>
+                <a:ea typeface="Microsoft JhengHei" pitchFamily="34" charset="-122"/>
+                <a:cs typeface="Microsoft JhengHei" pitchFamily="34" charset="-120"/>
+              </a:rPr>
+              <a:t>為什麼有效？</a:t>
+            </a:r>
+            <a:endParaRPr lang="en-US" sz="1300" dirty="0"/>
+          </a:p>
+        </p:txBody>
+      </p:sp>
+      <p:sp>
+        <p:nvSpPr>
+          <p:cNvPr id="10" name="Text 7"/>
+          <p:cNvSpPr txBox="1"/>
+          <p:nvPr/>
+        </p:nvSpPr>
+        <p:spPr>
+          <a:xfrm>
+            <a:off x="749808" y="3931920"/>
+            <a:ext cx="6547104" cy="1033272"/>
+          </a:xfrm>
+          <a:prstGeom prst="rect">
+            <a:avLst/>
+          </a:prstGeom>
+          <a:noFill/>
+          <a:ln/>
+        </p:spPr>
+        <p:txBody>
+          <a:bodyPr wrap="square" lIns="0" tIns="0" rIns="0" bIns="0" rtlCol="0" anchor="t"/>
+          <a:lstStyle/>
+          <a:p>
+            <a:pPr algn="l" indent="0" marL="0">
+              <a:lnSpc>
+                <a:spcPct val="115000"/>
+              </a:lnSpc>
+              <a:buNone/>
+            </a:pPr>
+            <a:r>
+              <a:rPr lang="en-US" sz="1150" dirty="0">
+                <a:solidFill>
+                  <a:srgbClr val="334155"/>
+                </a:solidFill>
+                <a:latin typeface="Microsoft JhengHei" pitchFamily="34" charset="0"/>
+                <a:ea typeface="Microsoft JhengHei" pitchFamily="34" charset="-122"/>
+                <a:cs typeface="Microsoft JhengHei" pitchFamily="34" charset="-120"/>
+              </a:rPr>
+              <a:t>永續滾動策略之所以表現不佳，並非機制本身有缺陷，而是「一解套就立刻用新的市價重新掛單」使資金反覆暴露於套牢風險。只要在解套當下停手、把資金轉回現金，就能保留已實現之獲利、避免立即再次陷入下一輪不確定的存續期間。</a:t>
+            </a:r>
+            <a:endParaRPr lang="en-US" sz="1150" dirty="0"/>
+          </a:p>
+        </p:txBody>
+      </p:sp>
+      <p:sp>
+        <p:nvSpPr>
+          <p:cNvPr id="11" name="Shape 8"/>
+          <p:cNvSpPr/>
+          <p:nvPr/>
+        </p:nvSpPr>
+        <p:spPr>
+          <a:xfrm>
+            <a:off x="7635240" y="3429000"/>
+            <a:ext cx="4005072" cy="1691640"/>
+          </a:xfrm>
+          <a:prstGeom prst="roundRect">
+            <a:avLst>
+              <a:gd name="adj" fmla="val 4324"/>
+            </a:avLst>
+          </a:prstGeom>
+          <a:solidFill>
+            <a:srgbClr val="F8FAFC"/>
+          </a:solidFill>
+          <a:ln w="9525">
+            <a:solidFill>
+              <a:srgbClr val="E2E8F0"/>
+            </a:solidFill>
+            <a:prstDash val="solid"/>
+          </a:ln>
+          <a:effectLst>
+            <a:outerShdw sx="100000" sy="100000" kx="0" ky="0" algn="bl" rotWithShape="0" blurRad="76200" dist="25400" dir="5400000">
+              <a:srgbClr val="1E293B">
+                <a:alpha val="8000"/>
+              </a:srgbClr>
+            </a:outerShdw>
+          </a:effectLst>
+        </p:spPr>
+      </p:sp>
+      <p:sp>
+        <p:nvSpPr>
+          <p:cNvPr id="12" name="Text 9"/>
+          <p:cNvSpPr txBox="1"/>
+          <p:nvPr/>
+        </p:nvSpPr>
+        <p:spPr>
+          <a:xfrm>
+            <a:off x="7836408" y="3575304"/>
+            <a:ext cx="3602736" cy="320040"/>
+          </a:xfrm>
+          <a:prstGeom prst="rect">
+            <a:avLst/>
+          </a:prstGeom>
+          <a:noFill/>
+          <a:ln/>
+        </p:spPr>
+        <p:txBody>
+          <a:bodyPr wrap="square" lIns="0" tIns="0" rIns="0" bIns="0" rtlCol="0" anchor="ctr"/>
+          <a:lstStyle/>
+          <a:p>
+            <a:pPr algn="l" indent="0" marL="0">
+              <a:buNone/>
+            </a:pPr>
+            <a:r>
+              <a:rPr lang="en-US" sz="1300" b="1" dirty="0">
+                <a:solidFill>
+                  <a:srgbClr val="0F172A"/>
+                </a:solidFill>
+                <a:latin typeface="Microsoft JhengHei" pitchFamily="34" charset="0"/>
+                <a:ea typeface="Microsoft JhengHei" pitchFamily="34" charset="-122"/>
+                <a:cs typeface="Microsoft JhengHei" pitchFamily="34" charset="-120"/>
+              </a:rPr>
+              <a:t>代價</a:t>
+            </a:r>
+            <a:endParaRPr lang="en-US" sz="1300" dirty="0"/>
+          </a:p>
+        </p:txBody>
+      </p:sp>
+      <p:sp>
+        <p:nvSpPr>
+          <p:cNvPr id="13" name="Text 10"/>
+          <p:cNvSpPr txBox="1"/>
+          <p:nvPr/>
+        </p:nvSpPr>
+        <p:spPr>
+          <a:xfrm>
+            <a:off x="7836408" y="3931920"/>
+            <a:ext cx="3602736" cy="1033272"/>
+          </a:xfrm>
+          <a:prstGeom prst="rect">
+            <a:avLst/>
+          </a:prstGeom>
+          <a:noFill/>
+          <a:ln/>
+        </p:spPr>
+        <p:txBody>
+          <a:bodyPr wrap="square" lIns="0" tIns="0" rIns="0" bIns="0" rtlCol="0" anchor="t"/>
+          <a:lstStyle/>
+          <a:p>
+            <a:pPr algn="l" indent="0" marL="0">
+              <a:lnSpc>
+                <a:spcPct val="115000"/>
+              </a:lnSpc>
+              <a:buNone/>
+            </a:pPr>
+            <a:r>
+              <a:rPr lang="en-US" sz="1100" dirty="0">
+                <a:solidFill>
+                  <a:srgbClr val="334155"/>
+                </a:solidFill>
+                <a:latin typeface="Microsoft JhengHei" pitchFamily="34" charset="0"/>
+                <a:ea typeface="Microsoft JhengHei" pitchFamily="34" charset="-122"/>
+                <a:cs typeface="Microsoft JhengHei" pitchFamily="34" charset="-120"/>
+              </a:rPr>
+              <a:t>停利後之閒置資金不再產生權利金收入，且平均每年仍會遇到約 1 至 2 成之路徑於年底前尚未解套。</a:t>
+            </a:r>
+            <a:endParaRPr lang="en-US" sz="1100" dirty="0"/>
+          </a:p>
+        </p:txBody>
+      </p:sp>
+      <p:sp>
+        <p:nvSpPr>
+          <p:cNvPr id="14" name="Shape 11"/>
+          <p:cNvSpPr/>
+          <p:nvPr/>
+        </p:nvSpPr>
+        <p:spPr>
+          <a:xfrm>
+            <a:off x="548640" y="5257800"/>
+            <a:ext cx="11094415" cy="1051560"/>
+          </a:xfrm>
+          <a:prstGeom prst="roundRect">
+            <a:avLst>
+              <a:gd name="adj" fmla="val 6957"/>
+            </a:avLst>
+          </a:prstGeom>
+          <a:solidFill>
+            <a:srgbClr val="EFF6FF"/>
+          </a:solidFill>
+          <a:ln w="9525">
+            <a:solidFill>
+              <a:srgbClr val="E2E8F0"/>
+            </a:solidFill>
+            <a:prstDash val="solid"/>
+          </a:ln>
+          <a:effectLst>
+            <a:outerShdw sx="100000" sy="100000" kx="0" ky="0" algn="bl" rotWithShape="0" blurRad="76200" dist="25400" dir="5400000">
+              <a:srgbClr val="1E293B">
+                <a:alpha val="8000"/>
+              </a:srgbClr>
+            </a:outerShdw>
+          </a:effectLst>
+        </p:spPr>
+      </p:sp>
+      <p:sp>
+        <p:nvSpPr>
+          <p:cNvPr id="15" name="Text 12"/>
+          <p:cNvSpPr txBox="1"/>
+          <p:nvPr/>
+        </p:nvSpPr>
+        <p:spPr>
+          <a:xfrm>
+            <a:off x="749808" y="5404104"/>
+            <a:ext cx="10692079" cy="320040"/>
+          </a:xfrm>
+          <a:prstGeom prst="rect">
+            <a:avLst/>
+          </a:prstGeom>
+          <a:noFill/>
+          <a:ln/>
+        </p:spPr>
+        <p:txBody>
+          <a:bodyPr wrap="square" lIns="0" tIns="0" rIns="0" bIns="0" rtlCol="0" anchor="ctr"/>
+          <a:lstStyle/>
+          <a:p>
+            <a:pPr algn="l" indent="0" marL="0">
+              <a:buNone/>
+            </a:pPr>
+            <a:r>
+              <a:rPr lang="en-US" sz="1300" b="1" dirty="0">
+                <a:solidFill>
+                  <a:srgbClr val="0F172A"/>
+                </a:solidFill>
+                <a:latin typeface="Microsoft JhengHei" pitchFamily="34" charset="0"/>
+                <a:ea typeface="Microsoft JhengHei" pitchFamily="34" charset="-122"/>
+                <a:cs typeface="Microsoft JhengHei" pitchFamily="34" charset="-120"/>
+              </a:rPr>
+              <a:t>落地建議</a:t>
+            </a:r>
+            <a:endParaRPr lang="en-US" sz="1300" dirty="0"/>
+          </a:p>
+        </p:txBody>
+      </p:sp>
+      <p:sp>
+        <p:nvSpPr>
+          <p:cNvPr id="16" name="Text 13"/>
+          <p:cNvSpPr txBox="1"/>
+          <p:nvPr/>
+        </p:nvSpPr>
+        <p:spPr>
+          <a:xfrm>
+            <a:off x="749808" y="5760720"/>
+            <a:ext cx="10692079" cy="393192"/>
+          </a:xfrm>
+          <a:prstGeom prst="rect">
+            <a:avLst/>
+          </a:prstGeom>
+          <a:noFill/>
+          <a:ln/>
+        </p:spPr>
+        <p:txBody>
+          <a:bodyPr wrap="square" lIns="0" tIns="0" rIns="0" bIns="0" rtlCol="0" anchor="t"/>
+          <a:lstStyle/>
+          <a:p>
+            <a:pPr algn="l" indent="0" marL="0">
+              <a:lnSpc>
+                <a:spcPct val="115000"/>
+              </a:lnSpc>
+              <a:buNone/>
+            </a:pPr>
+            <a:r>
+              <a:rPr lang="en-US" sz="1100" dirty="0">
+                <a:solidFill>
+                  <a:srgbClr val="334155"/>
+                </a:solidFill>
+                <a:latin typeface="Microsoft JhengHei" pitchFamily="34" charset="0"/>
+                <a:ea typeface="Microsoft JhengHei" pitchFamily="34" charset="-122"/>
+                <a:cs typeface="Microsoft JhengHei" pitchFamily="34" charset="-120"/>
+              </a:rPr>
+              <a:t>將本策略之標準作業程序（SOP）明訂為「解套後停利、待下一次進場訊號或固定週期再重新申購」，而非交易所預設之「自動再訂閱」；此為單一、低成本即可落實之治理措施，且已由模擬證實可大幅改善整體風險報酬輪廓。</a:t>
+            </a:r>
+            <a:endParaRPr lang="en-US" sz="1100" dirty="0"/>
+          </a:p>
+        </p:txBody>
+      </p:sp>
+      <p:sp>
+        <p:nvSpPr>
+          <p:cNvPr id="17" name="Text 14"/>
+          <p:cNvSpPr txBox="1"/>
+          <p:nvPr/>
+        </p:nvSpPr>
+        <p:spPr>
+          <a:xfrm>
+            <a:off x="457200" y="6492240"/>
+            <a:ext cx="5486400" cy="274320"/>
+          </a:xfrm>
+          <a:prstGeom prst="rect">
+            <a:avLst/>
+          </a:prstGeom>
+          <a:noFill/>
+          <a:ln/>
+        </p:spPr>
+        <p:txBody>
+          <a:bodyPr wrap="square" lIns="0" tIns="0" rIns="0" bIns="0" rtlCol="0" anchor="ctr"/>
+          <a:lstStyle/>
+          <a:p>
+            <a:pPr algn="l" indent="0" marL="0">
+              <a:buNone/>
+            </a:pPr>
+            <a:r>
+              <a:rPr lang="en-US" sz="900" dirty="0">
+                <a:solidFill>
+                  <a:srgbClr val="64748B"/>
+                </a:solidFill>
+                <a:latin typeface="Microsoft JhengHei" pitchFamily="34" charset="0"/>
+                <a:ea typeface="Microsoft JhengHei" pitchFamily="34" charset="-122"/>
+                <a:cs typeface="Microsoft JhengHei" pitchFamily="34" charset="-120"/>
+              </a:rPr>
+              <a:t>TSGEX 資產管理部｜內部機密</a:t>
+            </a:r>
+            <a:endParaRPr lang="en-US" sz="900" dirty="0"/>
+          </a:p>
+        </p:txBody>
+      </p:sp>
+      <p:sp>
+        <p:nvSpPr>
+          <p:cNvPr id="18" name="Text 15"/>
+          <p:cNvSpPr txBox="1"/>
+          <p:nvPr/>
+        </p:nvSpPr>
+        <p:spPr>
+          <a:xfrm>
+            <a:off x="9905695" y="6492240"/>
+            <a:ext cx="1828800" cy="274320"/>
+          </a:xfrm>
+          <a:prstGeom prst="rect">
+            <a:avLst/>
+          </a:prstGeom>
+          <a:noFill/>
+          <a:ln/>
+        </p:spPr>
+        <p:txBody>
+          <a:bodyPr wrap="square" lIns="0" tIns="0" rIns="0" bIns="0" rtlCol="0" anchor="ctr"/>
+          <a:lstStyle/>
+          <a:p>
+            <a:pPr algn="r" indent="0" marL="0">
+              <a:buNone/>
+            </a:pPr>
+            <a:r>
+              <a:rPr lang="en-US" sz="900" dirty="0">
+                <a:solidFill>
+                  <a:srgbClr val="64748B"/>
+                </a:solidFill>
+                <a:latin typeface="Microsoft JhengHei" pitchFamily="34" charset="0"/>
+                <a:ea typeface="Microsoft JhengHei" pitchFamily="34" charset="-122"/>
+                <a:cs typeface="Microsoft JhengHei" pitchFamily="34" charset="-120"/>
+              </a:rPr>
+              <a:t>12 / 18</a:t>
+            </a:r>
+            <a:endParaRPr lang="en-US" sz="900" dirty="0"/>
+          </a:p>
+        </p:txBody>
+      </p:sp>
+    </p:spTree>
+  </p:cSld>
+  <p:clrMapOvr>
+    <a:masterClrMapping/>
+  </p:clrMapOvr>
+</p:sld>
+</file>
+
+<file path=ppt/slides/slide13.xml><?xml version="1.0" encoding="utf-8"?>
+<p:sld xmlns:a="http://schemas.openxmlformats.org/drawingml/2006/main" xmlns:r="http://schemas.openxmlformats.org/officeDocument/2006/relationships" xmlns:p="http://schemas.openxmlformats.org/presentationml/2006/main">
+  <p:cSld name="Slide 13">
+    <p:bg>
+      <p:bgPr>
+        <a:solidFill>
+          <a:srgbClr val="FFFFFF"/>
+        </a:solidFill>
+      </p:bgPr>
+    </p:bg>
+    <p:spTree>
+      <p:nvGrpSpPr>
+        <p:cNvPr id="1" name=""/>
+        <p:cNvGrpSpPr/>
+        <p:nvPr/>
+      </p:nvGrpSpPr>
+      <p:grpSpPr>
+        <a:xfrm>
+          <a:off x="0" y="0"/>
+          <a:ext cx="0" cy="0"/>
+          <a:chOff x="0" y="0"/>
+          <a:chExt cx="0" cy="0"/>
+        </a:xfrm>
+      </p:grpSpPr>
+      <p:sp>
+        <p:nvSpPr>
+          <p:cNvPr id="2" name="Text 0"/>
+          <p:cNvSpPr txBox="1"/>
+          <p:nvPr/>
+        </p:nvSpPr>
+        <p:spPr>
+          <a:xfrm>
+            <a:off x="548640" y="365760"/>
+            <a:ext cx="11094415" cy="640080"/>
+          </a:xfrm>
+          <a:prstGeom prst="rect">
+            <a:avLst/>
+          </a:prstGeom>
+          <a:noFill/>
+          <a:ln/>
+        </p:spPr>
+        <p:txBody>
+          <a:bodyPr wrap="square" lIns="0" tIns="0" rIns="0" bIns="0" rtlCol="0" anchor="ctr"/>
+          <a:lstStyle/>
+          <a:p>
+            <a:pPr algn="l" indent="0" marL="0">
+              <a:buNone/>
+            </a:pPr>
+            <a:r>
+              <a:rPr lang="en-US" sz="2800" b="1" dirty="0">
+                <a:solidFill>
+                  <a:srgbClr val="0F172A"/>
+                </a:solidFill>
+                <a:latin typeface="Microsoft JhengHei" pitchFamily="34" charset="0"/>
+                <a:ea typeface="Microsoft JhengHei" pitchFamily="34" charset="-122"/>
+                <a:cs typeface="Microsoft JhengHei" pitchFamily="34" charset="-120"/>
+              </a:rPr>
               <a:t>④ 穩健性檢驗：換一個天期，結論會不同嗎？</a:t>
             </a:r>
             <a:endParaRPr lang="en-US" sz="2800" dirty="0"/>
@@ -7317,7 +8802,7 @@
       </p:sp>
       <p:graphicFrame>
         <p:nvGraphicFramePr>
-          <p:cNvPr id="13" name="Table 0"/>
+          <p:cNvPr id="14" name="Table 0"/>
           <p:cNvGraphicFramePr>
             <a:graphicFrameLocks noGrp="1"/>
           </p:cNvGraphicFramePr>
@@ -9592,7 +11077,7 @@
                 <a:ea typeface="Microsoft JhengHei" pitchFamily="34" charset="-122"/>
                 <a:cs typeface="Microsoft JhengHei" pitchFamily="34" charset="-120"/>
               </a:rPr>
-              <a:t>12 / 17</a:t>
+              <a:t>13 / 18</a:t>
             </a:r>
             <a:endParaRPr lang="en-US" sz="900" dirty="0"/>
           </a:p>
@@ -9606,9 +11091,9 @@
 </p:sld>
 </file>
 
-<file path=ppt/slides/slide13.xml><?xml version="1.0" encoding="utf-8"?>
+<file path=ppt/slides/slide14.xml><?xml version="1.0" encoding="utf-8"?>
 <p:sld xmlns:a="http://schemas.openxmlformats.org/drawingml/2006/main" xmlns:r="http://schemas.openxmlformats.org/officeDocument/2006/relationships" xmlns:p="http://schemas.openxmlformats.org/presentationml/2006/main">
-  <p:cSld name="Slide 13">
+  <p:cSld name="Slide 14">
     <p:bg>
       <p:bgPr>
         <a:solidFill>
@@ -9710,7 +11195,7 @@
       </p:sp>
       <p:graphicFrame>
         <p:nvGraphicFramePr>
-          <p:cNvPr id="14" name="Table 0"/>
+          <p:cNvPr id="15" name="Table 0"/>
           <p:cNvGraphicFramePr>
             <a:graphicFrameLocks noGrp="1"/>
           </p:cNvGraphicFramePr>
@@ -11066,7 +12551,7 @@
                 <a:ea typeface="Microsoft JhengHei" pitchFamily="34" charset="-122"/>
                 <a:cs typeface="Microsoft JhengHei" pitchFamily="34" charset="-120"/>
               </a:rPr>
-              <a:t>13 / 17</a:t>
+              <a:t>14 / 18</a:t>
             </a:r>
             <a:endParaRPr lang="en-US" sz="900" dirty="0"/>
           </a:p>
@@ -11080,9 +12565,9 @@
 </p:sld>
 </file>
 
-<file path=ppt/slides/slide14.xml><?xml version="1.0" encoding="utf-8"?>
+<file path=ppt/slides/slide15.xml><?xml version="1.0" encoding="utf-8"?>
 <p:sld xmlns:a="http://schemas.openxmlformats.org/drawingml/2006/main" xmlns:r="http://schemas.openxmlformats.org/officeDocument/2006/relationships" xmlns:p="http://schemas.openxmlformats.org/presentationml/2006/main">
-  <p:cSld name="Slide 14">
+  <p:cSld name="Slide 15">
     <p:bg>
       <p:bgPr>
         <a:solidFill>
@@ -11184,7 +12669,7 @@
       </p:sp>
       <p:graphicFrame>
         <p:nvGraphicFramePr>
-          <p:cNvPr id="15" name="Table 0"/>
+          <p:cNvPr id="16" name="Table 0"/>
           <p:cNvGraphicFramePr>
             <a:graphicFrameLocks noGrp="1"/>
           </p:cNvGraphicFramePr>
@@ -13008,7 +14493,7 @@
                 <a:ea typeface="Microsoft JhengHei" pitchFamily="34" charset="-122"/>
                 <a:cs typeface="Microsoft JhengHei" pitchFamily="34" charset="-120"/>
               </a:rPr>
-              <a:t>14 / 17</a:t>
+              <a:t>15 / 18</a:t>
             </a:r>
             <a:endParaRPr lang="en-US" sz="900" dirty="0"/>
           </a:p>
@@ -13022,9 +14507,9 @@
 </p:sld>
 </file>
 
-<file path=ppt/slides/slide15.xml><?xml version="1.0" encoding="utf-8"?>
+<file path=ppt/slides/slide16.xml><?xml version="1.0" encoding="utf-8"?>
 <p:sld xmlns:a="http://schemas.openxmlformats.org/drawingml/2006/main" xmlns:r="http://schemas.openxmlformats.org/officeDocument/2006/relationships" xmlns:p="http://schemas.openxmlformats.org/presentationml/2006/main">
-  <p:cSld name="Slide 15">
+  <p:cSld name="Slide 16">
     <p:bg>
       <p:bgPr>
         <a:solidFill>
@@ -13126,7 +14611,7 @@
       </p:sp>
       <p:graphicFrame>
         <p:nvGraphicFramePr>
-          <p:cNvPr id="16" name="Table 0"/>
+          <p:cNvPr id="17" name="Table 0"/>
           <p:cNvGraphicFramePr>
             <a:graphicFrameLocks noGrp="1"/>
           </p:cNvGraphicFramePr>
@@ -15806,7 +17291,7 @@
                 <a:ea typeface="Microsoft JhengHei" pitchFamily="34" charset="-122"/>
                 <a:cs typeface="Microsoft JhengHei" pitchFamily="34" charset="-120"/>
               </a:rPr>
-              <a:t>15 / 17</a:t>
+              <a:t>16 / 18</a:t>
             </a:r>
             <a:endParaRPr lang="en-US" sz="900" dirty="0"/>
           </a:p>
@@ -15820,9 +17305,9 @@
 </p:sld>
 </file>
 
-<file path=ppt/slides/slide16.xml><?xml version="1.0" encoding="utf-8"?>
+<file path=ppt/slides/slide17.xml><?xml version="1.0" encoding="utf-8"?>
 <p:sld xmlns:a="http://schemas.openxmlformats.org/drawingml/2006/main" xmlns:r="http://schemas.openxmlformats.org/officeDocument/2006/relationships" xmlns:p="http://schemas.openxmlformats.org/presentationml/2006/main">
-  <p:cSld name="Slide 16">
+  <p:cSld name="Slide 17">
     <p:bg>
       <p:bgPr>
         <a:solidFill>
@@ -15940,7 +17425,7 @@
       </p:graphicFrame>
       <p:graphicFrame>
         <p:nvGraphicFramePr>
-          <p:cNvPr id="17" name="Table 0"/>
+          <p:cNvPr id="18" name="Table 0"/>
           <p:cNvGraphicFramePr>
             <a:graphicFrameLocks noGrp="1"/>
           </p:cNvGraphicFramePr>
@@ -17874,7 +19359,7 @@
                 <a:ea typeface="Microsoft JhengHei" pitchFamily="34" charset="-122"/>
                 <a:cs typeface="Microsoft JhengHei" pitchFamily="34" charset="-120"/>
               </a:rPr>
-              <a:t>雙幣理財之 45% 年化係採「未觸及行使價（價外到期）」情境計算，未反映觸價本金轉換損失。若納入機率加權情境分析，實際綜合年化將視市場波動與觸價機率顯著偏離本表數字，甚至於單一結算週期內轉為負值，詳見報告第 6、7 章情境試算。</a:t>
+              <a:t>雙幣理財之 45% 年化係採「未觸及行使價（價外到期）」情境計算，未反映觸價本金轉換損失。若納入機率加權情境分析，實際綜合年化將視市場波動與觸價機率顯著偏離本表數字；惟第 11–12 頁之全年模擬顯示，只要搭配停利紀律（解套後不永續滾動），虧損機率可由七至八成大幅降至二成以下，詳見報告第 6、7 章完整情境試算。</a:t>
             </a:r>
             <a:endParaRPr lang="en-US" sz="1100" dirty="0"/>
           </a:p>
@@ -17952,7 +19437,7 @@
                 <a:ea typeface="Microsoft JhengHei" pitchFamily="34" charset="-122"/>
                 <a:cs typeface="Microsoft JhengHei" pitchFamily="34" charset="-120"/>
               </a:rPr>
-              <a:t>16 / 17</a:t>
+              <a:t>17 / 18</a:t>
             </a:r>
             <a:endParaRPr lang="en-US" sz="900" dirty="0"/>
           </a:p>
@@ -17966,9 +19451,9 @@
 </p:sld>
 </file>
 
-<file path=ppt/slides/slide17.xml><?xml version="1.0" encoding="utf-8"?>
+<file path=ppt/slides/slide18.xml><?xml version="1.0" encoding="utf-8"?>
 <p:sld xmlns:a="http://schemas.openxmlformats.org/drawingml/2006/main" xmlns:r="http://schemas.openxmlformats.org/officeDocument/2006/relationships" xmlns:p="http://schemas.openxmlformats.org/presentationml/2006/main">
-  <p:cSld name="Slide 17">
+  <p:cSld name="Slide 18">
     <p:bg>
       <p:bgPr>
         <a:solidFill>
@@ -19284,7 +20769,7 @@
                 <a:ea typeface="Microsoft JhengHei" pitchFamily="34" charset="-122"/>
                 <a:cs typeface="Microsoft JhengHei" pitchFamily="34" charset="-120"/>
               </a:rPr>
-              <a:t>17 / 17</a:t>
+              <a:t>18 / 18</a:t>
             </a:r>
             <a:endParaRPr lang="en-US" sz="900" dirty="0"/>
           </a:p>
@@ -21181,7 +22666,7 @@
                 <a:ea typeface="Microsoft JhengHei" pitchFamily="34" charset="-122"/>
                 <a:cs typeface="Microsoft JhengHei" pitchFamily="34" charset="-120"/>
               </a:rPr>
-              <a:t>2 / 17</a:t>
+              <a:t>2 / 18</a:t>
             </a:r>
             <a:endParaRPr lang="en-US" sz="900" dirty="0"/>
           </a:p>
@@ -21899,7 +23384,7 @@
                 <a:ea typeface="Microsoft JhengHei" pitchFamily="34" charset="-122"/>
                 <a:cs typeface="Microsoft JhengHei" pitchFamily="34" charset="-120"/>
               </a:rPr>
-              <a:t>3 / 17</a:t>
+              <a:t>3 / 18</a:t>
             </a:r>
             <a:endParaRPr lang="en-US" sz="900" dirty="0"/>
           </a:p>
@@ -22877,7 +24362,7 @@
                 <a:ea typeface="Microsoft JhengHei" pitchFamily="34" charset="-122"/>
                 <a:cs typeface="Microsoft JhengHei" pitchFamily="34" charset="-120"/>
               </a:rPr>
-              <a:t>4 / 17</a:t>
+              <a:t>4 / 18</a:t>
             </a:r>
             <a:endParaRPr lang="en-US" sz="900" dirty="0"/>
           </a:p>
@@ -24539,7 +26024,7 @@
                 <a:ea typeface="Microsoft JhengHei" pitchFamily="34" charset="-122"/>
                 <a:cs typeface="Microsoft JhengHei" pitchFamily="34" charset="-120"/>
               </a:rPr>
-              <a:t>5 / 17</a:t>
+              <a:t>5 / 18</a:t>
             </a:r>
             <a:endParaRPr lang="en-US" sz="900" dirty="0"/>
           </a:p>
@@ -26418,7 +27903,7 @@
                 <a:ea typeface="Microsoft JhengHei" pitchFamily="34" charset="-122"/>
                 <a:cs typeface="Microsoft JhengHei" pitchFamily="34" charset="-120"/>
               </a:rPr>
-              <a:t>6 / 17</a:t>
+              <a:t>6 / 18</a:t>
             </a:r>
             <a:endParaRPr lang="en-US" sz="900" dirty="0"/>
           </a:p>
@@ -28028,7 +29513,7 @@
                 <a:ea typeface="Microsoft JhengHei" pitchFamily="34" charset="-122"/>
                 <a:cs typeface="Microsoft JhengHei" pitchFamily="34" charset="-120"/>
               </a:rPr>
-              <a:t>7 / 17</a:t>
+              <a:t>7 / 18</a:t>
             </a:r>
             <a:endParaRPr lang="en-US" sz="900" dirty="0"/>
           </a:p>
@@ -28447,7 +29932,7 @@
                 <a:ea typeface="Microsoft JhengHei" pitchFamily="34" charset="-122"/>
                 <a:cs typeface="Microsoft JhengHei" pitchFamily="34" charset="-120"/>
               </a:rPr>
-              <a:t>8 / 17</a:t>
+              <a:t>8 / 18</a:t>
             </a:r>
             <a:endParaRPr lang="en-US" sz="900" dirty="0"/>
           </a:p>
@@ -29938,7 +31423,7 @@
                 <a:ea typeface="Microsoft JhengHei" pitchFamily="34" charset="-122"/>
                 <a:cs typeface="Microsoft JhengHei" pitchFamily="34" charset="-120"/>
               </a:rPr>
-              <a:t>① 設定目標價逢低分批建倉：於等待建倉價位期間同時賺取權利金｜② 震盪市掛深度價外（OTM 10%+）收益增強：降低轉換機率，以較低年化換取較高本金安全邊際</a:t>
+              <a:t>① 設定目標價逢低分批建倉：於等待建倉價位期間同時賺取權利金，等同「限價單＋額外收益」的複合工具｜② 震盪市掛深度價外（OTM 10%+）收益增強：降低轉換機率，以較低年化換取較高本金安全邊際</a:t>
             </a:r>
             <a:endParaRPr lang="en-US" sz="1100" dirty="0"/>
           </a:p>
@@ -30016,7 +31501,7 @@
                 <a:ea typeface="Microsoft JhengHei" pitchFamily="34" charset="-122"/>
                 <a:cs typeface="Microsoft JhengHei" pitchFamily="34" charset="-120"/>
               </a:rPr>
-              <a:t>9 / 17</a:t>
+              <a:t>9 / 18</a:t>
             </a:r>
             <a:endParaRPr lang="en-US" sz="900" dirty="0"/>
           </a:p>
